--- a/Nguyen_Quang_Trungg-22011211/Slides_Topic13_MultiDeliveryRobot.pptx
+++ b/Nguyen_Quang_Trungg-22011211/Slides_Topic13_MultiDeliveryRobot.pptx
@@ -4,24 +4,24 @@
   <p:sldMasterIdLst>
     <p:sldMasterId id="2147483648" r:id="rId1"/>
   </p:sldMasterIdLst>
+  <p:notesMasterIdLst>
+    <p:notesMasterId r:id="rId14"/>
+  </p:notesMasterIdLst>
   <p:sldIdLst>
     <p:sldId id="256" r:id="rId2"/>
     <p:sldId id="257" r:id="rId3"/>
     <p:sldId id="258" r:id="rId4"/>
-    <p:sldId id="259" r:id="rId5"/>
-    <p:sldId id="260" r:id="rId6"/>
-    <p:sldId id="261" r:id="rId7"/>
-    <p:sldId id="262" r:id="rId8"/>
-    <p:sldId id="263" r:id="rId9"/>
-    <p:sldId id="264" r:id="rId10"/>
-    <p:sldId id="265" r:id="rId11"/>
-    <p:sldId id="266" r:id="rId12"/>
-    <p:sldId id="267" r:id="rId13"/>
-    <p:sldId id="268" r:id="rId14"/>
+    <p:sldId id="260" r:id="rId5"/>
+    <p:sldId id="262" r:id="rId7"/>
+    <p:sldId id="261" r:id="rId6"/>
+    <p:sldId id="269" r:id="rId19"/>
+    <p:sldId id="263" r:id="rId8"/>
+    <p:sldId id="264" r:id="rId9"/>
+    <p:sldId id="265" r:id="rId10"/>
+    <p:sldId id="266" r:id="rId11"/>
+    <p:sldId id="267" r:id="rId12"/>
+    <p:sldId id="268" r:id="rId13"/>
   </p:sldIdLst>
-  <p:notesMasterIdLst>
-    <p:notesMasterId r:id="rId15"/>
-  </p:notesMasterIdLst>
   <p:sldSz cx="12192000" cy="6858000"/>
   <p:notesSz cx="6858000" cy="12192000"/>
   <p:defaultTextStyle>
@@ -119,15 +119,14 @@
   <p:extLst>
     <p:ext uri="{521415D9-36F7-43E2-AB2F-B90AF26B5E84}">
       <p14:sectionLst xmlns:p14="http://schemas.microsoft.com/office/powerpoint/2010/main">
-        <p14:section name="Problem and MDP" id="{6ebb974e-eeee-d71c-cd58-e7588f5a99bd}">
+        <p14:section name="Problem and MDP" id="{6EBB974E-EEEE-D71C-CD58-E7588F5A99BD}">
           <p14:sldIdLst>
             <p14:sldId id="256"/>
             <p14:sldId id="257"/>
             <p14:sldId id="258"/>
-            <p14:sldId id="259"/>
           </p14:sldIdLst>
         </p14:section>
-        <p14:section name="Algorithms and results" id="{0d629ff2-8c30-38fd-d0bd-76c88ae21564}">
+        <p14:section name="Algorithms and results" id="{0D629FF2-8C30-38FD-D0BD-76C88AE21564}">
           <p14:sldIdLst>
             <p14:sldId id="260"/>
             <p14:sldId id="261"/>
@@ -135,14 +134,14 @@
             <p14:sldId id="263"/>
           </p14:sldIdLst>
         </p14:section>
-        <p14:section name="Failure analysis and experiments" id="{561e9c66-9a4d-8cf0-7d7d-a724f2569bbc}">
+        <p14:section name="Failure analysis and experiments" id="{561E9C66-9A4D-8CF0-7D7D-A724F2569BBC}">
           <p14:sldIdLst>
             <p14:sldId id="264"/>
             <p14:sldId id="265"/>
             <p14:sldId id="266"/>
           </p14:sldIdLst>
         </p14:section>
-        <p14:section name="Demo and conclusion" id="{10c083dc-cef1-d286-28c6-042c83149f2c}">
+        <p14:section name="Demo and conclusion" id="{10C083DC-CEF1-D286-28C6-042C83149F2C}">
           <p14:sldIdLst>
             <p14:sldId id="267"/>
             <p14:sldId id="268"/>
@@ -179,234 +178,10 @@
           <a:chExt cx="0" cy="0"/>
         </a:xfrm>
       </p:grpSpPr>
-      <p:sp>
-        <p:nvSpPr>
-          <p:cNvPr id="2" name="Header Placeholder 1"/>
-          <p:cNvSpPr>
-            <a:spLocks noGrp="1"/>
-          </p:cNvSpPr>
-          <p:nvPr>
-            <p:ph type="hdr" sz="quarter"/>
-          </p:nvPr>
-        </p:nvSpPr>
-        <p:spPr>
-          <a:xfrm>
-            <a:off x="0" y="0"/>
-            <a:ext cx="2971800" cy="458788"/>
-          </a:xfrm>
-          <a:prstGeom prst="rect">
-            <a:avLst/>
-          </a:prstGeom>
-        </p:spPr>
-        <p:txBody>
-          <a:bodyPr vert="horz" lIns="91440" tIns="45720" rIns="91440" bIns="45720" rtlCol="0"/>
-          <a:lstStyle>
-            <a:lvl1pPr algn="l">
-              <a:defRPr sz="1200"/>
-            </a:lvl1pPr>
-          </a:lstStyle>
-          <a:p>
-            <a:endParaRPr lang="en-US"/>
-          </a:p>
-        </p:txBody>
-      </p:sp>
-      <p:sp>
-        <p:nvSpPr>
-          <p:cNvPr id="3" name="Date Placeholder 2"/>
-          <p:cNvSpPr>
-            <a:spLocks noGrp="1"/>
-          </p:cNvSpPr>
-          <p:nvPr>
-            <p:ph type="dt" idx="1"/>
-          </p:nvPr>
-        </p:nvSpPr>
-        <p:spPr>
-          <a:xfrm>
-            <a:off x="3884613" y="0"/>
-            <a:ext cx="2971800" cy="458788"/>
-          </a:xfrm>
-          <a:prstGeom prst="rect">
-            <a:avLst/>
-          </a:prstGeom>
-        </p:spPr>
-        <p:txBody>
-          <a:bodyPr vert="horz" lIns="91440" tIns="45720" rIns="91440" bIns="45720" rtlCol="0"/>
-          <a:lstStyle>
-            <a:lvl1pPr algn="r">
-              <a:defRPr sz="1200"/>
-            </a:lvl1pPr>
-          </a:lstStyle>
-          <a:p>
-            <a:fld id="{5282F153-3F37-0F45-9E97-73ACFA13230C}" type="datetimeFigureOut">
-              <a:rPr lang="en-US"/>
-              <a:t>7/23/19</a:t>
-            </a:fld>
-            <a:endParaRPr lang="en-US"/>
-          </a:p>
-        </p:txBody>
-      </p:sp>
-      <p:sp>
-        <p:nvSpPr>
-          <p:cNvPr id="4" name="Slide Image Placeholder 3"/>
-          <p:cNvSpPr>
-            <a:spLocks noGrp="1" noRot="1" noChangeAspect="1"/>
-          </p:cNvSpPr>
-          <p:nvPr>
-            <p:ph type="sldImg" idx="2"/>
-          </p:nvPr>
-        </p:nvSpPr>
-        <p:spPr>
-          <a:xfrm>
-            <a:off x="685800" y="1143000"/>
-            <a:ext cx="5486400" cy="3086100"/>
-          </a:xfrm>
-          <a:prstGeom prst="rect">
-            <a:avLst/>
-          </a:prstGeom>
-          <a:noFill/>
-          <a:ln w="12700">
-            <a:solidFill>
-              <a:prstClr val="black"/>
-            </a:solidFill>
-          </a:ln>
-        </p:spPr>
-        <p:txBody>
-          <a:bodyPr vert="horz" lIns="91440" tIns="45720" rIns="91440" bIns="45720" rtlCol="0" anchor="ctr"/>
-          <a:lstStyle/>
-          <a:p>
-            <a:endParaRPr lang="en-US"/>
-          </a:p>
-        </p:txBody>
-      </p:sp>
-      <p:sp>
-        <p:nvSpPr>
-          <p:cNvPr id="5" name="Notes Placeholder 4"/>
-          <p:cNvSpPr>
-            <a:spLocks noGrp="1"/>
-          </p:cNvSpPr>
-          <p:nvPr>
-            <p:ph type="body" sz="quarter" idx="3"/>
-          </p:nvPr>
-        </p:nvSpPr>
-        <p:spPr>
-          <a:xfrm>
-            <a:off x="685800" y="4400550"/>
-            <a:ext cx="5486400" cy="3600450"/>
-          </a:xfrm>
-          <a:prstGeom prst="rect">
-            <a:avLst/>
-          </a:prstGeom>
-        </p:spPr>
-        <p:txBody>
-          <a:bodyPr vert="horz" lIns="91440" tIns="45720" rIns="91440" bIns="45720" rtlCol="0"/>
-          <a:lstStyle/>
-          <a:p>
-            <a:pPr lvl="0"/>
-            <a:r>
-              <a:rPr lang="en-US"/>
-              <a:t>Click to edit Master text styles</a:t>
-            </a:r>
-          </a:p>
-          <a:p>
-            <a:pPr lvl="1"/>
-            <a:r>
-              <a:rPr lang="en-US"/>
-              <a:t>Second level</a:t>
-            </a:r>
-          </a:p>
-          <a:p>
-            <a:pPr lvl="2"/>
-            <a:r>
-              <a:rPr lang="en-US"/>
-              <a:t>Third level</a:t>
-            </a:r>
-          </a:p>
-          <a:p>
-            <a:pPr lvl="3"/>
-            <a:r>
-              <a:rPr lang="en-US"/>
-              <a:t>Fourth level</a:t>
-            </a:r>
-          </a:p>
-          <a:p>
-            <a:pPr lvl="4"/>
-            <a:r>
-              <a:rPr lang="en-US"/>
-              <a:t>Fifth level</a:t>
-            </a:r>
-          </a:p>
-        </p:txBody>
-      </p:sp>
-      <p:sp>
-        <p:nvSpPr>
-          <p:cNvPr id="6" name="Footer Placeholder 5"/>
-          <p:cNvSpPr>
-            <a:spLocks noGrp="1"/>
-          </p:cNvSpPr>
-          <p:nvPr>
-            <p:ph type="ftr" sz="quarter" idx="4"/>
-          </p:nvPr>
-        </p:nvSpPr>
-        <p:spPr>
-          <a:xfrm>
-            <a:off x="0" y="8685213"/>
-            <a:ext cx="2971800" cy="458787"/>
-          </a:xfrm>
-          <a:prstGeom prst="rect">
-            <a:avLst/>
-          </a:prstGeom>
-        </p:spPr>
-        <p:txBody>
-          <a:bodyPr vert="horz" lIns="91440" tIns="45720" rIns="91440" bIns="45720" rtlCol="0" anchor="b"/>
-          <a:lstStyle>
-            <a:lvl1pPr algn="l">
-              <a:defRPr sz="1200"/>
-            </a:lvl1pPr>
-          </a:lstStyle>
-          <a:p>
-            <a:endParaRPr lang="en-US"/>
-          </a:p>
-        </p:txBody>
-      </p:sp>
-      <p:sp>
-        <p:nvSpPr>
-          <p:cNvPr id="7" name="Slide Number Placeholder 6"/>
-          <p:cNvSpPr>
-            <a:spLocks noGrp="1"/>
-          </p:cNvSpPr>
-          <p:nvPr>
-            <p:ph type="sldNum" sz="quarter" idx="5"/>
-          </p:nvPr>
-        </p:nvSpPr>
-        <p:spPr>
-          <a:xfrm>
-            <a:off x="3884613" y="8685213"/>
-            <a:ext cx="2971800" cy="458787"/>
-          </a:xfrm>
-          <a:prstGeom prst="rect">
-            <a:avLst/>
-          </a:prstGeom>
-        </p:spPr>
-        <p:txBody>
-          <a:bodyPr vert="horz" lIns="91440" tIns="45720" rIns="91440" bIns="45720" rtlCol="0" anchor="b"/>
-          <a:lstStyle>
-            <a:lvl1pPr algn="r">
-              <a:defRPr sz="1200"/>
-            </a:lvl1pPr>
-          </a:lstStyle>
-          <a:p>
-            <a:fld id="{CE5E9CC1-C706-0F49-92D6-E571CC5EEA8F}" type="slidenum">
-              <a:rPr lang="en-US"/>
-              <a:t>‹#›</a:t>
-            </a:fld>
-            <a:endParaRPr lang="en-US"/>
-          </a:p>
-        </p:txBody>
-      </p:sp>
     </p:spTree>
     <p:extLst>
       <p:ext uri="{BB962C8B-B14F-4D97-AF65-F5344CB8AC3E}">
-        <p14:creationId xmlns:p14="http://schemas.microsoft.com/office/powerpoint/2010/main" val="1024086991"/>
+        <p14:creationId xmlns:p14="http://schemas.microsoft.com/office/powerpoint/2010/main" val="3652859800"/>
       </p:ext>
     </p:extLst>
   </p:cSld>
@@ -552,9 +327,8 @@
           <a:p>
             <a:r>
               <a:rPr lang="en-US" dirty="0"/>
-              <a:t>Introduce the topic: a robot on a grid has to deliver several parcels, and the agent learns the pickup and delivery order by itself. The environment is a custom gymnasium environment following the Taxi logic, and the agent uses a Q table, with no neural network.</a:t>
-            </a:r>
-            <a:endParaRPr lang="en-US" dirty="0"/>
+              <a:t>Introduce the topic: a robot on a grid delivers several parcels and learns the pickup and delivery order by itself. The environment is a custom gymnasium environment following the Taxi logic. Three tabular algorithms are compared, Q-learning, SARSA and Monte Carlo ES, on four maps of increasing difficulty. No neural network is used.</a:t>
+            </a:r>
           </a:p>
         </p:txBody>
       </p:sp>
@@ -640,9 +414,8 @@
           <a:p>
             <a:r>
               <a:rPr lang="en-US" dirty="0"/>
-              <a:t>When being late costs nothing, going A then B then C is 9 steps shorter, so the agent stops prioritising parcel C and accepts being late. With a 35-step deadline, delivering C last is still on time, so the agent also switches to A-B-C. In the first run (Q0 = 0, 80,000 episodes) the agent did not switch because the reachable states grew from 2,825 to 8,210; with Q0 = 30 and 200,000 episodes it switched in all 5 seeds.</a:t>
-            </a:r>
-            <a:endParaRPr lang="en-US" dirty="0"/>
+              <a:t>Both configurations learn the optimal route in 5/5 seeds. With the booster cell the robot still delivers the deadline parcel first, then detours to the booster and carries A and B together. Without it, it needs four separate trips. The circled numbers give the order of the pickup and drop events.</a:t>
+            </a:r>
           </a:p>
         </p:txBody>
       </p:sp>
@@ -728,9 +501,8 @@
           <a:p>
             <a:r>
               <a:rPr lang="en-US" dirty="0"/>
-              <a:t>Both configurations learn the optimal route in 5/5 seeds. With the booster cell, the robot accepts a 2-step detour to turn it on, then carries two parcels at once and also changes the delivery order. The circled numbers in the figure give the order of the pickup and drop events.</a:t>
-            </a:r>
-            <a:endParaRPr lang="en-US" dirty="0"/>
+              <a:t>Run python demo.py during the talk: it loads the learned Q table from results/, runs the greedy policy from cell S and prints every step with its action, reward and event. On S4 the robot finishes at step 67 with return 13. Add --config to choose another map and --algo sarsa or mc to see the other algorithms. colab_train.ipynb runs the whole pipeline on Google Colab.</a:t>
+            </a:r>
           </a:p>
         </p:txBody>
       </p:sp>
@@ -816,9 +588,8 @@
           <a:p>
             <a:r>
               <a:rPr lang="en-US" dirty="0"/>
-              <a:t>Run python demo.py during the talk: it loads the learned Q table from results/, runs the greedy policy from cell S and prints every step with its action, reward and event. On S4 the robot finishes at step 38 with return 22. Add --config to choose another map.</a:t>
-            </a:r>
-            <a:endParaRPr lang="en-US" dirty="0"/>
+              <a:t>Summarise the four findings, then the limitations. Future work: a stochastic version of the environment (wheel slip) to see whether the ranking changes, Expected SARSA or Q(lambda), and function approximation so one model can serve several maps.</a:t>
+            </a:r>
           </a:p>
         </p:txBody>
       </p:sp>
@@ -904,9 +675,8 @@
           <a:p>
             <a:r>
               <a:rPr lang="en-US" dirty="0"/>
-              <a:t>Summarise the four findings, then the limitations. Future work: try Sarsa or Q(lambda), Monte Carlo with a constant step size and optimistic initialization, and keep tau only while the deadline parcel still matters.</a:t>
-            </a:r>
-            <a:endParaRPr lang="en-US" dirty="0"/>
+              <a:t>All three end at 100%, so the comparison is about speed, stability and robustness. Q-learning is the fastest and most stable, and the least sensitive to settings. Monte Carlo ES is slower at the start but exact once converged; it depends completely on exploring starts. SARSA needs about three times the episodes of Q-learning on S4 and keeps fluctuating, because its target depends on the sampled next action. SARSA's usual advantage, safer behaviour while exploring, does not show here because the maps have no dangerous cells.</a:t>
+            </a:r>
           </a:p>
         </p:txBody>
       </p:sp>
@@ -927,7 +697,7 @@
           <a:p>
             <a:fld id="{F7021451-1387-4CA6-816F-3879F97B5CBC}" type="slidenum">
               <a:rPr lang="en-US"/>
-              <a:t>13</a:t>
+              <a:t>2</a:t>
             </a:fld>
             <a:endParaRPr lang="en-US"/>
           </a:p>
@@ -992,9 +762,8 @@
           <a:p>
             <a:r>
               <a:rPr lang="en-US" dirty="0"/>
-              <a:t>The robot only knows its position and the parcel statuses. The −1 step penalty pushes the agent toward short routes; +20 per delivered order is the per-order reward; −10 punishes wrong actions; −30 only exists in the deadline setting.</a:t>
-            </a:r>
-            <a:endParaRPr lang="en-US" dirty="0"/>
+              <a:t>The robot only knows its position and the parcel statuses. The −1 step penalty pushes the agent toward short routes; +20 per delivered order is the per-order reward; −10 punishes wrong actions; −30 only exists in the deadline maps S3 and S4.</a:t>
+            </a:r>
           </a:p>
         </p:txBody>
       </p:sp>
@@ -1080,9 +849,8 @@
           <a:p>
             <a:r>
               <a:rPr lang="en-US" dirty="0"/>
-              <a:t>The four mandatory settings. S1: two independent parcels that can be carried together. S2: three parcels but only one can be carried. S3: parcel C must be delivered within the first 18 steps. S4: after the booster cell the robot can carry two parcels, for one trip only. The optimal step counts come from Value Iteration.</a:t>
-            </a:r>
-            <a:endParaRPr lang="en-US" dirty="0"/>
+              <a:t>Each level adds one new mechanic. S1: two parcels that can be carried together. S2: three parcels but only one at a time, so the order matters. S3: parcel C must be delivered within 20 steps. S4: four parcels, a booster cell that allows carrying two parcels for one trip, and parcel D with a 22-step deadline. Reachable states grow from 186 to 15,612 and the optimal route from 22 to 67 steps; the optimal routes come from Value Iteration.</a:t>
+            </a:r>
           </a:p>
         </p:txBody>
       </p:sp>
@@ -1168,9 +936,8 @@
           <a:p>
             <a:r>
               <a:rPr lang="en-US" dirty="0"/>
-              <a:t>The parcel statuses are read as a base-3 number. Example on S3: the robot is at (2,3), A is delivered, B is carried, C is not picked up and tau = 7, so code = 5 and idx = 7797. Fewer states are reachable than encoded because walls cannot be occupied, capacity 1 rules out carrying two parcels, and tau and b only take reachable values.</a:t>
-            </a:r>
-            <a:endParaRPr lang="en-US" dirty="0"/>
+              <a:t>All three keep a Q table and choose actions epsilon-greedily; they differ only in the update target. Q-learning bootstraps with the best next action, so it learns Q* even while exploring. SARSA bootstraps with the action it will actually take, so it learns the value of its own epsilon-greedy policy and only matches Q* when epsilon is close to zero. Monte Carlo ES waits for the whole episode and uses the real return; with a greedy policy in a deterministic world that return is exact. Every training episode starts from a random reachable state with a random first action.</a:t>
+            </a:r>
           </a:p>
         </p:txBody>
       </p:sp>
@@ -1256,9 +1023,8 @@
           <a:p>
             <a:r>
               <a:rPr lang="en-US" dirty="0"/>
-              <a:t>Q-learning example: Q = 0, r = −1, max Q(s′) = 10 and alpha = 0.5 give a target of 8.9 and a new Q of 4.45. Monte Carlo example: the last three rewards −1, −1, +19 give G = 19, 17.81 and 16.63. Q0 = 30 is an optimistic initialization that makes the agent try unknown actions by itself. Value Iteration is only used as the optimal reference.</a:t>
-            </a:r>
-            <a:endParaRPr lang="en-US" dirty="0"/>
+              <a:t>Accuracy is the share of start cells from which the greedy policy reaches the optimal return of Value Iteration, averaged over 5 seeds. All 60 runs end at 100%. Q-learning gets there first on three of the four maps; Monte Carlo ES is slightly faster on S3; SARSA is the slowest and still dips after reaching 100%.</a:t>
+            </a:r>
           </a:p>
         </p:txBody>
       </p:sp>
@@ -1344,9 +1110,8 @@
           <a:p>
             <a:r>
               <a:rPr lang="en-US" dirty="0"/>
-              <a:t>Each point is the return of the greedy policy run from cell S, averaged over 5 seeds; the shaded band is the standard deviation. The horizontal line is the optimal return from Value Iteration. The y-axis is cut at −1.15 × max_steps to show the region near the optimum clearly.</a:t>
-            </a:r>
-            <a:endParaRPr lang="en-US" dirty="0"/>
+              <a:t>Same maps, same number of episodes, only the settings change. Old settings: random start cell, linear epsilon decay to 0.05, alpha 0.5, Monte Carlo with 1/N averaging. With them SARSA and Monte Carlo almost never solve S3 and S4. Exploring starts are the biggest change: the deadline clock and the booster status multiply the states, and the robot rarely reaches most of them when it always starts with tau = 0. Old Q-learning was optimal from S in 5/5 seeds on S3, but correct from only 20% of the start cells.</a:t>
+            </a:r>
           </a:p>
         </p:txBody>
       </p:sp>
@@ -1432,9 +1197,8 @@
           <a:p>
             <a:r>
               <a:rPr lang="en-US" dirty="0"/>
-              <a:t>20 runs = 4 maps × 5 seeds. Q-learning with Q0 = 30 is optimal in all 20. Q0 = 0 delivers everything in 20/20 runs but gets stuck on worse routes on S1 (16 instead of 18), S3 (2/5 optimal) and S4 (21 instead of 22). Monte Carlo with the same episodes: S1 5/5, S2 2/5, S3 5/5 but always late, S4 0/5. Episodes: S1 20,000, S2 40,000, S3 and S4 100,000.</a:t>
-            </a:r>
-            <a:endParaRPr lang="en-US" dirty="0"/>
+              <a:t>Each panel is one phase: a combination of parcel statuses and booster status. Grey arrows show the action the policy would choose in that cell; P and D mean Pickup and Drop. The robot learns two trade-offs: deliver the far deadline parcel D first, and accept a detour to the booster cell so that A and B travel together. The black line is when it carries two parcels.</a:t>
+            </a:r>
           </a:p>
         </p:txBody>
       </p:sp>
@@ -1520,9 +1284,8 @@
           <a:p>
             <a:r>
               <a:rPr lang="en-US" dirty="0"/>
-              <a:t>Each panel is one phase: a combination of parcel statuses and booster status. Grey arrows show the action the policy would choose if the robot stood in that cell; P and D mean Pickup and Drop. The black line is when the robot carries two parcels. The agent exploits the rule that a booster trip only ends when the robot is empty-handed. The S2 policy figure is in figures_en/policy_S2.png.</a:t>
-            </a:r>
-            <a:endParaRPr lang="en-US" dirty="0"/>
+              <a:t>The figure shows the mean error between the learned Q table and Q* from Value Iteration, on a log scale, for each level: it reaches zero for Q-learning and Monte Carlo ES and about 0.05 for SARSA on S4. Exploring starts give every state direct updates; SARSA needs epsilon close to zero; Monte Carlo ES works with alpha = 1 because each return of the greedy policy is exact.</a:t>
+            </a:r>
           </a:p>
         </p:txBody>
       </p:sp>
@@ -1608,9 +1371,8 @@
           <a:p>
             <a:r>
               <a:rPr lang="en-US" dirty="0"/>
-              <a:t>Q-learning does not have these problems: its target r + gamma max Q(s′) is noise-free in a deterministic environment, and every delivered parcel propagates +20 back immediately through bootstrapping. Measured on S1: at the pickup cell of parcel A, the MC Q values were between −72 and −108 while the true values are +16 to +18. With 4 times the episodes and slower epsilon decay, MC is optimal in 5/5 seeds on S1 but only 3/5 on S2, so this is slow and unstable convergence, not an implementation bug.</a:t>
-            </a:r>
-            <a:endParaRPr lang="en-US" dirty="0"/>
+              <a:t>When being late costs nothing, B then A then C is 4 steps shorter, so the agent stops prioritising parcel C and accepts being late. With a 45-step deadline, delivering C last is still on time, so it also switches to B-A-C. The reachable states grow from 4,027 to 14,558, and Q-learning is still optimal in 5/5 seeds.</a:t>
+            </a:r>
           </a:p>
         </p:txBody>
       </p:sp>
@@ -1688,6 +1450,7 @@
         <a:solidFill>
           <a:srgbClr val="14213D"/>
         </a:solidFill>
+        <a:effectLst/>
       </p:bgPr>
     </p:bg>
     <p:spTree>
@@ -1707,9 +1470,11 @@
       <p:sp>
         <p:nvSpPr>
           <p:cNvPr id="2" name="Text 0"/>
-          <p:cNvSpPr/>
+          <p:cNvSpPr>
+            <a:spLocks noGrp="1"/>
+          </p:cNvSpPr>
           <p:nvPr>
-            <p:ph idx="100" type="body" hasCustomPrompt="1"/>
+            <p:ph type="body" idx="100" hasCustomPrompt="1"/>
           </p:nvPr>
         </p:nvSpPr>
         <p:spPr>
@@ -1726,9 +1491,9 @@
         <p:txBody>
           <a:bodyPr wrap="square" rtlCol="0"/>
           <a:lstStyle>
-            <a:lvl1pPr indent="0" marL="0">
-              <a:buNone/>
-              <a:defRPr lang="en-US" sz="1600" b="1" spc="300" kern="0" dirty="0">
+            <a:lvl1pPr marL="0" indent="0">
+              <a:buNone/>
+              <a:defRPr lang="en-US" sz="1600" b="1" kern="0" spc="300" dirty="0">
                 <a:solidFill>
                   <a:schemeClr val="accent5"/>
                 </a:solidFill>
@@ -1736,7 +1501,7 @@
             </a:lvl1pPr>
           </a:lstStyle>
           <a:p>
-            <a:pPr indent="0" marL="0">
+            <a:pPr marL="0" indent="0">
               <a:buNone/>
             </a:pPr>
             <a:endParaRPr lang="en-US" sz="1600" dirty="0"/>
@@ -1746,9 +1511,11 @@
       <p:sp>
         <p:nvSpPr>
           <p:cNvPr id="3" name="Text 0"/>
-          <p:cNvSpPr/>
+          <p:cNvSpPr>
+            <a:spLocks noGrp="1"/>
+          </p:cNvSpPr>
           <p:nvPr>
-            <p:ph idx="101" type="title" hasCustomPrompt="1"/>
+            <p:ph type="title" idx="101" hasCustomPrompt="1"/>
           </p:nvPr>
         </p:nvSpPr>
         <p:spPr>
@@ -1765,7 +1532,7 @@
         <p:txBody>
           <a:bodyPr wrap="square" rtlCol="0"/>
           <a:lstStyle>
-            <a:lvl1pPr algn="l" indent="0" marL="0">
+            <a:lvl1pPr marL="0" indent="0" algn="l">
               <a:buNone/>
               <a:defRPr lang="en-US" sz="5400" b="1" dirty="0">
                 <a:solidFill>
@@ -1775,7 +1542,7 @@
             </a:lvl1pPr>
           </a:lstStyle>
           <a:p>
-            <a:pPr algn="l" indent="0" marL="0">
+            <a:pPr marL="0" indent="0" algn="l">
               <a:buNone/>
             </a:pPr>
             <a:endParaRPr lang="en-US" sz="5400" dirty="0"/>
@@ -1785,9 +1552,11 @@
       <p:sp>
         <p:nvSpPr>
           <p:cNvPr id="4" name="Text 0"/>
-          <p:cNvSpPr/>
+          <p:cNvSpPr>
+            <a:spLocks noGrp="1"/>
+          </p:cNvSpPr>
           <p:nvPr>
-            <p:ph idx="102" type="body" hasCustomPrompt="1"/>
+            <p:ph type="body" idx="102" hasCustomPrompt="1"/>
           </p:nvPr>
         </p:nvSpPr>
         <p:spPr>
@@ -1804,7 +1573,7 @@
         <p:txBody>
           <a:bodyPr wrap="square" rtlCol="0"/>
           <a:lstStyle>
-            <a:lvl1pPr indent="0" marL="0">
+            <a:lvl1pPr marL="0" indent="0">
               <a:buNone/>
               <a:defRPr lang="en-US" sz="2200" dirty="0">
                 <a:solidFill>
@@ -1814,7 +1583,7 @@
             </a:lvl1pPr>
           </a:lstStyle>
           <a:p>
-            <a:pPr indent="0" marL="0">
+            <a:pPr marL="0" indent="0">
               <a:buNone/>
             </a:pPr>
             <a:endParaRPr lang="en-US" sz="2200" dirty="0"/>
@@ -1824,9 +1593,11 @@
       <p:sp>
         <p:nvSpPr>
           <p:cNvPr id="5" name="Text 0"/>
-          <p:cNvSpPr/>
+          <p:cNvSpPr>
+            <a:spLocks noGrp="1"/>
+          </p:cNvSpPr>
           <p:nvPr>
-            <p:ph idx="103" type="body" hasCustomPrompt="1"/>
+            <p:ph type="body" idx="103" hasCustomPrompt="1"/>
           </p:nvPr>
         </p:nvSpPr>
         <p:spPr>
@@ -1843,7 +1614,7 @@
         <p:txBody>
           <a:bodyPr wrap="square" rtlCol="0"/>
           <a:lstStyle>
-            <a:lvl1pPr indent="0" marL="0">
+            <a:lvl1pPr marL="0" indent="0">
               <a:buNone/>
               <a:defRPr lang="en-US" sz="1600" dirty="0">
                 <a:solidFill>
@@ -1853,7 +1624,7 @@
             </a:lvl1pPr>
           </a:lstStyle>
           <a:p>
-            <a:pPr indent="0" marL="0">
+            <a:pPr marL="0" indent="0">
               <a:buNone/>
             </a:pPr>
             <a:endParaRPr lang="en-US" sz="1600" dirty="0"/>
@@ -1876,6 +1647,7 @@
         <a:solidFill>
           <a:srgbClr val="FFFFFF"/>
         </a:solidFill>
+        <a:effectLst/>
       </p:bgPr>
     </p:bg>
     <p:spTree>
@@ -1895,9 +1667,11 @@
       <p:sp>
         <p:nvSpPr>
           <p:cNvPr id="2" name="Text 0"/>
-          <p:cNvSpPr/>
+          <p:cNvSpPr>
+            <a:spLocks noGrp="1"/>
+          </p:cNvSpPr>
           <p:nvPr>
-            <p:ph idx="100" type="title" hasCustomPrompt="1"/>
+            <p:ph type="title" idx="100" hasCustomPrompt="1"/>
           </p:nvPr>
         </p:nvSpPr>
         <p:spPr>
@@ -1914,7 +1688,7 @@
         <p:txBody>
           <a:bodyPr wrap="square" rtlCol="0"/>
           <a:lstStyle>
-            <a:lvl1pPr algn="l" indent="0" marL="0">
+            <a:lvl1pPr marL="0" indent="0" algn="l">
               <a:buNone/>
               <a:defRPr lang="en-US" sz="3400" b="1" dirty="0">
                 <a:solidFill>
@@ -1924,7 +1698,7 @@
             </a:lvl1pPr>
           </a:lstStyle>
           <a:p>
-            <a:pPr algn="l" indent="0" marL="0">
+            <a:pPr marL="0" indent="0" algn="l">
               <a:buNone/>
             </a:pPr>
             <a:endParaRPr lang="en-US" sz="3400" dirty="0"/>
@@ -1952,7 +1726,7 @@
           <a:bodyPr wrap="square" lIns="0" tIns="0" rIns="0" bIns="0" rtlCol="0" anchor="ctr"/>
           <a:lstStyle/>
           <a:p>
-            <a:pPr indent="0" marL="0">
+            <a:pPr marL="0" indent="0">
               <a:buNone/>
             </a:pPr>
             <a:r>
@@ -1987,7 +1761,7 @@
           </a:prstGeom>
           <a:extLst>
             <a:ext uri="{C572A759-6A51-4108-AA02-DFA0A04FC94B}">
-              <ma14:wrappingTextBoxFlag xmlns:ma14="http://schemas.microsoft.com/office/mac/drawingml/2011/main" val="0"/>
+              <ma14:wrappingTextBoxFlag xmlns:ma14="http://schemas.microsoft.com/office/mac/drawingml/2011/main" xmlns="" val="0"/>
             </a:ext>
           </a:extLst>
         </p:spPr>
@@ -2005,8 +1779,8 @@
           <a:p>
             <a:pPr algn="r"/>
             <a:fld id="{F7021451-1387-4CA6-816F-3879F97B5CBC}" type="slidenum">
-              <a:rPr b="0" lang="en-US"/>
-              <a:t>1003</a:t>
+              <a:rPr lang="en-US" b="0"/>
+              <a:t>‹#›</a:t>
             </a:fld>
             <a:endParaRPr lang="en-US"/>
           </a:p>
@@ -2028,6 +1802,7 @@
         <a:solidFill>
           <a:srgbClr val="14213D"/>
         </a:solidFill>
+        <a:effectLst/>
       </p:bgPr>
     </p:bg>
     <p:spTree>
@@ -2047,9 +1822,11 @@
       <p:sp>
         <p:nvSpPr>
           <p:cNvPr id="2" name="Text 0"/>
-          <p:cNvSpPr/>
+          <p:cNvSpPr>
+            <a:spLocks noGrp="1"/>
+          </p:cNvSpPr>
           <p:nvPr>
-            <p:ph idx="100" type="title" hasCustomPrompt="1"/>
+            <p:ph type="title" idx="100" hasCustomPrompt="1"/>
           </p:nvPr>
         </p:nvSpPr>
         <p:spPr>
@@ -2066,7 +1843,7 @@
         <p:txBody>
           <a:bodyPr wrap="square" rtlCol="0"/>
           <a:lstStyle>
-            <a:lvl1pPr algn="l" indent="0" marL="0">
+            <a:lvl1pPr marL="0" indent="0" algn="l">
               <a:buNone/>
               <a:defRPr lang="en-US" sz="3600" b="1" dirty="0">
                 <a:solidFill>
@@ -2076,7 +1853,7 @@
             </a:lvl1pPr>
           </a:lstStyle>
           <a:p>
-            <a:pPr algn="l" indent="0" marL="0">
+            <a:pPr marL="0" indent="0" algn="l">
               <a:buNone/>
             </a:pPr>
             <a:endParaRPr lang="en-US" sz="3600" dirty="0"/>
@@ -2104,7 +1881,7 @@
           <a:bodyPr wrap="square" lIns="0" tIns="0" rIns="0" bIns="0" rtlCol="0" anchor="ctr"/>
           <a:lstStyle/>
           <a:p>
-            <a:pPr indent="0" marL="0">
+            <a:pPr marL="0" indent="0">
               <a:buNone/>
             </a:pPr>
             <a:r>
@@ -2139,7 +1916,7 @@
           </a:prstGeom>
           <a:extLst>
             <a:ext uri="{C572A759-6A51-4108-AA02-DFA0A04FC94B}">
-              <ma14:wrappingTextBoxFlag xmlns:ma14="http://schemas.microsoft.com/office/mac/drawingml/2011/main" val="0"/>
+              <ma14:wrappingTextBoxFlag xmlns:ma14="http://schemas.microsoft.com/office/mac/drawingml/2011/main" xmlns="" val="0"/>
             </a:ext>
           </a:extLst>
         </p:spPr>
@@ -2157,8 +1934,8 @@
           <a:p>
             <a:pPr algn="r"/>
             <a:fld id="{F7021451-1387-4CA6-816F-3879F97B5CBC}" type="slidenum">
-              <a:rPr b="0" lang="en-US"/>
-              <a:t>1004</a:t>
+              <a:rPr lang="en-US" b="0"/>
+              <a:t>‹#›</a:t>
             </a:fld>
             <a:endParaRPr lang="en-US"/>
           </a:p>
@@ -2175,6 +1952,11 @@
 <file path=ppt/slideMasters/slideMaster1.xml><?xml version="1.0" encoding="utf-8"?>
 <p:sldMaster xmlns:a="http://schemas.openxmlformats.org/drawingml/2006/main" xmlns:r="http://schemas.openxmlformats.org/officeDocument/2006/relationships" xmlns:p="http://schemas.openxmlformats.org/presentationml/2006/main">
   <p:cSld>
+    <p:bg>
+      <p:bgRef idx="1001">
+        <a:schemeClr val="bg1"/>
+      </p:bgRef>
+    </p:bg>
     <p:spTree>
       <p:nvGrpSpPr>
         <p:cNvPr id="1" name=""/>
@@ -2209,7 +1991,7 @@
           </a:prstGeom>
           <a:extLst>
             <a:ext uri="{C572A759-6A51-4108-AA02-DFA0A04FC94B}">
-              <ma14:wrappingTextBoxFlag xmlns:ma14="http://schemas.microsoft.com/office/mac/drawingml/2011/main" val="0"/>
+              <ma14:wrappingTextBoxFlag xmlns:ma14="http://schemas.microsoft.com/office/mac/drawingml/2011/main" xmlns="" val="0"/>
             </a:ext>
           </a:extLst>
         </p:spPr>
@@ -2227,8 +2009,8 @@
           <a:p>
             <a:pPr algn="r"/>
             <a:fld id="{F7021451-1387-4CA6-816F-3879F97B5CBC}" type="slidenum">
-              <a:rPr b="0" lang="en-US"/>
-              <a:t>null</a:t>
+              <a:rPr lang="en-US" b="0"/>
+              <a:t>‹#›</a:t>
             </a:fld>
             <a:endParaRPr lang="en-US"/>
           </a:p>
@@ -2517,9 +2299,11 @@
       <p:sp>
         <p:nvSpPr>
           <p:cNvPr id="2" name="Text 0"/>
-          <p:cNvSpPr/>
+          <p:cNvSpPr>
+            <a:spLocks noGrp="1"/>
+          </p:cNvSpPr>
           <p:nvPr>
-            <p:ph idx="100" type="body" hasCustomPrompt="1"/>
+            <p:ph type="body" idx="100" hasCustomPrompt="1"/>
           </p:nvPr>
         </p:nvSpPr>
         <p:spPr>
@@ -2537,11 +2321,11 @@
           <a:bodyPr wrap="square" lIns="0" tIns="0" rIns="0" bIns="0" rtlCol="0"/>
           <a:lstStyle/>
           <a:p>
-            <a:pPr indent="0" marL="0">
-              <a:buNone/>
-            </a:pPr>
-            <a:r>
-              <a:rPr lang="en-US" sz="1600" b="1" spc="300" kern="0" dirty="0">
+            <a:pPr marL="0" indent="0">
+              <a:buNone/>
+            </a:pPr>
+            <a:r>
+              <a:rPr lang="en-US" sz="1600" b="1" kern="0" spc="300" dirty="0">
                 <a:solidFill>
                   <a:schemeClr val="accent5"/>
                 </a:solidFill>
@@ -2555,9 +2339,11 @@
       <p:sp>
         <p:nvSpPr>
           <p:cNvPr id="3" name="Text 0"/>
-          <p:cNvSpPr/>
+          <p:cNvSpPr>
+            <a:spLocks noGrp="1"/>
+          </p:cNvSpPr>
           <p:nvPr>
-            <p:ph idx="101" type="title" hasCustomPrompt="1"/>
+            <p:ph type="title" idx="101" hasCustomPrompt="1"/>
           </p:nvPr>
         </p:nvSpPr>
         <p:spPr>
@@ -2575,7 +2361,7 @@
           <a:bodyPr wrap="square" lIns="0" tIns="0" rIns="0" bIns="0" rtlCol="0" anchor="ctr"/>
           <a:lstStyle/>
           <a:p>
-            <a:pPr algn="l" indent="0" marL="0">
+            <a:pPr marL="0" indent="0" algn="l">
               <a:buNone/>
             </a:pPr>
             <a:r>
@@ -2593,9 +2379,11 @@
       <p:sp>
         <p:nvSpPr>
           <p:cNvPr id="4" name="Text 0"/>
-          <p:cNvSpPr/>
+          <p:cNvSpPr>
+            <a:spLocks noGrp="1"/>
+          </p:cNvSpPr>
           <p:nvPr>
-            <p:ph idx="102" type="body" hasCustomPrompt="1"/>
+            <p:ph type="body" idx="102" hasCustomPrompt="1"/>
           </p:nvPr>
         </p:nvSpPr>
         <p:spPr>
@@ -2613,7 +2401,7 @@
           <a:bodyPr wrap="square" lIns="0" tIns="0" rIns="0" bIns="0" rtlCol="0" anchor="t"/>
           <a:lstStyle/>
           <a:p>
-            <a:pPr indent="0" marL="0">
+            <a:pPr marL="0" indent="0">
               <a:buNone/>
             </a:pPr>
             <a:r>
@@ -2622,7 +2410,7 @@
                   <a:schemeClr val="bg2"/>
                 </a:solidFill>
               </a:rPr>
-              <a:t>A robot that learns its own pickup and delivery order with tabular Q-learning and Monte Carlo</a:t>
+              <a:t>A robot that learns its own pickup and delivery order with tabular Q-learning, SARSA and Monte Carlo</a:t>
             </a:r>
             <a:endParaRPr lang="en-US" sz="2200" dirty="0"/>
           </a:p>
@@ -2631,9 +2419,11 @@
       <p:sp>
         <p:nvSpPr>
           <p:cNvPr id="5" name="Text 0"/>
-          <p:cNvSpPr/>
+          <p:cNvSpPr>
+            <a:spLocks noGrp="1"/>
+          </p:cNvSpPr>
           <p:nvPr>
-            <p:ph idx="103" type="body" hasCustomPrompt="1"/>
+            <p:ph type="body" idx="103" hasCustomPrompt="1"/>
           </p:nvPr>
         </p:nvSpPr>
         <p:spPr>
@@ -2651,7 +2441,7 @@
           <a:bodyPr wrap="square" lIns="0" tIns="0" rIns="0" bIns="0" rtlCol="0" anchor="t"/>
           <a:lstStyle/>
           <a:p>
-            <a:pPr indent="0" marL="0">
+            <a:pPr marL="0" indent="0">
               <a:spcAft>
                 <a:spcPts val="400"/>
               </a:spcAft>
@@ -2668,7 +2458,7 @@
             <a:endParaRPr lang="en-US" sz="1600" dirty="0"/>
           </a:p>
           <a:p>
-            <a:pPr indent="0" marL="0">
+            <a:pPr marL="0" indent="0">
               <a:spcAft>
                 <a:spcPts val="400"/>
               </a:spcAft>
@@ -2685,7 +2475,7 @@
             <a:endParaRPr lang="en-US" sz="1600" dirty="0"/>
           </a:p>
           <a:p>
-            <a:pPr indent="0" marL="0">
+            <a:pPr marL="0" indent="0">
               <a:spcAft>
                 <a:spcPts val="400"/>
               </a:spcAft>
@@ -2729,25 +2519,32 @@
             <a:prstDash val="solid"/>
           </a:ln>
         </p:spPr>
+        <p:txBody>
+          <a:bodyPr/>
+          <a:lstStyle/>
+          <a:p>
+            <a:endParaRPr lang="en-US"/>
+          </a:p>
+        </p:txBody>
       </p:sp>
       <p:pic>
         <p:nvPicPr>
-          <p:cNvPr id="7" name="cover-route" descr="Route learned on map S4: the robot visits the booster cell, carries two parcels at once and delivers C, B, then A">    </p:cNvPr>
+          <p:cNvPr id="7" name="cover-route" descr="Route learned on map S4: the robot visits the booster cell, carries two parcels at once and delivers C, B, then A"/>
           <p:cNvPicPr>
             <a:picLocks noChangeAspect="1"/>
           </p:cNvPicPr>
           <p:nvPr/>
         </p:nvPicPr>
         <p:blipFill>
-          <a:blip r:embed="rId1"/>
+          <a:blip r:embed="rId3"/>
           <a:stretch>
             <a:fillRect/>
           </a:stretch>
         </p:blipFill>
         <p:spPr>
           <a:xfrm>
-            <a:off x="8001000" y="1143000"/>
-            <a:ext cx="3474720" cy="3474720"/>
+            <a:off x="8003409" y="1142999"/>
+            <a:ext cx="3469900" cy="3474720"/>
           </a:xfrm>
           <a:prstGeom prst="rect">
             <a:avLst/>
@@ -2775,7 +2572,7 @@
           <a:bodyPr wrap="square" lIns="0" tIns="0" rIns="0" bIns="0" rtlCol="0" anchor="t"/>
           <a:lstStyle/>
           <a:p>
-            <a:pPr indent="0" marL="0">
+            <a:pPr marL="0" indent="0">
               <a:buNone/>
             </a:pPr>
             <a:r>
@@ -2784,7 +2581,7 @@
                   <a:schemeClr val="tx2"/>
                 </a:solidFill>
               </a:rPr>
-              <a:t>Route learned on S4: 38 steps, return 22 (optimal)</a:t>
+              <a:t>Route learned on S4: 67 steps, return 13 (optimal)</a:t>
             </a:r>
             <a:endParaRPr lang="en-US" sz="1300" dirty="0"/>
           </a:p>
@@ -2799,196 +2596,6 @@
 </file>
 
 <file path=ppt/slides/slide10.xml><?xml version="1.0" encoding="utf-8"?>
-<p:sld xmlns:a="http://schemas.openxmlformats.org/drawingml/2006/main" xmlns:r="http://schemas.openxmlformats.org/officeDocument/2006/relationships" xmlns:p="http://schemas.openxmlformats.org/presentationml/2006/main">
-  <p:cSld name="Slide 10">
-    <p:spTree>
-      <p:nvGrpSpPr>
-        <p:cNvPr id="1" name=""/>
-        <p:cNvGrpSpPr/>
-        <p:nvPr/>
-      </p:nvGrpSpPr>
-      <p:grpSpPr>
-        <a:xfrm>
-          <a:off x="0" y="0"/>
-          <a:ext cx="0" cy="0"/>
-          <a:chOff x="0" y="0"/>
-          <a:chExt cx="0" cy="0"/>
-        </a:xfrm>
-      </p:grpSpPr>
-      <p:sp>
-        <p:nvSpPr>
-          <p:cNvPr id="2" name="Text 0"/>
-          <p:cNvSpPr/>
-          <p:nvPr>
-            <p:ph idx="100" type="title" hasCustomPrompt="1"/>
-          </p:nvPr>
-        </p:nvSpPr>
-        <p:spPr>
-          <a:xfrm>
-            <a:off x="548640" y="320040"/>
-            <a:ext cx="11091672" cy="777240"/>
-          </a:xfrm>
-          <a:prstGeom prst="rect">
-            <a:avLst/>
-          </a:prstGeom>
-          <a:noFill/>
-          <a:ln/>
-        </p:spPr>
-        <p:txBody>
-          <a:bodyPr wrap="square" lIns="0" tIns="0" rIns="0" bIns="0" rtlCol="0" anchor="ctr"/>
-          <a:lstStyle/>
-          <a:p>
-            <a:pPr algn="l" indent="0" marL="0">
-              <a:buNone/>
-            </a:pPr>
-            <a:r>
-              <a:rPr lang="en-US" sz="3400" b="1" dirty="0">
-                <a:solidFill>
-                  <a:schemeClr val="tx1"/>
-                </a:solidFill>
-              </a:rPr>
-              <a:t>Reward or deadline changes the delivery order</a:t>
-            </a:r>
-            <a:endParaRPr lang="en-US" sz="3400" dirty="0"/>
-          </a:p>
-        </p:txBody>
-      </p:sp>
-      <p:pic>
-        <p:nvPicPr>
-          <p:cNvPr id="3" name="reward-deadline" descr="S3 under three configurations: the base case delivers C first, late penalty 0 and deadline 35 both deliver A first">    </p:cNvPr>
-          <p:cNvPicPr>
-            <a:picLocks noChangeAspect="1"/>
-          </p:cNvPicPr>
-          <p:nvPr/>
-        </p:nvPicPr>
-        <p:blipFill>
-          <a:blip r:embed="rId1"/>
-          <a:stretch>
-            <a:fillRect/>
-          </a:stretch>
-        </p:blipFill>
-        <p:spPr>
-          <a:xfrm>
-            <a:off x="936991" y="1234440"/>
-            <a:ext cx="10314971" cy="4160520"/>
-          </a:xfrm>
-          <a:prstGeom prst="rect">
-            <a:avLst/>
-          </a:prstGeom>
-        </p:spPr>
-      </p:pic>
-      <p:sp>
-        <p:nvSpPr>
-          <p:cNvPr id="4" name="reward-caption"/>
-          <p:cNvSpPr txBox="1"/>
-          <p:nvPr/>
-        </p:nvSpPr>
-        <p:spPr>
-          <a:xfrm>
-            <a:off x="548640" y="5623560"/>
-            <a:ext cx="11091672" cy="502920"/>
-          </a:xfrm>
-          <a:prstGeom prst="rect">
-            <a:avLst/>
-          </a:prstGeom>
-          <a:noFill/>
-          <a:ln/>
-        </p:spPr>
-        <p:txBody>
-          <a:bodyPr wrap="square" lIns="0" tIns="0" rIns="0" bIns="0" rtlCol="0" anchor="t"/>
-          <a:lstStyle/>
-          <a:p>
-            <a:pPr indent="0" marL="0">
-              <a:buNone/>
-            </a:pPr>
-            <a:r>
-              <a:rPr lang="en-US" sz="1700" dirty="0">
-                <a:solidFill>
-                  <a:schemeClr val="tx2"/>
-                </a:solidFill>
-              </a:rPr>
-              <a:t>Late penalty 30 → 0 or deadline 18 → 35: </a:t>
-            </a:r>
-            <a:pPr indent="0" marL="0">
-              <a:buNone/>
-            </a:pPr>
-            <a:r>
-              <a:rPr lang="en-US" sz="1700" b="1" dirty="0">
-                <a:solidFill>
-                  <a:schemeClr val="tx1"/>
-                </a:solidFill>
-              </a:rPr>
-              <a:t>C→B→A becomes A→B→C, 9 steps shorter</a:t>
-            </a:r>
-            <a:pPr indent="0" marL="0">
-              <a:buNone/>
-            </a:pPr>
-            <a:r>
-              <a:rPr lang="en-US" sz="1700" dirty="0">
-                <a:solidFill>
-                  <a:schemeClr val="tx2"/>
-                </a:solidFill>
-              </a:rPr>
-              <a:t> (5/5 seeds, matching the optimum).</a:t>
-            </a:r>
-            <a:endParaRPr lang="en-US" sz="1700" dirty="0"/>
-          </a:p>
-        </p:txBody>
-      </p:sp>
-      <p:sp>
-        <p:nvSpPr>
-          <p:cNvPr id="25" name="Slide Number Placeholder 0"/>
-          <p:cNvSpPr>
-            <a:spLocks noGrp="1"/>
-          </p:cNvSpPr>
-          <p:nvPr>
-            <p:ph type="sldNum" sz="quarter" idx="4294967295"/>
-          </p:nvPr>
-        </p:nvSpPr>
-        <p:spPr>
-          <a:xfrm>
-            <a:off x="11091672" y="6355080"/>
-            <a:ext cx="548640" cy="274320"/>
-          </a:xfrm>
-          <a:prstGeom prst="rect">
-            <a:avLst/>
-          </a:prstGeom>
-          <a:extLst>
-            <a:ext uri="{C572A759-6A51-4108-AA02-DFA0A04FC94B}">
-              <ma14:wrappingTextBoxFlag xmlns:ma14="http://schemas.microsoft.com/office/mac/drawingml/2011/main" val="0"/>
-            </a:ext>
-          </a:extLst>
-        </p:spPr>
-        <p:txBody>
-          <a:bodyPr/>
-          <a:lstStyle>
-            <a:lvl1pPr>
-              <a:defRPr sz="1100">
-                <a:solidFill>
-                  <a:srgbClr val="737B89"/>
-                </a:solidFill>
-              </a:defRPr>
-            </a:lvl1pPr>
-          </a:lstStyle>
-          <a:p>
-            <a:pPr algn="r"/>
-            <a:fld id="{F7021451-1387-4CA6-816F-3879F97B5CBC}" type="slidenum">
-              <a:rPr b="0" lang="en-US"/>
-              <a:t>10</a:t>
-            </a:fld>
-            <a:endParaRPr lang="en-US"/>
-          </a:p>
-        </p:txBody>
-      </p:sp>
-    </p:spTree>
-  </p:cSld>
-  <p:clrMapOvr>
-    <a:masterClrMapping/>
-  </p:clrMapOvr>
-</p:sld>
-</file>
-
-<file path=ppt/slides/slide11.xml><?xml version="1.0" encoding="utf-8"?>
 <p:sld xmlns:a="http://schemas.openxmlformats.org/drawingml/2006/main" xmlns:r="http://schemas.openxmlformats.org/officeDocument/2006/relationships" xmlns:p="http://schemas.openxmlformats.org/presentationml/2006/main">
   <p:cSld name="Slide 11">
     <p:spTree>
@@ -3008,9 +2615,11 @@
       <p:sp>
         <p:nvSpPr>
           <p:cNvPr id="2" name="Text 0"/>
-          <p:cNvSpPr/>
+          <p:cNvSpPr>
+            <a:spLocks noGrp="1"/>
+          </p:cNvSpPr>
           <p:nvPr>
-            <p:ph idx="100" type="title" hasCustomPrompt="1"/>
+            <p:ph type="title" idx="100" hasCustomPrompt="1"/>
           </p:nvPr>
         </p:nvSpPr>
         <p:spPr>
@@ -3028,7 +2637,7 @@
           <a:bodyPr wrap="square" lIns="0" tIns="0" rIns="0" bIns="0" rtlCol="0" anchor="ctr"/>
           <a:lstStyle/>
           <a:p>
-            <a:pPr algn="l" indent="0" marL="0">
+            <a:pPr marL="0" indent="0" algn="l">
               <a:buNone/>
             </a:pPr>
             <a:r>
@@ -3045,22 +2654,22 @@
       </p:sp>
       <p:pic>
         <p:nvPicPr>
-          <p:cNvPr id="3" name="env-booster" descr="S4 with the booster cell: 38 steps, order C B A; without the booster cell: 46 steps, order B C A">    </p:cNvPr>
+          <p:cNvPr id="3" name="env-booster" descr="S4 with the booster cell: 38 steps, order C B A; without the booster cell: 46 steps, order B C A"/>
           <p:cNvPicPr>
             <a:picLocks noChangeAspect="1"/>
           </p:cNvPicPr>
           <p:nvPr/>
         </p:nvPicPr>
         <p:blipFill>
-          <a:blip r:embed="rId1"/>
+          <a:blip r:embed="rId3"/>
           <a:stretch>
             <a:fillRect/>
           </a:stretch>
         </p:blipFill>
         <p:spPr>
           <a:xfrm>
-            <a:off x="548640" y="1280160"/>
-            <a:ext cx="8503920" cy="3706201"/>
+            <a:off x="551945" y="1280160"/>
+            <a:ext cx="8497309" cy="3703320"/>
           </a:xfrm>
           <a:prstGeom prst="rect">
             <a:avLst/>
@@ -3088,7 +2697,7 @@
           <a:bodyPr wrap="square" lIns="0" tIns="0" rIns="0" bIns="0" rtlCol="0" anchor="t"/>
           <a:lstStyle/>
           <a:p>
-            <a:pPr indent="0" marL="0">
+            <a:pPr marL="0" indent="0">
               <a:buNone/>
             </a:pPr>
             <a:r>
@@ -3097,7 +2706,7 @@
                   <a:schemeClr val="tx2"/>
                 </a:solidFill>
               </a:rPr>
-              <a:t>The agent accepts a 2-step detour to turn on the booster, then carries two parcels at once.</a:t>
+              <a:t>Even with the booster, the robot delivers the deadline parcel D first, then detours via the ×2 cell to carry A and B together.</a:t>
             </a:r>
             <a:endParaRPr lang="en-US" sz="1700" dirty="0"/>
           </a:p>
@@ -3124,7 +2733,7 @@
           <a:bodyPr wrap="square" lIns="0" tIns="0" rIns="0" bIns="0" rtlCol="0" anchor="t"/>
           <a:lstStyle/>
           <a:p>
-            <a:pPr indent="0" marL="0">
+            <a:pPr marL="0" indent="0">
               <a:buNone/>
             </a:pPr>
             <a:r>
@@ -3133,7 +2742,7 @@
                   <a:schemeClr val="accent1"/>
                 </a:solidFill>
               </a:rPr>
-              <a:t>38 steps</a:t>
+              <a:t>67 steps</a:t>
             </a:r>
             <a:endParaRPr lang="en-US" sz="4000" dirty="0"/>
           </a:p>
@@ -3160,7 +2769,7 @@
           <a:bodyPr wrap="square" lIns="0" tIns="0" rIns="0" bIns="0" rtlCol="0" anchor="t"/>
           <a:lstStyle/>
           <a:p>
-            <a:pPr indent="0" marL="0">
+            <a:pPr marL="0" indent="0">
               <a:buNone/>
             </a:pPr>
             <a:r>
@@ -3169,7 +2778,7 @@
                   <a:schemeClr val="tx2"/>
                 </a:solidFill>
               </a:rPr>
-              <a:t>with booster: C → B → A</a:t>
+              <a:t>with booster: D→C→B→A</a:t>
             </a:r>
             <a:endParaRPr lang="en-US" sz="1500" dirty="0"/>
           </a:p>
@@ -3196,7 +2805,7 @@
           <a:bodyPr wrap="square" lIns="0" tIns="0" rIns="0" bIns="0" rtlCol="0" anchor="t"/>
           <a:lstStyle/>
           <a:p>
-            <a:pPr indent="0" marL="0">
+            <a:pPr marL="0" indent="0">
               <a:buNone/>
             </a:pPr>
             <a:r>
@@ -3205,7 +2814,7 @@
                   <a:schemeClr val="tx1"/>
                 </a:solidFill>
               </a:rPr>
-              <a:t>46 steps</a:t>
+              <a:t>75 steps</a:t>
             </a:r>
             <a:endParaRPr lang="en-US" sz="4000" dirty="0"/>
           </a:p>
@@ -3232,7 +2841,7 @@
           <a:bodyPr wrap="square" lIns="0" tIns="0" rIns="0" bIns="0" rtlCol="0" anchor="t"/>
           <a:lstStyle/>
           <a:p>
-            <a:pPr indent="0" marL="0">
+            <a:pPr marL="0" indent="0">
               <a:buNone/>
             </a:pPr>
             <a:r>
@@ -3241,7 +2850,7 @@
                   <a:schemeClr val="tx2"/>
                 </a:solidFill>
               </a:rPr>
-              <a:t>without booster: B → C → A</a:t>
+              <a:t>without booster: D→B→C→A</a:t>
             </a:r>
             <a:endParaRPr lang="en-US" sz="1500" dirty="0"/>
           </a:p>
@@ -3267,7 +2876,7 @@
           </a:prstGeom>
           <a:extLst>
             <a:ext uri="{C572A759-6A51-4108-AA02-DFA0A04FC94B}">
-              <ma14:wrappingTextBoxFlag xmlns:ma14="http://schemas.microsoft.com/office/mac/drawingml/2011/main" val="0"/>
+              <ma14:wrappingTextBoxFlag xmlns:ma14="http://schemas.microsoft.com/office/mac/drawingml/2011/main" xmlns="" val="0"/>
             </a:ext>
           </a:extLst>
         </p:spPr>
@@ -3285,8 +2894,8 @@
           <a:p>
             <a:pPr algn="r"/>
             <a:fld id="{F7021451-1387-4CA6-816F-3879F97B5CBC}" type="slidenum">
-              <a:rPr b="0" lang="en-US"/>
-              <a:t>11</a:t>
+              <a:rPr lang="en-US" b="0"/>
+              <a:t>10</a:t>
             </a:fld>
             <a:endParaRPr lang="en-US"/>
           </a:p>
@@ -3300,7 +2909,7 @@
 </p:sld>
 </file>
 
-<file path=ppt/slides/slide12.xml><?xml version="1.0" encoding="utf-8"?>
+<file path=ppt/slides/slide11.xml><?xml version="1.0" encoding="utf-8"?>
 <p:sld xmlns:a="http://schemas.openxmlformats.org/drawingml/2006/main" xmlns:r="http://schemas.openxmlformats.org/officeDocument/2006/relationships" xmlns:p="http://schemas.openxmlformats.org/presentationml/2006/main">
   <p:cSld name="Slide 12">
     <p:spTree>
@@ -3320,9 +2929,11 @@
       <p:sp>
         <p:nvSpPr>
           <p:cNvPr id="2" name="Text 0"/>
-          <p:cNvSpPr/>
+          <p:cNvSpPr>
+            <a:spLocks noGrp="1"/>
+          </p:cNvSpPr>
           <p:nvPr>
-            <p:ph idx="100" type="title" hasCustomPrompt="1"/>
+            <p:ph type="title" idx="100" hasCustomPrompt="1"/>
           </p:nvPr>
         </p:nvSpPr>
         <p:spPr>
@@ -3340,7 +2951,7 @@
           <a:bodyPr wrap="square" lIns="0" tIns="0" rIns="0" bIns="0" rtlCol="0" anchor="ctr"/>
           <a:lstStyle/>
           <a:p>
-            <a:pPr algn="l" indent="0" marL="0">
+            <a:pPr marL="0" indent="0" algn="l">
               <a:buNone/>
             </a:pPr>
             <a:r>
@@ -3357,22 +2968,22 @@
       </p:sp>
       <p:pic>
         <p:nvPicPr>
-          <p:cNvPr id="3" name="demo-gif" descr="Animation of the robot following the learned policy on S4 for 38 steps">    </p:cNvPr>
+          <p:cNvPr id="3" name="demo-gif" descr="Animation of the robot following the learned policy on S4 for 38 steps"/>
           <p:cNvPicPr>
             <a:picLocks noChangeAspect="1"/>
           </p:cNvPicPr>
           <p:nvPr/>
         </p:nvPicPr>
         <p:blipFill>
-          <a:blip r:embed="rId1"/>
+          <a:blip r:embed="rId3"/>
           <a:stretch>
             <a:fillRect/>
           </a:stretch>
         </p:blipFill>
         <p:spPr>
           <a:xfrm>
-            <a:off x="548640" y="1234440"/>
-            <a:ext cx="4508390" cy="4937760"/>
+            <a:off x="548640" y="1234657"/>
+            <a:ext cx="4507992" cy="4937324"/>
           </a:xfrm>
           <a:prstGeom prst="rect">
             <a:avLst/>
@@ -3405,6 +3016,13 @@
             <a:prstDash val="solid"/>
           </a:ln>
         </p:spPr>
+        <p:txBody>
+          <a:bodyPr/>
+          <a:lstStyle/>
+          <a:p>
+            <a:endParaRPr lang="en-US"/>
+          </a:p>
+        </p:txBody>
       </p:sp>
       <p:sp>
         <p:nvSpPr>
@@ -3427,7 +3045,7 @@
           <a:bodyPr wrap="square" lIns="0" tIns="0" rIns="0" bIns="0" rtlCol="0" anchor="ctr"/>
           <a:lstStyle/>
           <a:p>
-            <a:pPr indent="0" marL="0">
+            <a:pPr marL="0" indent="0">
               <a:lnSpc>
                 <a:spcPct val="115000"/>
               </a:lnSpc>
@@ -3447,7 +3065,7 @@
             <a:endParaRPr lang="en-US" sz="1700" dirty="0"/>
           </a:p>
           <a:p>
-            <a:pPr indent="0" marL="0">
+            <a:pPr marL="0" indent="0">
               <a:lnSpc>
                 <a:spcPct val="115000"/>
               </a:lnSpc>
@@ -3467,7 +3085,7 @@
             <a:endParaRPr lang="en-US" sz="1700" dirty="0"/>
           </a:p>
           <a:p>
-            <a:pPr indent="0" marL="0">
+            <a:pPr marL="0" indent="0">
               <a:lnSpc>
                 <a:spcPct val="115000"/>
               </a:lnSpc>
@@ -3482,12 +3100,12 @@
                 <a:ea typeface="Courier New" pitchFamily="34" charset="-122"/>
                 <a:cs typeface="Courier New" pitchFamily="34" charset="-120"/>
               </a:rPr>
-              <a:t>python demo.py</a:t>
+              <a:t>python demo.py --algo sarsa</a:t>
             </a:r>
             <a:endParaRPr lang="en-US" sz="1700" dirty="0"/>
           </a:p>
           <a:p>
-            <a:pPr indent="0" marL="0">
+            <a:pPr marL="0" indent="0">
               <a:lnSpc>
                 <a:spcPct val="115000"/>
               </a:lnSpc>
@@ -3542,7 +3160,7 @@
                   <a:schemeClr val="tx2"/>
                 </a:solidFill>
               </a:rPr>
-              <a:t>experiments.py: 5 seeds, about 22 minutes</a:t>
+              <a:t>experiments.py: 5 seeds × 3 algorithms, about 4 minutes on 12 cores</a:t>
             </a:r>
             <a:endParaRPr lang="en-US" sz="1700" dirty="0"/>
           </a:p>
@@ -3560,7 +3178,7 @@
                   <a:schemeClr val="tx2"/>
                 </a:solidFill>
               </a:rPr>
-              <a:t>plots.py: 11 figures (English labels in figures_en/)</a:t>
+              <a:t>colab_train.ipynb runs the whole pipeline on Google Colab</a:t>
             </a:r>
             <a:endParaRPr lang="en-US" sz="1700" dirty="0"/>
           </a:p>
@@ -3578,7 +3196,7 @@
                   <a:schemeClr val="tx2"/>
                 </a:solidFill>
               </a:rPr>
-              <a:t>demo.py: prints a text map after every step</a:t>
+              <a:t>demo.py prints a text map after every step</a:t>
             </a:r>
             <a:endParaRPr lang="en-US" sz="1700" dirty="0"/>
           </a:p>
@@ -3596,7 +3214,7 @@
                   <a:schemeClr val="tx2"/>
                 </a:solidFill>
               </a:rPr>
-              <a:t>Symbols: @ robot · a/b/c waiting parcels · A/B/C drop cells · + booster cell</a:t>
+              <a:t>Symbols: @ robot · a–d waiting parcels · A–D drop cells · + booster cell</a:t>
             </a:r>
             <a:endParaRPr lang="en-US" sz="1700" dirty="0"/>
           </a:p>
@@ -3622,7 +3240,7 @@
           </a:prstGeom>
           <a:extLst>
             <a:ext uri="{C572A759-6A51-4108-AA02-DFA0A04FC94B}">
-              <ma14:wrappingTextBoxFlag xmlns:ma14="http://schemas.microsoft.com/office/mac/drawingml/2011/main" val="0"/>
+              <ma14:wrappingTextBoxFlag xmlns:ma14="http://schemas.microsoft.com/office/mac/drawingml/2011/main" xmlns="" val="0"/>
             </a:ext>
           </a:extLst>
         </p:spPr>
@@ -3640,8 +3258,8 @@
           <a:p>
             <a:pPr algn="r"/>
             <a:fld id="{F7021451-1387-4CA6-816F-3879F97B5CBC}" type="slidenum">
-              <a:rPr b="0" lang="en-US"/>
-              <a:t>12</a:t>
+              <a:rPr lang="en-US" b="0"/>
+              <a:t>11</a:t>
             </a:fld>
             <a:endParaRPr lang="en-US"/>
           </a:p>
@@ -3655,7 +3273,7 @@
 </p:sld>
 </file>
 
-<file path=ppt/slides/slide13.xml><?xml version="1.0" encoding="utf-8"?>
+<file path=ppt/slides/slide12.xml><?xml version="1.0" encoding="utf-8"?>
 <p:sld xmlns:a="http://schemas.openxmlformats.org/drawingml/2006/main" xmlns:r="http://schemas.openxmlformats.org/officeDocument/2006/relationships" xmlns:p="http://schemas.openxmlformats.org/presentationml/2006/main">
   <p:cSld name="Slide 13">
     <p:spTree>
@@ -3675,9 +3293,11 @@
       <p:sp>
         <p:nvSpPr>
           <p:cNvPr id="2" name="Text 0"/>
-          <p:cNvSpPr/>
+          <p:cNvSpPr>
+            <a:spLocks noGrp="1"/>
+          </p:cNvSpPr>
           <p:nvPr>
-            <p:ph idx="100" type="title" hasCustomPrompt="1"/>
+            <p:ph type="title" idx="100" hasCustomPrompt="1"/>
           </p:nvPr>
         </p:nvSpPr>
         <p:spPr>
@@ -3695,7 +3315,7 @@
           <a:bodyPr wrap="square" lIns="0" tIns="0" rIns="0" bIns="0" rtlCol="0" anchor="ctr"/>
           <a:lstStyle/>
           <a:p>
-            <a:pPr algn="l" indent="0" marL="0">
+            <a:pPr marL="0" indent="0" algn="l">
               <a:buNone/>
             </a:pPr>
             <a:r>
@@ -3737,7 +3357,7 @@
           <a:bodyPr wrap="square" lIns="0" tIns="0" rIns="0" bIns="0" rtlCol="0" anchor="ctr"/>
           <a:lstStyle/>
           <a:p>
-            <a:pPr algn="ctr" indent="0" marL="0">
+            <a:pPr marL="0" indent="0" algn="ctr">
               <a:buNone/>
             </a:pPr>
             <a:r>
@@ -3773,7 +3393,7 @@
           <a:bodyPr wrap="square" lIns="0" tIns="0" rIns="0" bIns="0" rtlCol="0" anchor="ctr"/>
           <a:lstStyle/>
           <a:p>
-            <a:pPr indent="0" marL="0">
+            <a:pPr marL="0" indent="0">
               <a:buNone/>
             </a:pPr>
             <a:r>
@@ -3782,7 +3402,7 @@
                   <a:schemeClr val="bg1"/>
                 </a:solidFill>
               </a:rPr>
-              <a:t>Q-learning is strong enough</a:t>
+              <a:t>All three reach the optimum</a:t>
             </a:r>
             <a:endParaRPr lang="en-US" sz="2000" dirty="0"/>
           </a:p>
@@ -3809,7 +3429,7 @@
           <a:bodyPr wrap="square" lIns="0" tIns="0" rIns="0" bIns="0" rtlCol="0" anchor="t"/>
           <a:lstStyle/>
           <a:p>
-            <a:pPr indent="0" marL="0">
+            <a:pPr marL="0" indent="0">
               <a:buNone/>
             </a:pPr>
             <a:r>
@@ -3818,29 +3438,7 @@
                   <a:schemeClr val="bg2"/>
                 </a:solidFill>
               </a:rPr>
-              <a:t>Q</a:t>
-            </a:r>
-            <a:pPr indent="0" marL="0">
-              <a:buNone/>
-            </a:pPr>
-            <a:r>
-              <a:rPr lang="en-US" sz="1700" baseline="-40000" dirty="0">
-                <a:solidFill>
-                  <a:schemeClr val="bg2"/>
-                </a:solidFill>
-              </a:rPr>
-              <a:t>0</a:t>
-            </a:r>
-            <a:pPr indent="0" marL="0">
-              <a:buNone/>
-            </a:pPr>
-            <a:r>
-              <a:rPr lang="en-US" sz="1700" dirty="0">
-                <a:solidFill>
-                  <a:schemeClr val="bg2"/>
-                </a:solidFill>
-              </a:rPr>
-              <a:t> = 30 is optimal in 5/5 seeds on all 4 maps</a:t>
+              <a:t>100% accuracy in 60/60 runs; the Q tables converge to Q*</a:t>
             </a:r>
             <a:endParaRPr lang="en-US" sz="1700" dirty="0"/>
           </a:p>
@@ -3873,7 +3471,7 @@
           <a:bodyPr wrap="square" lIns="0" tIns="0" rIns="0" bIns="0" rtlCol="0" anchor="ctr"/>
           <a:lstStyle/>
           <a:p>
-            <a:pPr algn="ctr" indent="0" marL="0">
+            <a:pPr marL="0" indent="0" algn="ctr">
               <a:buNone/>
             </a:pPr>
             <a:r>
@@ -3909,7 +3507,7 @@
           <a:bodyPr wrap="square" lIns="0" tIns="0" rIns="0" bIns="0" rtlCol="0" anchor="ctr"/>
           <a:lstStyle/>
           <a:p>
-            <a:pPr indent="0" marL="0">
+            <a:pPr marL="0" indent="0">
               <a:buNone/>
             </a:pPr>
             <a:r>
@@ -3918,7 +3516,7 @@
                   <a:schemeClr val="bg1"/>
                 </a:solidFill>
               </a:rPr>
-              <a:t>Exploration and episodes matter</a:t>
+              <a:t>Exploration design matters most</a:t>
             </a:r>
             <a:endParaRPr lang="en-US" sz="2000" dirty="0"/>
           </a:p>
@@ -3945,7 +3543,7 @@
           <a:bodyPr wrap="square" lIns="0" tIns="0" rIns="0" bIns="0" rtlCol="0" anchor="t"/>
           <a:lstStyle/>
           <a:p>
-            <a:pPr indent="0" marL="0">
+            <a:pPr marL="0" indent="0">
               <a:buNone/>
             </a:pPr>
             <a:r>
@@ -3954,29 +3552,7 @@
                   <a:schemeClr val="bg2"/>
                 </a:solidFill>
               </a:rPr>
-              <a:t>Q</a:t>
-            </a:r>
-            <a:pPr indent="0" marL="0">
-              <a:buNone/>
-            </a:pPr>
-            <a:r>
-              <a:rPr lang="en-US" sz="1700" baseline="-40000" dirty="0">
-                <a:solidFill>
-                  <a:schemeClr val="bg2"/>
-                </a:solidFill>
-              </a:rPr>
-              <a:t>0</a:t>
-            </a:r>
-            <a:pPr indent="0" marL="0">
-              <a:buNone/>
-            </a:pPr>
-            <a:r>
-              <a:rPr lang="en-US" sz="1700" dirty="0">
-                <a:solidFill>
-                  <a:schemeClr val="bg2"/>
-                </a:solidFill>
-              </a:rPr>
-              <a:t> = 0 gets stuck on worse routes; S3 needs ~75,000 episodes</a:t>
+              <a:t>Exploring starts + per-algorithm ε: SARSA on S4 goes from 0.4% to 100%</a:t>
             </a:r>
             <a:endParaRPr lang="en-US" sz="1700" dirty="0"/>
           </a:p>
@@ -4009,7 +3585,7 @@
           <a:bodyPr wrap="square" lIns="0" tIns="0" rIns="0" bIns="0" rtlCol="0" anchor="ctr"/>
           <a:lstStyle/>
           <a:p>
-            <a:pPr algn="ctr" indent="0" marL="0">
+            <a:pPr marL="0" indent="0" algn="ctr">
               <a:buNone/>
             </a:pPr>
             <a:r>
@@ -4045,7 +3621,7 @@
           <a:bodyPr wrap="square" lIns="0" tIns="0" rIns="0" bIns="0" rtlCol="0" anchor="ctr"/>
           <a:lstStyle/>
           <a:p>
-            <a:pPr indent="0" marL="0">
+            <a:pPr marL="0" indent="0">
               <a:buNone/>
             </a:pPr>
             <a:r>
@@ -4054,7 +3630,7 @@
                   <a:schemeClr val="bg1"/>
                 </a:solidFill>
               </a:rPr>
-              <a:t>Monte Carlo converges slowly</a:t>
+              <a:t>Q-learning learns fastest</a:t>
             </a:r>
             <a:endParaRPr lang="en-US" sz="2000" dirty="0"/>
           </a:p>
@@ -4081,7 +3657,7 @@
           <a:bodyPr wrap="square" lIns="0" tIns="0" rIns="0" bIns="0" rtlCol="0" anchor="t"/>
           <a:lstStyle/>
           <a:p>
-            <a:pPr indent="0" marL="0">
+            <a:pPr marL="0" indent="0">
               <a:buNone/>
             </a:pPr>
             <a:r>
@@ -4090,7 +3666,7 @@
                   <a:schemeClr val="bg2"/>
                 </a:solidFill>
               </a:rPr>
-              <a:t>All parcels delivered in only 12/20 runs, 0/5 on S4</a:t>
+              <a:t>Monte Carlo ES is second; SARSA needs about 3× more episodes and still fluctuates</a:t>
             </a:r>
             <a:endParaRPr lang="en-US" sz="1700" dirty="0"/>
           </a:p>
@@ -4123,7 +3699,7 @@
           <a:bodyPr wrap="square" lIns="0" tIns="0" rIns="0" bIns="0" rtlCol="0" anchor="ctr"/>
           <a:lstStyle/>
           <a:p>
-            <a:pPr algn="ctr" indent="0" marL="0">
+            <a:pPr marL="0" indent="0" algn="ctr">
               <a:buNone/>
             </a:pPr>
             <a:r>
@@ -4159,7 +3735,7 @@
           <a:bodyPr wrap="square" lIns="0" tIns="0" rIns="0" bIns="0" rtlCol="0" anchor="ctr"/>
           <a:lstStyle/>
           <a:p>
-            <a:pPr indent="0" marL="0">
+            <a:pPr marL="0" indent="0">
               <a:buNone/>
             </a:pPr>
             <a:r>
@@ -4195,7 +3771,7 @@
           <a:bodyPr wrap="square" lIns="0" tIns="0" rIns="0" bIns="0" rtlCol="0" anchor="t"/>
           <a:lstStyle/>
           <a:p>
-            <a:pPr indent="0" marL="0">
+            <a:pPr marL="0" indent="0">
               <a:buNone/>
             </a:pPr>
             <a:r>
@@ -4231,7 +3807,7 @@
           <a:bodyPr wrap="square" lIns="0" tIns="0" rIns="0" bIns="0" rtlCol="0" anchor="t"/>
           <a:lstStyle/>
           <a:p>
-            <a:pPr indent="0" marL="0">
+            <a:pPr marL="0" indent="0">
               <a:buNone/>
             </a:pPr>
             <a:r>
@@ -4242,16 +3818,13 @@
               </a:rPr>
               <a:t>Limitations: </a:t>
             </a:r>
-            <a:pPr indent="0" marL="0">
-              <a:buNone/>
-            </a:pPr>
             <a:r>
               <a:rPr lang="en-US" sz="1600" dirty="0">
                 <a:solidFill>
                   <a:schemeClr val="accent5"/>
                 </a:solidFill>
               </a:rPr>
-              <a:t>τ makes the state space grow with the deadline length; the Q table is relearned from scratch for every map.</a:t>
+              <a:t>exploring starts need a simulator that can reset to any state; the Q table is relearned for every map; τ grows the state space with the deadline.</a:t>
             </a:r>
             <a:endParaRPr lang="en-US" sz="1600" dirty="0"/>
           </a:p>
@@ -4277,7 +3850,7 @@
           </a:prstGeom>
           <a:extLst>
             <a:ext uri="{C572A759-6A51-4108-AA02-DFA0A04FC94B}">
-              <ma14:wrappingTextBoxFlag xmlns:ma14="http://schemas.microsoft.com/office/mac/drawingml/2011/main" val="0"/>
+              <ma14:wrappingTextBoxFlag xmlns:ma14="http://schemas.microsoft.com/office/mac/drawingml/2011/main" xmlns="" val="0"/>
             </a:ext>
           </a:extLst>
         </p:spPr>
@@ -4295,8 +3868,2244 @@
           <a:p>
             <a:pPr algn="r"/>
             <a:fld id="{F7021451-1387-4CA6-816F-3879F97B5CBC}" type="slidenum">
-              <a:rPr b="0" lang="en-US"/>
-              <a:t>13</a:t>
+              <a:rPr lang="en-US" b="0"/>
+              <a:t>12</a:t>
+            </a:fld>
+            <a:endParaRPr lang="en-US"/>
+          </a:p>
+        </p:txBody>
+      </p:sp>
+    </p:spTree>
+  </p:cSld>
+  <p:clrMapOvr>
+    <a:masterClrMapping/>
+  </p:clrMapOvr>
+</p:sld>
+</file>
+
+<file path=ppt/slides/slide13.xml><?xml version="1.0" encoding="utf-8"?>
+<p:sld xmlns:a="http://schemas.openxmlformats.org/drawingml/2006/main" xmlns:r="http://schemas.openxmlformats.org/officeDocument/2006/relationships" xmlns:p="http://schemas.openxmlformats.org/presentationml/2006/main">
+  <p:cSld name="Slide 2">
+    <p:spTree>
+      <p:nvGrpSpPr>
+        <p:cNvPr id="1" name=""/>
+        <p:cNvGrpSpPr/>
+        <p:nvPr/>
+      </p:nvGrpSpPr>
+      <p:grpSpPr>
+        <a:xfrm>
+          <a:off x="0" y="0"/>
+          <a:ext cx="0" cy="0"/>
+          <a:chOff x="0" y="0"/>
+          <a:chExt cx="0" cy="0"/>
+        </a:xfrm>
+      </p:grpSpPr>
+      <p:sp>
+        <p:nvSpPr>
+          <p:cNvPr id="2" name="Text 0"/>
+          <p:cNvSpPr>
+            <a:spLocks noGrp="1"/>
+          </p:cNvSpPr>
+          <p:nvPr>
+            <p:ph type="title" idx="100" hasCustomPrompt="1"/>
+          </p:nvPr>
+        </p:nvSpPr>
+        <p:spPr>
+          <a:xfrm>
+            <a:off x="548640" y="320040"/>
+            <a:ext cx="11091672" cy="777240"/>
+          </a:xfrm>
+          <a:prstGeom prst="rect">
+            <a:avLst/>
+          </a:prstGeom>
+          <a:noFill/>
+          <a:ln/>
+        </p:spPr>
+        <p:txBody>
+          <a:bodyPr wrap="square" lIns="0" tIns="0" rIns="0" bIns="0" rtlCol="0" anchor="ctr"/>
+          <a:lstStyle/>
+          <a:p>
+            <a:pPr marL="0" indent="0" algn="l">
+              <a:buNone/>
+            </a:pPr>
+            <a:r>
+              <a:rPr lang="en-US" sz="3400" b="1" dirty="0">
+                <a:solidFill>
+                  <a:schemeClr val="tx1"/>
+                </a:solidFill>
+              </a:rPr>
+              <a:t>Comparing the three algorithms</a:t>
+            </a:r>
+            <a:endParaRPr lang="en-US" sz="3400" dirty="0"/>
+          </a:p>
+        </p:txBody>
+      </p:sp>
+      <p:sp>
+        <p:nvSpPr>
+          <p:cNvPr id="6" name="reward-card"/>
+          <p:cNvSpPr/>
+          <p:nvPr/>
+        </p:nvSpPr>
+        <p:spPr>
+          <a:xfrm>
+            <a:off x="548640" y="1280160"/>
+            <a:ext cx="11091672" cy="4617720"/>
+          </a:xfrm>
+          <a:prstGeom prst="roundRect">
+            <a:avLst>
+              <a:gd name="adj" fmla="val 2609"/>
+            </a:avLst>
+          </a:prstGeom>
+          <a:solidFill>
+            <a:schemeClr val="bg2"/>
+          </a:solidFill>
+          <a:ln w="12700">
+            <a:solidFill>
+              <a:schemeClr val="bg2"/>
+            </a:solidFill>
+            <a:prstDash val="solid"/>
+          </a:ln>
+        </p:spPr>
+        <p:txBody>
+          <a:bodyPr/>
+          <a:lstStyle/>
+          <a:p>
+            <a:endParaRPr lang="en-US"/>
+          </a:p>
+        </p:txBody>
+      </p:sp>
+      <p:graphicFrame>
+        <p:nvGraphicFramePr>
+          <p:cNvPr id="8" name="reward-table"/>
+          <p:cNvGraphicFramePr>
+            <a:graphicFrameLocks noGrp="1"/>
+          </p:cNvGraphicFramePr>
+          <p:nvPr>
+            <p:extLst>
+              <p:ext uri="{D42A27DB-BD31-4B8C-83A1-F6EECF244321}">
+                <p14:modId xmlns:p14="http://schemas.microsoft.com/office/powerpoint/2010/main" val="1579011935"/>
+              </p:ext>
+            </p:extLst>
+          </p:nvPr>
+        </p:nvGraphicFramePr>
+        <p:xfrm>
+          <a:off x="868680" y="1554480"/>
+          <a:ext cx="10460736" cy="3511296"/>
+        </p:xfrm>
+        <a:graphic>
+          <a:graphicData uri="http://schemas.openxmlformats.org/drawingml/2006/table">
+            <a:tbl>
+              <a:tblPr/>
+              <a:tblGrid>
+                <a:gridCol w="3136392">
+                  <a:extLst>
+                    <a:ext uri="{9D8B030D-6E8A-4147-A177-3AD203B41FA5}">
+                      <a16:colId xmlns:a16="http://schemas.microsoft.com/office/drawing/2014/main" val="20000"/>
+                    </a:ext>
+                  </a:extLst>
+                </a:gridCol>
+                <a:gridCol w="2441448">
+                  <a:extLst>
+                    <a:ext uri="{9D8B030D-6E8A-4147-A177-3AD203B41FA5}">
+                      <a16:colId xmlns:a16="http://schemas.microsoft.com/office/drawing/2014/main" val="20001"/>
+                    </a:ext>
+                  </a:extLst>
+                </a:gridCol>
+                <a:gridCol w="2441448">
+                  <a:extLst>
+                    <a:ext uri="{9D8B030D-6E8A-4147-A177-3AD203B41FA5}">
+                      <a16:colId xmlns:a16="http://schemas.microsoft.com/office/drawing/2014/main" val="20002"/>
+                    </a:ext>
+                  </a:extLst>
+                </a:gridCol>
+                <a:gridCol w="2441448">
+                  <a:extLst>
+                    <a:ext uri="{9D8B030D-6E8A-4147-A177-3AD203B41FA5}">
+                      <a16:colId xmlns:a16="http://schemas.microsoft.com/office/drawing/2014/main" val="20003"/>
+                    </a:ext>
+                  </a:extLst>
+                </a:gridCol>
+              </a:tblGrid>
+              <a:tr h="438912">
+                <a:tc>
+                  <a:txBody>
+                    <a:bodyPr/>
+                    <a:lstStyle/>
+                    <a:p>
+                      <a:pPr marL="0" indent="0" algn="l">
+                        <a:buNone/>
+                      </a:pPr>
+                      <a:endParaRPr lang="en-US" sz="1400" dirty="0"/>
+                    </a:p>
+                  </a:txBody>
+                  <a:tcPr marL="109728" marR="109728" marT="0" marB="0" anchor="ctr">
+                    <a:lnL w="9525" cap="flat" cmpd="sng" algn="ctr">
+                      <a:solidFill>
+                        <a:srgbClr val="D5DCE6"/>
+                      </a:solidFill>
+                      <a:prstDash val="solid"/>
+                      <a:round/>
+                      <a:headEnd type="none" w="med" len="med"/>
+                      <a:tailEnd type="none" w="med" len="med"/>
+                    </a:lnL>
+                    <a:lnR w="9525" cap="flat" cmpd="sng" algn="ctr">
+                      <a:solidFill>
+                        <a:srgbClr val="D5DCE6"/>
+                      </a:solidFill>
+                      <a:prstDash val="solid"/>
+                      <a:round/>
+                      <a:headEnd type="none" w="med" len="med"/>
+                      <a:tailEnd type="none" w="med" len="med"/>
+                    </a:lnR>
+                    <a:lnT w="9525" cap="flat" cmpd="sng" algn="ctr">
+                      <a:solidFill>
+                        <a:srgbClr val="D5DCE6"/>
+                      </a:solidFill>
+                      <a:prstDash val="solid"/>
+                      <a:round/>
+                      <a:headEnd type="none" w="med" len="med"/>
+                      <a:tailEnd type="none" w="med" len="med"/>
+                    </a:lnT>
+                    <a:lnB w="9525" cap="flat" cmpd="sng" algn="ctr">
+                      <a:solidFill>
+                        <a:srgbClr val="D5DCE6"/>
+                      </a:solidFill>
+                      <a:prstDash val="solid"/>
+                      <a:round/>
+                      <a:headEnd type="none" w="med" len="med"/>
+                      <a:tailEnd type="none" w="med" len="med"/>
+                    </a:lnB>
+                    <a:solidFill>
+                      <a:srgbClr val="E2E8F1"/>
+                    </a:solidFill>
+                  </a:tcPr>
+                </a:tc>
+                <a:tc>
+                  <a:txBody>
+                    <a:bodyPr/>
+                    <a:lstStyle/>
+                    <a:p>
+                      <a:pPr marL="0" indent="0" algn="l">
+                        <a:buNone/>
+                      </a:pPr>
+                      <a:r>
+                        <a:rPr lang="en-US" sz="1400" b="1" dirty="0">
+                          <a:solidFill>
+                            <a:schemeClr val="tx1"/>
+                          </a:solidFill>
+                        </a:rPr>
+                        <a:t>Q-learning</a:t>
+                      </a:r>
+                      <a:endParaRPr lang="en-US" sz="1400" dirty="0"/>
+                    </a:p>
+                  </a:txBody>
+                  <a:tcPr marL="109728" marR="109728" marT="0" marB="0" anchor="ctr">
+                    <a:lnL w="9525" cap="flat" cmpd="sng" algn="ctr">
+                      <a:solidFill>
+                        <a:srgbClr val="D5DCE6"/>
+                      </a:solidFill>
+                      <a:prstDash val="solid"/>
+                      <a:round/>
+                      <a:headEnd type="none" w="med" len="med"/>
+                      <a:tailEnd type="none" w="med" len="med"/>
+                    </a:lnL>
+                    <a:lnR w="9525" cap="flat" cmpd="sng" algn="ctr">
+                      <a:solidFill>
+                        <a:srgbClr val="D5DCE6"/>
+                      </a:solidFill>
+                      <a:prstDash val="solid"/>
+                      <a:round/>
+                      <a:headEnd type="none" w="med" len="med"/>
+                      <a:tailEnd type="none" w="med" len="med"/>
+                    </a:lnR>
+                    <a:lnT w="9525" cap="flat" cmpd="sng" algn="ctr">
+                      <a:solidFill>
+                        <a:srgbClr val="D5DCE6"/>
+                      </a:solidFill>
+                      <a:prstDash val="solid"/>
+                      <a:round/>
+                      <a:headEnd type="none" w="med" len="med"/>
+                      <a:tailEnd type="none" w="med" len="med"/>
+                    </a:lnT>
+                    <a:lnB w="9525" cap="flat" cmpd="sng" algn="ctr">
+                      <a:solidFill>
+                        <a:srgbClr val="D5DCE6"/>
+                      </a:solidFill>
+                      <a:prstDash val="solid"/>
+                      <a:round/>
+                      <a:headEnd type="none" w="med" len="med"/>
+                      <a:tailEnd type="none" w="med" len="med"/>
+                    </a:lnB>
+                    <a:solidFill>
+                      <a:srgbClr val="E2E8F1"/>
+                    </a:solidFill>
+                  </a:tcPr>
+                </a:tc>
+                <a:tc>
+                  <a:txBody>
+                    <a:bodyPr/>
+                    <a:lstStyle/>
+                    <a:p>
+                      <a:pPr marL="0" indent="0" algn="l">
+                        <a:buNone/>
+                      </a:pPr>
+                      <a:r>
+                        <a:rPr lang="en-US" sz="1400" b="1" dirty="0">
+                          <a:solidFill>
+                            <a:schemeClr val="tx1"/>
+                          </a:solidFill>
+                        </a:rPr>
+                        <a:t>SARSA</a:t>
+                      </a:r>
+                      <a:endParaRPr lang="en-US" sz="1400" dirty="0"/>
+                    </a:p>
+                  </a:txBody>
+                  <a:tcPr marL="109728" marR="109728" marT="0" marB="0" anchor="ctr">
+                    <a:lnL w="9525" cap="flat" cmpd="sng" algn="ctr">
+                      <a:solidFill>
+                        <a:srgbClr val="D5DCE6"/>
+                      </a:solidFill>
+                      <a:prstDash val="solid"/>
+                      <a:round/>
+                      <a:headEnd type="none" w="med" len="med"/>
+                      <a:tailEnd type="none" w="med" len="med"/>
+                    </a:lnL>
+                    <a:lnR w="9525" cap="flat" cmpd="sng" algn="ctr">
+                      <a:solidFill>
+                        <a:srgbClr val="D5DCE6"/>
+                      </a:solidFill>
+                      <a:prstDash val="solid"/>
+                      <a:round/>
+                      <a:headEnd type="none" w="med" len="med"/>
+                      <a:tailEnd type="none" w="med" len="med"/>
+                    </a:lnR>
+                    <a:lnT w="9525" cap="flat" cmpd="sng" algn="ctr">
+                      <a:solidFill>
+                        <a:srgbClr val="D5DCE6"/>
+                      </a:solidFill>
+                      <a:prstDash val="solid"/>
+                      <a:round/>
+                      <a:headEnd type="none" w="med" len="med"/>
+                      <a:tailEnd type="none" w="med" len="med"/>
+                    </a:lnT>
+                    <a:lnB w="9525" cap="flat" cmpd="sng" algn="ctr">
+                      <a:solidFill>
+                        <a:srgbClr val="D5DCE6"/>
+                      </a:solidFill>
+                      <a:prstDash val="solid"/>
+                      <a:round/>
+                      <a:headEnd type="none" w="med" len="med"/>
+                      <a:tailEnd type="none" w="med" len="med"/>
+                    </a:lnB>
+                    <a:solidFill>
+                      <a:srgbClr val="E2E8F1"/>
+                    </a:solidFill>
+                  </a:tcPr>
+                </a:tc>
+                <a:tc>
+                  <a:txBody>
+                    <a:bodyPr/>
+                    <a:lstStyle/>
+                    <a:p>
+                      <a:pPr marL="0" indent="0" algn="l">
+                        <a:buNone/>
+                      </a:pPr>
+                      <a:r>
+                        <a:rPr lang="en-US" sz="1400" b="1" dirty="0">
+                          <a:solidFill>
+                            <a:schemeClr val="tx1"/>
+                          </a:solidFill>
+                        </a:rPr>
+                        <a:t>Monte Carlo ES</a:t>
+                      </a:r>
+                      <a:endParaRPr lang="en-US" sz="1400" dirty="0"/>
+                    </a:p>
+                  </a:txBody>
+                  <a:tcPr marL="109728" marR="109728" marT="0" marB="0" anchor="ctr">
+                    <a:lnL w="9525" cap="flat" cmpd="sng" algn="ctr">
+                      <a:solidFill>
+                        <a:srgbClr val="D5DCE6"/>
+                      </a:solidFill>
+                      <a:prstDash val="solid"/>
+                      <a:round/>
+                      <a:headEnd type="none" w="med" len="med"/>
+                      <a:tailEnd type="none" w="med" len="med"/>
+                    </a:lnL>
+                    <a:lnR w="9525" cap="flat" cmpd="sng" algn="ctr">
+                      <a:solidFill>
+                        <a:srgbClr val="D5DCE6"/>
+                      </a:solidFill>
+                      <a:prstDash val="solid"/>
+                      <a:round/>
+                      <a:headEnd type="none" w="med" len="med"/>
+                      <a:tailEnd type="none" w="med" len="med"/>
+                    </a:lnR>
+                    <a:lnT w="9525" cap="flat" cmpd="sng" algn="ctr">
+                      <a:solidFill>
+                        <a:srgbClr val="D5DCE6"/>
+                      </a:solidFill>
+                      <a:prstDash val="solid"/>
+                      <a:round/>
+                      <a:headEnd type="none" w="med" len="med"/>
+                      <a:tailEnd type="none" w="med" len="med"/>
+                    </a:lnT>
+                    <a:lnB w="9525" cap="flat" cmpd="sng" algn="ctr">
+                      <a:solidFill>
+                        <a:srgbClr val="D5DCE6"/>
+                      </a:solidFill>
+                      <a:prstDash val="solid"/>
+                      <a:round/>
+                      <a:headEnd type="none" w="med" len="med"/>
+                      <a:tailEnd type="none" w="med" len="med"/>
+                    </a:lnB>
+                    <a:solidFill>
+                      <a:srgbClr val="E2E8F1"/>
+                    </a:solidFill>
+                  </a:tcPr>
+                </a:tc>
+                <a:extLst>
+                  <a:ext uri="{0D108BD9-81ED-4DB2-BD59-A6C34878D82A}">
+                    <a16:rowId xmlns:a16="http://schemas.microsoft.com/office/drawing/2014/main" val="10000"/>
+                  </a:ext>
+                </a:extLst>
+              </a:tr>
+              <a:tr h="438912">
+                <a:tc>
+                  <a:txBody>
+                    <a:bodyPr/>
+                    <a:lstStyle/>
+                    <a:p>
+                      <a:pPr marL="0" indent="0">
+                        <a:buNone/>
+                      </a:pPr>
+                      <a:r>
+                        <a:rPr lang="en-US" sz="1400" dirty="0">
+                          <a:solidFill>
+                            <a:srgbClr val="3D4451"/>
+                          </a:solidFill>
+                        </a:rPr>
+                        <a:t>Update target</a:t>
+                      </a:r>
+                      <a:endParaRPr lang="en-US" sz="1400" dirty="0"/>
+                    </a:p>
+                  </a:txBody>
+                  <a:tcPr marL="109728" marR="109728" marT="0" marB="0" anchor="ctr">
+                    <a:lnL w="9525" cap="flat" cmpd="sng" algn="ctr">
+                      <a:solidFill>
+                        <a:srgbClr val="D5DCE6"/>
+                      </a:solidFill>
+                      <a:prstDash val="solid"/>
+                      <a:round/>
+                      <a:headEnd type="none" w="med" len="med"/>
+                      <a:tailEnd type="none" w="med" len="med"/>
+                    </a:lnL>
+                    <a:lnR w="9525" cap="flat" cmpd="sng" algn="ctr">
+                      <a:solidFill>
+                        <a:srgbClr val="D5DCE6"/>
+                      </a:solidFill>
+                      <a:prstDash val="solid"/>
+                      <a:round/>
+                      <a:headEnd type="none" w="med" len="med"/>
+                      <a:tailEnd type="none" w="med" len="med"/>
+                    </a:lnR>
+                    <a:lnT w="9525" cap="flat" cmpd="sng" algn="ctr">
+                      <a:solidFill>
+                        <a:srgbClr val="D5DCE6"/>
+                      </a:solidFill>
+                      <a:prstDash val="solid"/>
+                      <a:round/>
+                      <a:headEnd type="none" w="med" len="med"/>
+                      <a:tailEnd type="none" w="med" len="med"/>
+                    </a:lnT>
+                    <a:lnB w="9525" cap="flat" cmpd="sng" algn="ctr">
+                      <a:solidFill>
+                        <a:srgbClr val="D5DCE6"/>
+                      </a:solidFill>
+                      <a:prstDash val="solid"/>
+                      <a:round/>
+                      <a:headEnd type="none" w="med" len="med"/>
+                      <a:tailEnd type="none" w="med" len="med"/>
+                    </a:lnB>
+                    <a:solidFill>
+                      <a:srgbClr val="FFFFFF"/>
+                    </a:solidFill>
+                  </a:tcPr>
+                </a:tc>
+                <a:tc>
+                  <a:txBody>
+                    <a:bodyPr/>
+                    <a:lstStyle/>
+                    <a:p>
+                      <a:pPr marL="0" indent="0">
+                        <a:buNone/>
+                      </a:pPr>
+                      <a:r>
+                        <a:rPr lang="en-US" sz="1400" dirty="0">
+                          <a:solidFill>
+                            <a:srgbClr val="3D4451"/>
+                          </a:solidFill>
+                        </a:rPr>
+                        <a:t>r + γ max Q(s′, ·)</a:t>
+                      </a:r>
+                      <a:endParaRPr lang="en-US" sz="1400" dirty="0"/>
+                    </a:p>
+                  </a:txBody>
+                  <a:tcPr marL="109728" marR="109728" marT="0" marB="0" anchor="ctr">
+                    <a:lnL w="9525" cap="flat" cmpd="sng" algn="ctr">
+                      <a:solidFill>
+                        <a:srgbClr val="D5DCE6"/>
+                      </a:solidFill>
+                      <a:prstDash val="solid"/>
+                      <a:round/>
+                      <a:headEnd type="none" w="med" len="med"/>
+                      <a:tailEnd type="none" w="med" len="med"/>
+                    </a:lnL>
+                    <a:lnR w="9525" cap="flat" cmpd="sng" algn="ctr">
+                      <a:solidFill>
+                        <a:srgbClr val="D5DCE6"/>
+                      </a:solidFill>
+                      <a:prstDash val="solid"/>
+                      <a:round/>
+                      <a:headEnd type="none" w="med" len="med"/>
+                      <a:tailEnd type="none" w="med" len="med"/>
+                    </a:lnR>
+                    <a:lnT w="9525" cap="flat" cmpd="sng" algn="ctr">
+                      <a:solidFill>
+                        <a:srgbClr val="D5DCE6"/>
+                      </a:solidFill>
+                      <a:prstDash val="solid"/>
+                      <a:round/>
+                      <a:headEnd type="none" w="med" len="med"/>
+                      <a:tailEnd type="none" w="med" len="med"/>
+                    </a:lnT>
+                    <a:lnB w="9525" cap="flat" cmpd="sng" algn="ctr">
+                      <a:solidFill>
+                        <a:srgbClr val="D5DCE6"/>
+                      </a:solidFill>
+                      <a:prstDash val="solid"/>
+                      <a:round/>
+                      <a:headEnd type="none" w="med" len="med"/>
+                      <a:tailEnd type="none" w="med" len="med"/>
+                    </a:lnB>
+                    <a:solidFill>
+                      <a:srgbClr val="FFFFFF"/>
+                    </a:solidFill>
+                  </a:tcPr>
+                </a:tc>
+                <a:tc>
+                  <a:txBody>
+                    <a:bodyPr/>
+                    <a:lstStyle/>
+                    <a:p>
+                      <a:pPr marL="0" indent="0">
+                        <a:buNone/>
+                      </a:pPr>
+                      <a:r>
+                        <a:rPr lang="en-US" sz="1400" dirty="0">
+                          <a:solidFill>
+                            <a:srgbClr val="3D4451"/>
+                          </a:solidFill>
+                        </a:rPr>
+                        <a:t>r + γ Q(s′, a′)</a:t>
+                      </a:r>
+                      <a:endParaRPr lang="en-US" sz="1400" dirty="0"/>
+                    </a:p>
+                  </a:txBody>
+                  <a:tcPr marL="109728" marR="109728" marT="0" marB="0" anchor="ctr">
+                    <a:lnL w="9525" cap="flat" cmpd="sng" algn="ctr">
+                      <a:solidFill>
+                        <a:srgbClr val="D5DCE6"/>
+                      </a:solidFill>
+                      <a:prstDash val="solid"/>
+                      <a:round/>
+                      <a:headEnd type="none" w="med" len="med"/>
+                      <a:tailEnd type="none" w="med" len="med"/>
+                    </a:lnL>
+                    <a:lnR w="9525" cap="flat" cmpd="sng" algn="ctr">
+                      <a:solidFill>
+                        <a:srgbClr val="D5DCE6"/>
+                      </a:solidFill>
+                      <a:prstDash val="solid"/>
+                      <a:round/>
+                      <a:headEnd type="none" w="med" len="med"/>
+                      <a:tailEnd type="none" w="med" len="med"/>
+                    </a:lnR>
+                    <a:lnT w="9525" cap="flat" cmpd="sng" algn="ctr">
+                      <a:solidFill>
+                        <a:srgbClr val="D5DCE6"/>
+                      </a:solidFill>
+                      <a:prstDash val="solid"/>
+                      <a:round/>
+                      <a:headEnd type="none" w="med" len="med"/>
+                      <a:tailEnd type="none" w="med" len="med"/>
+                    </a:lnT>
+                    <a:lnB w="9525" cap="flat" cmpd="sng" algn="ctr">
+                      <a:solidFill>
+                        <a:srgbClr val="D5DCE6"/>
+                      </a:solidFill>
+                      <a:prstDash val="solid"/>
+                      <a:round/>
+                      <a:headEnd type="none" w="med" len="med"/>
+                      <a:tailEnd type="none" w="med" len="med"/>
+                    </a:lnB>
+                    <a:solidFill>
+                      <a:srgbClr val="FFFFFF"/>
+                    </a:solidFill>
+                  </a:tcPr>
+                </a:tc>
+                <a:tc>
+                  <a:txBody>
+                    <a:bodyPr/>
+                    <a:lstStyle/>
+                    <a:p>
+                      <a:pPr marL="0" indent="0">
+                        <a:buNone/>
+                      </a:pPr>
+                      <a:r>
+                        <a:rPr lang="en-US" sz="1400" dirty="0">
+                          <a:solidFill>
+                            <a:srgbClr val="3D4451"/>
+                          </a:solidFill>
+                        </a:rPr>
+                        <a:t>return G</a:t>
+                      </a:r>
+                      <a:endParaRPr lang="en-US" sz="1400" dirty="0"/>
+                    </a:p>
+                  </a:txBody>
+                  <a:tcPr marL="109728" marR="109728" marT="0" marB="0" anchor="ctr">
+                    <a:lnL w="9525" cap="flat" cmpd="sng" algn="ctr">
+                      <a:solidFill>
+                        <a:srgbClr val="D5DCE6"/>
+                      </a:solidFill>
+                      <a:prstDash val="solid"/>
+                      <a:round/>
+                      <a:headEnd type="none" w="med" len="med"/>
+                      <a:tailEnd type="none" w="med" len="med"/>
+                    </a:lnL>
+                    <a:lnR w="9525" cap="flat" cmpd="sng" algn="ctr">
+                      <a:solidFill>
+                        <a:srgbClr val="D5DCE6"/>
+                      </a:solidFill>
+                      <a:prstDash val="solid"/>
+                      <a:round/>
+                      <a:headEnd type="none" w="med" len="med"/>
+                      <a:tailEnd type="none" w="med" len="med"/>
+                    </a:lnR>
+                    <a:lnT w="9525" cap="flat" cmpd="sng" algn="ctr">
+                      <a:solidFill>
+                        <a:srgbClr val="D5DCE6"/>
+                      </a:solidFill>
+                      <a:prstDash val="solid"/>
+                      <a:round/>
+                      <a:headEnd type="none" w="med" len="med"/>
+                      <a:tailEnd type="none" w="med" len="med"/>
+                    </a:lnT>
+                    <a:lnB w="9525" cap="flat" cmpd="sng" algn="ctr">
+                      <a:solidFill>
+                        <a:srgbClr val="D5DCE6"/>
+                      </a:solidFill>
+                      <a:prstDash val="solid"/>
+                      <a:round/>
+                      <a:headEnd type="none" w="med" len="med"/>
+                      <a:tailEnd type="none" w="med" len="med"/>
+                    </a:lnB>
+                    <a:solidFill>
+                      <a:srgbClr val="FFFFFF"/>
+                    </a:solidFill>
+                  </a:tcPr>
+                </a:tc>
+                <a:extLst>
+                  <a:ext uri="{0D108BD9-81ED-4DB2-BD59-A6C34878D82A}">
+                    <a16:rowId xmlns:a16="http://schemas.microsoft.com/office/drawing/2014/main" val="10001"/>
+                  </a:ext>
+                </a:extLst>
+              </a:tr>
+              <a:tr h="438912">
+                <a:tc>
+                  <a:txBody>
+                    <a:bodyPr/>
+                    <a:lstStyle/>
+                    <a:p>
+                      <a:pPr marL="0" indent="0">
+                        <a:buNone/>
+                      </a:pPr>
+                      <a:r>
+                        <a:rPr lang="en-US" sz="1400" dirty="0">
+                          <a:solidFill>
+                            <a:srgbClr val="3D4451"/>
+                          </a:solidFill>
+                        </a:rPr>
+                        <a:t>Learns the value of</a:t>
+                      </a:r>
+                      <a:endParaRPr lang="en-US" sz="1400" dirty="0"/>
+                    </a:p>
+                  </a:txBody>
+                  <a:tcPr marL="109728" marR="109728" marT="0" marB="0" anchor="ctr">
+                    <a:lnL w="9525" cap="flat" cmpd="sng" algn="ctr">
+                      <a:solidFill>
+                        <a:srgbClr val="D5DCE6"/>
+                      </a:solidFill>
+                      <a:prstDash val="solid"/>
+                      <a:round/>
+                      <a:headEnd type="none" w="med" len="med"/>
+                      <a:tailEnd type="none" w="med" len="med"/>
+                    </a:lnL>
+                    <a:lnR w="9525" cap="flat" cmpd="sng" algn="ctr">
+                      <a:solidFill>
+                        <a:srgbClr val="D5DCE6"/>
+                      </a:solidFill>
+                      <a:prstDash val="solid"/>
+                      <a:round/>
+                      <a:headEnd type="none" w="med" len="med"/>
+                      <a:tailEnd type="none" w="med" len="med"/>
+                    </a:lnR>
+                    <a:lnT w="9525" cap="flat" cmpd="sng" algn="ctr">
+                      <a:solidFill>
+                        <a:srgbClr val="D5DCE6"/>
+                      </a:solidFill>
+                      <a:prstDash val="solid"/>
+                      <a:round/>
+                      <a:headEnd type="none" w="med" len="med"/>
+                      <a:tailEnd type="none" w="med" len="med"/>
+                    </a:lnT>
+                    <a:lnB w="9525" cap="flat" cmpd="sng" algn="ctr">
+                      <a:solidFill>
+                        <a:srgbClr val="D5DCE6"/>
+                      </a:solidFill>
+                      <a:prstDash val="solid"/>
+                      <a:round/>
+                      <a:headEnd type="none" w="med" len="med"/>
+                      <a:tailEnd type="none" w="med" len="med"/>
+                    </a:lnB>
+                    <a:solidFill>
+                      <a:srgbClr val="FFFFFF"/>
+                    </a:solidFill>
+                  </a:tcPr>
+                </a:tc>
+                <a:tc>
+                  <a:txBody>
+                    <a:bodyPr/>
+                    <a:lstStyle/>
+                    <a:p>
+                      <a:pPr marL="0" indent="0">
+                        <a:buNone/>
+                      </a:pPr>
+                      <a:r>
+                        <a:rPr lang="en-US" sz="1400" dirty="0">
+                          <a:solidFill>
+                            <a:srgbClr val="3D4451"/>
+                          </a:solidFill>
+                        </a:rPr>
+                        <a:t>the optimal policy (off-policy)</a:t>
+                      </a:r>
+                      <a:endParaRPr lang="en-US" sz="1400" dirty="0"/>
+                    </a:p>
+                  </a:txBody>
+                  <a:tcPr marL="109728" marR="109728" marT="0" marB="0" anchor="ctr">
+                    <a:lnL w="9525" cap="flat" cmpd="sng" algn="ctr">
+                      <a:solidFill>
+                        <a:srgbClr val="D5DCE6"/>
+                      </a:solidFill>
+                      <a:prstDash val="solid"/>
+                      <a:round/>
+                      <a:headEnd type="none" w="med" len="med"/>
+                      <a:tailEnd type="none" w="med" len="med"/>
+                    </a:lnL>
+                    <a:lnR w="9525" cap="flat" cmpd="sng" algn="ctr">
+                      <a:solidFill>
+                        <a:srgbClr val="D5DCE6"/>
+                      </a:solidFill>
+                      <a:prstDash val="solid"/>
+                      <a:round/>
+                      <a:headEnd type="none" w="med" len="med"/>
+                      <a:tailEnd type="none" w="med" len="med"/>
+                    </a:lnR>
+                    <a:lnT w="9525" cap="flat" cmpd="sng" algn="ctr">
+                      <a:solidFill>
+                        <a:srgbClr val="D5DCE6"/>
+                      </a:solidFill>
+                      <a:prstDash val="solid"/>
+                      <a:round/>
+                      <a:headEnd type="none" w="med" len="med"/>
+                      <a:tailEnd type="none" w="med" len="med"/>
+                    </a:lnT>
+                    <a:lnB w="9525" cap="flat" cmpd="sng" algn="ctr">
+                      <a:solidFill>
+                        <a:srgbClr val="D5DCE6"/>
+                      </a:solidFill>
+                      <a:prstDash val="solid"/>
+                      <a:round/>
+                      <a:headEnd type="none" w="med" len="med"/>
+                      <a:tailEnd type="none" w="med" len="med"/>
+                    </a:lnB>
+                    <a:solidFill>
+                      <a:srgbClr val="FFFFFF"/>
+                    </a:solidFill>
+                  </a:tcPr>
+                </a:tc>
+                <a:tc>
+                  <a:txBody>
+                    <a:bodyPr/>
+                    <a:lstStyle/>
+                    <a:p>
+                      <a:pPr marL="0" indent="0">
+                        <a:buNone/>
+                      </a:pPr>
+                      <a:r>
+                        <a:rPr lang="en-US" sz="1400" dirty="0">
+                          <a:solidFill>
+                            <a:srgbClr val="3D4451"/>
+                          </a:solidFill>
+                        </a:rPr>
+                        <a:t>its ε-greedy policy (on-policy)</a:t>
+                      </a:r>
+                      <a:endParaRPr lang="en-US" sz="1400" dirty="0"/>
+                    </a:p>
+                  </a:txBody>
+                  <a:tcPr marL="109728" marR="109728" marT="0" marB="0" anchor="ctr">
+                    <a:lnL w="9525" cap="flat" cmpd="sng" algn="ctr">
+                      <a:solidFill>
+                        <a:srgbClr val="D5DCE6"/>
+                      </a:solidFill>
+                      <a:prstDash val="solid"/>
+                      <a:round/>
+                      <a:headEnd type="none" w="med" len="med"/>
+                      <a:tailEnd type="none" w="med" len="med"/>
+                    </a:lnL>
+                    <a:lnR w="9525" cap="flat" cmpd="sng" algn="ctr">
+                      <a:solidFill>
+                        <a:srgbClr val="D5DCE6"/>
+                      </a:solidFill>
+                      <a:prstDash val="solid"/>
+                      <a:round/>
+                      <a:headEnd type="none" w="med" len="med"/>
+                      <a:tailEnd type="none" w="med" len="med"/>
+                    </a:lnR>
+                    <a:lnT w="9525" cap="flat" cmpd="sng" algn="ctr">
+                      <a:solidFill>
+                        <a:srgbClr val="D5DCE6"/>
+                      </a:solidFill>
+                      <a:prstDash val="solid"/>
+                      <a:round/>
+                      <a:headEnd type="none" w="med" len="med"/>
+                      <a:tailEnd type="none" w="med" len="med"/>
+                    </a:lnT>
+                    <a:lnB w="9525" cap="flat" cmpd="sng" algn="ctr">
+                      <a:solidFill>
+                        <a:srgbClr val="D5DCE6"/>
+                      </a:solidFill>
+                      <a:prstDash val="solid"/>
+                      <a:round/>
+                      <a:headEnd type="none" w="med" len="med"/>
+                      <a:tailEnd type="none" w="med" len="med"/>
+                    </a:lnB>
+                    <a:solidFill>
+                      <a:srgbClr val="FFFFFF"/>
+                    </a:solidFill>
+                  </a:tcPr>
+                </a:tc>
+                <a:tc>
+                  <a:txBody>
+                    <a:bodyPr/>
+                    <a:lstStyle/>
+                    <a:p>
+                      <a:pPr marL="0" indent="0">
+                        <a:buNone/>
+                      </a:pPr>
+                      <a:r>
+                        <a:rPr lang="en-US" sz="1400" dirty="0">
+                          <a:solidFill>
+                            <a:srgbClr val="3D4451"/>
+                          </a:solidFill>
+                        </a:rPr>
+                        <a:t>its greedy policy</a:t>
+                      </a:r>
+                      <a:endParaRPr lang="en-US" sz="1400" dirty="0"/>
+                    </a:p>
+                  </a:txBody>
+                  <a:tcPr marL="109728" marR="109728" marT="0" marB="0" anchor="ctr">
+                    <a:lnL w="9525" cap="flat" cmpd="sng" algn="ctr">
+                      <a:solidFill>
+                        <a:srgbClr val="D5DCE6"/>
+                      </a:solidFill>
+                      <a:prstDash val="solid"/>
+                      <a:round/>
+                      <a:headEnd type="none" w="med" len="med"/>
+                      <a:tailEnd type="none" w="med" len="med"/>
+                    </a:lnL>
+                    <a:lnR w="9525" cap="flat" cmpd="sng" algn="ctr">
+                      <a:solidFill>
+                        <a:srgbClr val="D5DCE6"/>
+                      </a:solidFill>
+                      <a:prstDash val="solid"/>
+                      <a:round/>
+                      <a:headEnd type="none" w="med" len="med"/>
+                      <a:tailEnd type="none" w="med" len="med"/>
+                    </a:lnR>
+                    <a:lnT w="9525" cap="flat" cmpd="sng" algn="ctr">
+                      <a:solidFill>
+                        <a:srgbClr val="D5DCE6"/>
+                      </a:solidFill>
+                      <a:prstDash val="solid"/>
+                      <a:round/>
+                      <a:headEnd type="none" w="med" len="med"/>
+                      <a:tailEnd type="none" w="med" len="med"/>
+                    </a:lnT>
+                    <a:lnB w="9525" cap="flat" cmpd="sng" algn="ctr">
+                      <a:solidFill>
+                        <a:srgbClr val="D5DCE6"/>
+                      </a:solidFill>
+                      <a:prstDash val="solid"/>
+                      <a:round/>
+                      <a:headEnd type="none" w="med" len="med"/>
+                      <a:tailEnd type="none" w="med" len="med"/>
+                    </a:lnB>
+                    <a:solidFill>
+                      <a:srgbClr val="FFFFFF"/>
+                    </a:solidFill>
+                  </a:tcPr>
+                </a:tc>
+                <a:extLst>
+                  <a:ext uri="{0D108BD9-81ED-4DB2-BD59-A6C34878D82A}">
+                    <a16:rowId xmlns:a16="http://schemas.microsoft.com/office/drawing/2014/main" val="10002"/>
+                  </a:ext>
+                </a:extLst>
+              </a:tr>
+              <a:tr h="438912">
+                <a:tc>
+                  <a:txBody>
+                    <a:bodyPr/>
+                    <a:lstStyle/>
+                    <a:p>
+                      <a:pPr marL="0" indent="0">
+                        <a:buNone/>
+                      </a:pPr>
+                      <a:r>
+                        <a:rPr lang="en-US" sz="1400" dirty="0">
+                          <a:solidFill>
+                            <a:srgbClr val="3D4451"/>
+                          </a:solidFill>
+                        </a:rPr>
+                        <a:t>Episodes to 100% on S4</a:t>
+                      </a:r>
+                      <a:endParaRPr lang="en-US" sz="1400" dirty="0"/>
+                    </a:p>
+                  </a:txBody>
+                  <a:tcPr marL="109728" marR="109728" marT="0" marB="0" anchor="ctr">
+                    <a:lnL w="9525" cap="flat" cmpd="sng" algn="ctr">
+                      <a:solidFill>
+                        <a:srgbClr val="D5DCE6"/>
+                      </a:solidFill>
+                      <a:prstDash val="solid"/>
+                      <a:round/>
+                      <a:headEnd type="none" w="med" len="med"/>
+                      <a:tailEnd type="none" w="med" len="med"/>
+                    </a:lnL>
+                    <a:lnR w="9525" cap="flat" cmpd="sng" algn="ctr">
+                      <a:solidFill>
+                        <a:srgbClr val="D5DCE6"/>
+                      </a:solidFill>
+                      <a:prstDash val="solid"/>
+                      <a:round/>
+                      <a:headEnd type="none" w="med" len="med"/>
+                      <a:tailEnd type="none" w="med" len="med"/>
+                    </a:lnR>
+                    <a:lnT w="9525" cap="flat" cmpd="sng" algn="ctr">
+                      <a:solidFill>
+                        <a:srgbClr val="D5DCE6"/>
+                      </a:solidFill>
+                      <a:prstDash val="solid"/>
+                      <a:round/>
+                      <a:headEnd type="none" w="med" len="med"/>
+                      <a:tailEnd type="none" w="med" len="med"/>
+                    </a:lnT>
+                    <a:lnB w="9525" cap="flat" cmpd="sng" algn="ctr">
+                      <a:solidFill>
+                        <a:srgbClr val="D5DCE6"/>
+                      </a:solidFill>
+                      <a:prstDash val="solid"/>
+                      <a:round/>
+                      <a:headEnd type="none" w="med" len="med"/>
+                      <a:tailEnd type="none" w="med" len="med"/>
+                    </a:lnB>
+                    <a:solidFill>
+                      <a:srgbClr val="FFFFFF"/>
+                    </a:solidFill>
+                  </a:tcPr>
+                </a:tc>
+                <a:tc>
+                  <a:txBody>
+                    <a:bodyPr/>
+                    <a:lstStyle/>
+                    <a:p>
+                      <a:pPr marL="0" indent="0">
+                        <a:buNone/>
+                      </a:pPr>
+                      <a:r>
+                        <a:rPr lang="en-US" sz="1400" dirty="0">
+                          <a:solidFill>
+                            <a:srgbClr val="3D4451"/>
+                          </a:solidFill>
+                        </a:rPr>
+                        <a:t>1.14 M</a:t>
+                      </a:r>
+                      <a:endParaRPr lang="en-US" sz="1400" dirty="0"/>
+                    </a:p>
+                  </a:txBody>
+                  <a:tcPr marL="109728" marR="109728" marT="0" marB="0" anchor="ctr">
+                    <a:lnL w="9525" cap="flat" cmpd="sng" algn="ctr">
+                      <a:solidFill>
+                        <a:srgbClr val="D5DCE6"/>
+                      </a:solidFill>
+                      <a:prstDash val="solid"/>
+                      <a:round/>
+                      <a:headEnd type="none" w="med" len="med"/>
+                      <a:tailEnd type="none" w="med" len="med"/>
+                    </a:lnL>
+                    <a:lnR w="9525" cap="flat" cmpd="sng" algn="ctr">
+                      <a:solidFill>
+                        <a:srgbClr val="D5DCE6"/>
+                      </a:solidFill>
+                      <a:prstDash val="solid"/>
+                      <a:round/>
+                      <a:headEnd type="none" w="med" len="med"/>
+                      <a:tailEnd type="none" w="med" len="med"/>
+                    </a:lnR>
+                    <a:lnT w="9525" cap="flat" cmpd="sng" algn="ctr">
+                      <a:solidFill>
+                        <a:srgbClr val="D5DCE6"/>
+                      </a:solidFill>
+                      <a:prstDash val="solid"/>
+                      <a:round/>
+                      <a:headEnd type="none" w="med" len="med"/>
+                      <a:tailEnd type="none" w="med" len="med"/>
+                    </a:lnT>
+                    <a:lnB w="9525" cap="flat" cmpd="sng" algn="ctr">
+                      <a:solidFill>
+                        <a:srgbClr val="D5DCE6"/>
+                      </a:solidFill>
+                      <a:prstDash val="solid"/>
+                      <a:round/>
+                      <a:headEnd type="none" w="med" len="med"/>
+                      <a:tailEnd type="none" w="med" len="med"/>
+                    </a:lnB>
+                    <a:solidFill>
+                      <a:srgbClr val="FFFFFF"/>
+                    </a:solidFill>
+                  </a:tcPr>
+                </a:tc>
+                <a:tc>
+                  <a:txBody>
+                    <a:bodyPr/>
+                    <a:lstStyle/>
+                    <a:p>
+                      <a:pPr marL="0" indent="0">
+                        <a:buNone/>
+                      </a:pPr>
+                      <a:r>
+                        <a:rPr lang="en-US" sz="1400" dirty="0">
+                          <a:solidFill>
+                            <a:srgbClr val="3D4451"/>
+                          </a:solidFill>
+                        </a:rPr>
+                        <a:t>3.57 M</a:t>
+                      </a:r>
+                      <a:endParaRPr lang="en-US" sz="1400" dirty="0"/>
+                    </a:p>
+                  </a:txBody>
+                  <a:tcPr marL="109728" marR="109728" marT="0" marB="0" anchor="ctr">
+                    <a:lnL w="9525" cap="flat" cmpd="sng" algn="ctr">
+                      <a:solidFill>
+                        <a:srgbClr val="D5DCE6"/>
+                      </a:solidFill>
+                      <a:prstDash val="solid"/>
+                      <a:round/>
+                      <a:headEnd type="none" w="med" len="med"/>
+                      <a:tailEnd type="none" w="med" len="med"/>
+                    </a:lnL>
+                    <a:lnR w="9525" cap="flat" cmpd="sng" algn="ctr">
+                      <a:solidFill>
+                        <a:srgbClr val="D5DCE6"/>
+                      </a:solidFill>
+                      <a:prstDash val="solid"/>
+                      <a:round/>
+                      <a:headEnd type="none" w="med" len="med"/>
+                      <a:tailEnd type="none" w="med" len="med"/>
+                    </a:lnR>
+                    <a:lnT w="9525" cap="flat" cmpd="sng" algn="ctr">
+                      <a:solidFill>
+                        <a:srgbClr val="D5DCE6"/>
+                      </a:solidFill>
+                      <a:prstDash val="solid"/>
+                      <a:round/>
+                      <a:headEnd type="none" w="med" len="med"/>
+                      <a:tailEnd type="none" w="med" len="med"/>
+                    </a:lnT>
+                    <a:lnB w="9525" cap="flat" cmpd="sng" algn="ctr">
+                      <a:solidFill>
+                        <a:srgbClr val="D5DCE6"/>
+                      </a:solidFill>
+                      <a:prstDash val="solid"/>
+                      <a:round/>
+                      <a:headEnd type="none" w="med" len="med"/>
+                      <a:tailEnd type="none" w="med" len="med"/>
+                    </a:lnB>
+                    <a:solidFill>
+                      <a:srgbClr val="FFFFFF"/>
+                    </a:solidFill>
+                  </a:tcPr>
+                </a:tc>
+                <a:tc>
+                  <a:txBody>
+                    <a:bodyPr/>
+                    <a:lstStyle/>
+                    <a:p>
+                      <a:pPr marL="0" indent="0">
+                        <a:buNone/>
+                      </a:pPr>
+                      <a:r>
+                        <a:rPr lang="en-US" sz="1400" dirty="0">
+                          <a:solidFill>
+                            <a:srgbClr val="3D4451"/>
+                          </a:solidFill>
+                        </a:rPr>
+                        <a:t>1.74 M</a:t>
+                      </a:r>
+                      <a:endParaRPr lang="en-US" sz="1400" dirty="0"/>
+                    </a:p>
+                  </a:txBody>
+                  <a:tcPr marL="109728" marR="109728" marT="0" marB="0" anchor="ctr">
+                    <a:lnL w="9525" cap="flat" cmpd="sng" algn="ctr">
+                      <a:solidFill>
+                        <a:srgbClr val="D5DCE6"/>
+                      </a:solidFill>
+                      <a:prstDash val="solid"/>
+                      <a:round/>
+                      <a:headEnd type="none" w="med" len="med"/>
+                      <a:tailEnd type="none" w="med" len="med"/>
+                    </a:lnL>
+                    <a:lnR w="9525" cap="flat" cmpd="sng" algn="ctr">
+                      <a:solidFill>
+                        <a:srgbClr val="D5DCE6"/>
+                      </a:solidFill>
+                      <a:prstDash val="solid"/>
+                      <a:round/>
+                      <a:headEnd type="none" w="med" len="med"/>
+                      <a:tailEnd type="none" w="med" len="med"/>
+                    </a:lnR>
+                    <a:lnT w="9525" cap="flat" cmpd="sng" algn="ctr">
+                      <a:solidFill>
+                        <a:srgbClr val="D5DCE6"/>
+                      </a:solidFill>
+                      <a:prstDash val="solid"/>
+                      <a:round/>
+                      <a:headEnd type="none" w="med" len="med"/>
+                      <a:tailEnd type="none" w="med" len="med"/>
+                    </a:lnT>
+                    <a:lnB w="9525" cap="flat" cmpd="sng" algn="ctr">
+                      <a:solidFill>
+                        <a:srgbClr val="D5DCE6"/>
+                      </a:solidFill>
+                      <a:prstDash val="solid"/>
+                      <a:round/>
+                      <a:headEnd type="none" w="med" len="med"/>
+                      <a:tailEnd type="none" w="med" len="med"/>
+                    </a:lnB>
+                    <a:solidFill>
+                      <a:srgbClr val="FFFFFF"/>
+                    </a:solidFill>
+                  </a:tcPr>
+                </a:tc>
+                <a:extLst>
+                  <a:ext uri="{0D108BD9-81ED-4DB2-BD59-A6C34878D82A}">
+                    <a16:rowId xmlns:a16="http://schemas.microsoft.com/office/drawing/2014/main" val="10003"/>
+                  </a:ext>
+                </a:extLst>
+              </a:tr>
+              <a:tr h="438912">
+                <a:tc>
+                  <a:txBody>
+                    <a:bodyPr/>
+                    <a:lstStyle/>
+                    <a:p>
+                      <a:pPr marL="0" indent="0">
+                        <a:buNone/>
+                      </a:pPr>
+                      <a:r>
+                        <a:rPr lang="en-US" sz="1400" dirty="0">
+                          <a:solidFill>
+                            <a:srgbClr val="3D4451"/>
+                          </a:solidFill>
+                        </a:rPr>
+                        <a:t>Mean accuracy while learning (S1 → S4)</a:t>
+                      </a:r>
+                      <a:endParaRPr lang="en-US" sz="1400" dirty="0"/>
+                    </a:p>
+                  </a:txBody>
+                  <a:tcPr marL="109728" marR="109728" marT="0" marB="0" anchor="ctr">
+                    <a:lnL w="9525" cap="flat" cmpd="sng" algn="ctr">
+                      <a:solidFill>
+                        <a:srgbClr val="D5DCE6"/>
+                      </a:solidFill>
+                      <a:prstDash val="solid"/>
+                      <a:round/>
+                      <a:headEnd type="none" w="med" len="med"/>
+                      <a:tailEnd type="none" w="med" len="med"/>
+                    </a:lnL>
+                    <a:lnR w="9525" cap="flat" cmpd="sng" algn="ctr">
+                      <a:solidFill>
+                        <a:srgbClr val="D5DCE6"/>
+                      </a:solidFill>
+                      <a:prstDash val="solid"/>
+                      <a:round/>
+                      <a:headEnd type="none" w="med" len="med"/>
+                      <a:tailEnd type="none" w="med" len="med"/>
+                    </a:lnR>
+                    <a:lnT w="9525" cap="flat" cmpd="sng" algn="ctr">
+                      <a:solidFill>
+                        <a:srgbClr val="D5DCE6"/>
+                      </a:solidFill>
+                      <a:prstDash val="solid"/>
+                      <a:round/>
+                      <a:headEnd type="none" w="med" len="med"/>
+                      <a:tailEnd type="none" w="med" len="med"/>
+                    </a:lnT>
+                    <a:lnB w="9525" cap="flat" cmpd="sng" algn="ctr">
+                      <a:solidFill>
+                        <a:srgbClr val="D5DCE6"/>
+                      </a:solidFill>
+                      <a:prstDash val="solid"/>
+                      <a:round/>
+                      <a:headEnd type="none" w="med" len="med"/>
+                      <a:tailEnd type="none" w="med" len="med"/>
+                    </a:lnB>
+                    <a:solidFill>
+                      <a:srgbClr val="FFFFFF"/>
+                    </a:solidFill>
+                  </a:tcPr>
+                </a:tc>
+                <a:tc>
+                  <a:txBody>
+                    <a:bodyPr/>
+                    <a:lstStyle/>
+                    <a:p>
+                      <a:pPr marL="0" indent="0">
+                        <a:buNone/>
+                      </a:pPr>
+                      <a:r>
+                        <a:rPr lang="en-US" sz="1400" dirty="0">
+                          <a:solidFill>
+                            <a:srgbClr val="3D4451"/>
+                          </a:solidFill>
+                        </a:rPr>
+                        <a:t>0.99 / 0.99 / 0.95 / 0.94</a:t>
+                      </a:r>
+                      <a:endParaRPr lang="en-US" sz="1400" dirty="0"/>
+                    </a:p>
+                  </a:txBody>
+                  <a:tcPr marL="109728" marR="109728" marT="0" marB="0" anchor="ctr">
+                    <a:lnL w="9525" cap="flat" cmpd="sng" algn="ctr">
+                      <a:solidFill>
+                        <a:srgbClr val="D5DCE6"/>
+                      </a:solidFill>
+                      <a:prstDash val="solid"/>
+                      <a:round/>
+                      <a:headEnd type="none" w="med" len="med"/>
+                      <a:tailEnd type="none" w="med" len="med"/>
+                    </a:lnL>
+                    <a:lnR w="9525" cap="flat" cmpd="sng" algn="ctr">
+                      <a:solidFill>
+                        <a:srgbClr val="D5DCE6"/>
+                      </a:solidFill>
+                      <a:prstDash val="solid"/>
+                      <a:round/>
+                      <a:headEnd type="none" w="med" len="med"/>
+                      <a:tailEnd type="none" w="med" len="med"/>
+                    </a:lnR>
+                    <a:lnT w="9525" cap="flat" cmpd="sng" algn="ctr">
+                      <a:solidFill>
+                        <a:srgbClr val="D5DCE6"/>
+                      </a:solidFill>
+                      <a:prstDash val="solid"/>
+                      <a:round/>
+                      <a:headEnd type="none" w="med" len="med"/>
+                      <a:tailEnd type="none" w="med" len="med"/>
+                    </a:lnT>
+                    <a:lnB w="9525" cap="flat" cmpd="sng" algn="ctr">
+                      <a:solidFill>
+                        <a:srgbClr val="D5DCE6"/>
+                      </a:solidFill>
+                      <a:prstDash val="solid"/>
+                      <a:round/>
+                      <a:headEnd type="none" w="med" len="med"/>
+                      <a:tailEnd type="none" w="med" len="med"/>
+                    </a:lnB>
+                    <a:solidFill>
+                      <a:srgbClr val="FFFFFF"/>
+                    </a:solidFill>
+                  </a:tcPr>
+                </a:tc>
+                <a:tc>
+                  <a:txBody>
+                    <a:bodyPr/>
+                    <a:lstStyle/>
+                    <a:p>
+                      <a:pPr marL="0" indent="0">
+                        <a:buNone/>
+                      </a:pPr>
+                      <a:r>
+                        <a:rPr lang="en-US" sz="1400" dirty="0">
+                          <a:solidFill>
+                            <a:srgbClr val="3D4451"/>
+                          </a:solidFill>
+                        </a:rPr>
+                        <a:t>0.77 / 0.77 / 0.60 / 0.48</a:t>
+                      </a:r>
+                      <a:endParaRPr lang="en-US" sz="1400" dirty="0"/>
+                    </a:p>
+                  </a:txBody>
+                  <a:tcPr marL="109728" marR="109728" marT="0" marB="0" anchor="ctr">
+                    <a:lnL w="9525" cap="flat" cmpd="sng" algn="ctr">
+                      <a:solidFill>
+                        <a:srgbClr val="D5DCE6"/>
+                      </a:solidFill>
+                      <a:prstDash val="solid"/>
+                      <a:round/>
+                      <a:headEnd type="none" w="med" len="med"/>
+                      <a:tailEnd type="none" w="med" len="med"/>
+                    </a:lnL>
+                    <a:lnR w="9525" cap="flat" cmpd="sng" algn="ctr">
+                      <a:solidFill>
+                        <a:srgbClr val="D5DCE6"/>
+                      </a:solidFill>
+                      <a:prstDash val="solid"/>
+                      <a:round/>
+                      <a:headEnd type="none" w="med" len="med"/>
+                      <a:tailEnd type="none" w="med" len="med"/>
+                    </a:lnR>
+                    <a:lnT w="9525" cap="flat" cmpd="sng" algn="ctr">
+                      <a:solidFill>
+                        <a:srgbClr val="D5DCE6"/>
+                      </a:solidFill>
+                      <a:prstDash val="solid"/>
+                      <a:round/>
+                      <a:headEnd type="none" w="med" len="med"/>
+                      <a:tailEnd type="none" w="med" len="med"/>
+                    </a:lnT>
+                    <a:lnB w="9525" cap="flat" cmpd="sng" algn="ctr">
+                      <a:solidFill>
+                        <a:srgbClr val="D5DCE6"/>
+                      </a:solidFill>
+                      <a:prstDash val="solid"/>
+                      <a:round/>
+                      <a:headEnd type="none" w="med" len="med"/>
+                      <a:tailEnd type="none" w="med" len="med"/>
+                    </a:lnB>
+                    <a:solidFill>
+                      <a:srgbClr val="FFFFFF"/>
+                    </a:solidFill>
+                  </a:tcPr>
+                </a:tc>
+                <a:tc>
+                  <a:txBody>
+                    <a:bodyPr/>
+                    <a:lstStyle/>
+                    <a:p>
+                      <a:pPr marL="0" indent="0">
+                        <a:buNone/>
+                      </a:pPr>
+                      <a:r>
+                        <a:rPr lang="en-US" sz="1400" dirty="0">
+                          <a:solidFill>
+                            <a:srgbClr val="3D4451"/>
+                          </a:solidFill>
+                        </a:rPr>
+                        <a:t>0.95 / 0.91 / 0.89 / 0.80</a:t>
+                      </a:r>
+                      <a:endParaRPr lang="en-US" sz="1400" dirty="0"/>
+                    </a:p>
+                  </a:txBody>
+                  <a:tcPr marL="109728" marR="109728" marT="0" marB="0" anchor="ctr">
+                    <a:lnL w="9525" cap="flat" cmpd="sng" algn="ctr">
+                      <a:solidFill>
+                        <a:srgbClr val="D5DCE6"/>
+                      </a:solidFill>
+                      <a:prstDash val="solid"/>
+                      <a:round/>
+                      <a:headEnd type="none" w="med" len="med"/>
+                      <a:tailEnd type="none" w="med" len="med"/>
+                    </a:lnL>
+                    <a:lnR w="9525" cap="flat" cmpd="sng" algn="ctr">
+                      <a:solidFill>
+                        <a:srgbClr val="D5DCE6"/>
+                      </a:solidFill>
+                      <a:prstDash val="solid"/>
+                      <a:round/>
+                      <a:headEnd type="none" w="med" len="med"/>
+                      <a:tailEnd type="none" w="med" len="med"/>
+                    </a:lnR>
+                    <a:lnT w="9525" cap="flat" cmpd="sng" algn="ctr">
+                      <a:solidFill>
+                        <a:srgbClr val="D5DCE6"/>
+                      </a:solidFill>
+                      <a:prstDash val="solid"/>
+                      <a:round/>
+                      <a:headEnd type="none" w="med" len="med"/>
+                      <a:tailEnd type="none" w="med" len="med"/>
+                    </a:lnT>
+                    <a:lnB w="9525" cap="flat" cmpd="sng" algn="ctr">
+                      <a:solidFill>
+                        <a:srgbClr val="D5DCE6"/>
+                      </a:solidFill>
+                      <a:prstDash val="solid"/>
+                      <a:round/>
+                      <a:headEnd type="none" w="med" len="med"/>
+                      <a:tailEnd type="none" w="med" len="med"/>
+                    </a:lnB>
+                    <a:solidFill>
+                      <a:srgbClr val="FFFFFF"/>
+                    </a:solidFill>
+                  </a:tcPr>
+                </a:tc>
+                <a:extLst>
+                  <a:ext uri="{0D108BD9-81ED-4DB2-BD59-A6C34878D82A}">
+                    <a16:rowId xmlns:a16="http://schemas.microsoft.com/office/drawing/2014/main" val="10004"/>
+                  </a:ext>
+                </a:extLst>
+              </a:tr>
+              <a:tr h="438912">
+                <a:tc>
+                  <a:txBody>
+                    <a:bodyPr/>
+                    <a:lstStyle/>
+                    <a:p>
+                      <a:pPr marL="0" indent="0">
+                        <a:buNone/>
+                      </a:pPr>
+                      <a:r>
+                        <a:rPr lang="en-US" sz="1400" dirty="0">
+                          <a:solidFill>
+                            <a:srgbClr val="3D4451"/>
+                          </a:solidFill>
+                        </a:rPr>
+                        <a:t>Drops below 100% after reaching it</a:t>
+                      </a:r>
+                      <a:endParaRPr lang="en-US" sz="1400" dirty="0"/>
+                    </a:p>
+                  </a:txBody>
+                  <a:tcPr marL="109728" marR="109728" marT="0" marB="0" anchor="ctr">
+                    <a:lnL w="9525" cap="flat" cmpd="sng" algn="ctr">
+                      <a:solidFill>
+                        <a:srgbClr val="D5DCE6"/>
+                      </a:solidFill>
+                      <a:prstDash val="solid"/>
+                      <a:round/>
+                      <a:headEnd type="none" w="med" len="med"/>
+                      <a:tailEnd type="none" w="med" len="med"/>
+                    </a:lnL>
+                    <a:lnR w="9525" cap="flat" cmpd="sng" algn="ctr">
+                      <a:solidFill>
+                        <a:srgbClr val="D5DCE6"/>
+                      </a:solidFill>
+                      <a:prstDash val="solid"/>
+                      <a:round/>
+                      <a:headEnd type="none" w="med" len="med"/>
+                      <a:tailEnd type="none" w="med" len="med"/>
+                    </a:lnR>
+                    <a:lnT w="9525" cap="flat" cmpd="sng" algn="ctr">
+                      <a:solidFill>
+                        <a:srgbClr val="D5DCE6"/>
+                      </a:solidFill>
+                      <a:prstDash val="solid"/>
+                      <a:round/>
+                      <a:headEnd type="none" w="med" len="med"/>
+                      <a:tailEnd type="none" w="med" len="med"/>
+                    </a:lnT>
+                    <a:lnB w="9525" cap="flat" cmpd="sng" algn="ctr">
+                      <a:solidFill>
+                        <a:srgbClr val="D5DCE6"/>
+                      </a:solidFill>
+                      <a:prstDash val="solid"/>
+                      <a:round/>
+                      <a:headEnd type="none" w="med" len="med"/>
+                      <a:tailEnd type="none" w="med" len="med"/>
+                    </a:lnB>
+                    <a:solidFill>
+                      <a:srgbClr val="FFFFFF"/>
+                    </a:solidFill>
+                  </a:tcPr>
+                </a:tc>
+                <a:tc>
+                  <a:txBody>
+                    <a:bodyPr/>
+                    <a:lstStyle/>
+                    <a:p>
+                      <a:pPr marL="0" indent="0">
+                        <a:buNone/>
+                      </a:pPr>
+                      <a:r>
+                        <a:rPr lang="en-US" sz="1400" dirty="0">
+                          <a:solidFill>
+                            <a:srgbClr val="3D4451"/>
+                          </a:solidFill>
+                        </a:rPr>
+                        <a:t>never</a:t>
+                      </a:r>
+                      <a:endParaRPr lang="en-US" sz="1400" dirty="0"/>
+                    </a:p>
+                  </a:txBody>
+                  <a:tcPr marL="109728" marR="109728" marT="0" marB="0" anchor="ctr">
+                    <a:lnL w="9525" cap="flat" cmpd="sng" algn="ctr">
+                      <a:solidFill>
+                        <a:srgbClr val="D5DCE6"/>
+                      </a:solidFill>
+                      <a:prstDash val="solid"/>
+                      <a:round/>
+                      <a:headEnd type="none" w="med" len="med"/>
+                      <a:tailEnd type="none" w="med" len="med"/>
+                    </a:lnL>
+                    <a:lnR w="9525" cap="flat" cmpd="sng" algn="ctr">
+                      <a:solidFill>
+                        <a:srgbClr val="D5DCE6"/>
+                      </a:solidFill>
+                      <a:prstDash val="solid"/>
+                      <a:round/>
+                      <a:headEnd type="none" w="med" len="med"/>
+                      <a:tailEnd type="none" w="med" len="med"/>
+                    </a:lnR>
+                    <a:lnT w="9525" cap="flat" cmpd="sng" algn="ctr">
+                      <a:solidFill>
+                        <a:srgbClr val="D5DCE6"/>
+                      </a:solidFill>
+                      <a:prstDash val="solid"/>
+                      <a:round/>
+                      <a:headEnd type="none" w="med" len="med"/>
+                      <a:tailEnd type="none" w="med" len="med"/>
+                    </a:lnT>
+                    <a:lnB w="9525" cap="flat" cmpd="sng" algn="ctr">
+                      <a:solidFill>
+                        <a:srgbClr val="D5DCE6"/>
+                      </a:solidFill>
+                      <a:prstDash val="solid"/>
+                      <a:round/>
+                      <a:headEnd type="none" w="med" len="med"/>
+                      <a:tailEnd type="none" w="med" len="med"/>
+                    </a:lnB>
+                    <a:solidFill>
+                      <a:srgbClr val="FFFFFF"/>
+                    </a:solidFill>
+                  </a:tcPr>
+                </a:tc>
+                <a:tc>
+                  <a:txBody>
+                    <a:bodyPr/>
+                    <a:lstStyle/>
+                    <a:p>
+                      <a:pPr marL="0" indent="0">
+                        <a:buNone/>
+                      </a:pPr>
+                      <a:r>
+                        <a:rPr lang="en-US" sz="1400" dirty="0">
+                          <a:solidFill>
+                            <a:srgbClr val="3D4451"/>
+                          </a:solidFill>
+                        </a:rPr>
+                        <a:t>9–19% of checks</a:t>
+                      </a:r>
+                      <a:endParaRPr lang="en-US" sz="1400" dirty="0"/>
+                    </a:p>
+                  </a:txBody>
+                  <a:tcPr marL="109728" marR="109728" marT="0" marB="0" anchor="ctr">
+                    <a:lnL w="9525" cap="flat" cmpd="sng" algn="ctr">
+                      <a:solidFill>
+                        <a:srgbClr val="D5DCE6"/>
+                      </a:solidFill>
+                      <a:prstDash val="solid"/>
+                      <a:round/>
+                      <a:headEnd type="none" w="med" len="med"/>
+                      <a:tailEnd type="none" w="med" len="med"/>
+                    </a:lnL>
+                    <a:lnR w="9525" cap="flat" cmpd="sng" algn="ctr">
+                      <a:solidFill>
+                        <a:srgbClr val="D5DCE6"/>
+                      </a:solidFill>
+                      <a:prstDash val="solid"/>
+                      <a:round/>
+                      <a:headEnd type="none" w="med" len="med"/>
+                      <a:tailEnd type="none" w="med" len="med"/>
+                    </a:lnR>
+                    <a:lnT w="9525" cap="flat" cmpd="sng" algn="ctr">
+                      <a:solidFill>
+                        <a:srgbClr val="D5DCE6"/>
+                      </a:solidFill>
+                      <a:prstDash val="solid"/>
+                      <a:round/>
+                      <a:headEnd type="none" w="med" len="med"/>
+                      <a:tailEnd type="none" w="med" len="med"/>
+                    </a:lnT>
+                    <a:lnB w="9525" cap="flat" cmpd="sng" algn="ctr">
+                      <a:solidFill>
+                        <a:srgbClr val="D5DCE6"/>
+                      </a:solidFill>
+                      <a:prstDash val="solid"/>
+                      <a:round/>
+                      <a:headEnd type="none" w="med" len="med"/>
+                      <a:tailEnd type="none" w="med" len="med"/>
+                    </a:lnB>
+                    <a:solidFill>
+                      <a:srgbClr val="FFFFFF"/>
+                    </a:solidFill>
+                  </a:tcPr>
+                </a:tc>
+                <a:tc>
+                  <a:txBody>
+                    <a:bodyPr/>
+                    <a:lstStyle/>
+                    <a:p>
+                      <a:pPr marL="0" indent="0">
+                        <a:buNone/>
+                      </a:pPr>
+                      <a:r>
+                        <a:rPr lang="en-US" sz="1400" dirty="0">
+                          <a:solidFill>
+                            <a:srgbClr val="3D4451"/>
+                          </a:solidFill>
+                        </a:rPr>
+                        <a:t>never</a:t>
+                      </a:r>
+                      <a:endParaRPr lang="en-US" sz="1400" dirty="0"/>
+                    </a:p>
+                  </a:txBody>
+                  <a:tcPr marL="109728" marR="109728" marT="0" marB="0" anchor="ctr">
+                    <a:lnL w="9525" cap="flat" cmpd="sng" algn="ctr">
+                      <a:solidFill>
+                        <a:srgbClr val="D5DCE6"/>
+                      </a:solidFill>
+                      <a:prstDash val="solid"/>
+                      <a:round/>
+                      <a:headEnd type="none" w="med" len="med"/>
+                      <a:tailEnd type="none" w="med" len="med"/>
+                    </a:lnL>
+                    <a:lnR w="9525" cap="flat" cmpd="sng" algn="ctr">
+                      <a:solidFill>
+                        <a:srgbClr val="D5DCE6"/>
+                      </a:solidFill>
+                      <a:prstDash val="solid"/>
+                      <a:round/>
+                      <a:headEnd type="none" w="med" len="med"/>
+                      <a:tailEnd type="none" w="med" len="med"/>
+                    </a:lnR>
+                    <a:lnT w="9525" cap="flat" cmpd="sng" algn="ctr">
+                      <a:solidFill>
+                        <a:srgbClr val="D5DCE6"/>
+                      </a:solidFill>
+                      <a:prstDash val="solid"/>
+                      <a:round/>
+                      <a:headEnd type="none" w="med" len="med"/>
+                      <a:tailEnd type="none" w="med" len="med"/>
+                    </a:lnT>
+                    <a:lnB w="9525" cap="flat" cmpd="sng" algn="ctr">
+                      <a:solidFill>
+                        <a:srgbClr val="D5DCE6"/>
+                      </a:solidFill>
+                      <a:prstDash val="solid"/>
+                      <a:round/>
+                      <a:headEnd type="none" w="med" len="med"/>
+                      <a:tailEnd type="none" w="med" len="med"/>
+                    </a:lnB>
+                    <a:solidFill>
+                      <a:srgbClr val="FFFFFF"/>
+                    </a:solidFill>
+                  </a:tcPr>
+                </a:tc>
+                <a:extLst>
+                  <a:ext uri="{0D108BD9-81ED-4DB2-BD59-A6C34878D82A}">
+                    <a16:rowId xmlns:a16="http://schemas.microsoft.com/office/drawing/2014/main" val="10005"/>
+                  </a:ext>
+                </a:extLst>
+              </a:tr>
+              <a:tr h="438912">
+                <a:tc>
+                  <a:txBody>
+                    <a:bodyPr/>
+                    <a:lstStyle/>
+                    <a:p>
+                      <a:pPr marL="0" indent="0">
+                        <a:buNone/>
+                      </a:pPr>
+                      <a:r>
+                        <a:rPr lang="en-US" sz="1400" dirty="0">
+                          <a:solidFill>
+                            <a:srgbClr val="3D4451"/>
+                          </a:solidFill>
+                        </a:rPr>
+                        <a:t>Final mean |Q − Q*|</a:t>
+                      </a:r>
+                      <a:endParaRPr lang="en-US" sz="1400" dirty="0"/>
+                    </a:p>
+                  </a:txBody>
+                  <a:tcPr marL="109728" marR="109728" marT="0" marB="0" anchor="ctr">
+                    <a:lnL w="9525" cap="flat" cmpd="sng" algn="ctr">
+                      <a:solidFill>
+                        <a:srgbClr val="D5DCE6"/>
+                      </a:solidFill>
+                      <a:prstDash val="solid"/>
+                      <a:round/>
+                      <a:headEnd type="none" w="med" len="med"/>
+                      <a:tailEnd type="none" w="med" len="med"/>
+                    </a:lnL>
+                    <a:lnR w="9525" cap="flat" cmpd="sng" algn="ctr">
+                      <a:solidFill>
+                        <a:srgbClr val="D5DCE6"/>
+                      </a:solidFill>
+                      <a:prstDash val="solid"/>
+                      <a:round/>
+                      <a:headEnd type="none" w="med" len="med"/>
+                      <a:tailEnd type="none" w="med" len="med"/>
+                    </a:lnR>
+                    <a:lnT w="9525" cap="flat" cmpd="sng" algn="ctr">
+                      <a:solidFill>
+                        <a:srgbClr val="D5DCE6"/>
+                      </a:solidFill>
+                      <a:prstDash val="solid"/>
+                      <a:round/>
+                      <a:headEnd type="none" w="med" len="med"/>
+                      <a:tailEnd type="none" w="med" len="med"/>
+                    </a:lnT>
+                    <a:lnB w="9525" cap="flat" cmpd="sng" algn="ctr">
+                      <a:solidFill>
+                        <a:srgbClr val="D5DCE6"/>
+                      </a:solidFill>
+                      <a:prstDash val="solid"/>
+                      <a:round/>
+                      <a:headEnd type="none" w="med" len="med"/>
+                      <a:tailEnd type="none" w="med" len="med"/>
+                    </a:lnB>
+                    <a:solidFill>
+                      <a:srgbClr val="FFFFFF"/>
+                    </a:solidFill>
+                  </a:tcPr>
+                </a:tc>
+                <a:tc>
+                  <a:txBody>
+                    <a:bodyPr/>
+                    <a:lstStyle/>
+                    <a:p>
+                      <a:pPr marL="0" indent="0">
+                        <a:buNone/>
+                      </a:pPr>
+                      <a:r>
+                        <a:rPr lang="en-US" sz="1400" dirty="0">
+                          <a:solidFill>
+                            <a:srgbClr val="3D4451"/>
+                          </a:solidFill>
+                        </a:rPr>
+                        <a:t>0</a:t>
+                      </a:r>
+                      <a:endParaRPr lang="en-US" sz="1400" dirty="0"/>
+                    </a:p>
+                  </a:txBody>
+                  <a:tcPr marL="109728" marR="109728" marT="0" marB="0" anchor="ctr">
+                    <a:lnL w="9525" cap="flat" cmpd="sng" algn="ctr">
+                      <a:solidFill>
+                        <a:srgbClr val="D5DCE6"/>
+                      </a:solidFill>
+                      <a:prstDash val="solid"/>
+                      <a:round/>
+                      <a:headEnd type="none" w="med" len="med"/>
+                      <a:tailEnd type="none" w="med" len="med"/>
+                    </a:lnL>
+                    <a:lnR w="9525" cap="flat" cmpd="sng" algn="ctr">
+                      <a:solidFill>
+                        <a:srgbClr val="D5DCE6"/>
+                      </a:solidFill>
+                      <a:prstDash val="solid"/>
+                      <a:round/>
+                      <a:headEnd type="none" w="med" len="med"/>
+                      <a:tailEnd type="none" w="med" len="med"/>
+                    </a:lnR>
+                    <a:lnT w="9525" cap="flat" cmpd="sng" algn="ctr">
+                      <a:solidFill>
+                        <a:srgbClr val="D5DCE6"/>
+                      </a:solidFill>
+                      <a:prstDash val="solid"/>
+                      <a:round/>
+                      <a:headEnd type="none" w="med" len="med"/>
+                      <a:tailEnd type="none" w="med" len="med"/>
+                    </a:lnT>
+                    <a:lnB w="9525" cap="flat" cmpd="sng" algn="ctr">
+                      <a:solidFill>
+                        <a:srgbClr val="D5DCE6"/>
+                      </a:solidFill>
+                      <a:prstDash val="solid"/>
+                      <a:round/>
+                      <a:headEnd type="none" w="med" len="med"/>
+                      <a:tailEnd type="none" w="med" len="med"/>
+                    </a:lnB>
+                    <a:solidFill>
+                      <a:srgbClr val="FFFFFF"/>
+                    </a:solidFill>
+                  </a:tcPr>
+                </a:tc>
+                <a:tc>
+                  <a:txBody>
+                    <a:bodyPr/>
+                    <a:lstStyle/>
+                    <a:p>
+                      <a:pPr marL="0" indent="0">
+                        <a:buNone/>
+                      </a:pPr>
+                      <a:r>
+                        <a:rPr lang="en-US" sz="1400" dirty="0">
+                          <a:solidFill>
+                            <a:srgbClr val="3D4451"/>
+                          </a:solidFill>
+                        </a:rPr>
+                        <a:t>0.001 – 0.047</a:t>
+                      </a:r>
+                      <a:endParaRPr lang="en-US" sz="1400" dirty="0"/>
+                    </a:p>
+                  </a:txBody>
+                  <a:tcPr marL="109728" marR="109728" marT="0" marB="0" anchor="ctr">
+                    <a:lnL w="9525" cap="flat" cmpd="sng" algn="ctr">
+                      <a:solidFill>
+                        <a:srgbClr val="D5DCE6"/>
+                      </a:solidFill>
+                      <a:prstDash val="solid"/>
+                      <a:round/>
+                      <a:headEnd type="none" w="med" len="med"/>
+                      <a:tailEnd type="none" w="med" len="med"/>
+                    </a:lnL>
+                    <a:lnR w="9525" cap="flat" cmpd="sng" algn="ctr">
+                      <a:solidFill>
+                        <a:srgbClr val="D5DCE6"/>
+                      </a:solidFill>
+                      <a:prstDash val="solid"/>
+                      <a:round/>
+                      <a:headEnd type="none" w="med" len="med"/>
+                      <a:tailEnd type="none" w="med" len="med"/>
+                    </a:lnR>
+                    <a:lnT w="9525" cap="flat" cmpd="sng" algn="ctr">
+                      <a:solidFill>
+                        <a:srgbClr val="D5DCE6"/>
+                      </a:solidFill>
+                      <a:prstDash val="solid"/>
+                      <a:round/>
+                      <a:headEnd type="none" w="med" len="med"/>
+                      <a:tailEnd type="none" w="med" len="med"/>
+                    </a:lnT>
+                    <a:lnB w="9525" cap="flat" cmpd="sng" algn="ctr">
+                      <a:solidFill>
+                        <a:srgbClr val="D5DCE6"/>
+                      </a:solidFill>
+                      <a:prstDash val="solid"/>
+                      <a:round/>
+                      <a:headEnd type="none" w="med" len="med"/>
+                      <a:tailEnd type="none" w="med" len="med"/>
+                    </a:lnB>
+                    <a:solidFill>
+                      <a:srgbClr val="FFFFFF"/>
+                    </a:solidFill>
+                  </a:tcPr>
+                </a:tc>
+                <a:tc>
+                  <a:txBody>
+                    <a:bodyPr/>
+                    <a:lstStyle/>
+                    <a:p>
+                      <a:pPr marL="0" indent="0">
+                        <a:buNone/>
+                      </a:pPr>
+                      <a:r>
+                        <a:rPr lang="en-US" sz="1400" dirty="0">
+                          <a:solidFill>
+                            <a:srgbClr val="3D4451"/>
+                          </a:solidFill>
+                        </a:rPr>
+                        <a:t>0</a:t>
+                      </a:r>
+                      <a:endParaRPr lang="en-US" sz="1400" dirty="0"/>
+                    </a:p>
+                  </a:txBody>
+                  <a:tcPr marL="109728" marR="109728" marT="0" marB="0" anchor="ctr">
+                    <a:lnL w="9525" cap="flat" cmpd="sng" algn="ctr">
+                      <a:solidFill>
+                        <a:srgbClr val="D5DCE6"/>
+                      </a:solidFill>
+                      <a:prstDash val="solid"/>
+                      <a:round/>
+                      <a:headEnd type="none" w="med" len="med"/>
+                      <a:tailEnd type="none" w="med" len="med"/>
+                    </a:lnL>
+                    <a:lnR w="9525" cap="flat" cmpd="sng" algn="ctr">
+                      <a:solidFill>
+                        <a:srgbClr val="D5DCE6"/>
+                      </a:solidFill>
+                      <a:prstDash val="solid"/>
+                      <a:round/>
+                      <a:headEnd type="none" w="med" len="med"/>
+                      <a:tailEnd type="none" w="med" len="med"/>
+                    </a:lnR>
+                    <a:lnT w="9525" cap="flat" cmpd="sng" algn="ctr">
+                      <a:solidFill>
+                        <a:srgbClr val="D5DCE6"/>
+                      </a:solidFill>
+                      <a:prstDash val="solid"/>
+                      <a:round/>
+                      <a:headEnd type="none" w="med" len="med"/>
+                      <a:tailEnd type="none" w="med" len="med"/>
+                    </a:lnT>
+                    <a:lnB w="9525" cap="flat" cmpd="sng" algn="ctr">
+                      <a:solidFill>
+                        <a:srgbClr val="D5DCE6"/>
+                      </a:solidFill>
+                      <a:prstDash val="solid"/>
+                      <a:round/>
+                      <a:headEnd type="none" w="med" len="med"/>
+                      <a:tailEnd type="none" w="med" len="med"/>
+                    </a:lnB>
+                    <a:solidFill>
+                      <a:srgbClr val="FFFFFF"/>
+                    </a:solidFill>
+                  </a:tcPr>
+                </a:tc>
+                <a:extLst>
+                  <a:ext uri="{0D108BD9-81ED-4DB2-BD59-A6C34878D82A}">
+                    <a16:rowId xmlns:a16="http://schemas.microsoft.com/office/drawing/2014/main" val="10006"/>
+                  </a:ext>
+                </a:extLst>
+              </a:tr>
+              <a:tr h="438912">
+                <a:tc>
+                  <a:txBody>
+                    <a:bodyPr/>
+                    <a:lstStyle/>
+                    <a:p>
+                      <a:pPr marL="0" indent="0">
+                        <a:buNone/>
+                      </a:pPr>
+                      <a:r>
+                        <a:rPr lang="en-US" sz="1400" dirty="0">
+                          <a:solidFill>
+                            <a:srgbClr val="3D4451"/>
+                          </a:solidFill>
+                        </a:rPr>
+                        <a:t>Old settings (S1 → S4)</a:t>
+                      </a:r>
+                      <a:endParaRPr lang="en-US" sz="1400" dirty="0"/>
+                    </a:p>
+                  </a:txBody>
+                  <a:tcPr marL="109728" marR="109728" marT="0" marB="0" anchor="ctr">
+                    <a:lnL w="9525" cap="flat" cmpd="sng" algn="ctr">
+                      <a:solidFill>
+                        <a:srgbClr val="D5DCE6"/>
+                      </a:solidFill>
+                      <a:prstDash val="solid"/>
+                      <a:round/>
+                      <a:headEnd type="none" w="med" len="med"/>
+                      <a:tailEnd type="none" w="med" len="med"/>
+                    </a:lnL>
+                    <a:lnR w="9525" cap="flat" cmpd="sng" algn="ctr">
+                      <a:solidFill>
+                        <a:srgbClr val="D5DCE6"/>
+                      </a:solidFill>
+                      <a:prstDash val="solid"/>
+                      <a:round/>
+                      <a:headEnd type="none" w="med" len="med"/>
+                      <a:tailEnd type="none" w="med" len="med"/>
+                    </a:lnR>
+                    <a:lnT w="9525" cap="flat" cmpd="sng" algn="ctr">
+                      <a:solidFill>
+                        <a:srgbClr val="D5DCE6"/>
+                      </a:solidFill>
+                      <a:prstDash val="solid"/>
+                      <a:round/>
+                      <a:headEnd type="none" w="med" len="med"/>
+                      <a:tailEnd type="none" w="med" len="med"/>
+                    </a:lnT>
+                    <a:lnB w="9525" cap="flat" cmpd="sng" algn="ctr">
+                      <a:solidFill>
+                        <a:srgbClr val="D5DCE6"/>
+                      </a:solidFill>
+                      <a:prstDash val="solid"/>
+                      <a:round/>
+                      <a:headEnd type="none" w="med" len="med"/>
+                      <a:tailEnd type="none" w="med" len="med"/>
+                    </a:lnB>
+                    <a:solidFill>
+                      <a:srgbClr val="FFFFFF"/>
+                    </a:solidFill>
+                  </a:tcPr>
+                </a:tc>
+                <a:tc>
+                  <a:txBody>
+                    <a:bodyPr/>
+                    <a:lstStyle/>
+                    <a:p>
+                      <a:pPr marL="0" indent="0">
+                        <a:buNone/>
+                      </a:pPr>
+                      <a:r>
+                        <a:rPr lang="en-US" sz="1400" dirty="0">
+                          <a:solidFill>
+                            <a:srgbClr val="3D4451"/>
+                          </a:solidFill>
+                        </a:rPr>
+                        <a:t>100 / 97 / 20 / 61%</a:t>
+                      </a:r>
+                      <a:endParaRPr lang="en-US" sz="1400" dirty="0"/>
+                    </a:p>
+                  </a:txBody>
+                  <a:tcPr marL="109728" marR="109728" marT="0" marB="0" anchor="ctr">
+                    <a:lnL w="9525" cap="flat" cmpd="sng" algn="ctr">
+                      <a:solidFill>
+                        <a:srgbClr val="D5DCE6"/>
+                      </a:solidFill>
+                      <a:prstDash val="solid"/>
+                      <a:round/>
+                      <a:headEnd type="none" w="med" len="med"/>
+                      <a:tailEnd type="none" w="med" len="med"/>
+                    </a:lnL>
+                    <a:lnR w="9525" cap="flat" cmpd="sng" algn="ctr">
+                      <a:solidFill>
+                        <a:srgbClr val="D5DCE6"/>
+                      </a:solidFill>
+                      <a:prstDash val="solid"/>
+                      <a:round/>
+                      <a:headEnd type="none" w="med" len="med"/>
+                      <a:tailEnd type="none" w="med" len="med"/>
+                    </a:lnR>
+                    <a:lnT w="9525" cap="flat" cmpd="sng" algn="ctr">
+                      <a:solidFill>
+                        <a:srgbClr val="D5DCE6"/>
+                      </a:solidFill>
+                      <a:prstDash val="solid"/>
+                      <a:round/>
+                      <a:headEnd type="none" w="med" len="med"/>
+                      <a:tailEnd type="none" w="med" len="med"/>
+                    </a:lnT>
+                    <a:lnB w="9525" cap="flat" cmpd="sng" algn="ctr">
+                      <a:solidFill>
+                        <a:srgbClr val="D5DCE6"/>
+                      </a:solidFill>
+                      <a:prstDash val="solid"/>
+                      <a:round/>
+                      <a:headEnd type="none" w="med" len="med"/>
+                      <a:tailEnd type="none" w="med" len="med"/>
+                    </a:lnB>
+                    <a:solidFill>
+                      <a:srgbClr val="FFFFFF"/>
+                    </a:solidFill>
+                  </a:tcPr>
+                </a:tc>
+                <a:tc>
+                  <a:txBody>
+                    <a:bodyPr/>
+                    <a:lstStyle/>
+                    <a:p>
+                      <a:pPr marL="0" indent="0">
+                        <a:buNone/>
+                      </a:pPr>
+                      <a:r>
+                        <a:rPr lang="en-US" sz="1400" dirty="0">
+                          <a:solidFill>
+                            <a:srgbClr val="3D4451"/>
+                          </a:solidFill>
+                        </a:rPr>
+                        <a:t>56 / 52 / 1 / 0.4%</a:t>
+                      </a:r>
+                      <a:endParaRPr lang="en-US" sz="1400" dirty="0"/>
+                    </a:p>
+                  </a:txBody>
+                  <a:tcPr marL="109728" marR="109728" marT="0" marB="0" anchor="ctr">
+                    <a:lnL w="9525" cap="flat" cmpd="sng" algn="ctr">
+                      <a:solidFill>
+                        <a:srgbClr val="D5DCE6"/>
+                      </a:solidFill>
+                      <a:prstDash val="solid"/>
+                      <a:round/>
+                      <a:headEnd type="none" w="med" len="med"/>
+                      <a:tailEnd type="none" w="med" len="med"/>
+                    </a:lnL>
+                    <a:lnR w="9525" cap="flat" cmpd="sng" algn="ctr">
+                      <a:solidFill>
+                        <a:srgbClr val="D5DCE6"/>
+                      </a:solidFill>
+                      <a:prstDash val="solid"/>
+                      <a:round/>
+                      <a:headEnd type="none" w="med" len="med"/>
+                      <a:tailEnd type="none" w="med" len="med"/>
+                    </a:lnR>
+                    <a:lnT w="9525" cap="flat" cmpd="sng" algn="ctr">
+                      <a:solidFill>
+                        <a:srgbClr val="D5DCE6"/>
+                      </a:solidFill>
+                      <a:prstDash val="solid"/>
+                      <a:round/>
+                      <a:headEnd type="none" w="med" len="med"/>
+                      <a:tailEnd type="none" w="med" len="med"/>
+                    </a:lnT>
+                    <a:lnB w="9525" cap="flat" cmpd="sng" algn="ctr">
+                      <a:solidFill>
+                        <a:srgbClr val="D5DCE6"/>
+                      </a:solidFill>
+                      <a:prstDash val="solid"/>
+                      <a:round/>
+                      <a:headEnd type="none" w="med" len="med"/>
+                      <a:tailEnd type="none" w="med" len="med"/>
+                    </a:lnB>
+                    <a:solidFill>
+                      <a:srgbClr val="FFFFFF"/>
+                    </a:solidFill>
+                  </a:tcPr>
+                </a:tc>
+                <a:tc>
+                  <a:txBody>
+                    <a:bodyPr/>
+                    <a:lstStyle/>
+                    <a:p>
+                      <a:pPr marL="0" indent="0">
+                        <a:buNone/>
+                      </a:pPr>
+                      <a:r>
+                        <a:rPr lang="en-US" sz="1400" dirty="0">
+                          <a:solidFill>
+                            <a:srgbClr val="3D4451"/>
+                          </a:solidFill>
+                        </a:rPr>
+                        <a:t>97 / 71 / 0 / 0%</a:t>
+                      </a:r>
+                      <a:endParaRPr lang="en-US" sz="1400" dirty="0"/>
+                    </a:p>
+                  </a:txBody>
+                  <a:tcPr marL="109728" marR="109728" marT="0" marB="0" anchor="ctr">
+                    <a:lnL w="9525" cap="flat" cmpd="sng" algn="ctr">
+                      <a:solidFill>
+                        <a:srgbClr val="D5DCE6"/>
+                      </a:solidFill>
+                      <a:prstDash val="solid"/>
+                      <a:round/>
+                      <a:headEnd type="none" w="med" len="med"/>
+                      <a:tailEnd type="none" w="med" len="med"/>
+                    </a:lnL>
+                    <a:lnR w="9525" cap="flat" cmpd="sng" algn="ctr">
+                      <a:solidFill>
+                        <a:srgbClr val="D5DCE6"/>
+                      </a:solidFill>
+                      <a:prstDash val="solid"/>
+                      <a:round/>
+                      <a:headEnd type="none" w="med" len="med"/>
+                      <a:tailEnd type="none" w="med" len="med"/>
+                    </a:lnR>
+                    <a:lnT w="9525" cap="flat" cmpd="sng" algn="ctr">
+                      <a:solidFill>
+                        <a:srgbClr val="D5DCE6"/>
+                      </a:solidFill>
+                      <a:prstDash val="solid"/>
+                      <a:round/>
+                      <a:headEnd type="none" w="med" len="med"/>
+                      <a:tailEnd type="none" w="med" len="med"/>
+                    </a:lnT>
+                    <a:lnB w="9525" cap="flat" cmpd="sng" algn="ctr">
+                      <a:solidFill>
+                        <a:srgbClr val="D5DCE6"/>
+                      </a:solidFill>
+                      <a:prstDash val="solid"/>
+                      <a:round/>
+                      <a:headEnd type="none" w="med" len="med"/>
+                      <a:tailEnd type="none" w="med" len="med"/>
+                    </a:lnB>
+                    <a:solidFill>
+                      <a:srgbClr val="FFFFFF"/>
+                    </a:solidFill>
+                  </a:tcPr>
+                </a:tc>
+                <a:extLst>
+                  <a:ext uri="{0D108BD9-81ED-4DB2-BD59-A6C34878D82A}">
+                    <a16:rowId xmlns:a16="http://schemas.microsoft.com/office/drawing/2014/main" val="10007"/>
+                  </a:ext>
+                </a:extLst>
+              </a:tr>
+            </a:tbl>
+          </a:graphicData>
+        </a:graphic>
+      </p:graphicFrame>
+      <p:sp>
+        <p:nvSpPr>
+          <p:cNvPr id="9" name="reward-note"/>
+          <p:cNvSpPr txBox="1"/>
+          <p:nvPr/>
+        </p:nvSpPr>
+        <p:spPr>
+          <a:xfrm>
+            <a:off x="868680" y="5303520"/>
+            <a:ext cx="10451592" cy="411480"/>
+          </a:xfrm>
+          <a:prstGeom prst="rect">
+            <a:avLst/>
+          </a:prstGeom>
+          <a:noFill/>
+          <a:ln/>
+        </p:spPr>
+        <p:txBody>
+          <a:bodyPr wrap="square" lIns="0" tIns="0" rIns="0" bIns="0" rtlCol="0" anchor="t"/>
+          <a:lstStyle/>
+          <a:p>
+            <a:pPr marL="0" indent="0">
+              <a:buNone/>
+            </a:pPr>
+            <a:r>
+              <a:rPr lang="en-US" sz="1400" dirty="0">
+                <a:solidFill>
+                  <a:schemeClr val="accent6"/>
+                </a:solidFill>
+              </a:rPr>
+              <a:t>Medians over 5 seeds. Accuracy = % of start cells from which the greedy policy reaches the optimal return.</a:t>
+            </a:r>
+            <a:endParaRPr lang="en-US" sz="1400" dirty="0"/>
+          </a:p>
+        </p:txBody>
+      </p:sp>
+      <p:sp>
+        <p:nvSpPr>
+          <p:cNvPr id="25" name="Slide Number Placeholder 0"/>
+          <p:cNvSpPr>
+            <a:spLocks noGrp="1"/>
+          </p:cNvSpPr>
+          <p:nvPr>
+            <p:ph type="sldNum" sz="quarter" idx="4294967295"/>
+          </p:nvPr>
+        </p:nvSpPr>
+        <p:spPr>
+          <a:xfrm>
+            <a:off x="11091672" y="6355080"/>
+            <a:ext cx="548640" cy="274320"/>
+          </a:xfrm>
+          <a:prstGeom prst="rect">
+            <a:avLst/>
+          </a:prstGeom>
+          <a:extLst>
+            <a:ext uri="{C572A759-6A51-4108-AA02-DFA0A04FC94B}">
+              <ma14:wrappingTextBoxFlag xmlns:ma14="http://schemas.microsoft.com/office/mac/drawingml/2011/main" xmlns="" val="0"/>
+            </a:ext>
+          </a:extLst>
+        </p:spPr>
+        <p:txBody>
+          <a:bodyPr/>
+          <a:lstStyle>
+            <a:lvl1pPr>
+              <a:defRPr sz="1100">
+                <a:solidFill>
+                  <a:srgbClr val="737B89"/>
+                </a:solidFill>
+              </a:defRPr>
+            </a:lvl1pPr>
+          </a:lstStyle>
+          <a:p>
+            <a:pPr algn="r"/>
+            <a:fld id="{F7021451-1387-4CA6-816F-3879F97B5CBC}" type="slidenum">
+              <a:rPr lang="en-US" b="0"/>
+              <a:t>2</a:t>
             </a:fld>
             <a:endParaRPr lang="en-US"/>
           </a:p>
@@ -4330,9 +6139,11 @@
       <p:sp>
         <p:nvSpPr>
           <p:cNvPr id="2" name="Text 0"/>
-          <p:cNvSpPr/>
+          <p:cNvSpPr>
+            <a:spLocks noGrp="1"/>
+          </p:cNvSpPr>
           <p:nvPr>
-            <p:ph idx="100" type="title" hasCustomPrompt="1"/>
+            <p:ph type="title" idx="100" hasCustomPrompt="1"/>
           </p:nvPr>
         </p:nvSpPr>
         <p:spPr>
@@ -4350,7 +6161,7 @@
           <a:bodyPr wrap="square" lIns="0" tIns="0" rIns="0" bIns="0" rtlCol="0" anchor="ctr"/>
           <a:lstStyle/>
           <a:p>
-            <a:pPr algn="l" indent="0" marL="0">
+            <a:pPr marL="0" indent="0" algn="l">
               <a:buNone/>
             </a:pPr>
             <a:r>
@@ -4391,6 +6202,13 @@
             <a:prstDash val="solid"/>
           </a:ln>
         </p:spPr>
+        <p:txBody>
+          <a:bodyPr/>
+          <a:lstStyle/>
+          <a:p>
+            <a:endParaRPr lang="en-US"/>
+          </a:p>
+        </p:txBody>
       </p:sp>
       <p:sp>
         <p:nvSpPr>
@@ -4413,7 +6231,7 @@
           <a:bodyPr wrap="square" lIns="0" tIns="0" rIns="0" bIns="0" rtlCol="0" anchor="t"/>
           <a:lstStyle/>
           <a:p>
-            <a:pPr indent="0" marL="0">
+            <a:pPr marL="0" indent="0">
               <a:buNone/>
             </a:pPr>
             <a:r>
@@ -4548,6 +6366,13 @@
             <a:prstDash val="solid"/>
           </a:ln>
         </p:spPr>
+        <p:txBody>
+          <a:bodyPr/>
+          <a:lstStyle/>
+          <a:p>
+            <a:endParaRPr lang="en-US"/>
+          </a:p>
+        </p:txBody>
       </p:sp>
       <p:sp>
         <p:nvSpPr>
@@ -4570,7 +6395,7 @@
           <a:bodyPr wrap="square" lIns="0" tIns="0" rIns="0" bIns="0" rtlCol="0" anchor="t"/>
           <a:lstStyle/>
           <a:p>
-            <a:pPr indent="0" marL="0">
+            <a:pPr marL="0" indent="0">
               <a:buNone/>
             </a:pPr>
             <a:r>
@@ -4587,7 +6412,7 @@
       </p:sp>
       <p:graphicFrame>
         <p:nvGraphicFramePr>
-          <p:cNvPr id="3" name="reward-table"/>
+          <p:cNvPr id="8" name="reward-table"/>
           <p:cNvGraphicFramePr>
             <a:graphicFrameLocks noGrp="1"/>
           </p:cNvGraphicFramePr>
@@ -4601,15 +6426,27 @@
         </p:nvGraphicFramePr>
         <p:xfrm>
           <a:off x="6565392" y="2240280"/>
-          <a:ext cx="4754880" cy="914400"/>
+          <a:ext cx="4754880" cy="2514600"/>
         </p:xfrm>
         <a:graphic>
           <a:graphicData uri="http://schemas.openxmlformats.org/drawingml/2006/table">
             <a:tbl>
               <a:tblPr/>
               <a:tblGrid>
-                <a:gridCol w="3566160"/>
-                <a:gridCol w="1188720"/>
+                <a:gridCol w="3566160">
+                  <a:extLst>
+                    <a:ext uri="{9D8B030D-6E8A-4147-A177-3AD203B41FA5}">
+                      <a16:colId xmlns:a16="http://schemas.microsoft.com/office/drawing/2014/main" val="20000"/>
+                    </a:ext>
+                  </a:extLst>
+                </a:gridCol>
+                <a:gridCol w="1188720">
+                  <a:extLst>
+                    <a:ext uri="{9D8B030D-6E8A-4147-A177-3AD203B41FA5}">
+                      <a16:colId xmlns:a16="http://schemas.microsoft.com/office/drawing/2014/main" val="20001"/>
+                    </a:ext>
+                  </a:extLst>
+                </a:gridCol>
               </a:tblGrid>
               <a:tr h="502920">
                 <a:tc>
@@ -4617,7 +6454,7 @@
                     <a:bodyPr/>
                     <a:lstStyle/>
                     <a:p>
-                      <a:pPr algn="l" indent="0" marL="0">
+                      <a:pPr marL="0" indent="0" algn="l">
                         <a:buNone/>
                       </a:pPr>
                       <a:r>
@@ -4678,7 +6515,7 @@
                     <a:bodyPr/>
                     <a:lstStyle/>
                     <a:p>
-                      <a:pPr algn="r" indent="0" marL="0">
+                      <a:pPr marL="0" indent="0" algn="r">
                         <a:buNone/>
                       </a:pPr>
                       <a:r>
@@ -4734,6 +6571,11 @@
                     </a:solidFill>
                   </a:tcPr>
                 </a:tc>
+                <a:extLst>
+                  <a:ext uri="{0D108BD9-81ED-4DB2-BD59-A6C34878D82A}">
+                    <a16:rowId xmlns:a16="http://schemas.microsoft.com/office/drawing/2014/main" val="10000"/>
+                  </a:ext>
+                </a:extLst>
               </a:tr>
               <a:tr h="502920">
                 <a:tc>
@@ -4741,7 +6583,7 @@
                     <a:bodyPr/>
                     <a:lstStyle/>
                     <a:p>
-                      <a:pPr indent="0" marL="0">
+                      <a:pPr marL="0" indent="0">
                         <a:buNone/>
                       </a:pPr>
                       <a:r>
@@ -4802,7 +6644,7 @@
                     <a:bodyPr/>
                     <a:lstStyle/>
                     <a:p>
-                      <a:pPr algn="r" indent="0" marL="0">
+                      <a:pPr marL="0" indent="0" algn="r">
                         <a:buNone/>
                       </a:pPr>
                       <a:r>
@@ -4858,6 +6700,11 @@
                     </a:solidFill>
                   </a:tcPr>
                 </a:tc>
+                <a:extLst>
+                  <a:ext uri="{0D108BD9-81ED-4DB2-BD59-A6C34878D82A}">
+                    <a16:rowId xmlns:a16="http://schemas.microsoft.com/office/drawing/2014/main" val="10001"/>
+                  </a:ext>
+                </a:extLst>
               </a:tr>
               <a:tr h="502920">
                 <a:tc>
@@ -4865,7 +6712,7 @@
                     <a:bodyPr/>
                     <a:lstStyle/>
                     <a:p>
-                      <a:pPr indent="0" marL="0">
+                      <a:pPr marL="0" indent="0">
                         <a:buNone/>
                       </a:pPr>
                       <a:r>
@@ -4926,7 +6773,7 @@
                     <a:bodyPr/>
                     <a:lstStyle/>
                     <a:p>
-                      <a:pPr algn="r" indent="0" marL="0">
+                      <a:pPr marL="0" indent="0" algn="r">
                         <a:buNone/>
                       </a:pPr>
                       <a:r>
@@ -4982,6 +6829,11 @@
                     </a:solidFill>
                   </a:tcPr>
                 </a:tc>
+                <a:extLst>
+                  <a:ext uri="{0D108BD9-81ED-4DB2-BD59-A6C34878D82A}">
+                    <a16:rowId xmlns:a16="http://schemas.microsoft.com/office/drawing/2014/main" val="10002"/>
+                  </a:ext>
+                </a:extLst>
               </a:tr>
               <a:tr h="502920">
                 <a:tc>
@@ -4989,7 +6841,7 @@
                     <a:bodyPr/>
                     <a:lstStyle/>
                     <a:p>
-                      <a:pPr indent="0" marL="0">
+                      <a:pPr marL="0" indent="0">
                         <a:buNone/>
                       </a:pPr>
                       <a:r>
@@ -5050,7 +6902,7 @@
                     <a:bodyPr/>
                     <a:lstStyle/>
                     <a:p>
-                      <a:pPr algn="r" indent="0" marL="0">
+                      <a:pPr marL="0" indent="0" algn="r">
                         <a:buNone/>
                       </a:pPr>
                       <a:r>
@@ -5106,6 +6958,11 @@
                     </a:solidFill>
                   </a:tcPr>
                 </a:tc>
+                <a:extLst>
+                  <a:ext uri="{0D108BD9-81ED-4DB2-BD59-A6C34878D82A}">
+                    <a16:rowId xmlns:a16="http://schemas.microsoft.com/office/drawing/2014/main" val="10003"/>
+                  </a:ext>
+                </a:extLst>
               </a:tr>
               <a:tr h="502920">
                 <a:tc>
@@ -5113,7 +6970,7 @@
                     <a:bodyPr/>
                     <a:lstStyle/>
                     <a:p>
-                      <a:pPr indent="0" marL="0">
+                      <a:pPr marL="0" indent="0">
                         <a:buNone/>
                       </a:pPr>
                       <a:r>
@@ -5174,7 +7031,7 @@
                     <a:bodyPr/>
                     <a:lstStyle/>
                     <a:p>
-                      <a:pPr algn="r" indent="0" marL="0">
+                      <a:pPr marL="0" indent="0" algn="r">
                         <a:buNone/>
                       </a:pPr>
                       <a:r>
@@ -5230,6 +7087,11 @@
                     </a:solidFill>
                   </a:tcPr>
                 </a:tc>
+                <a:extLst>
+                  <a:ext uri="{0D108BD9-81ED-4DB2-BD59-A6C34878D82A}">
+                    <a16:rowId xmlns:a16="http://schemas.microsoft.com/office/drawing/2014/main" val="10004"/>
+                  </a:ext>
+                </a:extLst>
               </a:tr>
             </a:tbl>
           </a:graphicData>
@@ -5256,7 +7118,7 @@
           <a:bodyPr wrap="square" lIns="0" tIns="0" rIns="0" bIns="0" rtlCol="0" anchor="t"/>
           <a:lstStyle/>
           <a:p>
-            <a:pPr indent="0" marL="0">
+            <a:pPr marL="0" indent="0">
               <a:buNone/>
             </a:pPr>
             <a:r>
@@ -5265,7 +7127,7 @@
                   <a:schemeClr val="accent6"/>
                 </a:solidFill>
               </a:rPr>
-              <a:t>The −30 penalty exists only in the deadline setting (S3).</a:t>
+              <a:t>The −30 penalty only exists in the deadline maps (S3, S4).</a:t>
             </a:r>
             <a:endParaRPr lang="en-US" sz="1400" dirty="0"/>
           </a:p>
@@ -5291,7 +7153,7 @@
           </a:prstGeom>
           <a:extLst>
             <a:ext uri="{C572A759-6A51-4108-AA02-DFA0A04FC94B}">
-              <ma14:wrappingTextBoxFlag xmlns:ma14="http://schemas.microsoft.com/office/mac/drawingml/2011/main" val="0"/>
+              <ma14:wrappingTextBoxFlag xmlns:ma14="http://schemas.microsoft.com/office/mac/drawingml/2011/main" xmlns="" val="0"/>
             </a:ext>
           </a:extLst>
         </p:spPr>
@@ -5309,7 +7171,7 @@
           <a:p>
             <a:pPr algn="r"/>
             <a:fld id="{F7021451-1387-4CA6-816F-3879F97B5CBC}" type="slidenum">
-              <a:rPr b="0" lang="en-US"/>
+              <a:rPr lang="en-US" b="0"/>
               <a:t>2</a:t>
             </a:fld>
             <a:endParaRPr lang="en-US"/>
@@ -5344,9 +7206,11 @@
       <p:sp>
         <p:nvSpPr>
           <p:cNvPr id="2" name="Text 0"/>
-          <p:cNvSpPr/>
+          <p:cNvSpPr>
+            <a:spLocks noGrp="1"/>
+          </p:cNvSpPr>
           <p:nvPr>
-            <p:ph idx="100" type="title" hasCustomPrompt="1"/>
+            <p:ph type="title" idx="100" hasCustomPrompt="1"/>
           </p:nvPr>
         </p:nvSpPr>
         <p:spPr>
@@ -5364,7 +7228,7 @@
           <a:bodyPr wrap="square" lIns="0" tIns="0" rIns="0" bIns="0" rtlCol="0" anchor="ctr"/>
           <a:lstStyle/>
           <a:p>
-            <a:pPr algn="l" indent="0" marL="0">
+            <a:pPr marL="0" indent="0" algn="l">
               <a:buNone/>
             </a:pPr>
             <a:r>
@@ -5373,7 +7237,7 @@
                   <a:schemeClr val="tx1"/>
                 </a:solidFill>
               </a:rPr>
-              <a:t>Four settings of increasing difficulty</a:t>
+              <a:t>Four levels of increasing difficulty</a:t>
             </a:r>
             <a:endParaRPr lang="en-US" sz="3400" dirty="0"/>
           </a:p>
@@ -5381,22 +7245,22 @@
       </p:sp>
       <p:pic>
         <p:nvPicPr>
-          <p:cNvPr id="3" name="maps" descr="The four maps S1 to S4: pickup points are circles, drop points are squares, walls are dark, the booster cell is yellow">    </p:cNvPr>
+          <p:cNvPr id="3" name="maps" descr="The four maps S1 to S4: pickup points are circles, drop points are squares, walls are dark, the booster cell is yellow"/>
           <p:cNvPicPr>
             <a:picLocks noChangeAspect="1"/>
           </p:cNvPicPr>
           <p:nvPr/>
         </p:nvPicPr>
         <p:blipFill>
-          <a:blip r:embed="rId1"/>
+          <a:blip r:embed="rId3"/>
           <a:stretch>
             <a:fillRect/>
           </a:stretch>
         </p:blipFill>
         <p:spPr>
           <a:xfrm>
-            <a:off x="548640" y="1234440"/>
-            <a:ext cx="11091672" cy="3540893"/>
+            <a:off x="552031" y="1234440"/>
+            <a:ext cx="11084889" cy="3538728"/>
           </a:xfrm>
           <a:prstGeom prst="rect">
             <a:avLst/>
@@ -5424,7 +7288,7 @@
           <a:bodyPr wrap="square" lIns="0" tIns="0" rIns="0" bIns="0" rtlCol="0" anchor="t"/>
           <a:lstStyle/>
           <a:p>
-            <a:pPr indent="0" marL="0">
+            <a:pPr marL="0" indent="0">
               <a:buNone/>
             </a:pPr>
             <a:r>
@@ -5433,12 +7297,12 @@
                   <a:schemeClr val="tx1"/>
                 </a:solidFill>
               </a:rPr>
-              <a:t>S1</a:t>
+              <a:t>S1 · level 1</a:t>
             </a:r>
             <a:endParaRPr lang="en-US" sz="1600" dirty="0"/>
           </a:p>
           <a:p>
-            <a:pPr indent="0" marL="0">
+            <a:pPr marL="0" indent="0">
               <a:buNone/>
             </a:pPr>
             <a:r>
@@ -5452,7 +7316,7 @@
             <a:endParaRPr lang="en-US" sz="1600" dirty="0"/>
           </a:p>
           <a:p>
-            <a:pPr indent="0" marL="0">
+            <a:pPr marL="0" indent="0">
               <a:buNone/>
             </a:pPr>
             <a:r>
@@ -5488,7 +7352,7 @@
           <a:bodyPr wrap="square" lIns="0" tIns="0" rIns="0" bIns="0" rtlCol="0" anchor="t"/>
           <a:lstStyle/>
           <a:p>
-            <a:pPr indent="0" marL="0">
+            <a:pPr marL="0" indent="0">
               <a:buNone/>
             </a:pPr>
             <a:r>
@@ -5497,12 +7361,12 @@
                   <a:schemeClr val="tx1"/>
                 </a:solidFill>
               </a:rPr>
-              <a:t>S2</a:t>
+              <a:t>S2 · level 2</a:t>
             </a:r>
             <a:endParaRPr lang="en-US" sz="1600" dirty="0"/>
           </a:p>
           <a:p>
-            <a:pPr indent="0" marL="0">
+            <a:pPr marL="0" indent="0">
               <a:buNone/>
             </a:pPr>
             <a:r>
@@ -5516,7 +7380,7 @@
             <a:endParaRPr lang="en-US" sz="1600" dirty="0"/>
           </a:p>
           <a:p>
-            <a:pPr indent="0" marL="0">
+            <a:pPr marL="0" indent="0">
               <a:buNone/>
             </a:pPr>
             <a:r>
@@ -5525,7 +7389,7 @@
                   <a:schemeClr val="accent6"/>
                 </a:solidFill>
               </a:rPr>
-              <a:t>optimal route: 31 steps</a:t>
+              <a:t>optimal route: 36 steps</a:t>
             </a:r>
             <a:endParaRPr lang="en-US" sz="1600" dirty="0"/>
           </a:p>
@@ -5552,7 +7416,7 @@
           <a:bodyPr wrap="square" lIns="0" tIns="0" rIns="0" bIns="0" rtlCol="0" anchor="t"/>
           <a:lstStyle/>
           <a:p>
-            <a:pPr indent="0" marL="0">
+            <a:pPr marL="0" indent="0">
               <a:buNone/>
             </a:pPr>
             <a:r>
@@ -5561,12 +7425,12 @@
                   <a:schemeClr val="tx1"/>
                 </a:solidFill>
               </a:rPr>
-              <a:t>S3</a:t>
+              <a:t>S3 · level 3</a:t>
             </a:r>
             <a:endParaRPr lang="en-US" sz="1600" dirty="0"/>
           </a:p>
           <a:p>
-            <a:pPr indent="0" marL="0">
+            <a:pPr marL="0" indent="0">
               <a:buNone/>
             </a:pPr>
             <a:r>
@@ -5575,12 +7439,12 @@
                   <a:schemeClr val="tx2"/>
                 </a:solidFill>
               </a:rPr>
-              <a:t>deadline for C: 18 steps</a:t>
+              <a:t>deadline for C: 20 steps</a:t>
             </a:r>
             <a:endParaRPr lang="en-US" sz="1600" dirty="0"/>
           </a:p>
           <a:p>
-            <a:pPr indent="0" marL="0">
+            <a:pPr marL="0" indent="0">
               <a:buNone/>
             </a:pPr>
             <a:r>
@@ -5589,7 +7453,7 @@
                   <a:schemeClr val="accent6"/>
                 </a:solidFill>
               </a:rPr>
-              <a:t>optimal route: 38 steps</a:t>
+              <a:t>optimal route: 44 steps</a:t>
             </a:r>
             <a:endParaRPr lang="en-US" sz="1600" dirty="0"/>
           </a:p>
@@ -5616,7 +7480,7 @@
           <a:bodyPr wrap="square" lIns="0" tIns="0" rIns="0" bIns="0" rtlCol="0" anchor="t"/>
           <a:lstStyle/>
           <a:p>
-            <a:pPr indent="0" marL="0">
+            <a:pPr marL="0" indent="0">
               <a:buNone/>
             </a:pPr>
             <a:r>
@@ -5625,12 +7489,12 @@
                   <a:schemeClr val="tx1"/>
                 </a:solidFill>
               </a:rPr>
-              <a:t>S4</a:t>
+              <a:t>S4 · level 4</a:t>
             </a:r>
             <a:endParaRPr lang="en-US" sz="1600" dirty="0"/>
           </a:p>
           <a:p>
-            <a:pPr indent="0" marL="0">
+            <a:pPr marL="0" indent="0">
               <a:buNone/>
             </a:pPr>
             <a:r>
@@ -5639,12 +7503,12 @@
                   <a:schemeClr val="tx2"/>
                 </a:solidFill>
               </a:rPr>
-              <a:t>×2 booster cell</a:t>
+              <a:t>4 parcels, ×2 cell, deadline D</a:t>
             </a:r>
             <a:endParaRPr lang="en-US" sz="1600" dirty="0"/>
           </a:p>
           <a:p>
-            <a:pPr indent="0" marL="0">
+            <a:pPr marL="0" indent="0">
               <a:buNone/>
             </a:pPr>
             <a:r>
@@ -5653,7 +7517,7 @@
                   <a:schemeClr val="accent6"/>
                 </a:solidFill>
               </a:rPr>
-              <a:t>optimal route: 38 steps</a:t>
+              <a:t>optimal route: 67 steps</a:t>
             </a:r>
             <a:endParaRPr lang="en-US" sz="1600" dirty="0"/>
           </a:p>
@@ -5679,7 +7543,7 @@
           </a:prstGeom>
           <a:extLst>
             <a:ext uri="{C572A759-6A51-4108-AA02-DFA0A04FC94B}">
-              <ma14:wrappingTextBoxFlag xmlns:ma14="http://schemas.microsoft.com/office/mac/drawingml/2011/main" val="0"/>
+              <ma14:wrappingTextBoxFlag xmlns:ma14="http://schemas.microsoft.com/office/mac/drawingml/2011/main" xmlns="" val="0"/>
             </a:ext>
           </a:extLst>
         </p:spPr>
@@ -5697,7 +7561,7 @@
           <a:p>
             <a:pPr algn="r"/>
             <a:fld id="{F7021451-1387-4CA6-816F-3879F97B5CBC}" type="slidenum">
-              <a:rPr b="0" lang="en-US"/>
+              <a:rPr lang="en-US" b="0"/>
               <a:t>3</a:t>
             </a:fld>
             <a:endParaRPr lang="en-US"/>
@@ -5713,634 +7577,6 @@
 </file>
 
 <file path=ppt/slides/slide4.xml><?xml version="1.0" encoding="utf-8"?>
-<p:sld xmlns:a="http://schemas.openxmlformats.org/drawingml/2006/main" xmlns:r="http://schemas.openxmlformats.org/officeDocument/2006/relationships" xmlns:p="http://schemas.openxmlformats.org/presentationml/2006/main">
-  <p:cSld name="Slide 4">
-    <p:spTree>
-      <p:nvGrpSpPr>
-        <p:cNvPr id="1" name=""/>
-        <p:cNvGrpSpPr/>
-        <p:nvPr/>
-      </p:nvGrpSpPr>
-      <p:grpSpPr>
-        <a:xfrm>
-          <a:off x="0" y="0"/>
-          <a:ext cx="0" cy="0"/>
-          <a:chOff x="0" y="0"/>
-          <a:chExt cx="0" cy="0"/>
-        </a:xfrm>
-      </p:grpSpPr>
-      <p:sp>
-        <p:nvSpPr>
-          <p:cNvPr id="2" name="Text 0"/>
-          <p:cNvSpPr/>
-          <p:nvPr>
-            <p:ph idx="100" type="title" hasCustomPrompt="1"/>
-          </p:nvPr>
-        </p:nvSpPr>
-        <p:spPr>
-          <a:xfrm>
-            <a:off x="548640" y="320040"/>
-            <a:ext cx="11091672" cy="777240"/>
-          </a:xfrm>
-          <a:prstGeom prst="rect">
-            <a:avLst/>
-          </a:prstGeom>
-          <a:noFill/>
-          <a:ln/>
-        </p:spPr>
-        <p:txBody>
-          <a:bodyPr wrap="square" lIns="0" tIns="0" rIns="0" bIns="0" rtlCol="0" anchor="ctr"/>
-          <a:lstStyle/>
-          <a:p>
-            <a:pPr algn="l" indent="0" marL="0">
-              <a:buNone/>
-            </a:pPr>
-            <a:r>
-              <a:rPr lang="en-US" sz="3400" b="1" dirty="0">
-                <a:solidFill>
-                  <a:schemeClr val="tx1"/>
-                </a:solidFill>
-              </a:rPr>
-              <a:t>State and its encoding</a:t>
-            </a:r>
-            <a:endParaRPr lang="en-US" sz="3400" dirty="0"/>
-          </a:p>
-        </p:txBody>
-      </p:sp>
-      <p:sp>
-        <p:nvSpPr>
-          <p:cNvPr id="3" name="state-box"/>
-          <p:cNvSpPr/>
-          <p:nvPr/>
-        </p:nvSpPr>
-        <p:spPr>
-          <a:xfrm>
-            <a:off x="548640" y="1325880"/>
-            <a:ext cx="5394960" cy="731520"/>
-          </a:xfrm>
-          <a:prstGeom prst="roundRect">
-            <a:avLst>
-              <a:gd name="adj" fmla="val 15000"/>
-            </a:avLst>
-          </a:prstGeom>
-          <a:solidFill>
-            <a:schemeClr val="bg2"/>
-          </a:solidFill>
-          <a:ln w="12700">
-            <a:solidFill>
-              <a:schemeClr val="bg2"/>
-            </a:solidFill>
-            <a:prstDash val="solid"/>
-          </a:ln>
-        </p:spPr>
-      </p:sp>
-      <p:sp>
-        <p:nvSpPr>
-          <p:cNvPr id="4" name="state-tuple"/>
-          <p:cNvSpPr txBox="1"/>
-          <p:nvPr/>
-        </p:nvSpPr>
-        <p:spPr>
-          <a:xfrm>
-            <a:off x="822960" y="1325880"/>
-            <a:ext cx="4937760" cy="731520"/>
-          </a:xfrm>
-          <a:prstGeom prst="rect">
-            <a:avLst/>
-          </a:prstGeom>
-          <a:noFill/>
-          <a:ln/>
-        </p:spPr>
-        <p:txBody>
-          <a:bodyPr wrap="square" lIns="0" tIns="0" rIns="0" bIns="0" rtlCol="0" anchor="ctr"/>
-          <a:lstStyle/>
-          <a:p>
-            <a:pPr indent="0" marL="0">
-              <a:buNone/>
-            </a:pPr>
-            <a:r>
-              <a:rPr lang="en-US" sz="2200" dirty="0">
-                <a:solidFill>
-                  <a:schemeClr val="tx1"/>
-                </a:solidFill>
-                <a:latin typeface="Cambria" pitchFamily="34" charset="0"/>
-                <a:ea typeface="Cambria" pitchFamily="34" charset="-122"/>
-                <a:cs typeface="Cambria" pitchFamily="34" charset="-120"/>
-              </a:rPr>
-              <a:t>s = (row, col, σ</a:t>
-            </a:r>
-            <a:pPr indent="0" marL="0">
-              <a:buNone/>
-            </a:pPr>
-            <a:r>
-              <a:rPr lang="en-US" sz="2200" baseline="-40000" dirty="0">
-                <a:solidFill>
-                  <a:schemeClr val="tx1"/>
-                </a:solidFill>
-                <a:latin typeface="Cambria" pitchFamily="34" charset="0"/>
-                <a:ea typeface="Cambria" pitchFamily="34" charset="-122"/>
-                <a:cs typeface="Cambria" pitchFamily="34" charset="-120"/>
-              </a:rPr>
-              <a:t>1</a:t>
-            </a:r>
-            <a:pPr indent="0" marL="0">
-              <a:buNone/>
-            </a:pPr>
-            <a:r>
-              <a:rPr lang="en-US" sz="2200" dirty="0">
-                <a:solidFill>
-                  <a:schemeClr val="tx1"/>
-                </a:solidFill>
-                <a:latin typeface="Cambria" pitchFamily="34" charset="0"/>
-                <a:ea typeface="Cambria" pitchFamily="34" charset="-122"/>
-                <a:cs typeface="Cambria" pitchFamily="34" charset="-120"/>
-              </a:rPr>
-              <a:t> … σ</a:t>
-            </a:r>
-            <a:pPr indent="0" marL="0">
-              <a:buNone/>
-            </a:pPr>
-            <a:r>
-              <a:rPr lang="en-US" sz="2200" baseline="-40000" dirty="0">
-                <a:solidFill>
-                  <a:schemeClr val="tx1"/>
-                </a:solidFill>
-                <a:latin typeface="Cambria" pitchFamily="34" charset="0"/>
-                <a:ea typeface="Cambria" pitchFamily="34" charset="-122"/>
-                <a:cs typeface="Cambria" pitchFamily="34" charset="-120"/>
-              </a:rPr>
-              <a:t>N</a:t>
-            </a:r>
-            <a:pPr indent="0" marL="0">
-              <a:buNone/>
-            </a:pPr>
-            <a:r>
-              <a:rPr lang="en-US" sz="2200" dirty="0">
-                <a:solidFill>
-                  <a:schemeClr val="tx1"/>
-                </a:solidFill>
-                <a:latin typeface="Cambria" pitchFamily="34" charset="0"/>
-                <a:ea typeface="Cambria" pitchFamily="34" charset="-122"/>
-                <a:cs typeface="Cambria" pitchFamily="34" charset="-120"/>
-              </a:rPr>
-              <a:t>, τ, b)</a:t>
-            </a:r>
-            <a:endParaRPr lang="en-US" sz="2200" dirty="0"/>
-          </a:p>
-        </p:txBody>
-      </p:sp>
-      <p:sp>
-        <p:nvSpPr>
-          <p:cNvPr id="5" name="state-list"/>
-          <p:cNvSpPr txBox="1"/>
-          <p:nvPr/>
-        </p:nvSpPr>
-        <p:spPr>
-          <a:xfrm>
-            <a:off x="548640" y="2286000"/>
-            <a:ext cx="5394960" cy="1417320"/>
-          </a:xfrm>
-          <a:prstGeom prst="rect">
-            <a:avLst/>
-          </a:prstGeom>
-          <a:noFill/>
-          <a:ln/>
-        </p:spPr>
-        <p:txBody>
-          <a:bodyPr wrap="square" lIns="0" tIns="0" rIns="0" bIns="0" rtlCol="0" anchor="t"/>
-          <a:lstStyle/>
-          <a:p>
-            <a:pPr marL="342900" indent="-342900">
-              <a:spcAft>
-                <a:spcPts val="1000"/>
-              </a:spcAft>
-              <a:buSzPct val="100000"/>
-              <a:buChar char="•"/>
-            </a:pPr>
-            <a:r>
-              <a:rPr lang="en-US" sz="1700" dirty="0">
-                <a:solidFill>
-                  <a:schemeClr val="tx2"/>
-                </a:solidFill>
-              </a:rPr>
-              <a:t>σ</a:t>
-            </a:r>
-            <a:pPr indent="0" marL="0">
-              <a:buNone/>
-            </a:pPr>
-            <a:r>
-              <a:rPr lang="en-US" sz="1700" baseline="-40000" dirty="0">
-                <a:solidFill>
-                  <a:schemeClr val="tx2"/>
-                </a:solidFill>
-              </a:rPr>
-              <a:t>i</a:t>
-            </a:r>
-            <a:pPr indent="0" marL="0">
-              <a:buNone/>
-            </a:pPr>
-            <a:r>
-              <a:rPr lang="en-US" sz="1700" dirty="0">
-                <a:solidFill>
-                  <a:schemeClr val="tx2"/>
-                </a:solidFill>
-              </a:rPr>
-              <a:t>: 0 not picked up · 1 carried · 2 delivered</a:t>
-            </a:r>
-            <a:endParaRPr lang="en-US" sz="1700" dirty="0"/>
-          </a:p>
-          <a:p>
-            <a:pPr marL="342900" indent="-342900">
-              <a:spcAft>
-                <a:spcPts val="1000"/>
-              </a:spcAft>
-              <a:buSzPct val="100000"/>
-              <a:buChar char="•"/>
-            </a:pPr>
-            <a:r>
-              <a:rPr lang="en-US" sz="1700" dirty="0">
-                <a:solidFill>
-                  <a:schemeClr val="tx2"/>
-                </a:solidFill>
-              </a:rPr>
-              <a:t>τ: deadline clock (S3) · b: booster status (S4)</a:t>
-            </a:r>
-            <a:endParaRPr lang="en-US" sz="1700" dirty="0"/>
-          </a:p>
-          <a:p>
-            <a:pPr marL="342900" indent="-342900">
-              <a:spcAft>
-                <a:spcPts val="1000"/>
-              </a:spcAft>
-              <a:buSzPct val="100000"/>
-              <a:buChar char="•"/>
-            </a:pPr>
-            <a:r>
-              <a:rPr lang="en-US" sz="1700" dirty="0">
-                <a:solidFill>
-                  <a:schemeClr val="tx2"/>
-                </a:solidFill>
-              </a:rPr>
-              <a:t>Without τ or b the state would not be Markov</a:t>
-            </a:r>
-            <a:endParaRPr lang="en-US" sz="1700" dirty="0"/>
-          </a:p>
-        </p:txBody>
-      </p:sp>
-      <p:sp>
-        <p:nvSpPr>
-          <p:cNvPr id="6" name="formula-box"/>
-          <p:cNvSpPr/>
-          <p:nvPr/>
-        </p:nvSpPr>
-        <p:spPr>
-          <a:xfrm>
-            <a:off x="548640" y="3886200"/>
-            <a:ext cx="5394960" cy="1965960"/>
-          </a:xfrm>
-          <a:prstGeom prst="roundRect">
-            <a:avLst>
-              <a:gd name="adj" fmla="val 5581"/>
-            </a:avLst>
-          </a:prstGeom>
-          <a:solidFill>
-            <a:schemeClr val="bg2"/>
-          </a:solidFill>
-          <a:ln w="12700">
-            <a:solidFill>
-              <a:schemeClr val="bg2"/>
-            </a:solidFill>
-            <a:prstDash val="solid"/>
-          </a:ln>
-        </p:spPr>
-      </p:sp>
-      <p:sp>
-        <p:nvSpPr>
-          <p:cNvPr id="7" name="formulas"/>
-          <p:cNvSpPr txBox="1"/>
-          <p:nvPr/>
-        </p:nvSpPr>
-        <p:spPr>
-          <a:xfrm>
-            <a:off x="822960" y="3886200"/>
-            <a:ext cx="4937760" cy="1965960"/>
-          </a:xfrm>
-          <a:prstGeom prst="rect">
-            <a:avLst/>
-          </a:prstGeom>
-          <a:noFill/>
-          <a:ln/>
-        </p:spPr>
-        <p:txBody>
-          <a:bodyPr wrap="square" lIns="0" tIns="0" rIns="0" bIns="0" rtlCol="0" anchor="ctr"/>
-          <a:lstStyle/>
-          <a:p>
-            <a:pPr indent="0" marL="0">
-              <a:lnSpc>
-                <a:spcPct val="130000"/>
-              </a:lnSpc>
-              <a:buNone/>
-            </a:pPr>
-            <a:r>
-              <a:rPr lang="en-US" sz="1900" dirty="0">
-                <a:solidFill>
-                  <a:schemeClr val="tx1"/>
-                </a:solidFill>
-                <a:latin typeface="Cambria" pitchFamily="34" charset="0"/>
-                <a:ea typeface="Cambria" pitchFamily="34" charset="-122"/>
-                <a:cs typeface="Cambria" pitchFamily="34" charset="-120"/>
-              </a:rPr>
-              <a:t>code = Σ σ</a:t>
-            </a:r>
-            <a:pPr indent="0" marL="0">
-              <a:lnSpc>
-                <a:spcPct val="130000"/>
-              </a:lnSpc>
-              <a:buNone/>
-            </a:pPr>
-            <a:r>
-              <a:rPr lang="en-US" sz="1900" baseline="-40000" dirty="0">
-                <a:solidFill>
-                  <a:schemeClr val="tx1"/>
-                </a:solidFill>
-                <a:latin typeface="Cambria" pitchFamily="34" charset="0"/>
-                <a:ea typeface="Cambria" pitchFamily="34" charset="-122"/>
-                <a:cs typeface="Cambria" pitchFamily="34" charset="-120"/>
-              </a:rPr>
-              <a:t>i</a:t>
-            </a:r>
-            <a:pPr indent="0" marL="0">
-              <a:lnSpc>
-                <a:spcPct val="130000"/>
-              </a:lnSpc>
-              <a:buNone/>
-            </a:pPr>
-            <a:r>
-              <a:rPr lang="en-US" sz="1900" dirty="0">
-                <a:solidFill>
-                  <a:schemeClr val="tx1"/>
-                </a:solidFill>
-                <a:latin typeface="Cambria" pitchFamily="34" charset="0"/>
-                <a:ea typeface="Cambria" pitchFamily="34" charset="-122"/>
-                <a:cs typeface="Cambria" pitchFamily="34" charset="-120"/>
-              </a:rPr>
-              <a:t> · 3</a:t>
-            </a:r>
-            <a:pPr indent="0" marL="0">
-              <a:lnSpc>
-                <a:spcPct val="130000"/>
-              </a:lnSpc>
-              <a:buNone/>
-            </a:pPr>
-            <a:r>
-              <a:rPr lang="en-US" sz="1900" baseline="30000" dirty="0">
-                <a:solidFill>
-                  <a:schemeClr val="tx1"/>
-                </a:solidFill>
-                <a:latin typeface="Cambria" pitchFamily="34" charset="0"/>
-                <a:ea typeface="Cambria" pitchFamily="34" charset="-122"/>
-                <a:cs typeface="Cambria" pitchFamily="34" charset="-120"/>
-              </a:rPr>
-              <a:t>i−1</a:t>
-            </a:r>
-            <a:pPr indent="0" marL="0">
-              <a:lnSpc>
-                <a:spcPct val="130000"/>
-              </a:lnSpc>
-              <a:buNone/>
-            </a:pPr>
-            <a:endParaRPr lang="en-US" sz="1900" dirty="0"/>
-          </a:p>
-          <a:p>
-            <a:pPr indent="0" marL="0">
-              <a:lnSpc>
-                <a:spcPct val="130000"/>
-              </a:lnSpc>
-              <a:buNone/>
-            </a:pPr>
-            <a:r>
-              <a:rPr lang="en-US" sz="1900" dirty="0">
-                <a:solidFill>
-                  <a:schemeClr val="tx1"/>
-                </a:solidFill>
-                <a:latin typeface="Cambria" pitchFamily="34" charset="0"/>
-                <a:ea typeface="Cambria" pitchFamily="34" charset="-122"/>
-                <a:cs typeface="Cambria" pitchFamily="34" charset="-120"/>
-              </a:rPr>
-              <a:t>idx = (((row·W + col)·3</a:t>
-            </a:r>
-            <a:pPr indent="0" marL="0">
-              <a:lnSpc>
-                <a:spcPct val="130000"/>
-              </a:lnSpc>
-              <a:buNone/>
-            </a:pPr>
-            <a:r>
-              <a:rPr lang="en-US" sz="1900" baseline="30000" dirty="0">
-                <a:solidFill>
-                  <a:schemeClr val="tx1"/>
-                </a:solidFill>
-                <a:latin typeface="Cambria" pitchFamily="34" charset="0"/>
-                <a:ea typeface="Cambria" pitchFamily="34" charset="-122"/>
-                <a:cs typeface="Cambria" pitchFamily="34" charset="-120"/>
-              </a:rPr>
-              <a:t>N</a:t>
-            </a:r>
-            <a:pPr indent="0" marL="0">
-              <a:lnSpc>
-                <a:spcPct val="130000"/>
-              </a:lnSpc>
-              <a:buNone/>
-            </a:pPr>
-            <a:r>
-              <a:rPr lang="en-US" sz="1900" dirty="0">
-                <a:solidFill>
-                  <a:schemeClr val="tx1"/>
-                </a:solidFill>
-                <a:latin typeface="Cambria" pitchFamily="34" charset="0"/>
-                <a:ea typeface="Cambria" pitchFamily="34" charset="-122"/>
-                <a:cs typeface="Cambria" pitchFamily="34" charset="-120"/>
-              </a:rPr>
-              <a:t> + code)·T + τ)·B + b</a:t>
-            </a:r>
-            <a:pPr indent="0" marL="0">
-              <a:lnSpc>
-                <a:spcPct val="130000"/>
-              </a:lnSpc>
-              <a:buNone/>
-            </a:pPr>
-            <a:endParaRPr lang="en-US" sz="1900" dirty="0"/>
-          </a:p>
-          <a:p>
-            <a:pPr indent="0" marL="0">
-              <a:lnSpc>
-                <a:spcPct val="130000"/>
-              </a:lnSpc>
-              <a:buNone/>
-            </a:pPr>
-            <a:r>
-              <a:rPr lang="en-US" sz="1900" dirty="0">
-                <a:solidFill>
-                  <a:schemeClr val="tx1"/>
-                </a:solidFill>
-                <a:latin typeface="Cambria" pitchFamily="34" charset="0"/>
-                <a:ea typeface="Cambria" pitchFamily="34" charset="-122"/>
-                <a:cs typeface="Cambria" pitchFamily="34" charset="-120"/>
-              </a:rPr>
-              <a:t>|S| = H·W·3</a:t>
-            </a:r>
-            <a:pPr indent="0" marL="0">
-              <a:lnSpc>
-                <a:spcPct val="130000"/>
-              </a:lnSpc>
-              <a:buNone/>
-            </a:pPr>
-            <a:r>
-              <a:rPr lang="en-US" sz="1900" baseline="30000" dirty="0">
-                <a:solidFill>
-                  <a:schemeClr val="tx1"/>
-                </a:solidFill>
-                <a:latin typeface="Cambria" pitchFamily="34" charset="0"/>
-                <a:ea typeface="Cambria" pitchFamily="34" charset="-122"/>
-                <a:cs typeface="Cambria" pitchFamily="34" charset="-120"/>
-              </a:rPr>
-              <a:t>N</a:t>
-            </a:r>
-            <a:pPr indent="0" marL="0">
-              <a:lnSpc>
-                <a:spcPct val="130000"/>
-              </a:lnSpc>
-              <a:buNone/>
-            </a:pPr>
-            <a:r>
-              <a:rPr lang="en-US" sz="1900" dirty="0">
-                <a:solidFill>
-                  <a:schemeClr val="tx1"/>
-                </a:solidFill>
-                <a:latin typeface="Cambria" pitchFamily="34" charset="0"/>
-                <a:ea typeface="Cambria" pitchFamily="34" charset="-122"/>
-                <a:cs typeface="Cambria" pitchFamily="34" charset="-120"/>
-              </a:rPr>
-              <a:t>·T·B</a:t>
-            </a:r>
-            <a:endParaRPr lang="en-US" sz="1900" dirty="0"/>
-          </a:p>
-        </p:txBody>
-      </p:sp>
-      <p:pic>
-        <p:nvPicPr>
-          <p:cNvPr id="8" name="state-space" descr="Log-scale bar chart of encoded and reachable state counts for S1 to S4">    </p:cNvPr>
-          <p:cNvPicPr>
-            <a:picLocks noChangeAspect="1"/>
-          </p:cNvPicPr>
-          <p:nvPr/>
-        </p:nvPicPr>
-        <p:blipFill>
-          <a:blip r:embed="rId1"/>
-          <a:stretch>
-            <a:fillRect/>
-          </a:stretch>
-        </p:blipFill>
-        <p:spPr>
-          <a:xfrm>
-            <a:off x="6263640" y="1325880"/>
-            <a:ext cx="5376672" cy="3049701"/>
-          </a:xfrm>
-          <a:prstGeom prst="rect">
-            <a:avLst/>
-          </a:prstGeom>
-        </p:spPr>
-      </p:pic>
-      <p:sp>
-        <p:nvSpPr>
-          <p:cNvPr id="9" name="state-caption"/>
-          <p:cNvSpPr txBox="1"/>
-          <p:nvPr/>
-        </p:nvSpPr>
-        <p:spPr>
-          <a:xfrm>
-            <a:off x="6263640" y="4604181"/>
-            <a:ext cx="5376672" cy="822960"/>
-          </a:xfrm>
-          <a:prstGeom prst="rect">
-            <a:avLst/>
-          </a:prstGeom>
-          <a:noFill/>
-          <a:ln/>
-        </p:spPr>
-        <p:txBody>
-          <a:bodyPr wrap="square" lIns="0" tIns="0" rIns="0" bIns="0" rtlCol="0" anchor="t"/>
-          <a:lstStyle/>
-          <a:p>
-            <a:pPr indent="0" marL="0">
-              <a:buNone/>
-            </a:pPr>
-            <a:r>
-              <a:rPr lang="en-US" sz="1600" dirty="0">
-                <a:solidFill>
-                  <a:schemeClr val="tx2"/>
-                </a:solidFill>
-              </a:rPr>
-              <a:t>|A| = 6 on every map. S3 is the largest: 18,468 encoded states, 2,825 reachable.</a:t>
-            </a:r>
-            <a:endParaRPr lang="en-US" sz="1600" dirty="0"/>
-          </a:p>
-        </p:txBody>
-      </p:sp>
-      <p:sp>
-        <p:nvSpPr>
-          <p:cNvPr id="25" name="Slide Number Placeholder 0"/>
-          <p:cNvSpPr>
-            <a:spLocks noGrp="1"/>
-          </p:cNvSpPr>
-          <p:nvPr>
-            <p:ph type="sldNum" sz="quarter" idx="4294967295"/>
-          </p:nvPr>
-        </p:nvSpPr>
-        <p:spPr>
-          <a:xfrm>
-            <a:off x="11091672" y="6355080"/>
-            <a:ext cx="548640" cy="274320"/>
-          </a:xfrm>
-          <a:prstGeom prst="rect">
-            <a:avLst/>
-          </a:prstGeom>
-          <a:extLst>
-            <a:ext uri="{C572A759-6A51-4108-AA02-DFA0A04FC94B}">
-              <ma14:wrappingTextBoxFlag xmlns:ma14="http://schemas.microsoft.com/office/mac/drawingml/2011/main" val="0"/>
-            </a:ext>
-          </a:extLst>
-        </p:spPr>
-        <p:txBody>
-          <a:bodyPr/>
-          <a:lstStyle>
-            <a:lvl1pPr>
-              <a:defRPr sz="1100">
-                <a:solidFill>
-                  <a:srgbClr val="737B89"/>
-                </a:solidFill>
-              </a:defRPr>
-            </a:lvl1pPr>
-          </a:lstStyle>
-          <a:p>
-            <a:pPr algn="r"/>
-            <a:fld id="{F7021451-1387-4CA6-816F-3879F97B5CBC}" type="slidenum">
-              <a:rPr b="0" lang="en-US"/>
-              <a:t>4</a:t>
-            </a:fld>
-            <a:endParaRPr lang="en-US"/>
-          </a:p>
-        </p:txBody>
-      </p:sp>
-    </p:spTree>
-  </p:cSld>
-  <p:clrMapOvr>
-    <a:masterClrMapping/>
-  </p:clrMapOvr>
-</p:sld>
-</file>
-
-<file path=ppt/slides/slide5.xml><?xml version="1.0" encoding="utf-8"?>
 <p:sld xmlns:a="http://schemas.openxmlformats.org/drawingml/2006/main" xmlns:r="http://schemas.openxmlformats.org/officeDocument/2006/relationships" xmlns:p="http://schemas.openxmlformats.org/presentationml/2006/main">
   <p:cSld name="Slide 5">
     <p:spTree>
@@ -6360,9 +7596,11 @@
       <p:sp>
         <p:nvSpPr>
           <p:cNvPr id="2" name="Text 0"/>
-          <p:cNvSpPr/>
+          <p:cNvSpPr>
+            <a:spLocks noGrp="1"/>
+          </p:cNvSpPr>
           <p:nvPr>
-            <p:ph idx="100" type="title" hasCustomPrompt="1"/>
+            <p:ph type="title" idx="100" hasCustomPrompt="1"/>
           </p:nvPr>
         </p:nvSpPr>
         <p:spPr>
@@ -6380,7 +7618,7 @@
           <a:bodyPr wrap="square" lIns="0" tIns="0" rIns="0" bIns="0" rtlCol="0" anchor="ctr"/>
           <a:lstStyle/>
           <a:p>
-            <a:pPr algn="l" indent="0" marL="0">
+            <a:pPr marL="0" indent="0" algn="l">
               <a:buNone/>
             </a:pPr>
             <a:r>
@@ -6389,7 +7627,7 @@
                   <a:schemeClr val="tx1"/>
                 </a:solidFill>
               </a:rPr>
-              <a:t>Two tabular algorithms</a:t>
+              <a:t>Three tabular algorithms</a:t>
             </a:r>
             <a:endParaRPr lang="en-US" sz="3400" dirty="0"/>
           </a:p>
@@ -6397,14 +7635,14 @@
       </p:sp>
       <p:sp>
         <p:nvSpPr>
-          <p:cNvPr id="3" name="QL-card"/>
+          <p:cNvPr id="26" name="QL-card"/>
           <p:cNvSpPr/>
           <p:nvPr/>
         </p:nvSpPr>
         <p:spPr>
           <a:xfrm>
             <a:off x="548640" y="1325880"/>
-            <a:ext cx="5394960" cy="3520440"/>
+            <a:ext cx="3496056" cy="3154680"/>
           </a:xfrm>
           <a:prstGeom prst="roundRect">
             <a:avLst>
@@ -6421,16 +7659,23 @@
             <a:prstDash val="solid"/>
           </a:ln>
         </p:spPr>
-      </p:sp>
-      <p:sp>
-        <p:nvSpPr>
-          <p:cNvPr id="4" name="QL-badge"/>
+        <p:txBody>
+          <a:bodyPr/>
+          <a:lstStyle/>
+          <a:p>
+            <a:endParaRPr lang="en-US"/>
+          </a:p>
+        </p:txBody>
+      </p:sp>
+      <p:sp>
+        <p:nvSpPr>
+          <p:cNvPr id="27" name="QL-badge"/>
           <p:cNvSpPr/>
           <p:nvPr/>
         </p:nvSpPr>
         <p:spPr>
           <a:xfrm>
-            <a:off x="868680" y="1600200"/>
+            <a:off x="822959" y="1600200"/>
             <a:ext cx="566928" cy="566928"/>
           </a:xfrm>
           <a:prstGeom prst="ellipse">
@@ -6449,7 +7694,7 @@
           <a:bodyPr wrap="square" lIns="0" tIns="0" rIns="0" bIns="0" rtlCol="0" anchor="ctr"/>
           <a:lstStyle/>
           <a:p>
-            <a:pPr algn="ctr" indent="0" marL="0">
+            <a:pPr marL="0" indent="0" algn="ctr">
               <a:buNone/>
             </a:pPr>
             <a:r>
@@ -6466,14 +7711,14 @@
       </p:sp>
       <p:sp>
         <p:nvSpPr>
-          <p:cNvPr id="5" name="QL-head"/>
+          <p:cNvPr id="28" name="QL-head"/>
           <p:cNvSpPr txBox="1"/>
           <p:nvPr/>
         </p:nvSpPr>
         <p:spPr>
           <a:xfrm>
-            <a:off x="1600200" y="1600200"/>
-            <a:ext cx="4114800" cy="566928"/>
+            <a:off x="1536192" y="1600200"/>
+            <a:ext cx="2307336" cy="566928"/>
           </a:xfrm>
           <a:prstGeom prst="rect">
             <a:avLst/>
@@ -6485,7 +7730,7 @@
           <a:bodyPr wrap="square" lIns="0" tIns="0" rIns="0" bIns="0" rtlCol="0" anchor="ctr"/>
           <a:lstStyle/>
           <a:p>
-            <a:pPr indent="0" marL="0">
+            <a:pPr marL="0" indent="0">
               <a:buNone/>
             </a:pPr>
             <a:r>
@@ -6502,14 +7747,14 @@
       </p:sp>
       <p:sp>
         <p:nvSpPr>
-          <p:cNvPr id="6" name="QL-formula"/>
+          <p:cNvPr id="29" name="QL-formula"/>
           <p:cNvSpPr txBox="1"/>
           <p:nvPr/>
         </p:nvSpPr>
         <p:spPr>
           <a:xfrm>
-            <a:off x="868680" y="2423160"/>
-            <a:ext cx="4846320" cy="914400"/>
+            <a:off x="822959" y="2395728"/>
+            <a:ext cx="2947416" cy="914400"/>
           </a:xfrm>
           <a:prstGeom prst="rect">
             <a:avLst/>
@@ -6521,14 +7766,14 @@
           <a:bodyPr wrap="square" lIns="0" tIns="0" rIns="0" bIns="0" rtlCol="0" anchor="t"/>
           <a:lstStyle/>
           <a:p>
-            <a:pPr indent="0" marL="0">
+            <a:pPr marL="0" indent="0">
               <a:lnSpc>
                 <a:spcPct val="120000"/>
               </a:lnSpc>
               <a:buNone/>
             </a:pPr>
             <a:r>
-              <a:rPr lang="en-US" sz="1800" dirty="0">
+              <a:rPr lang="en-US" sz="1500" dirty="0">
                 <a:solidFill>
                   <a:schemeClr val="tx1"/>
                 </a:solidFill>
@@ -6536,25 +7781,19 @@
                 <a:ea typeface="Cambria" pitchFamily="34" charset="-122"/>
                 <a:cs typeface="Cambria" pitchFamily="34" charset="-120"/>
               </a:rPr>
-              <a:t>Q(s,a) ← Q(s,a)</a:t>
-            </a:r>
-            <a:pPr indent="0" marL="0">
+              <a:t>Q(s,a) ← Q(s,a) + α·δ</a:t>
+            </a:r>
+            <a:endParaRPr lang="en-US" sz="1500" dirty="0"/>
+          </a:p>
+          <a:p>
+            <a:pPr marL="0" indent="0">
               <a:lnSpc>
                 <a:spcPct val="120000"/>
               </a:lnSpc>
               <a:buNone/>
             </a:pPr>
-            <a:endParaRPr lang="en-US" sz="1800" dirty="0"/>
-          </a:p>
-          <a:p>
-            <a:pPr indent="0" marL="0">
-              <a:lnSpc>
-                <a:spcPct val="120000"/>
-              </a:lnSpc>
-              <a:buNone/>
-            </a:pPr>
-            <a:r>
-              <a:rPr lang="en-US" sz="1800" dirty="0">
+            <a:r>
+              <a:rPr lang="en-US" sz="1500" dirty="0">
                 <a:solidFill>
                   <a:schemeClr val="tx1"/>
                 </a:solidFill>
@@ -6562,16 +7801,10 @@
                 <a:ea typeface="Cambria" pitchFamily="34" charset="-122"/>
                 <a:cs typeface="Cambria" pitchFamily="34" charset="-120"/>
               </a:rPr>
-              <a:t>    + α [ r + γ max</a:t>
-            </a:r>
-            <a:pPr indent="0" marL="0">
-              <a:lnSpc>
-                <a:spcPct val="120000"/>
-              </a:lnSpc>
-              <a:buNone/>
-            </a:pPr>
-            <a:r>
-              <a:rPr lang="en-US" sz="1800" baseline="-40000" dirty="0">
+              <a:t>δ = r + γ max</a:t>
+            </a:r>
+            <a:r>
+              <a:rPr lang="en-US" sz="1500" dirty="0" baseline="-40000">
                 <a:solidFill>
                   <a:schemeClr val="tx1"/>
                 </a:solidFill>
@@ -6581,14 +7814,8 @@
               </a:rPr>
               <a:t>a′</a:t>
             </a:r>
-            <a:pPr indent="0" marL="0">
-              <a:lnSpc>
-                <a:spcPct val="120000"/>
-              </a:lnSpc>
-              <a:buNone/>
-            </a:pPr>
-            <a:r>
-              <a:rPr lang="en-US" sz="1800" dirty="0">
+            <a:r>
+              <a:rPr lang="en-US" sz="1500" dirty="0">
                 <a:solidFill>
                   <a:schemeClr val="tx1"/>
                 </a:solidFill>
@@ -6596,22 +7823,22 @@
                 <a:ea typeface="Cambria" pitchFamily="34" charset="-122"/>
                 <a:cs typeface="Cambria" pitchFamily="34" charset="-120"/>
               </a:rPr>
-              <a:t> Q(s′,a′) − Q(s,a) ]</a:t>
-            </a:r>
-            <a:endParaRPr lang="en-US" sz="1800" dirty="0"/>
-          </a:p>
-        </p:txBody>
-      </p:sp>
-      <p:sp>
-        <p:nvSpPr>
-          <p:cNvPr id="7" name="QL-list"/>
+              <a:t> Q(s′,a′) − Q(s,a)</a:t>
+            </a:r>
+            <a:endParaRPr lang="en-US" sz="1500" dirty="0"/>
+          </a:p>
+        </p:txBody>
+      </p:sp>
+      <p:sp>
+        <p:nvSpPr>
+          <p:cNvPr id="30" name="QL-list"/>
           <p:cNvSpPr txBox="1"/>
           <p:nvPr/>
         </p:nvSpPr>
         <p:spPr>
           <a:xfrm>
-            <a:off x="868680" y="3611880"/>
-            <a:ext cx="4846320" cy="1097280"/>
+            <a:off x="822959" y="3429000"/>
+            <a:ext cx="2947416" cy="1325880"/>
           </a:xfrm>
           <a:prstGeom prst="rect">
             <a:avLst/>
@@ -6631,14 +7858,14 @@
               <a:buChar char="•"/>
             </a:pPr>
             <a:r>
-              <a:rPr lang="en-US" sz="1700" dirty="0">
+              <a:rPr lang="en-US" sz="1500" dirty="0">
                 <a:solidFill>
                   <a:schemeClr val="tx2"/>
                 </a:solidFill>
               </a:rPr>
-              <a:t>Updates after every step (bootstrapping)</a:t>
-            </a:r>
-            <a:endParaRPr lang="en-US" sz="1700" dirty="0"/>
+              <a:t>Off-policy: learns Q* while exploring</a:t>
+            </a:r>
+            <a:endParaRPr lang="en-US" sz="1500" dirty="0"/>
           </a:p>
           <a:p>
             <a:pPr marL="342900" indent="-342900">
@@ -6649,71 +7876,27 @@
               <a:buChar char="•"/>
             </a:pPr>
             <a:r>
-              <a:rPr lang="en-US" sz="1700" dirty="0">
+              <a:rPr lang="en-US" sz="1500" dirty="0">
                 <a:solidFill>
                   <a:schemeClr val="tx2"/>
                 </a:solidFill>
               </a:rPr>
-              <a:t>α = 0.5; two variants: Q</a:t>
-            </a:r>
-            <a:pPr indent="0" marL="0">
-              <a:buNone/>
-            </a:pPr>
-            <a:r>
-              <a:rPr lang="en-US" sz="1700" baseline="-40000" dirty="0">
-                <a:solidFill>
-                  <a:schemeClr val="tx2"/>
-                </a:solidFill>
-              </a:rPr>
-              <a:t>0</a:t>
-            </a:r>
-            <a:pPr indent="0" marL="0">
-              <a:buNone/>
-            </a:pPr>
-            <a:r>
-              <a:rPr lang="en-US" sz="1700" dirty="0">
-                <a:solidFill>
-                  <a:schemeClr val="tx2"/>
-                </a:solidFill>
-              </a:rPr>
-              <a:t> = 0 and Q</a:t>
-            </a:r>
-            <a:pPr indent="0" marL="0">
-              <a:buNone/>
-            </a:pPr>
-            <a:r>
-              <a:rPr lang="en-US" sz="1700" baseline="-40000" dirty="0">
-                <a:solidFill>
-                  <a:schemeClr val="tx2"/>
-                </a:solidFill>
-              </a:rPr>
-              <a:t>0</a:t>
-            </a:r>
-            <a:pPr indent="0" marL="0">
-              <a:buNone/>
-            </a:pPr>
-            <a:r>
-              <a:rPr lang="en-US" sz="1700" dirty="0">
-                <a:solidFill>
-                  <a:schemeClr val="tx2"/>
-                </a:solidFill>
-              </a:rPr>
-              <a:t> = 30</a:t>
-            </a:r>
-            <a:endParaRPr lang="en-US" sz="1700" dirty="0"/>
-          </a:p>
-        </p:txBody>
-      </p:sp>
-      <p:sp>
-        <p:nvSpPr>
-          <p:cNvPr id="8" name="MC-card"/>
+              <a:t>α = 1 · ε: 1 → 0.01</a:t>
+            </a:r>
+            <a:endParaRPr lang="en-US" sz="1500" dirty="0"/>
+          </a:p>
+        </p:txBody>
+      </p:sp>
+      <p:sp>
+        <p:nvSpPr>
+          <p:cNvPr id="31" name="SARSA-card"/>
           <p:cNvSpPr/>
           <p:nvPr/>
         </p:nvSpPr>
         <p:spPr>
           <a:xfrm>
-            <a:off x="6245352" y="1325880"/>
-            <a:ext cx="5394960" cy="3520440"/>
+            <a:off x="4346448" y="1325880"/>
+            <a:ext cx="3496056" cy="3154680"/>
           </a:xfrm>
           <a:prstGeom prst="roundRect">
             <a:avLst>
@@ -6730,16 +7913,255 @@
             <a:prstDash val="solid"/>
           </a:ln>
         </p:spPr>
-      </p:sp>
-      <p:sp>
-        <p:nvSpPr>
-          <p:cNvPr id="9" name="MC-badge"/>
+        <p:txBody>
+          <a:bodyPr/>
+          <a:lstStyle/>
+          <a:p>
+            <a:endParaRPr lang="en-US"/>
+          </a:p>
+        </p:txBody>
+      </p:sp>
+      <p:sp>
+        <p:nvSpPr>
+          <p:cNvPr id="32" name="SARSA-badge"/>
           <p:cNvSpPr/>
           <p:nvPr/>
         </p:nvSpPr>
         <p:spPr>
           <a:xfrm>
-            <a:off x="6565392" y="1600200"/>
+            <a:off x="4620767" y="1600200"/>
+            <a:ext cx="566928" cy="566928"/>
+          </a:xfrm>
+          <a:prstGeom prst="ellipse">
+            <a:avLst/>
+          </a:prstGeom>
+          <a:solidFill>
+            <a:schemeClr val="accent3"/>
+          </a:solidFill>
+          <a:ln>
+            <a:solidFill>
+              <a:schemeClr val="accent3"/>
+            </a:solidFill>
+          </a:ln>
+        </p:spPr>
+        <p:txBody>
+          <a:bodyPr wrap="square" lIns="0" tIns="0" rIns="0" bIns="0" rtlCol="0" anchor="ctr"/>
+          <a:lstStyle/>
+          <a:p>
+            <a:pPr marL="0" indent="0" algn="ctr">
+              <a:buNone/>
+            </a:pPr>
+            <a:r>
+              <a:rPr lang="en-US" sz="1400" b="1" dirty="0">
+                <a:solidFill>
+                  <a:schemeClr val="bg1"/>
+                </a:solidFill>
+              </a:rPr>
+              <a:t>SA</a:t>
+            </a:r>
+            <a:endParaRPr lang="en-US" sz="1400" dirty="0"/>
+          </a:p>
+        </p:txBody>
+      </p:sp>
+      <p:sp>
+        <p:nvSpPr>
+          <p:cNvPr id="33" name="SARSA-head"/>
+          <p:cNvSpPr txBox="1"/>
+          <p:nvPr/>
+        </p:nvSpPr>
+        <p:spPr>
+          <a:xfrm>
+            <a:off x="5334000" y="1600200"/>
+            <a:ext cx="2307336" cy="566928"/>
+          </a:xfrm>
+          <a:prstGeom prst="rect">
+            <a:avLst/>
+          </a:prstGeom>
+          <a:noFill/>
+          <a:ln/>
+        </p:spPr>
+        <p:txBody>
+          <a:bodyPr wrap="square" lIns="0" tIns="0" rIns="0" bIns="0" rtlCol="0" anchor="ctr"/>
+          <a:lstStyle/>
+          <a:p>
+            <a:pPr marL="0" indent="0">
+              <a:buNone/>
+            </a:pPr>
+            <a:r>
+              <a:rPr lang="en-US" sz="2200" b="1" dirty="0">
+                <a:solidFill>
+                  <a:schemeClr val="tx1"/>
+                </a:solidFill>
+              </a:rPr>
+              <a:t>SARSA</a:t>
+            </a:r>
+            <a:endParaRPr lang="en-US" sz="2200" dirty="0"/>
+          </a:p>
+        </p:txBody>
+      </p:sp>
+      <p:sp>
+        <p:nvSpPr>
+          <p:cNvPr id="34" name="SARSA-formula"/>
+          <p:cNvSpPr txBox="1"/>
+          <p:nvPr/>
+        </p:nvSpPr>
+        <p:spPr>
+          <a:xfrm>
+            <a:off x="4620767" y="2395728"/>
+            <a:ext cx="2947416" cy="914400"/>
+          </a:xfrm>
+          <a:prstGeom prst="rect">
+            <a:avLst/>
+          </a:prstGeom>
+          <a:noFill/>
+          <a:ln/>
+        </p:spPr>
+        <p:txBody>
+          <a:bodyPr wrap="square" lIns="0" tIns="0" rIns="0" bIns="0" rtlCol="0" anchor="t"/>
+          <a:lstStyle/>
+          <a:p>
+            <a:pPr marL="0" indent="0">
+              <a:lnSpc>
+                <a:spcPct val="120000"/>
+              </a:lnSpc>
+              <a:buNone/>
+            </a:pPr>
+            <a:r>
+              <a:rPr lang="en-US" sz="1500" dirty="0">
+                <a:solidFill>
+                  <a:schemeClr val="tx1"/>
+                </a:solidFill>
+                <a:latin typeface="Cambria" pitchFamily="34" charset="0"/>
+                <a:ea typeface="Cambria" pitchFamily="34" charset="-122"/>
+                <a:cs typeface="Cambria" pitchFamily="34" charset="-120"/>
+              </a:rPr>
+              <a:t>Q(s,a) ← Q(s,a) + α·δ</a:t>
+            </a:r>
+            <a:endParaRPr lang="en-US" sz="1500" dirty="0"/>
+          </a:p>
+          <a:p>
+            <a:pPr marL="0" indent="0">
+              <a:lnSpc>
+                <a:spcPct val="120000"/>
+              </a:lnSpc>
+              <a:buNone/>
+            </a:pPr>
+            <a:r>
+              <a:rPr lang="en-US" sz="1500" dirty="0">
+                <a:solidFill>
+                  <a:schemeClr val="tx1"/>
+                </a:solidFill>
+                <a:latin typeface="Cambria" pitchFamily="34" charset="0"/>
+                <a:ea typeface="Cambria" pitchFamily="34" charset="-122"/>
+                <a:cs typeface="Cambria" pitchFamily="34" charset="-120"/>
+              </a:rPr>
+              <a:t>δ = r + γ Q(s′,a′) − Q(s,a)</a:t>
+            </a:r>
+            <a:endParaRPr lang="en-US" sz="1500" dirty="0"/>
+          </a:p>
+        </p:txBody>
+      </p:sp>
+      <p:sp>
+        <p:nvSpPr>
+          <p:cNvPr id="35" name="SARSA-list"/>
+          <p:cNvSpPr txBox="1"/>
+          <p:nvPr/>
+        </p:nvSpPr>
+        <p:spPr>
+          <a:xfrm>
+            <a:off x="4620767" y="3429000"/>
+            <a:ext cx="2947416" cy="1325880"/>
+          </a:xfrm>
+          <a:prstGeom prst="rect">
+            <a:avLst/>
+          </a:prstGeom>
+          <a:noFill/>
+          <a:ln/>
+        </p:spPr>
+        <p:txBody>
+          <a:bodyPr wrap="square" lIns="0" tIns="0" rIns="0" bIns="0" rtlCol="0" anchor="t"/>
+          <a:lstStyle/>
+          <a:p>
+            <a:pPr marL="342900" indent="-342900">
+              <a:spcAft>
+                <a:spcPts val="1000"/>
+              </a:spcAft>
+              <a:buSzPct val="100000"/>
+              <a:buChar char="•"/>
+            </a:pPr>
+            <a:r>
+              <a:rPr lang="en-US" sz="1500" dirty="0">
+                <a:solidFill>
+                  <a:schemeClr val="tx2"/>
+                </a:solidFill>
+              </a:rPr>
+              <a:t>On-policy: a′ is the action it will take next</a:t>
+            </a:r>
+            <a:endParaRPr lang="en-US" sz="1500" dirty="0"/>
+          </a:p>
+          <a:p>
+            <a:pPr marL="342900" indent="-342900">
+              <a:spcAft>
+                <a:spcPts val="1000"/>
+              </a:spcAft>
+              <a:buSzPct val="100000"/>
+              <a:buChar char="•"/>
+            </a:pPr>
+            <a:r>
+              <a:rPr lang="en-US" sz="1500" dirty="0">
+                <a:solidFill>
+                  <a:schemeClr val="tx2"/>
+                </a:solidFill>
+              </a:rPr>
+              <a:t>α: 0.5 → 0.1 · ε: 1 → 10⁻⁵</a:t>
+            </a:r>
+            <a:endParaRPr lang="en-US" sz="1500" dirty="0"/>
+          </a:p>
+        </p:txBody>
+      </p:sp>
+      <p:sp>
+        <p:nvSpPr>
+          <p:cNvPr id="36" name="MC-card"/>
+          <p:cNvSpPr/>
+          <p:nvPr/>
+        </p:nvSpPr>
+        <p:spPr>
+          <a:xfrm>
+            <a:off x="8144256" y="1325880"/>
+            <a:ext cx="3496056" cy="3154680"/>
+          </a:xfrm>
+          <a:prstGeom prst="roundRect">
+            <a:avLst>
+              <a:gd name="adj" fmla="val 3117"/>
+            </a:avLst>
+          </a:prstGeom>
+          <a:solidFill>
+            <a:schemeClr val="bg2"/>
+          </a:solidFill>
+          <a:ln w="12700">
+            <a:solidFill>
+              <a:schemeClr val="bg2"/>
+            </a:solidFill>
+            <a:prstDash val="solid"/>
+          </a:ln>
+        </p:spPr>
+        <p:txBody>
+          <a:bodyPr/>
+          <a:lstStyle/>
+          <a:p>
+            <a:endParaRPr lang="en-US"/>
+          </a:p>
+        </p:txBody>
+      </p:sp>
+      <p:sp>
+        <p:nvSpPr>
+          <p:cNvPr id="37" name="MC-badge"/>
+          <p:cNvSpPr/>
+          <p:nvPr/>
+        </p:nvSpPr>
+        <p:spPr>
+          <a:xfrm>
+            <a:off x="8418576" y="1600200"/>
             <a:ext cx="566928" cy="566928"/>
           </a:xfrm>
           <a:prstGeom prst="ellipse">
@@ -6758,7 +8180,7 @@
           <a:bodyPr wrap="square" lIns="0" tIns="0" rIns="0" bIns="0" rtlCol="0" anchor="ctr"/>
           <a:lstStyle/>
           <a:p>
-            <a:pPr algn="ctr" indent="0" marL="0">
+            <a:pPr marL="0" indent="0" algn="ctr">
               <a:buNone/>
             </a:pPr>
             <a:r>
@@ -6775,14 +8197,14 @@
       </p:sp>
       <p:sp>
         <p:nvSpPr>
-          <p:cNvPr id="10" name="MC-head"/>
+          <p:cNvPr id="38" name="MC-head"/>
           <p:cNvSpPr txBox="1"/>
           <p:nvPr/>
         </p:nvSpPr>
         <p:spPr>
           <a:xfrm>
-            <a:off x="7296912" y="1600200"/>
-            <a:ext cx="4114800" cy="566928"/>
+            <a:off x="9131808" y="1600200"/>
+            <a:ext cx="2307336" cy="566928"/>
           </a:xfrm>
           <a:prstGeom prst="rect">
             <a:avLst/>
@@ -6794,7 +8216,7 @@
           <a:bodyPr wrap="square" lIns="0" tIns="0" rIns="0" bIns="0" rtlCol="0" anchor="ctr"/>
           <a:lstStyle/>
           <a:p>
-            <a:pPr indent="0" marL="0">
+            <a:pPr marL="0" indent="0">
               <a:buNone/>
             </a:pPr>
             <a:r>
@@ -6803,7 +8225,7 @@
                   <a:schemeClr val="tx1"/>
                 </a:solidFill>
               </a:rPr>
-              <a:t>First-visit Monte Carlo</a:t>
+              <a:t>Monte Carlo ES</a:t>
             </a:r>
             <a:endParaRPr lang="en-US" sz="2200" dirty="0"/>
           </a:p>
@@ -6811,14 +8233,14 @@
       </p:sp>
       <p:sp>
         <p:nvSpPr>
-          <p:cNvPr id="11" name="MC-formula"/>
+          <p:cNvPr id="39" name="MC-formula"/>
           <p:cNvSpPr txBox="1"/>
           <p:nvPr/>
         </p:nvSpPr>
         <p:spPr>
           <a:xfrm>
-            <a:off x="6565392" y="2423160"/>
-            <a:ext cx="4846320" cy="914400"/>
+            <a:off x="8418576" y="2395728"/>
+            <a:ext cx="2947416" cy="914400"/>
           </a:xfrm>
           <a:prstGeom prst="rect">
             <a:avLst/>
@@ -6830,14 +8252,14 @@
           <a:bodyPr wrap="square" lIns="0" tIns="0" rIns="0" bIns="0" rtlCol="0" anchor="t"/>
           <a:lstStyle/>
           <a:p>
-            <a:pPr indent="0" marL="0">
+            <a:pPr marL="0" indent="0">
               <a:lnSpc>
                 <a:spcPct val="120000"/>
               </a:lnSpc>
               <a:buNone/>
             </a:pPr>
             <a:r>
-              <a:rPr lang="en-US" sz="1800" dirty="0">
+              <a:rPr lang="en-US" sz="1500" dirty="0">
                 <a:solidFill>
                   <a:schemeClr val="tx1"/>
                 </a:solidFill>
@@ -6847,14 +8269,72 @@
               </a:rPr>
               <a:t>G</a:t>
             </a:r>
-            <a:pPr indent="0" marL="0">
+            <a:r>
+              <a:rPr lang="en-US" sz="1500" dirty="0" baseline="-40000">
+                <a:solidFill>
+                  <a:schemeClr val="tx1"/>
+                </a:solidFill>
+                <a:latin typeface="Cambria" pitchFamily="34" charset="0"/>
+                <a:ea typeface="Cambria" pitchFamily="34" charset="-122"/>
+                <a:cs typeface="Cambria" pitchFamily="34" charset="-120"/>
+              </a:rPr>
+              <a:t>t</a:t>
+            </a:r>
+            <a:r>
+              <a:rPr lang="en-US" sz="1500" dirty="0">
+                <a:solidFill>
+                  <a:schemeClr val="tx1"/>
+                </a:solidFill>
+                <a:latin typeface="Cambria" pitchFamily="34" charset="0"/>
+                <a:ea typeface="Cambria" pitchFamily="34" charset="-122"/>
+                <a:cs typeface="Cambria" pitchFamily="34" charset="-120"/>
+              </a:rPr>
+              <a:t> = r</a:t>
+            </a:r>
+            <a:r>
+              <a:rPr lang="en-US" sz="1500" dirty="0" baseline="-40000">
+                <a:solidFill>
+                  <a:schemeClr val="tx1"/>
+                </a:solidFill>
+                <a:latin typeface="Cambria" pitchFamily="34" charset="0"/>
+                <a:ea typeface="Cambria" pitchFamily="34" charset="-122"/>
+                <a:cs typeface="Cambria" pitchFamily="34" charset="-120"/>
+              </a:rPr>
+              <a:t>t+1</a:t>
+            </a:r>
+            <a:r>
+              <a:rPr lang="en-US" sz="1500" dirty="0">
+                <a:solidFill>
+                  <a:schemeClr val="tx1"/>
+                </a:solidFill>
+                <a:latin typeface="Cambria" pitchFamily="34" charset="0"/>
+                <a:ea typeface="Cambria" pitchFamily="34" charset="-122"/>
+                <a:cs typeface="Cambria" pitchFamily="34" charset="-120"/>
+              </a:rPr>
+              <a:t> + γ G</a:t>
+            </a:r>
+            <a:r>
+              <a:rPr lang="en-US" sz="1500" dirty="0" baseline="-40000">
+                <a:solidFill>
+                  <a:schemeClr val="tx1"/>
+                </a:solidFill>
+                <a:latin typeface="Cambria" pitchFamily="34" charset="0"/>
+                <a:ea typeface="Cambria" pitchFamily="34" charset="-122"/>
+                <a:cs typeface="Cambria" pitchFamily="34" charset="-120"/>
+              </a:rPr>
+              <a:t>t+1</a:t>
+            </a:r>
+            <a:endParaRPr lang="en-US" sz="1500" dirty="0"/>
+          </a:p>
+          <a:p>
+            <a:pPr marL="0" indent="0">
               <a:lnSpc>
                 <a:spcPct val="120000"/>
               </a:lnSpc>
               <a:buNone/>
             </a:pPr>
             <a:r>
-              <a:rPr lang="en-US" sz="1800" baseline="-40000" dirty="0">
+              <a:rPr lang="en-US" sz="1500" dirty="0">
                 <a:solidFill>
                   <a:schemeClr val="tx1"/>
                 </a:solidFill>
@@ -6862,16 +8342,10 @@
                 <a:ea typeface="Cambria" pitchFamily="34" charset="-122"/>
                 <a:cs typeface="Cambria" pitchFamily="34" charset="-120"/>
               </a:rPr>
-              <a:t>t</a:t>
-            </a:r>
-            <a:pPr indent="0" marL="0">
-              <a:lnSpc>
-                <a:spcPct val="120000"/>
-              </a:lnSpc>
-              <a:buNone/>
-            </a:pPr>
-            <a:r>
-              <a:rPr lang="en-US" sz="1800" dirty="0">
+              <a:t>Q(s,a) ← Q(s,a) + α [G</a:t>
+            </a:r>
+            <a:r>
+              <a:rPr lang="en-US" sz="1500" dirty="0" baseline="-40000">
                 <a:solidFill>
                   <a:schemeClr val="tx1"/>
                 </a:solidFill>
@@ -6879,16 +8353,10 @@
                 <a:ea typeface="Cambria" pitchFamily="34" charset="-122"/>
                 <a:cs typeface="Cambria" pitchFamily="34" charset="-120"/>
               </a:rPr>
-              <a:t> = r</a:t>
-            </a:r>
-            <a:pPr indent="0" marL="0">
-              <a:lnSpc>
-                <a:spcPct val="120000"/>
-              </a:lnSpc>
-              <a:buNone/>
-            </a:pPr>
-            <a:r>
-              <a:rPr lang="en-US" sz="1800" baseline="-40000" dirty="0">
+              <a:t>t</a:t>
+            </a:r>
+            <a:r>
+              <a:rPr lang="en-US" sz="1500" dirty="0">
                 <a:solidFill>
                   <a:schemeClr val="tx1"/>
                 </a:solidFill>
@@ -6896,116 +8364,22 @@
                 <a:ea typeface="Cambria" pitchFamily="34" charset="-122"/>
                 <a:cs typeface="Cambria" pitchFamily="34" charset="-120"/>
               </a:rPr>
-              <a:t>t+1</a:t>
-            </a:r>
-            <a:pPr indent="0" marL="0">
-              <a:lnSpc>
-                <a:spcPct val="120000"/>
-              </a:lnSpc>
-              <a:buNone/>
-            </a:pPr>
-            <a:r>
-              <a:rPr lang="en-US" sz="1800" dirty="0">
-                <a:solidFill>
-                  <a:schemeClr val="tx1"/>
-                </a:solidFill>
-                <a:latin typeface="Cambria" pitchFamily="34" charset="0"/>
-                <a:ea typeface="Cambria" pitchFamily="34" charset="-122"/>
-                <a:cs typeface="Cambria" pitchFamily="34" charset="-120"/>
-              </a:rPr>
-              <a:t> + γ G</a:t>
-            </a:r>
-            <a:pPr indent="0" marL="0">
-              <a:lnSpc>
-                <a:spcPct val="120000"/>
-              </a:lnSpc>
-              <a:buNone/>
-            </a:pPr>
-            <a:r>
-              <a:rPr lang="en-US" sz="1800" baseline="-40000" dirty="0">
-                <a:solidFill>
-                  <a:schemeClr val="tx1"/>
-                </a:solidFill>
-                <a:latin typeface="Cambria" pitchFamily="34" charset="0"/>
-                <a:ea typeface="Cambria" pitchFamily="34" charset="-122"/>
-                <a:cs typeface="Cambria" pitchFamily="34" charset="-120"/>
-              </a:rPr>
-              <a:t>t+1</a:t>
-            </a:r>
-            <a:pPr indent="0" marL="0">
-              <a:lnSpc>
-                <a:spcPct val="120000"/>
-              </a:lnSpc>
-              <a:buNone/>
-            </a:pPr>
-            <a:endParaRPr lang="en-US" sz="1800" dirty="0"/>
-          </a:p>
-          <a:p>
-            <a:pPr indent="0" marL="0">
-              <a:lnSpc>
-                <a:spcPct val="120000"/>
-              </a:lnSpc>
-              <a:buNone/>
-            </a:pPr>
-            <a:r>
-              <a:rPr lang="en-US" sz="1800" dirty="0">
-                <a:solidFill>
-                  <a:schemeClr val="tx1"/>
-                </a:solidFill>
-                <a:latin typeface="Cambria" pitchFamily="34" charset="0"/>
-                <a:ea typeface="Cambria" pitchFamily="34" charset="-122"/>
-                <a:cs typeface="Cambria" pitchFamily="34" charset="-120"/>
-              </a:rPr>
-              <a:t>Q(s,a) ← Q(s,a) + [G</a:t>
-            </a:r>
-            <a:pPr indent="0" marL="0">
-              <a:lnSpc>
-                <a:spcPct val="120000"/>
-              </a:lnSpc>
-              <a:buNone/>
-            </a:pPr>
-            <a:r>
-              <a:rPr lang="en-US" sz="1800" baseline="-40000" dirty="0">
-                <a:solidFill>
-                  <a:schemeClr val="tx1"/>
-                </a:solidFill>
-                <a:latin typeface="Cambria" pitchFamily="34" charset="0"/>
-                <a:ea typeface="Cambria" pitchFamily="34" charset="-122"/>
-                <a:cs typeface="Cambria" pitchFamily="34" charset="-120"/>
-              </a:rPr>
-              <a:t>t</a:t>
-            </a:r>
-            <a:pPr indent="0" marL="0">
-              <a:lnSpc>
-                <a:spcPct val="120000"/>
-              </a:lnSpc>
-              <a:buNone/>
-            </a:pPr>
-            <a:r>
-              <a:rPr lang="en-US" sz="1800" dirty="0">
-                <a:solidFill>
-                  <a:schemeClr val="tx1"/>
-                </a:solidFill>
-                <a:latin typeface="Cambria" pitchFamily="34" charset="0"/>
-                <a:ea typeface="Cambria" pitchFamily="34" charset="-122"/>
-                <a:cs typeface="Cambria" pitchFamily="34" charset="-120"/>
-              </a:rPr>
-              <a:t> − Q(s,a)] / N(s,a)</a:t>
-            </a:r>
-            <a:endParaRPr lang="en-US" sz="1800" dirty="0"/>
-          </a:p>
-        </p:txBody>
-      </p:sp>
-      <p:sp>
-        <p:nvSpPr>
-          <p:cNvPr id="12" name="MC-list"/>
+              <a:t> − Q(s,a)]</a:t>
+            </a:r>
+            <a:endParaRPr lang="en-US" sz="1500" dirty="0"/>
+          </a:p>
+        </p:txBody>
+      </p:sp>
+      <p:sp>
+        <p:nvSpPr>
+          <p:cNvPr id="40" name="MC-list"/>
           <p:cNvSpPr txBox="1"/>
           <p:nvPr/>
         </p:nvSpPr>
         <p:spPr>
           <a:xfrm>
-            <a:off x="6565392" y="3611880"/>
-            <a:ext cx="4846320" cy="1097280"/>
+            <a:off x="8418576" y="3429000"/>
+            <a:ext cx="2947416" cy="1325880"/>
           </a:xfrm>
           <a:prstGeom prst="rect">
             <a:avLst/>
@@ -7025,14 +8399,14 @@
               <a:buChar char="•"/>
             </a:pPr>
             <a:r>
-              <a:rPr lang="en-US" sz="1700" dirty="0">
+              <a:rPr lang="en-US" sz="1500" dirty="0">
                 <a:solidFill>
                   <a:schemeClr val="tx2"/>
                 </a:solidFill>
               </a:rPr>
-              <a:t>Updates after the whole episode</a:t>
-            </a:r>
-            <a:endParaRPr lang="en-US" sz="1700" dirty="0"/>
+              <a:t>Greedy (ε = 0): explores only through exploring starts</a:t>
+            </a:r>
+            <a:endParaRPr lang="en-US" sz="1500" dirty="0"/>
           </a:p>
           <a:p>
             <a:pPr marL="342900" indent="-342900">
@@ -7043,14 +8417,14 @@
               <a:buChar char="•"/>
             </a:pPr>
             <a:r>
-              <a:rPr lang="en-US" sz="1700" dirty="0">
+              <a:rPr lang="en-US" sz="1500" dirty="0">
                 <a:solidFill>
                   <a:schemeClr val="tx2"/>
                 </a:solidFill>
               </a:rPr>
-              <a:t>Extra run: 4× episodes, slower ε decay</a:t>
-            </a:r>
-            <a:endParaRPr lang="en-US" sz="1700" dirty="0"/>
+              <a:t>α = 1: Q = the latest return</a:t>
+            </a:r>
+            <a:endParaRPr lang="en-US" sz="1500" dirty="0"/>
           </a:p>
         </p:txBody>
       </p:sp>
@@ -7062,8 +8436,8 @@
         </p:nvSpPr>
         <p:spPr>
           <a:xfrm>
-            <a:off x="548640" y="5166360"/>
-            <a:ext cx="11091672" cy="457200"/>
+            <a:off x="548640" y="4754880"/>
+            <a:ext cx="11091672" cy="731520"/>
           </a:xfrm>
           <a:prstGeom prst="rect">
             <a:avLst/>
@@ -7075,7 +8449,7 @@
           <a:bodyPr wrap="square" lIns="0" tIns="0" rIns="0" bIns="0" rtlCol="0" anchor="t"/>
           <a:lstStyle/>
           <a:p>
-            <a:pPr indent="0" marL="0">
+            <a:pPr marL="0" indent="0">
               <a:buNone/>
             </a:pPr>
             <a:r>
@@ -7084,18 +8458,15 @@
                   <a:schemeClr val="tx1"/>
                 </a:solidFill>
               </a:rPr>
-              <a:t>Shared settings: </a:t>
-            </a:r>
-            <a:pPr indent="0" marL="0">
-              <a:buNone/>
-            </a:pPr>
+              <a:t>Shared: </a:t>
+            </a:r>
             <a:r>
               <a:rPr lang="en-US" sz="1700" dirty="0">
                 <a:solidFill>
                   <a:schemeClr val="tx2"/>
                 </a:solidFill>
               </a:rPr>
-              <a:t>ε-greedy 1.0 → 0.05 · γ = 0.99 · 5 seeds · evaluated by the greedy policy from S</a:t>
+              <a:t>exploring starts (random reachable state + random first action) · γ = 0.99 · 5 seeds · accuracy = % of start cells that reach the optimal return</a:t>
             </a:r>
             <a:endParaRPr lang="en-US" sz="1700" dirty="0"/>
           </a:p>
@@ -7121,7 +8492,7 @@
           </a:prstGeom>
           <a:extLst>
             <a:ext uri="{C572A759-6A51-4108-AA02-DFA0A04FC94B}">
-              <ma14:wrappingTextBoxFlag xmlns:ma14="http://schemas.microsoft.com/office/mac/drawingml/2011/main" val="0"/>
+              <ma14:wrappingTextBoxFlag xmlns:ma14="http://schemas.microsoft.com/office/mac/drawingml/2011/main" xmlns="" val="0"/>
             </a:ext>
           </a:extLst>
         </p:spPr>
@@ -7139,8 +8510,8 @@
           <a:p>
             <a:pPr algn="r"/>
             <a:fld id="{F7021451-1387-4CA6-816F-3879F97B5CBC}" type="slidenum">
-              <a:rPr b="0" lang="en-US"/>
-              <a:t>5</a:t>
+              <a:rPr lang="en-US" b="0"/>
+              <a:t>4</a:t>
             </a:fld>
             <a:endParaRPr lang="en-US"/>
           </a:p>
@@ -7154,7 +8525,7 @@
 </p:sld>
 </file>
 
-<file path=ppt/slides/slide6.xml><?xml version="1.0" encoding="utf-8"?>
+<file path=ppt/slides/slide5.xml><?xml version="1.0" encoding="utf-8"?>
 <p:sld xmlns:a="http://schemas.openxmlformats.org/drawingml/2006/main" xmlns:r="http://schemas.openxmlformats.org/officeDocument/2006/relationships" xmlns:p="http://schemas.openxmlformats.org/presentationml/2006/main">
   <p:cSld name="Slide 6">
     <p:spTree>
@@ -7174,9 +8545,11 @@
       <p:sp>
         <p:nvSpPr>
           <p:cNvPr id="2" name="Text 0"/>
-          <p:cNvSpPr/>
+          <p:cNvSpPr>
+            <a:spLocks noGrp="1"/>
+          </p:cNvSpPr>
           <p:nvPr>
-            <p:ph idx="100" type="title" hasCustomPrompt="1"/>
+            <p:ph type="title" idx="100" hasCustomPrompt="1"/>
           </p:nvPr>
         </p:nvSpPr>
         <p:spPr>
@@ -7194,7 +8567,7 @@
           <a:bodyPr wrap="square" lIns="0" tIns="0" rIns="0" bIns="0" rtlCol="0" anchor="ctr"/>
           <a:lstStyle/>
           <a:p>
-            <a:pPr algn="l" indent="0" marL="0">
+            <a:pPr marL="0" indent="0" algn="l">
               <a:buNone/>
             </a:pPr>
             <a:r>
@@ -7203,7 +8576,7 @@
                   <a:schemeClr val="tx1"/>
                 </a:solidFill>
               </a:rPr>
-              <a:t>Learning curves: Q-learning reaches the optimum</a:t>
+              <a:t>Accuracy: all three reach 100% on every map</a:t>
             </a:r>
             <a:endParaRPr lang="en-US" sz="3400" dirty="0"/>
           </a:p>
@@ -7211,21 +8584,21 @@
       </p:sp>
       <p:pic>
         <p:nvPicPr>
-          <p:cNvPr id="3" name="learning-curves" descr="Learning curves on the four maps: greedy policy return per episode for both Q-learning variants and Monte Carlo, 5 seeds">    </p:cNvPr>
+          <p:cNvPr id="3" name="learning-curves" descr="Learning curves on the four maps: greedy policy return per episode for both Q-learning variants and Monte Carlo, 5 seeds"/>
           <p:cNvPicPr>
             <a:picLocks noChangeAspect="1"/>
           </p:cNvPicPr>
           <p:nvPr/>
         </p:nvPicPr>
         <p:blipFill>
-          <a:blip r:embed="rId1"/>
+          <a:blip r:embed="rId3"/>
           <a:stretch>
             <a:fillRect/>
           </a:stretch>
         </p:blipFill>
         <p:spPr>
           <a:xfrm>
-            <a:off x="548640" y="1234440"/>
+            <a:off x="550278" y="1234440"/>
             <a:ext cx="7147331" cy="4937760"/>
           </a:xfrm>
           <a:prstGeom prst="rect">
@@ -7254,16 +8627,16 @@
           <a:bodyPr wrap="square" lIns="0" tIns="0" rIns="0" bIns="0" rtlCol="0" anchor="t"/>
           <a:lstStyle/>
           <a:p>
-            <a:pPr indent="0" marL="0">
+            <a:pPr marL="0" indent="0">
               <a:buNone/>
             </a:pPr>
             <a:r>
               <a:rPr lang="en-US" sz="4000" b="1" dirty="0">
                 <a:solidFill>
-                  <a:schemeClr val="accent1"/>
-                </a:solidFill>
-              </a:rPr>
-              <a:t>~17,000</a:t>
+                  <a:schemeClr val="tx1"/>
+                </a:solidFill>
+              </a:rPr>
+              <a:t>60 / 60</a:t>
             </a:r>
             <a:endParaRPr lang="en-US" sz="4000" dirty="0"/>
           </a:p>
@@ -7290,7 +8663,7 @@
           <a:bodyPr wrap="square" lIns="0" tIns="0" rIns="0" bIns="0" rtlCol="0" anchor="t"/>
           <a:lstStyle/>
           <a:p>
-            <a:pPr indent="0" marL="0">
+            <a:pPr marL="0" indent="0">
               <a:buNone/>
             </a:pPr>
             <a:r>
@@ -7299,7 +8672,7 @@
                   <a:schemeClr val="tx2"/>
                 </a:solidFill>
               </a:rPr>
-              <a:t>episodes for Q-learning (Q₀ = 30) to reach the optimum on S4</a:t>
+              <a:t>runs end at 100% accuracy (3 algorithms × 4 maps × 5 seeds)</a:t>
             </a:r>
             <a:endParaRPr lang="en-US" sz="1500" dirty="0"/>
           </a:p>
@@ -7326,7 +8699,7 @@
           <a:bodyPr wrap="square" lIns="0" tIns="0" rIns="0" bIns="0" rtlCol="0" anchor="t"/>
           <a:lstStyle/>
           <a:p>
-            <a:pPr indent="0" marL="0">
+            <a:pPr marL="0" indent="0">
               <a:buNone/>
             </a:pPr>
             <a:r>
@@ -7335,7 +8708,7 @@
                   <a:schemeClr val="accent1"/>
                 </a:solidFill>
               </a:rPr>
-              <a:t>~75,000</a:t>
+              <a:t>1.1 M</a:t>
             </a:r>
             <a:endParaRPr lang="en-US" sz="4000" dirty="0"/>
           </a:p>
@@ -7362,7 +8735,7 @@
           <a:bodyPr wrap="square" lIns="0" tIns="0" rIns="0" bIns="0" rtlCol="0" anchor="t"/>
           <a:lstStyle/>
           <a:p>
-            <a:pPr indent="0" marL="0">
+            <a:pPr marL="0" indent="0">
               <a:buNone/>
             </a:pPr>
             <a:r>
@@ -7371,7 +8744,7 @@
                   <a:schemeClr val="tx2"/>
                 </a:solidFill>
               </a:rPr>
-              <a:t>episodes on S3, the hardest map because of the deadline</a:t>
+              <a:t>episodes Q-learning needs on S4 (median), the fastest</a:t>
             </a:r>
             <a:endParaRPr lang="en-US" sz="1500" dirty="0"/>
           </a:p>
@@ -7398,16 +8771,16 @@
           <a:bodyPr wrap="square" lIns="0" tIns="0" rIns="0" bIns="0" rtlCol="0" anchor="t"/>
           <a:lstStyle/>
           <a:p>
-            <a:pPr indent="0" marL="0">
+            <a:pPr marL="0" indent="0">
               <a:buNone/>
             </a:pPr>
             <a:r>
               <a:rPr lang="en-US" sz="4000" b="1" dirty="0">
                 <a:solidFill>
-                  <a:schemeClr val="accent2"/>
-                </a:solidFill>
-              </a:rPr>
-              <a:t>−200</a:t>
+                  <a:schemeClr val="accent3"/>
+                </a:solidFill>
+              </a:rPr>
+              <a:t>3.6 M</a:t>
             </a:r>
             <a:endParaRPr lang="en-US" sz="4000" dirty="0"/>
           </a:p>
@@ -7434,7 +8807,7 @@
           <a:bodyPr wrap="square" lIns="0" tIns="0" rIns="0" bIns="0" rtlCol="0" anchor="t"/>
           <a:lstStyle/>
           <a:p>
-            <a:pPr indent="0" marL="0">
+            <a:pPr marL="0" indent="0">
               <a:buNone/>
             </a:pPr>
             <a:r>
@@ -7443,7 +8816,7 @@
                   <a:schemeClr val="tx2"/>
                 </a:solidFill>
               </a:rPr>
-              <a:t>Monte Carlo on S4: the policy loops until max_steps</a:t>
+              <a:t>episodes SARSA needs on S4, about 3× Q-learning</a:t>
             </a:r>
             <a:endParaRPr lang="en-US" sz="1500" dirty="0"/>
           </a:p>
@@ -7469,7 +8842,7 @@
           </a:prstGeom>
           <a:extLst>
             <a:ext uri="{C572A759-6A51-4108-AA02-DFA0A04FC94B}">
-              <ma14:wrappingTextBoxFlag xmlns:ma14="http://schemas.microsoft.com/office/mac/drawingml/2011/main" val="0"/>
+              <ma14:wrappingTextBoxFlag xmlns:ma14="http://schemas.microsoft.com/office/mac/drawingml/2011/main" xmlns="" val="0"/>
             </a:ext>
           </a:extLst>
         </p:spPr>
@@ -7487,8 +8860,8 @@
           <a:p>
             <a:pPr algn="r"/>
             <a:fld id="{F7021451-1387-4CA6-816F-3879F97B5CBC}" type="slidenum">
-              <a:rPr b="0" lang="en-US"/>
-              <a:t>6</a:t>
+              <a:rPr lang="en-US" b="0"/>
+              <a:t>5</a:t>
             </a:fld>
             <a:endParaRPr lang="en-US"/>
           </a:p>
@@ -7502,7 +8875,7 @@
 </p:sld>
 </file>
 
-<file path=ppt/slides/slide7.xml><?xml version="1.0" encoding="utf-8"?>
+<file path=ppt/slides/slide6.xml><?xml version="1.0" encoding="utf-8"?>
 <p:sld xmlns:a="http://schemas.openxmlformats.org/drawingml/2006/main" xmlns:r="http://schemas.openxmlformats.org/officeDocument/2006/relationships" xmlns:p="http://schemas.openxmlformats.org/presentationml/2006/main">
   <p:cSld name="Slide 7">
     <p:spTree>
@@ -7522,9 +8895,11 @@
       <p:sp>
         <p:nvSpPr>
           <p:cNvPr id="2" name="Text 0"/>
-          <p:cNvSpPr/>
+          <p:cNvSpPr>
+            <a:spLocks noGrp="1"/>
+          </p:cNvSpPr>
           <p:nvPr>
-            <p:ph idx="100" type="title" hasCustomPrompt="1"/>
+            <p:ph type="title" idx="100" hasCustomPrompt="1"/>
           </p:nvPr>
         </p:nvSpPr>
         <p:spPr>
@@ -7542,7 +8917,7 @@
           <a:bodyPr wrap="square" lIns="0" tIns="0" rIns="0" bIns="0" rtlCol="0" anchor="ctr"/>
           <a:lstStyle/>
           <a:p>
-            <a:pPr algn="l" indent="0" marL="0">
+            <a:pPr marL="0" indent="0" algn="l">
               <a:buNone/>
             </a:pPr>
             <a:r>
@@ -7551,7 +8926,7 @@
                   <a:schemeClr val="tx1"/>
                 </a:solidFill>
               </a:rPr>
-              <a:t>Final results: Q-learning optimal in 20/20 runs</a:t>
+              <a:t>Same episodes, new settings: accuracy jumps to 100%</a:t>
             </a:r>
             <a:endParaRPr lang="en-US" sz="3400" dirty="0"/>
           </a:p>
@@ -7559,22 +8934,22 @@
       </p:sp>
       <p:pic>
         <p:nvPicPr>
-          <p:cNvPr id="3" name="final-returns" descr="Final return of every seed on the four maps for both Q-learning variants, Monte Carlo and Monte Carlo 4x, against the optimum">    </p:cNvPr>
+          <p:cNvPr id="3" name="final-returns" descr="Final return of every seed on the four maps for both Q-learning variants, Monte Carlo and Monte Carlo 4x, against the optimum"/>
           <p:cNvPicPr>
             <a:picLocks noChangeAspect="1"/>
           </p:cNvPicPr>
           <p:nvPr/>
         </p:nvPicPr>
         <p:blipFill>
-          <a:blip r:embed="rId1"/>
+          <a:blip r:embed="rId3"/>
           <a:stretch>
             <a:fillRect/>
           </a:stretch>
         </p:blipFill>
         <p:spPr>
           <a:xfrm>
-            <a:off x="548640" y="1280160"/>
-            <a:ext cx="11091672" cy="3509160"/>
+            <a:off x="565280" y="1234440"/>
+            <a:ext cx="11058391" cy="3657600"/>
           </a:xfrm>
           <a:prstGeom prst="rect">
             <a:avLst/>
@@ -7583,14 +8958,14 @@
       </p:pic>
       <p:sp>
         <p:nvSpPr>
-          <p:cNvPr id="4" name="results-caption"/>
+          <p:cNvPr id="26" name="change-1"/>
           <p:cNvSpPr txBox="1"/>
           <p:nvPr/>
         </p:nvSpPr>
         <p:spPr>
           <a:xfrm>
-            <a:off x="548640" y="5063640"/>
-            <a:ext cx="11091672" cy="822960"/>
+            <a:off x="548640" y="5049653"/>
+            <a:ext cx="2567178" cy="1005840"/>
           </a:xfrm>
           <a:prstGeom prst="rect">
             <a:avLst/>
@@ -7602,40 +8977,238 @@
           <a:bodyPr wrap="square" lIns="0" tIns="0" rIns="0" bIns="0" rtlCol="0" anchor="t"/>
           <a:lstStyle/>
           <a:p>
-            <a:pPr indent="0" marL="0">
-              <a:buNone/>
-            </a:pPr>
-            <a:r>
-              <a:rPr lang="en-US" sz="1700" dirty="0">
+            <a:pPr marL="0" indent="0">
+              <a:buNone/>
+            </a:pPr>
+            <a:r>
+              <a:rPr lang="en-US" sz="1600" b="1" dirty="0">
+                <a:solidFill>
+                  <a:schemeClr val="tx1"/>
+                </a:solidFill>
+              </a:rPr>
+              <a:t>Exploring starts</a:t>
+            </a:r>
+            <a:endParaRPr lang="en-US" sz="1600" dirty="0"/>
+          </a:p>
+          <a:p>
+            <a:pPr marL="0" indent="0">
+              <a:buNone/>
+            </a:pPr>
+            <a:r>
+              <a:rPr lang="en-US" sz="1600" dirty="0">
                 <a:solidFill>
                   <a:schemeClr val="tx2"/>
                 </a:solidFill>
               </a:rPr>
-              <a:t>Bar = mean of 5 seeds, dots = individual seeds, line = optimal. </a:t>
-            </a:r>
-            <a:pPr indent="0" marL="0">
-              <a:buNone/>
-            </a:pPr>
-            <a:r>
-              <a:rPr lang="en-US" sz="1700" b="1" dirty="0">
+              <a:t>random reachable state</a:t>
+            </a:r>
+            <a:endParaRPr lang="en-US" sz="1600" dirty="0"/>
+          </a:p>
+          <a:p>
+            <a:pPr marL="0" indent="0">
+              <a:buNone/>
+            </a:pPr>
+            <a:r>
+              <a:rPr lang="en-US" sz="1600" dirty="0">
+                <a:solidFill>
+                  <a:schemeClr val="accent6"/>
+                </a:solidFill>
+              </a:rPr>
+              <a:t>+ random first action</a:t>
+            </a:r>
+            <a:endParaRPr lang="en-US" sz="1600" dirty="0"/>
+          </a:p>
+        </p:txBody>
+      </p:sp>
+      <p:sp>
+        <p:nvSpPr>
+          <p:cNvPr id="27" name="change-2"/>
+          <p:cNvSpPr txBox="1"/>
+          <p:nvPr/>
+        </p:nvSpPr>
+        <p:spPr>
+          <a:xfrm>
+            <a:off x="3390138" y="5049653"/>
+            <a:ext cx="2567178" cy="1005840"/>
+          </a:xfrm>
+          <a:prstGeom prst="rect">
+            <a:avLst/>
+          </a:prstGeom>
+          <a:noFill/>
+          <a:ln/>
+        </p:spPr>
+        <p:txBody>
+          <a:bodyPr wrap="square" lIns="0" tIns="0" rIns="0" bIns="0" rtlCol="0" anchor="t"/>
+          <a:lstStyle/>
+          <a:p>
+            <a:pPr marL="0" indent="0">
+              <a:buNone/>
+            </a:pPr>
+            <a:r>
+              <a:rPr lang="en-US" sz="1600" b="1" dirty="0">
                 <a:solidFill>
                   <a:schemeClr val="tx1"/>
                 </a:solidFill>
               </a:rPr>
-              <a:t>Monte Carlo delivers every parcel in only 12/20 runs; </a:t>
-            </a:r>
-            <a:pPr indent="0" marL="0">
-              <a:buNone/>
-            </a:pPr>
-            <a:r>
-              <a:rPr lang="en-US" sz="1700" dirty="0">
+              <a:t>ε per algorithm</a:t>
+            </a:r>
+            <a:endParaRPr lang="en-US" sz="1600" dirty="0"/>
+          </a:p>
+          <a:p>
+            <a:pPr marL="0" indent="0">
+              <a:buNone/>
+            </a:pPr>
+            <a:r>
+              <a:rPr lang="en-US" sz="1600" dirty="0">
                 <a:solidFill>
                   <a:schemeClr val="tx2"/>
                 </a:solidFill>
               </a:rPr>
-              <a:t>with 4× episodes it is optimal in 5/5 seeds on S1 but only 3/5 on S2.</a:t>
-            </a:r>
-            <a:endParaRPr lang="en-US" sz="1700" dirty="0"/>
+              <a:t>QL → 0.01, SARSA → 10⁻⁵</a:t>
+            </a:r>
+            <a:endParaRPr lang="en-US" sz="1600" dirty="0"/>
+          </a:p>
+          <a:p>
+            <a:pPr marL="0" indent="0">
+              <a:buNone/>
+            </a:pPr>
+            <a:r>
+              <a:rPr lang="en-US" sz="1600" dirty="0">
+                <a:solidFill>
+                  <a:schemeClr val="accent6"/>
+                </a:solidFill>
+              </a:rPr>
+              <a:t>MC ES: ε = 0 (greedy)</a:t>
+            </a:r>
+            <a:endParaRPr lang="en-US" sz="1600" dirty="0"/>
+          </a:p>
+        </p:txBody>
+      </p:sp>
+      <p:sp>
+        <p:nvSpPr>
+          <p:cNvPr id="28" name="change-3"/>
+          <p:cNvSpPr txBox="1"/>
+          <p:nvPr/>
+        </p:nvSpPr>
+        <p:spPr>
+          <a:xfrm>
+            <a:off x="6231636" y="5049653"/>
+            <a:ext cx="2567178" cy="1005840"/>
+          </a:xfrm>
+          <a:prstGeom prst="rect">
+            <a:avLst/>
+          </a:prstGeom>
+          <a:noFill/>
+          <a:ln/>
+        </p:spPr>
+        <p:txBody>
+          <a:bodyPr wrap="square" lIns="0" tIns="0" rIns="0" bIns="0" rtlCol="0" anchor="t"/>
+          <a:lstStyle/>
+          <a:p>
+            <a:pPr marL="0" indent="0">
+              <a:buNone/>
+            </a:pPr>
+            <a:r>
+              <a:rPr lang="en-US" sz="1600" b="1" dirty="0">
+                <a:solidFill>
+                  <a:schemeClr val="tx1"/>
+                </a:solidFill>
+              </a:rPr>
+              <a:t>Step size α</a:t>
+            </a:r>
+            <a:endParaRPr lang="en-US" sz="1600" dirty="0"/>
+          </a:p>
+          <a:p>
+            <a:pPr marL="0" indent="0">
+              <a:buNone/>
+            </a:pPr>
+            <a:r>
+              <a:rPr lang="en-US" sz="1600" dirty="0">
+                <a:solidFill>
+                  <a:schemeClr val="tx2"/>
+                </a:solidFill>
+              </a:rPr>
+              <a:t>QL 1 · SARSA 0.5 → 0.1</a:t>
+            </a:r>
+            <a:endParaRPr lang="en-US" sz="1600" dirty="0"/>
+          </a:p>
+          <a:p>
+            <a:pPr marL="0" indent="0">
+              <a:buNone/>
+            </a:pPr>
+            <a:r>
+              <a:rPr lang="en-US" sz="1600" dirty="0">
+                <a:solidFill>
+                  <a:schemeClr val="accent6"/>
+                </a:solidFill>
+              </a:rPr>
+              <a:t>MC ES 1 (latest return)</a:t>
+            </a:r>
+            <a:endParaRPr lang="en-US" sz="1600" dirty="0"/>
+          </a:p>
+        </p:txBody>
+      </p:sp>
+      <p:sp>
+        <p:nvSpPr>
+          <p:cNvPr id="29" name="change-4"/>
+          <p:cNvSpPr txBox="1"/>
+          <p:nvPr/>
+        </p:nvSpPr>
+        <p:spPr>
+          <a:xfrm>
+            <a:off x="9073134" y="5049653"/>
+            <a:ext cx="2567178" cy="1005840"/>
+          </a:xfrm>
+          <a:prstGeom prst="rect">
+            <a:avLst/>
+          </a:prstGeom>
+          <a:noFill/>
+          <a:ln/>
+        </p:spPr>
+        <p:txBody>
+          <a:bodyPr wrap="square" lIns="0" tIns="0" rIns="0" bIns="0" rtlCol="0" anchor="t"/>
+          <a:lstStyle/>
+          <a:p>
+            <a:pPr marL="0" indent="0">
+              <a:buNone/>
+            </a:pPr>
+            <a:r>
+              <a:rPr lang="en-US" sz="1600" b="1" dirty="0">
+                <a:solidFill>
+                  <a:schemeClr val="tx1"/>
+                </a:solidFill>
+              </a:rPr>
+              <a:t>More episodes</a:t>
+            </a:r>
+            <a:endParaRPr lang="en-US" sz="1600" dirty="0"/>
+          </a:p>
+          <a:p>
+            <a:pPr marL="0" indent="0">
+              <a:buNone/>
+            </a:pPr>
+            <a:r>
+              <a:rPr lang="en-US" sz="1600" dirty="0">
+                <a:solidFill>
+                  <a:schemeClr val="tx2"/>
+                </a:solidFill>
+              </a:rPr>
+              <a:t>up to 6 M on S4</a:t>
+            </a:r>
+            <a:endParaRPr lang="en-US" sz="1600" dirty="0"/>
+          </a:p>
+          <a:p>
+            <a:pPr marL="0" indent="0">
+              <a:buNone/>
+            </a:pPr>
+            <a:r>
+              <a:rPr lang="en-US" sz="1600" dirty="0">
+                <a:solidFill>
+                  <a:schemeClr val="accent6"/>
+                </a:solidFill>
+              </a:rPr>
+              <a:t>numba: about 170× faster</a:t>
+            </a:r>
+            <a:endParaRPr lang="en-US" sz="1600" dirty="0"/>
           </a:p>
         </p:txBody>
       </p:sp>
@@ -7659,7 +9232,7 @@
           </a:prstGeom>
           <a:extLst>
             <a:ext uri="{C572A759-6A51-4108-AA02-DFA0A04FC94B}">
-              <ma14:wrappingTextBoxFlag xmlns:ma14="http://schemas.microsoft.com/office/mac/drawingml/2011/main" val="0"/>
+              <ma14:wrappingTextBoxFlag xmlns:ma14="http://schemas.microsoft.com/office/mac/drawingml/2011/main" xmlns="" val="0"/>
             </a:ext>
           </a:extLst>
         </p:spPr>
@@ -7677,8 +9250,8 @@
           <a:p>
             <a:pPr algn="r"/>
             <a:fld id="{F7021451-1387-4CA6-816F-3879F97B5CBC}" type="slidenum">
-              <a:rPr b="0" lang="en-US"/>
-              <a:t>7</a:t>
+              <a:rPr lang="en-US" b="0"/>
+              <a:t>6</a:t>
             </a:fld>
             <a:endParaRPr lang="en-US"/>
           </a:p>
@@ -7692,7 +9265,7 @@
 </p:sld>
 </file>
 
-<file path=ppt/slides/slide8.xml><?xml version="1.0" encoding="utf-8"?>
+<file path=ppt/slides/slide7.xml><?xml version="1.0" encoding="utf-8"?>
 <p:sld xmlns:a="http://schemas.openxmlformats.org/drawingml/2006/main" xmlns:r="http://schemas.openxmlformats.org/officeDocument/2006/relationships" xmlns:p="http://schemas.openxmlformats.org/presentationml/2006/main">
   <p:cSld name="Slide 8">
     <p:spTree>
@@ -7712,9 +9285,11 @@
       <p:sp>
         <p:nvSpPr>
           <p:cNvPr id="2" name="Text 0"/>
-          <p:cNvSpPr/>
+          <p:cNvSpPr>
+            <a:spLocks noGrp="1"/>
+          </p:cNvSpPr>
           <p:nvPr>
-            <p:ph idx="100" type="title" hasCustomPrompt="1"/>
+            <p:ph type="title" idx="100" hasCustomPrompt="1"/>
           </p:nvPr>
         </p:nvSpPr>
         <p:spPr>
@@ -7732,7 +9307,7 @@
           <a:bodyPr wrap="square" lIns="0" tIns="0" rIns="0" bIns="0" rtlCol="0" anchor="ctr"/>
           <a:lstStyle/>
           <a:p>
-            <a:pPr algn="l" indent="0" marL="0">
+            <a:pPr marL="0" indent="0" algn="l">
               <a:buNone/>
             </a:pPr>
             <a:r>
@@ -7741,7 +9316,7 @@
                   <a:schemeClr val="tx1"/>
                 </a:solidFill>
               </a:rPr>
-              <a:t>S4 policy: the agent finds the booster cell</a:t>
+              <a:t>S4 policy: deadline first, then the booster</a:t>
             </a:r>
             <a:endParaRPr lang="en-US" sz="3400" dirty="0"/>
           </a:p>
@@ -7749,14 +9324,14 @@
       </p:sp>
       <p:pic>
         <p:nvPicPr>
-          <p:cNvPr id="3" name="policy-s4" descr="S4 policy in 7 phases: grey arrows are the greedy action in each cell, the coloured line is the path actually taken">    </p:cNvPr>
+          <p:cNvPr id="3" name="policy-s4" descr="S4 policy in 7 phases: grey arrows are the greedy action in each cell, the coloured line is the path actually taken"/>
           <p:cNvPicPr>
             <a:picLocks noChangeAspect="1"/>
           </p:cNvPicPr>
           <p:nvPr/>
         </p:nvPicPr>
         <p:blipFill>
-          <a:blip r:embed="rId1"/>
+          <a:blip r:embed="rId3"/>
           <a:stretch>
             <a:fillRect/>
           </a:stretch>
@@ -7764,7 +9339,7 @@
         <p:spPr>
           <a:xfrm>
             <a:off x="548640" y="1234440"/>
-            <a:ext cx="7587948" cy="4937760"/>
+            <a:ext cx="5207814" cy="4937760"/>
           </a:xfrm>
           <a:prstGeom prst="rect">
             <a:avLst/>
@@ -7779,8 +9354,8 @@
         </p:nvSpPr>
         <p:spPr>
           <a:xfrm>
-            <a:off x="8412480" y="1417320"/>
-            <a:ext cx="3227832" cy="3566160"/>
+            <a:off x="6167934" y="1417320"/>
+            <a:ext cx="5472377" cy="3566160"/>
           </a:xfrm>
           <a:prstGeom prst="rect">
             <a:avLst/>
@@ -7798,7 +9373,7 @@
               </a:spcAft>
               <a:buSzPct val="100000"/>
               <a:buFont typeface="+mj-lt"/>
-              <a:buAutoNum type="arabicPeriod" startAt="1"/>
+              <a:buAutoNum type="arabicPeriod"/>
             </a:pPr>
             <a:r>
               <a:rPr lang="en-US" sz="1600" dirty="0">
@@ -7806,7 +9381,7 @@
                   <a:schemeClr val="tx2"/>
                 </a:solidFill>
               </a:rPr>
-              <a:t>Go down to the ×2 cell: booster on</a:t>
+              <a:t>Pick up D in the bottom-right corner</a:t>
             </a:r>
             <a:endParaRPr lang="en-US" sz="1600" dirty="0"/>
           </a:p>
@@ -7817,7 +9392,7 @@
               </a:spcAft>
               <a:buSzPct val="100000"/>
               <a:buFont typeface="+mj-lt"/>
-              <a:buAutoNum type="arabicPeriod" startAt="1"/>
+              <a:buAutoNum type="arabicPeriod"/>
             </a:pPr>
             <a:r>
               <a:rPr lang="en-US" sz="1600" dirty="0">
@@ -7825,7 +9400,7 @@
                   <a:schemeClr val="tx2"/>
                 </a:solidFill>
               </a:rPr>
-              <a:t>Pick up C</a:t>
+              <a:t>Deliver D in the middle, before its 22-step deadline</a:t>
             </a:r>
             <a:endParaRPr lang="en-US" sz="1600" dirty="0"/>
           </a:p>
@@ -7836,7 +9411,7 @@
               </a:spcAft>
               <a:buSzPct val="100000"/>
               <a:buFont typeface="+mj-lt"/>
-              <a:buAutoNum type="arabicPeriod" startAt="1"/>
+              <a:buAutoNum type="arabicPeriod"/>
             </a:pPr>
             <a:r>
               <a:rPr lang="en-US" sz="1600" dirty="0">
@@ -7844,7 +9419,7 @@
                   <a:schemeClr val="tx2"/>
                 </a:solidFill>
               </a:rPr>
-              <a:t>Pick up A on the top row: 2 parcels</a:t>
+              <a:t>Pick up C and deliver it on the top row</a:t>
             </a:r>
             <a:endParaRPr lang="en-US" sz="1600" dirty="0"/>
           </a:p>
@@ -7855,7 +9430,7 @@
               </a:spcAft>
               <a:buSzPct val="100000"/>
               <a:buFont typeface="+mj-lt"/>
-              <a:buAutoNum type="arabicPeriod" startAt="1"/>
+              <a:buAutoNum type="arabicPeriod"/>
             </a:pPr>
             <a:r>
               <a:rPr lang="en-US" sz="1600" dirty="0">
@@ -7863,7 +9438,7 @@
                   <a:schemeClr val="tx2"/>
                 </a:solidFill>
               </a:rPr>
-              <a:t>Deliver C on the way</a:t>
+              <a:t>Go down to the ×2 cell: booster on</a:t>
             </a:r>
             <a:endParaRPr lang="en-US" sz="1600" dirty="0"/>
           </a:p>
@@ -7874,7 +9449,7 @@
               </a:spcAft>
               <a:buSzPct val="100000"/>
               <a:buFont typeface="+mj-lt"/>
-              <a:buAutoNum type="arabicPeriod" startAt="1"/>
+              <a:buAutoNum type="arabicPeriod"/>
             </a:pPr>
             <a:r>
               <a:rPr lang="en-US" sz="1600" dirty="0">
@@ -7882,7 +9457,7 @@
                   <a:schemeClr val="tx2"/>
                 </a:solidFill>
               </a:rPr>
-              <a:t>Still carrying A, so the trip continues: pick up B</a:t>
+              <a:t>Pick up A, then B: carrying 2 parcels</a:t>
             </a:r>
             <a:endParaRPr lang="en-US" sz="1600" dirty="0"/>
           </a:p>
@@ -7893,7 +9468,7 @@
               </a:spcAft>
               <a:buSzPct val="100000"/>
               <a:buFont typeface="+mj-lt"/>
-              <a:buAutoNum type="arabicPeriod" startAt="1"/>
+              <a:buAutoNum type="arabicPeriod"/>
             </a:pPr>
             <a:r>
               <a:rPr lang="en-US" sz="1600" dirty="0">
@@ -7901,7 +9476,7 @@
                   <a:schemeClr val="tx2"/>
                 </a:solidFill>
               </a:rPr>
-              <a:t>Go to the bottom corner, deliver B then A</a:t>
+              <a:t>Deliver B, then A, in the bottom-left corner</a:t>
             </a:r>
             <a:endParaRPr lang="en-US" sz="1600" dirty="0"/>
           </a:p>
@@ -7915,8 +9490,8 @@
         </p:nvSpPr>
         <p:spPr>
           <a:xfrm>
-            <a:off x="8412480" y="4480560"/>
-            <a:ext cx="3227832" cy="457200"/>
+            <a:off x="6167934" y="5120640"/>
+            <a:ext cx="5472377" cy="457200"/>
           </a:xfrm>
           <a:prstGeom prst="rect">
             <a:avLst/>
@@ -7928,7 +9503,7 @@
           <a:bodyPr wrap="square" lIns="0" tIns="0" rIns="0" bIns="0" rtlCol="0" anchor="t"/>
           <a:lstStyle/>
           <a:p>
-            <a:pPr indent="0" marL="0">
+            <a:pPr marL="0" indent="0">
               <a:buNone/>
             </a:pPr>
             <a:r>
@@ -7937,7 +9512,7 @@
                   <a:schemeClr val="tx1"/>
                 </a:solidFill>
               </a:rPr>
-              <a:t>38 steps, return 22 = optimal</a:t>
+              <a:t>67 steps, return 13 = optimal</a:t>
             </a:r>
             <a:endParaRPr lang="en-US" sz="1800" dirty="0"/>
           </a:p>
@@ -7963,7 +9538,7 @@
           </a:prstGeom>
           <a:extLst>
             <a:ext uri="{C572A759-6A51-4108-AA02-DFA0A04FC94B}">
-              <ma14:wrappingTextBoxFlag xmlns:ma14="http://schemas.microsoft.com/office/mac/drawingml/2011/main" val="0"/>
+              <ma14:wrappingTextBoxFlag xmlns:ma14="http://schemas.microsoft.com/office/mac/drawingml/2011/main" xmlns="" val="0"/>
             </a:ext>
           </a:extLst>
         </p:spPr>
@@ -7981,8 +9556,8 @@
           <a:p>
             <a:pPr algn="r"/>
             <a:fld id="{F7021451-1387-4CA6-816F-3879F97B5CBC}" type="slidenum">
-              <a:rPr b="0" lang="en-US"/>
-              <a:t>8</a:t>
+              <a:rPr lang="en-US" b="0"/>
+              <a:t>7</a:t>
             </a:fld>
             <a:endParaRPr lang="en-US"/>
           </a:p>
@@ -7996,7 +9571,7 @@
 </p:sld>
 </file>
 
-<file path=ppt/slides/slide9.xml><?xml version="1.0" encoding="utf-8"?>
+<file path=ppt/slides/slide8.xml><?xml version="1.0" encoding="utf-8"?>
 <p:sld xmlns:a="http://schemas.openxmlformats.org/drawingml/2006/main" xmlns:r="http://schemas.openxmlformats.org/officeDocument/2006/relationships" xmlns:p="http://schemas.openxmlformats.org/presentationml/2006/main">
   <p:cSld name="Slide 9">
     <p:spTree>
@@ -8016,9 +9591,11 @@
       <p:sp>
         <p:nvSpPr>
           <p:cNvPr id="2" name="Text 0"/>
-          <p:cNvSpPr/>
+          <p:cNvSpPr>
+            <a:spLocks noGrp="1"/>
+          </p:cNvSpPr>
           <p:nvPr>
-            <p:ph idx="100" type="title" hasCustomPrompt="1"/>
+            <p:ph type="title" idx="100" hasCustomPrompt="1"/>
           </p:nvPr>
         </p:nvSpPr>
         <p:spPr>
@@ -8036,7 +9613,7 @@
           <a:bodyPr wrap="square" lIns="0" tIns="0" rIns="0" bIns="0" rtlCol="0" anchor="ctr"/>
           <a:lstStyle/>
           <a:p>
-            <a:pPr algn="l" indent="0" marL="0">
+            <a:pPr marL="0" indent="0" algn="l">
               <a:buNone/>
             </a:pPr>
             <a:r>
@@ -8045,7 +9622,7 @@
                   <a:schemeClr val="tx1"/>
                 </a:solidFill>
               </a:rPr>
-              <a:t>Why does Monte Carlo fail?</a:t>
+              <a:t>Why the new settings work</a:t>
             </a:r>
             <a:endParaRPr lang="en-US" sz="3400" dirty="0"/>
           </a:p>
@@ -8053,22 +9630,22 @@
       </p:sp>
       <p:pic>
         <p:nvPicPr>
-          <p:cNvPr id="3" name="episode-length" descr="Steps per training episode: Q-learning drops quickly, Monte Carlo more slowly and stays near 200 steps on S4">    </p:cNvPr>
+          <p:cNvPr id="3" name="episode-length" descr="Steps per training episode: Q-learning drops quickly, Monte Carlo more slowly and stays near 200 steps on S4"/>
           <p:cNvPicPr>
             <a:picLocks noChangeAspect="1"/>
           </p:cNvPicPr>
           <p:nvPr/>
         </p:nvPicPr>
         <p:blipFill>
-          <a:blip r:embed="rId1"/>
+          <a:blip r:embed="rId3"/>
           <a:stretch>
             <a:fillRect/>
           </a:stretch>
         </p:blipFill>
         <p:spPr>
           <a:xfrm>
-            <a:off x="548640" y="1234440"/>
-            <a:ext cx="7147331" cy="4937760"/>
+            <a:off x="601425" y="1234440"/>
+            <a:ext cx="7045036" cy="4937760"/>
           </a:xfrm>
           <a:prstGeom prst="rect">
             <a:avLst/>
@@ -8102,7 +9679,7 @@
           <a:bodyPr wrap="square" lIns="0" tIns="0" rIns="0" bIns="0" rtlCol="0" anchor="ctr"/>
           <a:lstStyle/>
           <a:p>
-            <a:pPr algn="ctr" indent="0" marL="0">
+            <a:pPr marL="0" indent="0" algn="ctr">
               <a:buNone/>
             </a:pPr>
             <a:r>
@@ -8138,7 +9715,7 @@
           <a:bodyPr wrap="square" lIns="0" tIns="0" rIns="0" bIns="0" rtlCol="0" anchor="ctr"/>
           <a:lstStyle/>
           <a:p>
-            <a:pPr indent="0" marL="0">
+            <a:pPr marL="0" indent="0">
               <a:buNone/>
             </a:pPr>
             <a:r>
@@ -8147,7 +9724,7 @@
                   <a:schemeClr val="tx1"/>
                 </a:solidFill>
               </a:rPr>
-              <a:t>No learning signal</a:t>
+              <a:t>Exploring starts cover τ and b</a:t>
             </a:r>
             <a:endParaRPr lang="en-US" sz="1800" dirty="0"/>
           </a:p>
@@ -8174,7 +9751,7 @@
           <a:bodyPr wrap="square" lIns="0" tIns="0" rIns="0" bIns="0" rtlCol="0" anchor="t"/>
           <a:lstStyle/>
           <a:p>
-            <a:pPr indent="0" marL="0">
+            <a:pPr marL="0" indent="0">
               <a:buNone/>
             </a:pPr>
             <a:r>
@@ -8183,7 +9760,7 @@
                   <a:schemeClr val="tx2"/>
                 </a:solidFill>
               </a:rPr>
-              <a:t>A random walk rarely delivers all 3 parcels, so most returns are ≈ −max_steps (S4 stays near 200 steps)</a:t>
+              <a:t>Every (s, a) gets direct updates, even states rarely reached from τ = 0</a:t>
             </a:r>
             <a:endParaRPr lang="en-US" sz="1400" dirty="0"/>
           </a:p>
@@ -8216,7 +9793,7 @@
           <a:bodyPr wrap="square" lIns="0" tIns="0" rIns="0" bIns="0" rtlCol="0" anchor="ctr"/>
           <a:lstStyle/>
           <a:p>
-            <a:pPr algn="ctr" indent="0" marL="0">
+            <a:pPr marL="0" indent="0" algn="ctr">
               <a:buNone/>
             </a:pPr>
             <a:r>
@@ -8252,7 +9829,7 @@
           <a:bodyPr wrap="square" lIns="0" tIns="0" rIns="0" bIns="0" rtlCol="0" anchor="ctr"/>
           <a:lstStyle/>
           <a:p>
-            <a:pPr indent="0" marL="0">
+            <a:pPr marL="0" indent="0">
               <a:buNone/>
             </a:pPr>
             <a:r>
@@ -8261,7 +9838,7 @@
                   <a:schemeClr val="tx1"/>
                 </a:solidFill>
               </a:rPr>
-              <a:t>Returns are too noisy</a:t>
+              <a:t>SARSA needs ε → 0</a:t>
             </a:r>
             <a:endParaRPr lang="en-US" sz="1800" dirty="0"/>
           </a:p>
@@ -8288,7 +9865,7 @@
           <a:bodyPr wrap="square" lIns="0" tIns="0" rIns="0" bIns="0" rtlCol="0" anchor="t"/>
           <a:lstStyle/>
           <a:p>
-            <a:pPr indent="0" marL="0">
+            <a:pPr marL="0" indent="0">
               <a:buNone/>
             </a:pPr>
             <a:r>
@@ -8297,7 +9874,7 @@
                   <a:schemeClr val="tx2"/>
                 </a:solidFill>
               </a:rPr>
-              <a:t>Bumping into a wall is only 1–2 points worse than the best action; the noise is larger, so the policy loops</a:t>
+              <a:t>It learns the value of its own ε-greedy policy, so ε falls to 10⁻⁵ and α decays to 0.1</a:t>
             </a:r>
             <a:endParaRPr lang="en-US" sz="1400" dirty="0"/>
           </a:p>
@@ -8330,7 +9907,7 @@
           <a:bodyPr wrap="square" lIns="0" tIns="0" rIns="0" bIns="0" rtlCol="0" anchor="ctr"/>
           <a:lstStyle/>
           <a:p>
-            <a:pPr algn="ctr" indent="0" marL="0">
+            <a:pPr marL="0" indent="0" algn="ctr">
               <a:buNone/>
             </a:pPr>
             <a:r>
@@ -8366,7 +9943,7 @@
           <a:bodyPr wrap="square" lIns="0" tIns="0" rIns="0" bIns="0" rtlCol="0" anchor="ctr"/>
           <a:lstStyle/>
           <a:p>
-            <a:pPr indent="0" marL="0">
+            <a:pPr marL="0" indent="0">
               <a:buNone/>
             </a:pPr>
             <a:r>
@@ -8375,7 +9952,7 @@
                   <a:schemeClr val="tx1"/>
                 </a:solidFill>
               </a:rPr>
-              <a:t>1/N remembers the past</a:t>
+              <a:t>MC ES returns are exact</a:t>
             </a:r>
             <a:endParaRPr lang="en-US" sz="1800" dirty="0"/>
           </a:p>
@@ -8402,7 +9979,7 @@
           <a:bodyPr wrap="square" lIns="0" tIns="0" rIns="0" bIns="0" rtlCol="0" anchor="t"/>
           <a:lstStyle/>
           <a:p>
-            <a:pPr indent="0" marL="0">
+            <a:pPr marL="0" indent="0">
               <a:buNone/>
             </a:pPr>
             <a:r>
@@ -8411,7 +9988,7 @@
                   <a:schemeClr val="tx2"/>
                 </a:solidFill>
               </a:rPr>
-              <a:t>Returns from the early random phase drag Q down for a long time</a:t>
+              <a:t>A greedy policy in a deterministic world gives the true value in one return, so α = 1</a:t>
             </a:r>
             <a:endParaRPr lang="en-US" sz="1400" dirty="0"/>
           </a:p>
@@ -8437,7 +10014,7 @@
           </a:prstGeom>
           <a:extLst>
             <a:ext uri="{C572A759-6A51-4108-AA02-DFA0A04FC94B}">
-              <ma14:wrappingTextBoxFlag xmlns:ma14="http://schemas.microsoft.com/office/mac/drawingml/2011/main" val="0"/>
+              <ma14:wrappingTextBoxFlag xmlns:ma14="http://schemas.microsoft.com/office/mac/drawingml/2011/main" xmlns="" val="0"/>
             </a:ext>
           </a:extLst>
         </p:spPr>
@@ -8455,7 +10032,193 @@
           <a:p>
             <a:pPr algn="r"/>
             <a:fld id="{F7021451-1387-4CA6-816F-3879F97B5CBC}" type="slidenum">
-              <a:rPr b="0" lang="en-US"/>
+              <a:rPr lang="en-US" b="0"/>
+              <a:t>8</a:t>
+            </a:fld>
+            <a:endParaRPr lang="en-US"/>
+          </a:p>
+        </p:txBody>
+      </p:sp>
+    </p:spTree>
+  </p:cSld>
+  <p:clrMapOvr>
+    <a:masterClrMapping/>
+  </p:clrMapOvr>
+</p:sld>
+</file>
+
+<file path=ppt/slides/slide9.xml><?xml version="1.0" encoding="utf-8"?>
+<p:sld xmlns:a="http://schemas.openxmlformats.org/drawingml/2006/main" xmlns:r="http://schemas.openxmlformats.org/officeDocument/2006/relationships" xmlns:p="http://schemas.openxmlformats.org/presentationml/2006/main">
+  <p:cSld name="Slide 10">
+    <p:spTree>
+      <p:nvGrpSpPr>
+        <p:cNvPr id="1" name=""/>
+        <p:cNvGrpSpPr/>
+        <p:nvPr/>
+      </p:nvGrpSpPr>
+      <p:grpSpPr>
+        <a:xfrm>
+          <a:off x="0" y="0"/>
+          <a:ext cx="0" cy="0"/>
+          <a:chOff x="0" y="0"/>
+          <a:chExt cx="0" cy="0"/>
+        </a:xfrm>
+      </p:grpSpPr>
+      <p:sp>
+        <p:nvSpPr>
+          <p:cNvPr id="2" name="Text 0"/>
+          <p:cNvSpPr>
+            <a:spLocks noGrp="1"/>
+          </p:cNvSpPr>
+          <p:nvPr>
+            <p:ph type="title" idx="100" hasCustomPrompt="1"/>
+          </p:nvPr>
+        </p:nvSpPr>
+        <p:spPr>
+          <a:xfrm>
+            <a:off x="548640" y="320040"/>
+            <a:ext cx="11091672" cy="777240"/>
+          </a:xfrm>
+          <a:prstGeom prst="rect">
+            <a:avLst/>
+          </a:prstGeom>
+          <a:noFill/>
+          <a:ln/>
+        </p:spPr>
+        <p:txBody>
+          <a:bodyPr wrap="square" lIns="0" tIns="0" rIns="0" bIns="0" rtlCol="0" anchor="ctr"/>
+          <a:lstStyle/>
+          <a:p>
+            <a:pPr marL="0" indent="0" algn="l">
+              <a:buNone/>
+            </a:pPr>
+            <a:r>
+              <a:rPr lang="en-US" sz="3400" b="1" dirty="0">
+                <a:solidFill>
+                  <a:schemeClr val="tx1"/>
+                </a:solidFill>
+              </a:rPr>
+              <a:t>Reward or deadline changes the delivery order</a:t>
+            </a:r>
+            <a:endParaRPr lang="en-US" sz="3400" dirty="0"/>
+          </a:p>
+        </p:txBody>
+      </p:sp>
+      <p:pic>
+        <p:nvPicPr>
+          <p:cNvPr id="3" name="reward-deadline" descr="S3 under three configurations: the base case delivers C first, late penalty 0 and deadline 35 both deliver A first"/>
+          <p:cNvPicPr>
+            <a:picLocks noChangeAspect="1"/>
+          </p:cNvPicPr>
+          <p:nvPr/>
+        </p:nvPicPr>
+        <p:blipFill>
+          <a:blip r:embed="rId3"/>
+          <a:stretch>
+            <a:fillRect/>
+          </a:stretch>
+        </p:blipFill>
+        <p:spPr>
+          <a:xfrm>
+            <a:off x="936990" y="1234440"/>
+            <a:ext cx="10314970" cy="4160520"/>
+          </a:xfrm>
+          <a:prstGeom prst="rect">
+            <a:avLst/>
+          </a:prstGeom>
+        </p:spPr>
+      </p:pic>
+      <p:sp>
+        <p:nvSpPr>
+          <p:cNvPr id="4" name="reward-caption"/>
+          <p:cNvSpPr txBox="1"/>
+          <p:nvPr/>
+        </p:nvSpPr>
+        <p:spPr>
+          <a:xfrm>
+            <a:off x="548640" y="5623560"/>
+            <a:ext cx="11091672" cy="502920"/>
+          </a:xfrm>
+          <a:prstGeom prst="rect">
+            <a:avLst/>
+          </a:prstGeom>
+          <a:noFill/>
+          <a:ln/>
+        </p:spPr>
+        <p:txBody>
+          <a:bodyPr wrap="square" lIns="0" tIns="0" rIns="0" bIns="0" rtlCol="0" anchor="t"/>
+          <a:lstStyle/>
+          <a:p>
+            <a:pPr marL="0" indent="0">
+              <a:buNone/>
+            </a:pPr>
+            <a:r>
+              <a:rPr lang="en-US" sz="1700" dirty="0">
+                <a:solidFill>
+                  <a:schemeClr val="tx2"/>
+                </a:solidFill>
+              </a:rPr>
+              <a:t>Late penalty 30 → 0 or deadline 20 → 45: </a:t>
+            </a:r>
+            <a:r>
+              <a:rPr lang="en-US" sz="1700" b="1" dirty="0">
+                <a:solidFill>
+                  <a:schemeClr val="tx1"/>
+                </a:solidFill>
+              </a:rPr>
+              <a:t>C→B→A becomes B→A→C, 4 steps shorter</a:t>
+            </a:r>
+            <a:r>
+              <a:rPr lang="en-US" sz="1700" dirty="0">
+                <a:solidFill>
+                  <a:schemeClr val="tx2"/>
+                </a:solidFill>
+              </a:rPr>
+              <a:t> (5/5 seeds, matching the optimum).</a:t>
+            </a:r>
+            <a:endParaRPr lang="en-US" sz="1700" dirty="0"/>
+          </a:p>
+        </p:txBody>
+      </p:sp>
+      <p:sp>
+        <p:nvSpPr>
+          <p:cNvPr id="25" name="Slide Number Placeholder 0"/>
+          <p:cNvSpPr>
+            <a:spLocks noGrp="1"/>
+          </p:cNvSpPr>
+          <p:nvPr>
+            <p:ph type="sldNum" sz="quarter" idx="4294967295"/>
+          </p:nvPr>
+        </p:nvSpPr>
+        <p:spPr>
+          <a:xfrm>
+            <a:off x="11091672" y="6355080"/>
+            <a:ext cx="548640" cy="274320"/>
+          </a:xfrm>
+          <a:prstGeom prst="rect">
+            <a:avLst/>
+          </a:prstGeom>
+          <a:extLst>
+            <a:ext uri="{C572A759-6A51-4108-AA02-DFA0A04FC94B}">
+              <ma14:wrappingTextBoxFlag xmlns:ma14="http://schemas.microsoft.com/office/mac/drawingml/2011/main" xmlns="" val="0"/>
+            </a:ext>
+          </a:extLst>
+        </p:spPr>
+        <p:txBody>
+          <a:bodyPr/>
+          <a:lstStyle>
+            <a:lvl1pPr>
+              <a:defRPr sz="1100">
+                <a:solidFill>
+                  <a:srgbClr val="737B89"/>
+                </a:solidFill>
+              </a:defRPr>
+            </a:lvl1pPr>
+          </a:lstStyle>
+          <a:p>
+            <a:pPr algn="r"/>
+            <a:fld id="{F7021451-1387-4CA6-816F-3879F97B5CBC}" type="slidenum">
+              <a:rPr lang="en-US" b="0"/>
               <a:t>9</a:t>
             </a:fld>
             <a:endParaRPr lang="en-US"/>
@@ -8763,4 +10526,319 @@
     </a:ext>
   </a:extLst>
 </a:theme>
+</file>
+
+<file path=ppt/theme/theme2.xml><?xml version="1.0" encoding="utf-8"?>
+<a:theme xmlns:a="http://schemas.openxmlformats.org/drawingml/2006/main" name="Office Theme">
+  <a:themeElements>
+    <a:clrScheme name="Office">
+      <a:dk1>
+        <a:sysClr val="windowText" lastClr="000000"/>
+      </a:dk1>
+      <a:lt1>
+        <a:sysClr val="window" lastClr="FFFFFF"/>
+      </a:lt1>
+      <a:dk2>
+        <a:srgbClr val="0E2841"/>
+      </a:dk2>
+      <a:lt2>
+        <a:srgbClr val="E8E8E8"/>
+      </a:lt2>
+      <a:accent1>
+        <a:srgbClr val="156082"/>
+      </a:accent1>
+      <a:accent2>
+        <a:srgbClr val="E97132"/>
+      </a:accent2>
+      <a:accent3>
+        <a:srgbClr val="196B24"/>
+      </a:accent3>
+      <a:accent4>
+        <a:srgbClr val="0F9ED5"/>
+      </a:accent4>
+      <a:accent5>
+        <a:srgbClr val="A02B93"/>
+      </a:accent5>
+      <a:accent6>
+        <a:srgbClr val="4EA72E"/>
+      </a:accent6>
+      <a:hlink>
+        <a:srgbClr val="467886"/>
+      </a:hlink>
+      <a:folHlink>
+        <a:srgbClr val="96607D"/>
+      </a:folHlink>
+    </a:clrScheme>
+    <a:fontScheme name="Office">
+      <a:majorFont>
+        <a:latin typeface="Aptos Display" panose="02110004020202020204"/>
+        <a:ea typeface=""/>
+        <a:cs typeface=""/>
+        <a:font script="Jpan" typeface="游ゴシック Light"/>
+        <a:font script="Hang" typeface="맑은 고딕"/>
+        <a:font script="Hans" typeface="等线 Light"/>
+        <a:font script="Hant" typeface="新細明體"/>
+        <a:font script="Arab" typeface="Times New Roman"/>
+        <a:font script="Hebr" typeface="Times New Roman"/>
+        <a:font script="Thai" typeface="Angsana New"/>
+        <a:font script="Ethi" typeface="Nyala"/>
+        <a:font script="Beng" typeface="Vrinda"/>
+        <a:font script="Gujr" typeface="Shruti"/>
+        <a:font script="Khmr" typeface="MoolBoran"/>
+        <a:font script="Knda" typeface="Tunga"/>
+        <a:font script="Guru" typeface="Raavi"/>
+        <a:font script="Cans" typeface="Euphemia"/>
+        <a:font script="Cher" typeface="Plantagenet Cherokee"/>
+        <a:font script="Yiii" typeface="Microsoft Yi Baiti"/>
+        <a:font script="Tibt" typeface="Microsoft Himalaya"/>
+        <a:font script="Thaa" typeface="MV Boli"/>
+        <a:font script="Deva" typeface="Mangal"/>
+        <a:font script="Telu" typeface="Gautami"/>
+        <a:font script="Taml" typeface="Latha"/>
+        <a:font script="Syrc" typeface="Estrangelo Edessa"/>
+        <a:font script="Orya" typeface="Kalinga"/>
+        <a:font script="Mlym" typeface="Kartika"/>
+        <a:font script="Laoo" typeface="DokChampa"/>
+        <a:font script="Sinh" typeface="Iskoola Pota"/>
+        <a:font script="Mong" typeface="Mongolian Baiti"/>
+        <a:font script="Viet" typeface="Times New Roman"/>
+        <a:font script="Uigh" typeface="Microsoft Uighur"/>
+        <a:font script="Geor" typeface="Sylfaen"/>
+        <a:font script="Armn" typeface="Arial"/>
+        <a:font script="Bugi" typeface="Leelawadee UI"/>
+        <a:font script="Bopo" typeface="Microsoft JhengHei"/>
+        <a:font script="Java" typeface="Javanese Text"/>
+        <a:font script="Lisu" typeface="Segoe UI"/>
+        <a:font script="Mymr" typeface="Myanmar Text"/>
+        <a:font script="Nkoo" typeface="Ebrima"/>
+        <a:font script="Olck" typeface="Nirmala UI"/>
+        <a:font script="Osma" typeface="Ebrima"/>
+        <a:font script="Phag" typeface="Phagspa"/>
+        <a:font script="Syrn" typeface="Estrangelo Edessa"/>
+        <a:font script="Syrj" typeface="Estrangelo Edessa"/>
+        <a:font script="Syre" typeface="Estrangelo Edessa"/>
+        <a:font script="Sora" typeface="Nirmala UI"/>
+        <a:font script="Tale" typeface="Microsoft Tai Le"/>
+        <a:font script="Talu" typeface="Microsoft New Tai Lue"/>
+        <a:font script="Tfng" typeface="Ebrima"/>
+      </a:majorFont>
+      <a:minorFont>
+        <a:latin typeface="Aptos" panose="02110004020202020204"/>
+        <a:ea typeface=""/>
+        <a:cs typeface=""/>
+        <a:font script="Jpan" typeface="游ゴシック"/>
+        <a:font script="Hang" typeface="맑은 고딕"/>
+        <a:font script="Hans" typeface="等线"/>
+        <a:font script="Hant" typeface="新細明體"/>
+        <a:font script="Arab" typeface="Arial"/>
+        <a:font script="Hebr" typeface="Arial"/>
+        <a:font script="Thai" typeface="Cordia New"/>
+        <a:font script="Ethi" typeface="Nyala"/>
+        <a:font script="Beng" typeface="Vrinda"/>
+        <a:font script="Gujr" typeface="Shruti"/>
+        <a:font script="Khmr" typeface="DaunPenh"/>
+        <a:font script="Knda" typeface="Tunga"/>
+        <a:font script="Guru" typeface="Raavi"/>
+        <a:font script="Cans" typeface="Euphemia"/>
+        <a:font script="Cher" typeface="Plantagenet Cherokee"/>
+        <a:font script="Yiii" typeface="Microsoft Yi Baiti"/>
+        <a:font script="Tibt" typeface="Microsoft Himalaya"/>
+        <a:font script="Thaa" typeface="MV Boli"/>
+        <a:font script="Deva" typeface="Mangal"/>
+        <a:font script="Telu" typeface="Gautami"/>
+        <a:font script="Taml" typeface="Latha"/>
+        <a:font script="Syrc" typeface="Estrangelo Edessa"/>
+        <a:font script="Orya" typeface="Kalinga"/>
+        <a:font script="Mlym" typeface="Kartika"/>
+        <a:font script="Laoo" typeface="DokChampa"/>
+        <a:font script="Sinh" typeface="Iskoola Pota"/>
+        <a:font script="Mong" typeface="Mongolian Baiti"/>
+        <a:font script="Viet" typeface="Arial"/>
+        <a:font script="Uigh" typeface="Microsoft Uighur"/>
+        <a:font script="Geor" typeface="Sylfaen"/>
+        <a:font script="Armn" typeface="Arial"/>
+        <a:font script="Bugi" typeface="Leelawadee UI"/>
+        <a:font script="Bopo" typeface="Microsoft JhengHei"/>
+        <a:font script="Java" typeface="Javanese Text"/>
+        <a:font script="Lisu" typeface="Segoe UI"/>
+        <a:font script="Mymr" typeface="Myanmar Text"/>
+        <a:font script="Nkoo" typeface="Ebrima"/>
+        <a:font script="Olck" typeface="Nirmala UI"/>
+        <a:font script="Osma" typeface="Ebrima"/>
+        <a:font script="Phag" typeface="Phagspa"/>
+        <a:font script="Syrn" typeface="Estrangelo Edessa"/>
+        <a:font script="Syrj" typeface="Estrangelo Edessa"/>
+        <a:font script="Syre" typeface="Estrangelo Edessa"/>
+        <a:font script="Sora" typeface="Nirmala UI"/>
+        <a:font script="Tale" typeface="Microsoft Tai Le"/>
+        <a:font script="Talu" typeface="Microsoft New Tai Lue"/>
+        <a:font script="Tfng" typeface="Ebrima"/>
+      </a:minorFont>
+    </a:fontScheme>
+    <a:fmtScheme name="Office">
+      <a:fillStyleLst>
+        <a:solidFill>
+          <a:schemeClr val="phClr"/>
+        </a:solidFill>
+        <a:gradFill rotWithShape="1">
+          <a:gsLst>
+            <a:gs pos="0">
+              <a:schemeClr val="phClr">
+                <a:lumMod val="110000"/>
+                <a:satMod val="105000"/>
+                <a:tint val="67000"/>
+              </a:schemeClr>
+            </a:gs>
+            <a:gs pos="50000">
+              <a:schemeClr val="phClr">
+                <a:lumMod val="105000"/>
+                <a:satMod val="103000"/>
+                <a:tint val="73000"/>
+              </a:schemeClr>
+            </a:gs>
+            <a:gs pos="100000">
+              <a:schemeClr val="phClr">
+                <a:lumMod val="105000"/>
+                <a:satMod val="109000"/>
+                <a:tint val="81000"/>
+              </a:schemeClr>
+            </a:gs>
+          </a:gsLst>
+          <a:lin ang="5400000" scaled="0"/>
+        </a:gradFill>
+        <a:gradFill rotWithShape="1">
+          <a:gsLst>
+            <a:gs pos="0">
+              <a:schemeClr val="phClr">
+                <a:satMod val="103000"/>
+                <a:lumMod val="102000"/>
+                <a:tint val="94000"/>
+              </a:schemeClr>
+            </a:gs>
+            <a:gs pos="50000">
+              <a:schemeClr val="phClr">
+                <a:satMod val="110000"/>
+                <a:lumMod val="100000"/>
+                <a:shade val="100000"/>
+              </a:schemeClr>
+            </a:gs>
+            <a:gs pos="100000">
+              <a:schemeClr val="phClr">
+                <a:lumMod val="99000"/>
+                <a:satMod val="120000"/>
+                <a:shade val="78000"/>
+              </a:schemeClr>
+            </a:gs>
+          </a:gsLst>
+          <a:lin ang="5400000" scaled="0"/>
+        </a:gradFill>
+      </a:fillStyleLst>
+      <a:lnStyleLst>
+        <a:ln w="12700" cap="flat" cmpd="sng" algn="ctr">
+          <a:solidFill>
+            <a:schemeClr val="phClr"/>
+          </a:solidFill>
+          <a:prstDash val="solid"/>
+          <a:miter lim="800000"/>
+        </a:ln>
+        <a:ln w="19050" cap="flat" cmpd="sng" algn="ctr">
+          <a:solidFill>
+            <a:schemeClr val="phClr"/>
+          </a:solidFill>
+          <a:prstDash val="solid"/>
+          <a:miter lim="800000"/>
+        </a:ln>
+        <a:ln w="25400" cap="flat" cmpd="sng" algn="ctr">
+          <a:solidFill>
+            <a:schemeClr val="phClr"/>
+          </a:solidFill>
+          <a:prstDash val="solid"/>
+          <a:miter lim="800000"/>
+        </a:ln>
+      </a:lnStyleLst>
+      <a:effectStyleLst>
+        <a:effectStyle>
+          <a:effectLst/>
+        </a:effectStyle>
+        <a:effectStyle>
+          <a:effectLst/>
+        </a:effectStyle>
+        <a:effectStyle>
+          <a:effectLst>
+            <a:outerShdw blurRad="57150" dist="19050" dir="5400000" algn="ctr" rotWithShape="0">
+              <a:srgbClr val="000000">
+                <a:alpha val="63000"/>
+              </a:srgbClr>
+            </a:outerShdw>
+          </a:effectLst>
+        </a:effectStyle>
+      </a:effectStyleLst>
+      <a:bgFillStyleLst>
+        <a:solidFill>
+          <a:schemeClr val="phClr"/>
+        </a:solidFill>
+        <a:solidFill>
+          <a:schemeClr val="phClr">
+            <a:tint val="95000"/>
+            <a:satMod val="170000"/>
+          </a:schemeClr>
+        </a:solidFill>
+        <a:gradFill rotWithShape="1">
+          <a:gsLst>
+            <a:gs pos="0">
+              <a:schemeClr val="phClr">
+                <a:tint val="93000"/>
+                <a:satMod val="150000"/>
+                <a:shade val="98000"/>
+                <a:lumMod val="102000"/>
+              </a:schemeClr>
+            </a:gs>
+            <a:gs pos="50000">
+              <a:schemeClr val="phClr">
+                <a:tint val="98000"/>
+                <a:satMod val="130000"/>
+                <a:shade val="90000"/>
+                <a:lumMod val="103000"/>
+              </a:schemeClr>
+            </a:gs>
+            <a:gs pos="100000">
+              <a:schemeClr val="phClr">
+                <a:shade val="63000"/>
+                <a:satMod val="120000"/>
+              </a:schemeClr>
+            </a:gs>
+          </a:gsLst>
+          <a:lin ang="5400000" scaled="0"/>
+        </a:gradFill>
+      </a:bgFillStyleLst>
+    </a:fmtScheme>
+  </a:themeElements>
+  <a:objectDefaults>
+    <a:lnDef>
+      <a:spPr/>
+      <a:bodyPr/>
+      <a:lstStyle/>
+      <a:style>
+        <a:lnRef idx="2">
+          <a:schemeClr val="accent1"/>
+        </a:lnRef>
+        <a:fillRef idx="0">
+          <a:schemeClr val="accent1"/>
+        </a:fillRef>
+        <a:effectRef idx="1">
+          <a:schemeClr val="accent1"/>
+        </a:effectRef>
+        <a:fontRef idx="minor">
+          <a:schemeClr val="tx1"/>
+        </a:fontRef>
+      </a:style>
+    </a:lnDef>
+  </a:objectDefaults>
+  <a:extraClrSchemeLst/>
+  <a:extLst>
+    <a:ext uri="{05A4C25C-085E-4340-85A3-A5531E510DB2}">
+      <thm15:themeFamily xmlns:thm15="http://schemas.microsoft.com/office/thememl/2012/main" name="Office Theme" id="{2E142A2C-CD16-42D6-873A-C26D2A0506FA}" vid="{1BDDFF52-6CD6-40A5-AB3C-68EB2F1E4D0A}"/>
+    </a:ext>
+  </a:extLst>
+</a:theme>
 </file>
--- a/Nguyen_Quang_Trungg-22011211/Slides_Topic13_MultiDeliveryRobot.pptx
+++ b/Nguyen_Quang_Trungg-22011211/Slides_Topic13_MultiDeliveryRobot.pptx
@@ -16,6 +16,8 @@
     <p:sldId id="261" r:id="rId6"/>
     <p:sldId id="269" r:id="rId19"/>
     <p:sldId id="263" r:id="rId8"/>
+    <p:sldId id="271" r:id="rId21"/>
+    <p:sldId id="270" r:id="rId20"/>
     <p:sldId id="264" r:id="rId9"/>
     <p:sldId id="265" r:id="rId10"/>
     <p:sldId id="266" r:id="rId11"/>
@@ -716,6 +718,180 @@
 </p:notes>
 </file>
 
+<file path=ppt/notesSlides/notesSlide14.xml><?xml version="1.0" encoding="utf-8"?>
+<p:notes xmlns:a="http://schemas.openxmlformats.org/drawingml/2006/main" xmlns:r="http://schemas.openxmlformats.org/officeDocument/2006/relationships" xmlns:p="http://schemas.openxmlformats.org/presentationml/2006/main">
+  <p:cSld>
+    <p:spTree>
+      <p:nvGrpSpPr>
+        <p:cNvPr id="1" name=""/>
+        <p:cNvGrpSpPr/>
+        <p:nvPr/>
+      </p:nvGrpSpPr>
+      <p:grpSpPr>
+        <a:xfrm>
+          <a:off x="0" y="0"/>
+          <a:ext cx="0" cy="0"/>
+          <a:chOff x="0" y="0"/>
+          <a:chExt cx="0" cy="0"/>
+        </a:xfrm>
+      </p:grpSpPr>
+      <p:sp>
+        <p:nvSpPr>
+          <p:cNvPr id="2" name="Slide Image Placeholder 1"/>
+          <p:cNvSpPr>
+            <a:spLocks noGrp="1" noRot="1" noChangeAspect="1"/>
+          </p:cNvSpPr>
+          <p:nvPr>
+            <p:ph type="sldImg"/>
+          </p:nvPr>
+        </p:nvSpPr>
+        <p:spPr/>
+      </p:sp>
+      <p:sp>
+        <p:nvSpPr>
+          <p:cNvPr id="3" name="Notes Placeholder 2"/>
+          <p:cNvSpPr>
+            <a:spLocks noGrp="1"/>
+          </p:cNvSpPr>
+          <p:nvPr>
+            <p:ph type="body" idx="1"/>
+          </p:nvPr>
+        </p:nvSpPr>
+        <p:spPr/>
+        <p:txBody>
+          <a:bodyPr/>
+          <a:lstStyle/>
+          <a:p>
+            <a:r>
+              <a:rPr lang="en-US" dirty="0"/>
+              <a:t>Each cell is coloured by the learned value V(s), the largest Q value of that state, when the robot starts there with every parcel waiting. Darker means a higher expected return. Values rise toward the first parcel to collect. The value at S is below the optimal return because the discount factor 0.99 makes a reward collected later worth less.</a:t>
+            </a:r>
+          </a:p>
+        </p:txBody>
+      </p:sp>
+      <p:sp>
+        <p:nvSpPr>
+          <p:cNvPr id="4" name="Slide Number Placeholder 3"/>
+          <p:cNvSpPr>
+            <a:spLocks noGrp="1"/>
+          </p:cNvSpPr>
+          <p:nvPr>
+            <p:ph type="sldNum" sz="quarter" idx="10"/>
+          </p:nvPr>
+        </p:nvSpPr>
+        <p:spPr/>
+        <p:txBody>
+          <a:bodyPr/>
+          <a:lstStyle/>
+          <a:p>
+            <a:fld id="{F7021451-1387-4CA6-816F-3879F97B5CBC}" type="slidenum">
+              <a:rPr lang="en-US"/>
+              <a:t>2</a:t>
+            </a:fld>
+            <a:endParaRPr lang="en-US"/>
+          </a:p>
+        </p:txBody>
+      </p:sp>
+    </p:spTree>
+    <p:extLst>
+      <p:ext uri="{BB962C8B-B14F-4D97-AF65-F5344CB8AC3E}">
+        <p14:creationId xmlns:p14="http://schemas.microsoft.com/office/powerpoint/2010/main" val="1024086991"/>
+      </p:ext>
+    </p:extLst>
+  </p:cSld>
+  <p:clrMapOvr>
+    <a:masterClrMapping/>
+  </p:clrMapOvr>
+</p:notes>
+</file>
+
+<file path=ppt/notesSlides/notesSlide15.xml><?xml version="1.0" encoding="utf-8"?>
+<p:notes xmlns:a="http://schemas.openxmlformats.org/drawingml/2006/main" xmlns:r="http://schemas.openxmlformats.org/officeDocument/2006/relationships" xmlns:p="http://schemas.openxmlformats.org/presentationml/2006/main">
+  <p:cSld>
+    <p:spTree>
+      <p:nvGrpSpPr>
+        <p:cNvPr id="1" name=""/>
+        <p:cNvGrpSpPr/>
+        <p:nvPr/>
+      </p:nvGrpSpPr>
+      <p:grpSpPr>
+        <a:xfrm>
+          <a:off x="0" y="0"/>
+          <a:ext cx="0" cy="0"/>
+          <a:chOff x="0" y="0"/>
+          <a:chExt cx="0" cy="0"/>
+        </a:xfrm>
+      </p:grpSpPr>
+      <p:sp>
+        <p:nvSpPr>
+          <p:cNvPr id="2" name="Slide Image Placeholder 1"/>
+          <p:cNvSpPr>
+            <a:spLocks noGrp="1" noRot="1" noChangeAspect="1"/>
+          </p:cNvSpPr>
+          <p:nvPr>
+            <p:ph type="sldImg"/>
+          </p:nvPr>
+        </p:nvSpPr>
+        <p:spPr/>
+      </p:sp>
+      <p:sp>
+        <p:nvSpPr>
+          <p:cNvPr id="3" name="Notes Placeholder 2"/>
+          <p:cNvSpPr>
+            <a:spLocks noGrp="1"/>
+          </p:cNvSpPr>
+          <p:nvPr>
+            <p:ph type="body" idx="1"/>
+          </p:nvPr>
+        </p:nvSpPr>
+        <p:spPr/>
+        <p:txBody>
+          <a:bodyPr/>
+          <a:lstStyle/>
+          <a:p>
+            <a:r>
+              <a:rPr lang="en-US" dirty="0"/>
+              <a:t>The same heatmap for four of the nine phases of the S4 route; the report shows all nine. Within a phase the colour grows toward the current target, which is why the greedy robot follows the darker cells. In phase 2 the robot carries D with 15 of its 22 steps used: from cells far from D's drop cell the deadline can no longer be met, so the value drops below zero. In phase 8 the robot carries A and B together, so almost every cell is dark.</a:t>
+            </a:r>
+          </a:p>
+        </p:txBody>
+      </p:sp>
+      <p:sp>
+        <p:nvSpPr>
+          <p:cNvPr id="4" name="Slide Number Placeholder 3"/>
+          <p:cNvSpPr>
+            <a:spLocks noGrp="1"/>
+          </p:cNvSpPr>
+          <p:nvPr>
+            <p:ph type="sldNum" sz="quarter" idx="10"/>
+          </p:nvPr>
+        </p:nvSpPr>
+        <p:spPr/>
+        <p:txBody>
+          <a:bodyPr/>
+          <a:lstStyle/>
+          <a:p>
+            <a:fld id="{F7021451-1387-4CA6-816F-3879F97B5CBC}" type="slidenum">
+              <a:rPr lang="en-US"/>
+              <a:t>2</a:t>
+            </a:fld>
+            <a:endParaRPr lang="en-US"/>
+          </a:p>
+        </p:txBody>
+      </p:sp>
+    </p:spTree>
+    <p:extLst>
+      <p:ext uri="{BB962C8B-B14F-4D97-AF65-F5344CB8AC3E}">
+        <p14:creationId xmlns:p14="http://schemas.microsoft.com/office/powerpoint/2010/main" val="1024086991"/>
+      </p:ext>
+    </p:extLst>
+  </p:cSld>
+  <p:clrMapOvr>
+    <a:masterClrMapping/>
+  </p:clrMapOvr>
+</p:notes>
+</file>
+
 <file path=ppt/notesSlides/notesSlide2.xml><?xml version="1.0" encoding="utf-8"?>
 <p:notes xmlns:a="http://schemas.openxmlformats.org/drawingml/2006/main" xmlns:r="http://schemas.openxmlformats.org/officeDocument/2006/relationships" xmlns:p="http://schemas.openxmlformats.org/presentationml/2006/main">
   <p:cSld>
@@ -6106,6 +6282,444 @@
             <a:fld id="{F7021451-1387-4CA6-816F-3879F97B5CBC}" type="slidenum">
               <a:rPr lang="en-US" b="0"/>
               <a:t>2</a:t>
+            </a:fld>
+            <a:endParaRPr lang="en-US"/>
+          </a:p>
+        </p:txBody>
+      </p:sp>
+    </p:spTree>
+  </p:cSld>
+  <p:clrMapOvr>
+    <a:masterClrMapping/>
+  </p:clrMapOvr>
+</p:sld>
+</file>
+
+<file path=ppt/slides/slide14.xml><?xml version="1.0" encoding="utf-8"?>
+<p:sld xmlns:a="http://schemas.openxmlformats.org/drawingml/2006/main" xmlns:r="http://schemas.openxmlformats.org/officeDocument/2006/relationships" xmlns:p="http://schemas.openxmlformats.org/presentationml/2006/main">
+  <p:cSld name="Slide 8">
+    <p:spTree>
+      <p:nvGrpSpPr>
+        <p:cNvPr id="1" name=""/>
+        <p:cNvGrpSpPr/>
+        <p:nvPr/>
+      </p:nvGrpSpPr>
+      <p:grpSpPr>
+        <a:xfrm>
+          <a:off x="0" y="0"/>
+          <a:ext cx="0" cy="0"/>
+          <a:chOff x="0" y="0"/>
+          <a:chExt cx="0" cy="0"/>
+        </a:xfrm>
+      </p:grpSpPr>
+      <p:sp>
+        <p:nvSpPr>
+          <p:cNvPr id="2" name="Text 0"/>
+          <p:cNvSpPr>
+            <a:spLocks noGrp="1"/>
+          </p:cNvSpPr>
+          <p:nvPr>
+            <p:ph type="title" idx="100" hasCustomPrompt="1"/>
+          </p:nvPr>
+        </p:nvSpPr>
+        <p:spPr>
+          <a:xfrm>
+            <a:off x="548640" y="320040"/>
+            <a:ext cx="11091672" cy="777240"/>
+          </a:xfrm>
+          <a:prstGeom prst="rect">
+            <a:avLst/>
+          </a:prstGeom>
+          <a:noFill/>
+          <a:ln/>
+        </p:spPr>
+        <p:txBody>
+          <a:bodyPr wrap="square" lIns="0" tIns="0" rIns="0" bIns="0" rtlCol="0" anchor="ctr"/>
+          <a:lstStyle/>
+          <a:p>
+            <a:pPr marL="0" indent="0" algn="l">
+              <a:buNone/>
+            </a:pPr>
+            <a:r>
+              <a:rPr lang="en-US" sz="3400" b="1" dirty="0">
+                <a:solidFill>
+                  <a:schemeClr val="tx1"/>
+                </a:solidFill>
+              </a:rPr>
+              <a:t>S4 values per phase: the deadline becomes a cliff</a:t>
+            </a:r>
+            <a:endParaRPr lang="en-US" sz="3400" dirty="0"/>
+          </a:p>
+        </p:txBody>
+      </p:sp>
+      <p:pic>
+        <p:nvPicPr>
+          <p:cNvPr id="3" name="value-s4" descr="value_S4_slide.png"/>
+          <p:cNvPicPr>
+            <a:picLocks noChangeAspect="1"/>
+          </p:cNvPicPr>
+          <p:nvPr/>
+        </p:nvPicPr>
+        <p:blipFill>
+          <a:blip r:embed="rId3"/>
+          <a:stretch>
+            <a:fillRect/>
+          </a:stretch>
+        </p:blipFill>
+        <p:spPr>
+          <a:xfrm>
+            <a:off x="548640" y="1188720"/>
+            <a:ext cx="4412347" cy="5029200"/>
+          </a:xfrm>
+          <a:prstGeom prst="rect">
+            <a:avLst/>
+          </a:prstGeom>
+        </p:spPr>
+      </p:pic>
+      <p:sp>
+        <p:nvSpPr>
+          <p:cNvPr id="4" name="value-points"/>
+          <p:cNvSpPr txBox="1"/>
+          <p:nvPr/>
+        </p:nvSpPr>
+        <p:spPr>
+          <a:xfrm>
+            <a:off x="6167934" y="1417320"/>
+            <a:ext cx="5472377" cy="3566160"/>
+          </a:xfrm>
+          <a:prstGeom prst="rect">
+            <a:avLst/>
+          </a:prstGeom>
+          <a:noFill/>
+          <a:ln/>
+        </p:spPr>
+        <p:txBody>
+          <a:bodyPr wrap="square" lIns="0" tIns="0" rIns="0" bIns="0" rtlCol="0" anchor="t"/>
+          <a:lstStyle/>
+          <a:p>
+            <a:pPr marL="342900" indent="-342900">
+              <a:spcAft>
+                <a:spcPts val="1000"/>
+              </a:spcAft>
+              <a:buSzPct val="100000"/>
+              <a:buFont typeface="+mj-lt"/>
+              <a:buAutoNum type="arabicPeriod"/>
+            </a:pPr>
+            <a:r>
+              <a:rPr lang="en-US" sz="1600" dirty="0">
+                <a:solidFill>
+                  <a:schemeClr val="tx2"/>
+                </a:solidFill>
+              </a:rPr>
+              <a:t>Four of the nine phases of the greedy route; the black line is the robot's path</a:t>
+            </a:r>
+            <a:endParaRPr lang="en-US" sz="1600" dirty="0"/>
+          </a:p>
+          <a:p>
+            <a:pPr marL="342900" indent="-342900">
+              <a:spcAft>
+                <a:spcPts val="1000"/>
+              </a:spcAft>
+              <a:buSzPct val="100000"/>
+              <a:buFont typeface="+mj-lt"/>
+              <a:buAutoNum type="arabicPeriod"/>
+            </a:pPr>
+            <a:r>
+              <a:rPr lang="en-US" sz="1600" dirty="0">
+                <a:solidFill>
+                  <a:schemeClr val="tx2"/>
+                </a:solidFill>
+              </a:rPr>
+              <a:t>Cells near the current target are darker, so the robot walks toward darker cells</a:t>
+            </a:r>
+            <a:endParaRPr lang="en-US" sz="1600" dirty="0"/>
+          </a:p>
+          <a:p>
+            <a:pPr marL="342900" indent="-342900">
+              <a:spcAft>
+                <a:spcPts val="1000"/>
+              </a:spcAft>
+              <a:buSzPct val="100000"/>
+              <a:buFont typeface="+mj-lt"/>
+              <a:buAutoNum type="arabicPeriod"/>
+            </a:pPr>
+            <a:r>
+              <a:rPr lang="en-US" sz="1600" dirty="0">
+                <a:solidFill>
+                  <a:schemeClr val="tx2"/>
+                </a:solidFill>
+              </a:rPr>
+              <a:t>Phase 2 (carrying D, τ = 15): cells far from D's drop fall to about −11, too late for the deadline</a:t>
+            </a:r>
+            <a:endParaRPr lang="en-US" sz="1600" dirty="0"/>
+          </a:p>
+          <a:p>
+            <a:pPr marL="342900" indent="-342900">
+              <a:spcAft>
+                <a:spcPts val="1000"/>
+              </a:spcAft>
+              <a:buSzPct val="100000"/>
+              <a:buFont typeface="+mj-lt"/>
+              <a:buAutoNum type="arabicPeriod"/>
+            </a:pPr>
+            <a:r>
+              <a:rPr lang="en-US" sz="1600" dirty="0">
+                <a:solidFill>
+                  <a:schemeClr val="tx2"/>
+                </a:solidFill>
+              </a:rPr>
+              <a:t>Phase 8 (A + B with the booster): the whole map is dark, two +20 rewards are close</a:t>
+            </a:r>
+            <a:endParaRPr lang="en-US" sz="1600" dirty="0"/>
+          </a:p>
+        </p:txBody>
+      </p:sp>
+      <p:sp>
+        <p:nvSpPr>
+          <p:cNvPr id="5" name="value-result"/>
+          <p:cNvSpPr txBox="1"/>
+          <p:nvPr/>
+        </p:nvSpPr>
+        <p:spPr>
+          <a:xfrm>
+            <a:off x="6167934" y="5120640"/>
+            <a:ext cx="5472377" cy="457200"/>
+          </a:xfrm>
+          <a:prstGeom prst="rect">
+            <a:avLst/>
+          </a:prstGeom>
+          <a:noFill/>
+          <a:ln/>
+        </p:spPr>
+        <p:txBody>
+          <a:bodyPr wrap="square" lIns="0" tIns="0" rIns="0" bIns="0" rtlCol="0" anchor="t"/>
+          <a:lstStyle/>
+          <a:p>
+            <a:pPr marL="0" indent="0">
+              <a:buNone/>
+            </a:pPr>
+            <a:r>
+              <a:rPr lang="en-US" sz="1800" b="1" dirty="0">
+                <a:solidFill>
+                  <a:schemeClr val="tx1"/>
+                </a:solidFill>
+              </a:rPr>
+              <a:t>Deadline and booster show up in the values</a:t>
+            </a:r>
+            <a:endParaRPr lang="en-US" sz="1800" dirty="0"/>
+          </a:p>
+        </p:txBody>
+      </p:sp>
+      <p:sp>
+        <p:nvSpPr>
+          <p:cNvPr id="25" name="Slide Number Placeholder 0"/>
+          <p:cNvSpPr>
+            <a:spLocks noGrp="1"/>
+          </p:cNvSpPr>
+          <p:nvPr>
+            <p:ph type="sldNum" sz="quarter" idx="4294967295"/>
+          </p:nvPr>
+        </p:nvSpPr>
+        <p:spPr>
+          <a:xfrm>
+            <a:off x="11091672" y="6355080"/>
+            <a:ext cx="548640" cy="274320"/>
+          </a:xfrm>
+          <a:prstGeom prst="rect">
+            <a:avLst/>
+          </a:prstGeom>
+          <a:extLst>
+            <a:ext uri="{C572A759-6A51-4108-AA02-DFA0A04FC94B}">
+              <ma14:wrappingTextBoxFlag xmlns:ma14="http://schemas.microsoft.com/office/mac/drawingml/2011/main" xmlns="" val="0"/>
+            </a:ext>
+          </a:extLst>
+        </p:spPr>
+        <p:txBody>
+          <a:bodyPr/>
+          <a:lstStyle>
+            <a:lvl1pPr>
+              <a:defRPr sz="1100">
+                <a:solidFill>
+                  <a:srgbClr val="737B89"/>
+                </a:solidFill>
+              </a:defRPr>
+            </a:lvl1pPr>
+          </a:lstStyle>
+          <a:p>
+            <a:pPr algn="r"/>
+            <a:fld id="{F7021451-1387-4CA6-816F-3879F97B5CBC}" type="slidenum">
+              <a:rPr lang="en-US" b="0"/>
+              <a:t>7</a:t>
+            </a:fld>
+            <a:endParaRPr lang="en-US"/>
+          </a:p>
+        </p:txBody>
+      </p:sp>
+    </p:spTree>
+  </p:cSld>
+  <p:clrMapOvr>
+    <a:masterClrMapping/>
+  </p:clrMapOvr>
+</p:sld>
+</file>
+
+<file path=ppt/slides/slide15.xml><?xml version="1.0" encoding="utf-8"?>
+<p:sld xmlns:a="http://schemas.openxmlformats.org/drawingml/2006/main" xmlns:r="http://schemas.openxmlformats.org/officeDocument/2006/relationships" xmlns:p="http://schemas.openxmlformats.org/presentationml/2006/main">
+  <p:cSld name="Slide 10">
+    <p:spTree>
+      <p:nvGrpSpPr>
+        <p:cNvPr id="1" name=""/>
+        <p:cNvGrpSpPr/>
+        <p:nvPr/>
+      </p:nvGrpSpPr>
+      <p:grpSpPr>
+        <a:xfrm>
+          <a:off x="0" y="0"/>
+          <a:ext cx="0" cy="0"/>
+          <a:chOff x="0" y="0"/>
+          <a:chExt cx="0" cy="0"/>
+        </a:xfrm>
+      </p:grpSpPr>
+      <p:sp>
+        <p:nvSpPr>
+          <p:cNvPr id="2" name="Text 0"/>
+          <p:cNvSpPr>
+            <a:spLocks noGrp="1"/>
+          </p:cNvSpPr>
+          <p:nvPr>
+            <p:ph type="title" idx="100" hasCustomPrompt="1"/>
+          </p:nvPr>
+        </p:nvSpPr>
+        <p:spPr>
+          <a:xfrm>
+            <a:off x="548640" y="320040"/>
+            <a:ext cx="11091672" cy="777240"/>
+          </a:xfrm>
+          <a:prstGeom prst="rect">
+            <a:avLst/>
+          </a:prstGeom>
+          <a:noFill/>
+          <a:ln/>
+        </p:spPr>
+        <p:txBody>
+          <a:bodyPr wrap="square" lIns="0" tIns="0" rIns="0" bIns="0" rtlCol="0" anchor="ctr"/>
+          <a:lstStyle/>
+          <a:p>
+            <a:pPr marL="0" indent="0" algn="l">
+              <a:buNone/>
+            </a:pPr>
+            <a:r>
+              <a:rPr lang="en-US" sz="3400" b="1" dirty="0">
+                <a:solidFill>
+                  <a:schemeClr val="tx1"/>
+                </a:solidFill>
+              </a:rPr>
+              <a:t>Learned values: darker cells promise a higher return</a:t>
+            </a:r>
+            <a:endParaRPr lang="en-US" sz="3400" dirty="0"/>
+          </a:p>
+        </p:txBody>
+      </p:sp>
+      <p:pic>
+        <p:nvPicPr>
+          <p:cNvPr id="3" name="value-start" descr="value_start.png"/>
+          <p:cNvPicPr>
+            <a:picLocks noChangeAspect="1"/>
+          </p:cNvPicPr>
+          <p:nvPr/>
+        </p:nvPicPr>
+        <p:blipFill>
+          <a:blip r:embed="rId3"/>
+          <a:stretch>
+            <a:fillRect/>
+          </a:stretch>
+        </p:blipFill>
+        <p:spPr>
+          <a:xfrm>
+            <a:off x="548640" y="1202130"/>
+            <a:ext cx="11091672" cy="4316579"/>
+          </a:xfrm>
+          <a:prstGeom prst="rect">
+            <a:avLst/>
+          </a:prstGeom>
+        </p:spPr>
+      </p:pic>
+      <p:sp>
+        <p:nvSpPr>
+          <p:cNvPr id="4" name="value-caption"/>
+          <p:cNvSpPr txBox="1"/>
+          <p:nvPr/>
+        </p:nvSpPr>
+        <p:spPr>
+          <a:xfrm>
+            <a:off x="548640" y="5623560"/>
+            <a:ext cx="11091672" cy="502920"/>
+          </a:xfrm>
+          <a:prstGeom prst="rect">
+            <a:avLst/>
+          </a:prstGeom>
+          <a:noFill/>
+          <a:ln/>
+        </p:spPr>
+        <p:txBody>
+          <a:bodyPr wrap="square" lIns="0" tIns="0" rIns="0" bIns="0" rtlCol="0" anchor="t"/>
+          <a:lstStyle/>
+          <a:p>
+            <a:pPr marL="0" indent="0">
+              <a:buNone/>
+            </a:pPr>
+            <a:r>
+              <a:rPr lang="en-US" sz="1700" dirty="0">
+                <a:solidFill>
+                  <a:schemeClr val="tx2"/>
+                </a:solidFill>
+              </a:rPr>
+              <a:t>V(s) = max Q(s, a) when the robot starts in a cell. V at S (13.7 / 17.8 / 8.6 / 2.5) is below the optimal return (18 / 24 / 16 / 13) because γ = 0.99 discounts late rewards.</a:t>
+            </a:r>
+            <a:endParaRPr lang="en-US" sz="1700" dirty="0"/>
+          </a:p>
+        </p:txBody>
+      </p:sp>
+      <p:sp>
+        <p:nvSpPr>
+          <p:cNvPr id="25" name="Slide Number Placeholder 0"/>
+          <p:cNvSpPr>
+            <a:spLocks noGrp="1"/>
+          </p:cNvSpPr>
+          <p:nvPr>
+            <p:ph type="sldNum" sz="quarter" idx="4294967295"/>
+          </p:nvPr>
+        </p:nvSpPr>
+        <p:spPr>
+          <a:xfrm>
+            <a:off x="11091672" y="6355080"/>
+            <a:ext cx="548640" cy="274320"/>
+          </a:xfrm>
+          <a:prstGeom prst="rect">
+            <a:avLst/>
+          </a:prstGeom>
+          <a:extLst>
+            <a:ext uri="{C572A759-6A51-4108-AA02-DFA0A04FC94B}">
+              <ma14:wrappingTextBoxFlag xmlns:ma14="http://schemas.microsoft.com/office/mac/drawingml/2011/main" xmlns="" val="0"/>
+            </a:ext>
+          </a:extLst>
+        </p:spPr>
+        <p:txBody>
+          <a:bodyPr/>
+          <a:lstStyle>
+            <a:lvl1pPr>
+              <a:defRPr sz="1100">
+                <a:solidFill>
+                  <a:srgbClr val="737B89"/>
+                </a:solidFill>
+              </a:defRPr>
+            </a:lvl1pPr>
+          </a:lstStyle>
+          <a:p>
+            <a:pPr algn="r"/>
+            <a:fld id="{F7021451-1387-4CA6-816F-3879F97B5CBC}" type="slidenum">
+              <a:rPr lang="en-US" b="0"/>
+              <a:t>9</a:t>
             </a:fld>
             <a:endParaRPr lang="en-US"/>
           </a:p>

--- a/Nguyen_Quang_Trungg-22011211/Slides_Topic13_MultiDeliveryRobot.pptx
+++ b/Nguyen_Quang_Trungg-22011211/Slides_Topic13_MultiDeliveryRobot.pptx
@@ -21,7 +21,13 @@
     <p:sldId id="264" r:id="rId9"/>
     <p:sldId id="265" r:id="rId10"/>
     <p:sldId id="266" r:id="rId11"/>
+    <p:sldId id="272" r:id="rId22"/>
+    <p:sldId id="273" r:id="rId23"/>
+    <p:sldId id="274" r:id="rId24"/>
+    <p:sldId id="275" r:id="rId25"/>
+    <p:sldId id="276" r:id="rId26"/>
     <p:sldId id="267" r:id="rId12"/>
+    <p:sldId id="277" r:id="rId27"/>
     <p:sldId id="268" r:id="rId13"/>
   </p:sldIdLst>
   <p:sldSz cx="12192000" cy="6858000"/>
@@ -892,6 +898,354 @@
 </p:notes>
 </file>
 
+<file path=ppt/notesSlides/notesSlide16.xml><?xml version="1.0" encoding="utf-8"?>
+<p:notes xmlns:a="http://schemas.openxmlformats.org/drawingml/2006/main" xmlns:r="http://schemas.openxmlformats.org/officeDocument/2006/relationships" xmlns:p="http://schemas.openxmlformats.org/presentationml/2006/main">
+  <p:cSld>
+    <p:spTree>
+      <p:nvGrpSpPr>
+        <p:cNvPr id="1" name=""/>
+        <p:cNvGrpSpPr/>
+        <p:nvPr/>
+      </p:nvGrpSpPr>
+      <p:grpSpPr>
+        <a:xfrm>
+          <a:off x="0" y="0"/>
+          <a:ext cx="0" cy="0"/>
+          <a:chOff x="0" y="0"/>
+          <a:chExt cx="0" cy="0"/>
+        </a:xfrm>
+      </p:grpSpPr>
+      <p:sp>
+        <p:nvSpPr>
+          <p:cNvPr id="2" name="Slide Image Placeholder 1"/>
+          <p:cNvSpPr>
+            <a:spLocks noGrp="1" noRot="1" noChangeAspect="1"/>
+          </p:cNvSpPr>
+          <p:nvPr>
+            <p:ph type="sldImg"/>
+          </p:nvPr>
+        </p:nvSpPr>
+        <p:spPr/>
+      </p:sp>
+      <p:sp>
+        <p:nvSpPr>
+          <p:cNvPr id="3" name="Notes Placeholder 2"/>
+          <p:cNvSpPr>
+            <a:spLocks noGrp="1"/>
+          </p:cNvSpPr>
+          <p:nvPr>
+            <p:ph type="body" idx="1"/>
+          </p:nvPr>
+        </p:nvSpPr>
+        <p:spPr/>
+        <p:txBody>
+          <a:bodyPr/>
+          <a:lstStyle/>
+          <a:p>
+            <a:r>
+              <a:rPr lang="en-US" dirty="0"/>
+              <a:t>With the old settings the robot already goes wrong from the start cell S. SARSA never finishes in 3 of 5 seeds on S1 and S4, Monte Carlo in 4 of 5 seeds on S4: the robot stands on a cell and keeps walking into a wall or the edge of the map, because that blocked move has a slightly higher Q value than the right action, for example Drop. The state does not change, so it repeats the move until max_steps. On S3 both deliver parcel C late in all 5 seeds.</a:t>
+            </a:r>
+          </a:p>
+        </p:txBody>
+      </p:sp>
+      <p:sp>
+        <p:nvSpPr>
+          <p:cNvPr id="4" name="Slide Number Placeholder 3"/>
+          <p:cNvSpPr>
+            <a:spLocks noGrp="1"/>
+          </p:cNvSpPr>
+          <p:nvPr>
+            <p:ph type="sldNum" sz="quarter" idx="10"/>
+          </p:nvPr>
+        </p:nvSpPr>
+        <p:spPr/>
+        <p:txBody>
+          <a:bodyPr/>
+          <a:lstStyle/>
+          <a:p>
+            <a:fld id="{F7021451-1387-4CA6-816F-3879F97B5CBC}" type="slidenum">
+              <a:rPr lang="en-US"/>
+              <a:t>2</a:t>
+            </a:fld>
+            <a:endParaRPr lang="en-US"/>
+          </a:p>
+        </p:txBody>
+      </p:sp>
+    </p:spTree>
+    <p:extLst>
+      <p:ext uri="{BB962C8B-B14F-4D97-AF65-F5344CB8AC3E}">
+        <p14:creationId xmlns:p14="http://schemas.microsoft.com/office/powerpoint/2010/main" val="1024086991"/>
+      </p:ext>
+    </p:extLst>
+  </p:cSld>
+  <p:clrMapOvr>
+    <a:masterClrMapping/>
+  </p:clrMapOvr>
+</p:notes>
+</file>
+
+<file path=ppt/notesSlides/notesSlide17.xml><?xml version="1.0" encoding="utf-8"?>
+<p:notes xmlns:a="http://schemas.openxmlformats.org/drawingml/2006/main" xmlns:r="http://schemas.openxmlformats.org/officeDocument/2006/relationships" xmlns:p="http://schemas.openxmlformats.org/presentationml/2006/main">
+  <p:cSld>
+    <p:spTree>
+      <p:nvGrpSpPr>
+        <p:cNvPr id="1" name=""/>
+        <p:cNvGrpSpPr/>
+        <p:nvPr/>
+      </p:nvGrpSpPr>
+      <p:grpSpPr>
+        <a:xfrm>
+          <a:off x="0" y="0"/>
+          <a:ext cx="0" cy="0"/>
+          <a:chOff x="0" y="0"/>
+          <a:chExt cx="0" cy="0"/>
+        </a:xfrm>
+      </p:grpSpPr>
+      <p:sp>
+        <p:nvSpPr>
+          <p:cNvPr id="2" name="Slide Image Placeholder 1"/>
+          <p:cNvSpPr>
+            <a:spLocks noGrp="1" noRot="1" noChangeAspect="1"/>
+          </p:cNvSpPr>
+          <p:nvPr>
+            <p:ph type="sldImg"/>
+          </p:nvPr>
+        </p:nvSpPr>
+        <p:spPr/>
+      </p:sp>
+      <p:sp>
+        <p:nvSpPr>
+          <p:cNvPr id="3" name="Notes Placeholder 2"/>
+          <p:cNvSpPr>
+            <a:spLocks noGrp="1"/>
+          </p:cNvSpPr>
+          <p:nvPr>
+            <p:ph type="body" idx="1"/>
+          </p:nvPr>
+        </p:nvSpPr>
+        <p:spPr/>
+        <p:txBody>
+          <a:bodyPr/>
+          <a:lstStyle/>
+          <a:p>
+            <a:r>
+              <a:rPr lang="en-US" dirty="0"/>
+              <a:t>Accuracy only starts the robot at an empty cell with every parcel waiting. Here the robot is put in every reachable state: carrying parcels, after some deliveries, with the deadline clock running or the booster on. The grey bars are the old settings: wrong in up to 91 percent of the states, with loops, late deliveries and illegal actions. With the new settings Q-learning and Monte Carlo ES are right in every state in all 5 seeds. SARSA is slightly off in a few hundred states of S4; twice as many episodes do not help, a smaller final step size halves it.</a:t>
+            </a:r>
+          </a:p>
+        </p:txBody>
+      </p:sp>
+      <p:sp>
+        <p:nvSpPr>
+          <p:cNvPr id="4" name="Slide Number Placeholder 3"/>
+          <p:cNvSpPr>
+            <a:spLocks noGrp="1"/>
+          </p:cNvSpPr>
+          <p:nvPr>
+            <p:ph type="sldNum" sz="quarter" idx="10"/>
+          </p:nvPr>
+        </p:nvSpPr>
+        <p:spPr/>
+        <p:txBody>
+          <a:bodyPr/>
+          <a:lstStyle/>
+          <a:p>
+            <a:fld id="{F7021451-1387-4CA6-816F-3879F97B5CBC}" type="slidenum">
+              <a:rPr lang="en-US"/>
+              <a:t>2</a:t>
+            </a:fld>
+            <a:endParaRPr lang="en-US"/>
+          </a:p>
+        </p:txBody>
+      </p:sp>
+    </p:spTree>
+    <p:extLst>
+      <p:ext uri="{BB962C8B-B14F-4D97-AF65-F5344CB8AC3E}">
+        <p14:creationId xmlns:p14="http://schemas.microsoft.com/office/powerpoint/2010/main" val="1024086991"/>
+      </p:ext>
+    </p:extLst>
+  </p:cSld>
+  <p:clrMapOvr>
+    <a:masterClrMapping/>
+  </p:clrMapOvr>
+</p:notes>
+</file>
+
+<file path=ppt/notesSlides/notesSlide18.xml><?xml version="1.0" encoding="utf-8"?>
+<p:notes xmlns:a="http://schemas.openxmlformats.org/drawingml/2006/main" xmlns:r="http://schemas.openxmlformats.org/officeDocument/2006/relationships" xmlns:p="http://schemas.openxmlformats.org/presentationml/2006/main">
+  <p:cSld>
+    <p:spTree>
+      <p:nvGrpSpPr>
+        <p:cNvPr id="1" name=""/>
+        <p:cNvGrpSpPr/>
+        <p:nvPr/>
+      </p:nvGrpSpPr>
+      <p:grpSpPr>
+        <a:xfrm>
+          <a:off x="0" y="0"/>
+          <a:ext cx="0" cy="0"/>
+          <a:chOff x="0" y="0"/>
+          <a:chExt cx="0" cy="0"/>
+        </a:xfrm>
+      </p:grpSpPr>
+      <p:sp>
+        <p:nvSpPr>
+          <p:cNvPr id="2" name="Slide Image Placeholder 1"/>
+          <p:cNvSpPr>
+            <a:spLocks noGrp="1" noRot="1" noChangeAspect="1"/>
+          </p:cNvSpPr>
+          <p:nvPr>
+            <p:ph type="sldImg"/>
+          </p:nvPr>
+        </p:nvSpPr>
+        <p:spPr/>
+      </p:sp>
+      <p:sp>
+        <p:nvSpPr>
+          <p:cNvPr id="3" name="Notes Placeholder 2"/>
+          <p:cNvSpPr>
+            <a:spLocks noGrp="1"/>
+          </p:cNvSpPr>
+          <p:nvPr>
+            <p:ph type="body" idx="1"/>
+          </p:nvPr>
+        </p:nvSpPr>
+        <p:spPr/>
+        <p:txBody>
+          <a:bodyPr/>
+          <a:lstStyle/>
+          <a:p>
+            <a:r>
+              <a:rPr lang="en-US" dirty="0"/>
+              <a:t>The costliest SARSA state on S4, state code 643: the robot is in the top-left corner, carries C and has the booster on. SARSA's first move is still right; it turns wrong three steps later at state 17419, on C's drop cell, where it drops C although going Down is optimal. In the true values the two actions differ by only 0.04, and SARSA's values there are off by 0.12 to 0.24, so the order flips. Dropping C ends the booster trip, so A, B and D are carried one by one: 61 steps. The optimal route first fetches A while still holding C and then carries A and B together: 55 steps. Every SARSA mistake is a longer route like this one, at most 6 steps, never a loop. Q-learning and Monte Carlo ES have no wrong state at all. A smaller final step size for SARSA halves the mistakes on S4.</a:t>
+            </a:r>
+          </a:p>
+        </p:txBody>
+      </p:sp>
+      <p:sp>
+        <p:nvSpPr>
+          <p:cNvPr id="4" name="Slide Number Placeholder 3"/>
+          <p:cNvSpPr>
+            <a:spLocks noGrp="1"/>
+          </p:cNvSpPr>
+          <p:nvPr>
+            <p:ph type="sldNum" sz="quarter" idx="10"/>
+          </p:nvPr>
+        </p:nvSpPr>
+        <p:spPr/>
+        <p:txBody>
+          <a:bodyPr/>
+          <a:lstStyle/>
+          <a:p>
+            <a:fld id="{F7021451-1387-4CA6-816F-3879F97B5CBC}" type="slidenum">
+              <a:rPr lang="en-US"/>
+              <a:t>2</a:t>
+            </a:fld>
+            <a:endParaRPr lang="en-US"/>
+          </a:p>
+        </p:txBody>
+      </p:sp>
+    </p:spTree>
+    <p:extLst>
+      <p:ext uri="{BB962C8B-B14F-4D97-AF65-F5344CB8AC3E}">
+        <p14:creationId xmlns:p14="http://schemas.microsoft.com/office/powerpoint/2010/main" val="1024086991"/>
+      </p:ext>
+    </p:extLst>
+  </p:cSld>
+  <p:clrMapOvr>
+    <a:masterClrMapping/>
+  </p:clrMapOvr>
+</p:notes>
+</file>
+
+<file path=ppt/notesSlides/notesSlide19.xml><?xml version="1.0" encoding="utf-8"?>
+<p:notes xmlns:a="http://schemas.openxmlformats.org/drawingml/2006/main" xmlns:r="http://schemas.openxmlformats.org/officeDocument/2006/relationships" xmlns:p="http://schemas.openxmlformats.org/presentationml/2006/main">
+  <p:cSld>
+    <p:spTree>
+      <p:nvGrpSpPr>
+        <p:cNvPr id="1" name=""/>
+        <p:cNvGrpSpPr/>
+        <p:nvPr/>
+      </p:nvGrpSpPr>
+      <p:grpSpPr>
+        <a:xfrm>
+          <a:off x="0" y="0"/>
+          <a:ext cx="0" cy="0"/>
+          <a:chOff x="0" y="0"/>
+          <a:chExt cx="0" cy="0"/>
+        </a:xfrm>
+      </p:grpSpPr>
+      <p:sp>
+        <p:nvSpPr>
+          <p:cNvPr id="2" name="Slide Image Placeholder 1"/>
+          <p:cNvSpPr>
+            <a:spLocks noGrp="1" noRot="1" noChangeAspect="1"/>
+          </p:cNvSpPr>
+          <p:nvPr>
+            <p:ph type="sldImg"/>
+          </p:nvPr>
+        </p:nvSpPr>
+        <p:spPr/>
+      </p:sp>
+      <p:sp>
+        <p:nvSpPr>
+          <p:cNvPr id="3" name="Notes Placeholder 2"/>
+          <p:cNvSpPr>
+            <a:spLocks noGrp="1"/>
+          </p:cNvSpPr>
+          <p:nvPr>
+            <p:ph type="body" idx="1"/>
+          </p:nvPr>
+        </p:nvSpPr>
+        <p:spPr/>
+        <p:txBody>
+          <a:bodyPr/>
+          <a:lstStyle/>
+          <a:p>
+            <a:r>
+              <a:rPr lang="en-US" dirty="0"/>
+              <a:t>The state code is the integer index of a state, the row of the Q table, from encode in delivery_env.py. For every wrong state the script follows the learned route to the first state where the greedy action is not optimal. The 301 wrong states of SARSA seed 0 on S4 come from only a few dozen such states, all on two cells: the pickup cell of C, carrying B and C with the booster on, where SARSA goes Down instead of Up, and the drop cell of C, where it drops C instead of going Down. The true values of the two actions differ by a few hundredths, so SARSA's small errors flip them. The CSV file lists every wrong state.</a:t>
+            </a:r>
+          </a:p>
+        </p:txBody>
+      </p:sp>
+      <p:sp>
+        <p:nvSpPr>
+          <p:cNvPr id="4" name="Slide Number Placeholder 3"/>
+          <p:cNvSpPr>
+            <a:spLocks noGrp="1"/>
+          </p:cNvSpPr>
+          <p:nvPr>
+            <p:ph type="sldNum" sz="quarter" idx="10"/>
+          </p:nvPr>
+        </p:nvSpPr>
+        <p:spPr/>
+        <p:txBody>
+          <a:bodyPr/>
+          <a:lstStyle/>
+          <a:p>
+            <a:fld id="{F7021451-1387-4CA6-816F-3879F97B5CBC}" type="slidenum">
+              <a:rPr lang="en-US"/>
+              <a:t>2</a:t>
+            </a:fld>
+            <a:endParaRPr lang="en-US"/>
+          </a:p>
+        </p:txBody>
+      </p:sp>
+    </p:spTree>
+    <p:extLst>
+      <p:ext uri="{BB962C8B-B14F-4D97-AF65-F5344CB8AC3E}">
+        <p14:creationId xmlns:p14="http://schemas.microsoft.com/office/powerpoint/2010/main" val="1024086991"/>
+      </p:ext>
+    </p:extLst>
+  </p:cSld>
+  <p:clrMapOvr>
+    <a:masterClrMapping/>
+  </p:clrMapOvr>
+</p:notes>
+</file>
+
 <file path=ppt/notesSlides/notesSlide2.xml><?xml version="1.0" encoding="utf-8"?>
 <p:notes xmlns:a="http://schemas.openxmlformats.org/drawingml/2006/main" xmlns:r="http://schemas.openxmlformats.org/officeDocument/2006/relationships" xmlns:p="http://schemas.openxmlformats.org/presentationml/2006/main">
   <p:cSld>
@@ -939,6 +1293,180 @@
             <a:r>
               <a:rPr lang="en-US" dirty="0"/>
               <a:t>The robot only knows its position and the parcel statuses. The −1 step penalty pushes the agent toward short routes; +20 per delivered order is the per-order reward; −10 punishes wrong actions; −30 only exists in the deadline maps S3 and S4.</a:t>
+            </a:r>
+          </a:p>
+        </p:txBody>
+      </p:sp>
+      <p:sp>
+        <p:nvSpPr>
+          <p:cNvPr id="4" name="Slide Number Placeholder 3"/>
+          <p:cNvSpPr>
+            <a:spLocks noGrp="1"/>
+          </p:cNvSpPr>
+          <p:nvPr>
+            <p:ph type="sldNum" sz="quarter" idx="10"/>
+          </p:nvPr>
+        </p:nvSpPr>
+        <p:spPr/>
+        <p:txBody>
+          <a:bodyPr/>
+          <a:lstStyle/>
+          <a:p>
+            <a:fld id="{F7021451-1387-4CA6-816F-3879F97B5CBC}" type="slidenum">
+              <a:rPr lang="en-US"/>
+              <a:t>2</a:t>
+            </a:fld>
+            <a:endParaRPr lang="en-US"/>
+          </a:p>
+        </p:txBody>
+      </p:sp>
+    </p:spTree>
+    <p:extLst>
+      <p:ext uri="{BB962C8B-B14F-4D97-AF65-F5344CB8AC3E}">
+        <p14:creationId xmlns:p14="http://schemas.microsoft.com/office/powerpoint/2010/main" val="1024086991"/>
+      </p:ext>
+    </p:extLst>
+  </p:cSld>
+  <p:clrMapOvr>
+    <a:masterClrMapping/>
+  </p:clrMapOvr>
+</p:notes>
+</file>
+
+<file path=ppt/notesSlides/notesSlide20.xml><?xml version="1.0" encoding="utf-8"?>
+<p:notes xmlns:a="http://schemas.openxmlformats.org/drawingml/2006/main" xmlns:r="http://schemas.openxmlformats.org/officeDocument/2006/relationships" xmlns:p="http://schemas.openxmlformats.org/presentationml/2006/main">
+  <p:cSld>
+    <p:spTree>
+      <p:nvGrpSpPr>
+        <p:cNvPr id="1" name=""/>
+        <p:cNvGrpSpPr/>
+        <p:nvPr/>
+      </p:nvGrpSpPr>
+      <p:grpSpPr>
+        <a:xfrm>
+          <a:off x="0" y="0"/>
+          <a:ext cx="0" cy="0"/>
+          <a:chOff x="0" y="0"/>
+          <a:chExt cx="0" cy="0"/>
+        </a:xfrm>
+      </p:grpSpPr>
+      <p:sp>
+        <p:nvSpPr>
+          <p:cNvPr id="2" name="Slide Image Placeholder 1"/>
+          <p:cNvSpPr>
+            <a:spLocks noGrp="1" noRot="1" noChangeAspect="1"/>
+          </p:cNvSpPr>
+          <p:nvPr>
+            <p:ph type="sldImg"/>
+          </p:nvPr>
+        </p:nvSpPr>
+        <p:spPr/>
+      </p:sp>
+      <p:sp>
+        <p:nvSpPr>
+          <p:cNvPr id="3" name="Notes Placeholder 2"/>
+          <p:cNvSpPr>
+            <a:spLocks noGrp="1"/>
+          </p:cNvSpPr>
+          <p:nvPr>
+            <p:ph type="body" idx="1"/>
+          </p:nvPr>
+        </p:nvSpPr>
+        <p:spPr/>
+        <p:txBody>
+          <a:bodyPr/>
+          <a:lstStyle/>
+          <a:p>
+            <a:r>
+              <a:rPr lang="en-US" dirty="0"/>
+              <a:t>Every state is a tuple: the robot's cell, the status of each parcel, the deadline clock and the booster. encode packs it into one integer, the state code, which is simply the row of the Q table. Parcel statuses are read as a base-3 number, then each component is multiplied in, and decode undoes it with divmod. For example state 17419 decodes to row 0, column 3, carrying C, clock 10, booster on: that is where SARSA drops C although going down is optimal. The CSV file lists every wrong state by this code.</a:t>
+            </a:r>
+          </a:p>
+        </p:txBody>
+      </p:sp>
+      <p:sp>
+        <p:nvSpPr>
+          <p:cNvPr id="4" name="Slide Number Placeholder 3"/>
+          <p:cNvSpPr>
+            <a:spLocks noGrp="1"/>
+          </p:cNvSpPr>
+          <p:nvPr>
+            <p:ph type="sldNum" sz="quarter" idx="10"/>
+          </p:nvPr>
+        </p:nvSpPr>
+        <p:spPr/>
+        <p:txBody>
+          <a:bodyPr/>
+          <a:lstStyle/>
+          <a:p>
+            <a:fld id="{F7021451-1387-4CA6-816F-3879F97B5CBC}" type="slidenum">
+              <a:rPr lang="en-US"/>
+              <a:t>2</a:t>
+            </a:fld>
+            <a:endParaRPr lang="en-US"/>
+          </a:p>
+        </p:txBody>
+      </p:sp>
+    </p:spTree>
+    <p:extLst>
+      <p:ext uri="{BB962C8B-B14F-4D97-AF65-F5344CB8AC3E}">
+        <p14:creationId xmlns:p14="http://schemas.microsoft.com/office/powerpoint/2010/main" val="1024086991"/>
+      </p:ext>
+    </p:extLst>
+  </p:cSld>
+  <p:clrMapOvr>
+    <a:masterClrMapping/>
+  </p:clrMapOvr>
+</p:notes>
+</file>
+
+<file path=ppt/notesSlides/notesSlide21.xml><?xml version="1.0" encoding="utf-8"?>
+<p:notes xmlns:a="http://schemas.openxmlformats.org/drawingml/2006/main" xmlns:r="http://schemas.openxmlformats.org/officeDocument/2006/relationships" xmlns:p="http://schemas.openxmlformats.org/presentationml/2006/main">
+  <p:cSld>
+    <p:spTree>
+      <p:nvGrpSpPr>
+        <p:cNvPr id="1" name=""/>
+        <p:cNvGrpSpPr/>
+        <p:nvPr/>
+      </p:nvGrpSpPr>
+      <p:grpSpPr>
+        <a:xfrm>
+          <a:off x="0" y="0"/>
+          <a:ext cx="0" cy="0"/>
+          <a:chOff x="0" y="0"/>
+          <a:chExt cx="0" cy="0"/>
+        </a:xfrm>
+      </p:grpSpPr>
+      <p:sp>
+        <p:nvSpPr>
+          <p:cNvPr id="2" name="Slide Image Placeholder 1"/>
+          <p:cNvSpPr>
+            <a:spLocks noGrp="1" noRot="1" noChangeAspect="1"/>
+          </p:cNvSpPr>
+          <p:nvPr>
+            <p:ph type="sldImg"/>
+          </p:nvPr>
+        </p:nvSpPr>
+        <p:spPr/>
+      </p:sp>
+      <p:sp>
+        <p:nvSpPr>
+          <p:cNvPr id="3" name="Notes Placeholder 2"/>
+          <p:cNvSpPr>
+            <a:spLocks noGrp="1"/>
+          </p:cNvSpPr>
+          <p:nvPr>
+            <p:ph type="body" idx="1"/>
+          </p:nvPr>
+        </p:nvSpPr>
+        <p:spPr/>
+        <p:txBody>
+          <a:bodyPr/>
+          <a:lstStyle/>
+          <a:p>
+            <a:r>
+              <a:rPr lang="en-US" dirty="0"/>
+              <a:t>This is the desktop app in app.py. On the left you pick the map, the algorithm and every hyperparameter and start training. Training runs in a separate process with the same numba code, so the map and the learning curves update live and you can pause, stop or slow it down to one episode per update; with the same seed it gives exactly the Q table of the experiments. In the middle you can drive the robot yourself or let the agent move, click any cell or type a state code. The screenshot shows SARSA on S4 after training, at state 17419: the red cell and the warning on the right show its wrong decision, Drop instead of Down, with a gap of only 0.04 in Q*.</a:t>
             </a:r>
           </a:p>
         </p:txBody>
@@ -3300,6 +3828,26 @@
             </a:r>
             <a:endParaRPr lang="en-US" sz="1700" dirty="0"/>
           </a:p>
+          <a:p>
+            <a:pPr marL="0" indent="0">
+              <a:lnSpc>
+                <a:spcPct val="115000"/>
+              </a:lnSpc>
+              <a:buNone/>
+            </a:pPr>
+            <a:r>
+              <a:rPr lang="en-US" sz="1700" dirty="0">
+                <a:solidFill>
+                  <a:schemeClr val="bg1"/>
+                </a:solidFill>
+                <a:latin typeface="Courier New" pitchFamily="34" charset="0"/>
+                <a:ea typeface="Courier New" pitchFamily="34" charset="-122"/>
+                <a:cs typeface="Courier New" pitchFamily="34" charset="-120"/>
+              </a:rPr>
+              <a:t>python failure_cases.py</a:t>
+            </a:r>
+            <a:endParaRPr lang="en-US" sz="1700" dirty="0"/>
+          </a:p>
         </p:txBody>
       </p:sp>
       <p:sp>
@@ -3842,7 +4390,7 @@
                   <a:schemeClr val="bg2"/>
                 </a:solidFill>
               </a:rPr>
-              <a:t>Monte Carlo ES is second; SARSA needs about 3× more episodes and still fluctuates</a:t>
+              <a:t>Monte Carlo ES is second; SARSA needs about 3× more episodes and is still off in 1.8% of the S4 states</a:t>
             </a:r>
             <a:endParaRPr lang="en-US" sz="1700" dirty="0"/>
           </a:p>
@@ -4166,7 +4714,7 @@
         </p:nvGraphicFramePr>
         <p:xfrm>
           <a:off x="868680" y="1554480"/>
-          <a:ext cx="10460736" cy="3511296"/>
+          <a:ext cx="10460736" cy="3429000"/>
         </p:xfrm>
         <a:graphic>
           <a:graphicData uri="http://schemas.openxmlformats.org/drawingml/2006/table">
@@ -4202,7 +4750,7 @@
                   </a:extLst>
                 </a:gridCol>
               </a:tblGrid>
-              <a:tr h="438912">
+              <a:tr h="381000">
                 <a:tc>
                   <a:txBody>
                     <a:bodyPr/>
@@ -4445,7 +4993,7 @@
                   </a:ext>
                 </a:extLst>
               </a:tr>
-              <a:tr h="438912">
+              <a:tr h="381000">
                 <a:tc>
                   <a:txBody>
                     <a:bodyPr/>
@@ -4696,7 +5244,7 @@
                   </a:ext>
                 </a:extLst>
               </a:tr>
-              <a:tr h="438912">
+              <a:tr h="381000">
                 <a:tc>
                   <a:txBody>
                     <a:bodyPr/>
@@ -4947,7 +5495,7 @@
                   </a:ext>
                 </a:extLst>
               </a:tr>
-              <a:tr h="438912">
+              <a:tr h="381000">
                 <a:tc>
                   <a:txBody>
                     <a:bodyPr/>
@@ -5198,7 +5746,7 @@
                   </a:ext>
                 </a:extLst>
               </a:tr>
-              <a:tr h="438912">
+              <a:tr h="381000">
                 <a:tc>
                   <a:txBody>
                     <a:bodyPr/>
@@ -5449,7 +5997,7 @@
                   </a:ext>
                 </a:extLst>
               </a:tr>
-              <a:tr h="438912">
+              <a:tr h="381000">
                 <a:tc>
                   <a:txBody>
                     <a:bodyPr/>
@@ -5700,7 +6248,7 @@
                   </a:ext>
                 </a:extLst>
               </a:tr>
-              <a:tr h="438912">
+              <a:tr h="381000">
                 <a:tc>
                   <a:txBody>
                     <a:bodyPr/>
@@ -5951,7 +6499,258 @@
                   </a:ext>
                 </a:extLst>
               </a:tr>
-              <a:tr h="438912">
+              <a:tr h="381000">
+                <a:tc>
+                  <a:txBody>
+                    <a:bodyPr/>
+                    <a:lstStyle/>
+                    <a:p>
+                      <a:pPr marL="0" indent="0">
+                        <a:buNone/>
+                      </a:pPr>
+                      <a:r>
+                        <a:rPr lang="en-US" sz="1400" dirty="0">
+                          <a:solidFill>
+                            <a:srgbClr val="3D4451"/>
+                          </a:solidFill>
+                        </a:rPr>
+                        <a:t>Wrong if started anywhere (S3 / S4)</a:t>
+                      </a:r>
+                      <a:endParaRPr lang="en-US" sz="1400" dirty="0"/>
+                    </a:p>
+                  </a:txBody>
+                  <a:tcPr marL="109728" marR="109728" marT="0" marB="0" anchor="ctr">
+                    <a:lnL w="9525" cap="flat" cmpd="sng" algn="ctr">
+                      <a:solidFill>
+                        <a:srgbClr val="D5DCE6"/>
+                      </a:solidFill>
+                      <a:prstDash val="solid"/>
+                      <a:round/>
+                      <a:headEnd type="none" w="med" len="med"/>
+                      <a:tailEnd type="none" w="med" len="med"/>
+                    </a:lnL>
+                    <a:lnR w="9525" cap="flat" cmpd="sng" algn="ctr">
+                      <a:solidFill>
+                        <a:srgbClr val="D5DCE6"/>
+                      </a:solidFill>
+                      <a:prstDash val="solid"/>
+                      <a:round/>
+                      <a:headEnd type="none" w="med" len="med"/>
+                      <a:tailEnd type="none" w="med" len="med"/>
+                    </a:lnR>
+                    <a:lnT w="9525" cap="flat" cmpd="sng" algn="ctr">
+                      <a:solidFill>
+                        <a:srgbClr val="D5DCE6"/>
+                      </a:solidFill>
+                      <a:prstDash val="solid"/>
+                      <a:round/>
+                      <a:headEnd type="none" w="med" len="med"/>
+                      <a:tailEnd type="none" w="med" len="med"/>
+                    </a:lnT>
+                    <a:lnB w="9525" cap="flat" cmpd="sng" algn="ctr">
+                      <a:solidFill>
+                        <a:srgbClr val="D5DCE6"/>
+                      </a:solidFill>
+                      <a:prstDash val="solid"/>
+                      <a:round/>
+                      <a:headEnd type="none" w="med" len="med"/>
+                      <a:tailEnd type="none" w="med" len="med"/>
+                    </a:lnB>
+                    <a:solidFill>
+                      <a:srgbClr val="FFFFFF"/>
+                    </a:solidFill>
+                  </a:tcPr>
+                </a:tc>
+                <a:tc>
+                  <a:txBody>
+                    <a:bodyPr/>
+                    <a:lstStyle/>
+                    <a:p>
+                      <a:pPr marL="0" indent="0">
+                        <a:buNone/>
+                      </a:pPr>
+                      <a:r>
+                        <a:rPr lang="en-US" sz="1400" dirty="0">
+                          <a:solidFill>
+                            <a:srgbClr val="3D4451"/>
+                          </a:solidFill>
+                        </a:rPr>
+                        <a:t>0 / 0</a:t>
+                      </a:r>
+                      <a:endParaRPr lang="en-US" sz="1400" dirty="0"/>
+                    </a:p>
+                  </a:txBody>
+                  <a:tcPr marL="109728" marR="109728" marT="0" marB="0" anchor="ctr">
+                    <a:lnL w="9525" cap="flat" cmpd="sng" algn="ctr">
+                      <a:solidFill>
+                        <a:srgbClr val="D5DCE6"/>
+                      </a:solidFill>
+                      <a:prstDash val="solid"/>
+                      <a:round/>
+                      <a:headEnd type="none" w="med" len="med"/>
+                      <a:tailEnd type="none" w="med" len="med"/>
+                    </a:lnL>
+                    <a:lnR w="9525" cap="flat" cmpd="sng" algn="ctr">
+                      <a:solidFill>
+                        <a:srgbClr val="D5DCE6"/>
+                      </a:solidFill>
+                      <a:prstDash val="solid"/>
+                      <a:round/>
+                      <a:headEnd type="none" w="med" len="med"/>
+                      <a:tailEnd type="none" w="med" len="med"/>
+                    </a:lnR>
+                    <a:lnT w="9525" cap="flat" cmpd="sng" algn="ctr">
+                      <a:solidFill>
+                        <a:srgbClr val="D5DCE6"/>
+                      </a:solidFill>
+                      <a:prstDash val="solid"/>
+                      <a:round/>
+                      <a:headEnd type="none" w="med" len="med"/>
+                      <a:tailEnd type="none" w="med" len="med"/>
+                    </a:lnT>
+                    <a:lnB w="9525" cap="flat" cmpd="sng" algn="ctr">
+                      <a:solidFill>
+                        <a:srgbClr val="D5DCE6"/>
+                      </a:solidFill>
+                      <a:prstDash val="solid"/>
+                      <a:round/>
+                      <a:headEnd type="none" w="med" len="med"/>
+                      <a:tailEnd type="none" w="med" len="med"/>
+                    </a:lnB>
+                    <a:solidFill>
+                      <a:srgbClr val="FFFFFF"/>
+                    </a:solidFill>
+                  </a:tcPr>
+                </a:tc>
+                <a:tc>
+                  <a:txBody>
+                    <a:bodyPr/>
+                    <a:lstStyle/>
+                    <a:p>
+                      <a:pPr marL="0" indent="0">
+                        <a:buNone/>
+                      </a:pPr>
+                      <a:r>
+                        <a:rPr lang="en-US" sz="1400" dirty="0">
+                          <a:solidFill>
+                            <a:srgbClr val="3D4451"/>
+                          </a:solidFill>
+                        </a:rPr>
+                        <a:t>0.3% / 1.8%</a:t>
+                      </a:r>
+                      <a:endParaRPr lang="en-US" sz="1400" dirty="0"/>
+                    </a:p>
+                  </a:txBody>
+                  <a:tcPr marL="109728" marR="109728" marT="0" marB="0" anchor="ctr">
+                    <a:lnL w="9525" cap="flat" cmpd="sng" algn="ctr">
+                      <a:solidFill>
+                        <a:srgbClr val="D5DCE6"/>
+                      </a:solidFill>
+                      <a:prstDash val="solid"/>
+                      <a:round/>
+                      <a:headEnd type="none" w="med" len="med"/>
+                      <a:tailEnd type="none" w="med" len="med"/>
+                    </a:lnL>
+                    <a:lnR w="9525" cap="flat" cmpd="sng" algn="ctr">
+                      <a:solidFill>
+                        <a:srgbClr val="D5DCE6"/>
+                      </a:solidFill>
+                      <a:prstDash val="solid"/>
+                      <a:round/>
+                      <a:headEnd type="none" w="med" len="med"/>
+                      <a:tailEnd type="none" w="med" len="med"/>
+                    </a:lnR>
+                    <a:lnT w="9525" cap="flat" cmpd="sng" algn="ctr">
+                      <a:solidFill>
+                        <a:srgbClr val="D5DCE6"/>
+                      </a:solidFill>
+                      <a:prstDash val="solid"/>
+                      <a:round/>
+                      <a:headEnd type="none" w="med" len="med"/>
+                      <a:tailEnd type="none" w="med" len="med"/>
+                    </a:lnT>
+                    <a:lnB w="9525" cap="flat" cmpd="sng" algn="ctr">
+                      <a:solidFill>
+                        <a:srgbClr val="D5DCE6"/>
+                      </a:solidFill>
+                      <a:prstDash val="solid"/>
+                      <a:round/>
+                      <a:headEnd type="none" w="med" len="med"/>
+                      <a:tailEnd type="none" w="med" len="med"/>
+                    </a:lnB>
+                    <a:solidFill>
+                      <a:srgbClr val="FFFFFF"/>
+                    </a:solidFill>
+                  </a:tcPr>
+                </a:tc>
+                <a:tc>
+                  <a:txBody>
+                    <a:bodyPr/>
+                    <a:lstStyle/>
+                    <a:p>
+                      <a:pPr marL="0" indent="0">
+                        <a:buNone/>
+                      </a:pPr>
+                      <a:r>
+                        <a:rPr lang="en-US" sz="1400" dirty="0">
+                          <a:solidFill>
+                            <a:srgbClr val="3D4451"/>
+                          </a:solidFill>
+                        </a:rPr>
+                        <a:t>0 / 0</a:t>
+                      </a:r>
+                      <a:endParaRPr lang="en-US" sz="1400" dirty="0"/>
+                    </a:p>
+                  </a:txBody>
+                  <a:tcPr marL="109728" marR="109728" marT="0" marB="0" anchor="ctr">
+                    <a:lnL w="9525" cap="flat" cmpd="sng" algn="ctr">
+                      <a:solidFill>
+                        <a:srgbClr val="D5DCE6"/>
+                      </a:solidFill>
+                      <a:prstDash val="solid"/>
+                      <a:round/>
+                      <a:headEnd type="none" w="med" len="med"/>
+                      <a:tailEnd type="none" w="med" len="med"/>
+                    </a:lnL>
+                    <a:lnR w="9525" cap="flat" cmpd="sng" algn="ctr">
+                      <a:solidFill>
+                        <a:srgbClr val="D5DCE6"/>
+                      </a:solidFill>
+                      <a:prstDash val="solid"/>
+                      <a:round/>
+                      <a:headEnd type="none" w="med" len="med"/>
+                      <a:tailEnd type="none" w="med" len="med"/>
+                    </a:lnR>
+                    <a:lnT w="9525" cap="flat" cmpd="sng" algn="ctr">
+                      <a:solidFill>
+                        <a:srgbClr val="D5DCE6"/>
+                      </a:solidFill>
+                      <a:prstDash val="solid"/>
+                      <a:round/>
+                      <a:headEnd type="none" w="med" len="med"/>
+                      <a:tailEnd type="none" w="med" len="med"/>
+                    </a:lnT>
+                    <a:lnB w="9525" cap="flat" cmpd="sng" algn="ctr">
+                      <a:solidFill>
+                        <a:srgbClr val="D5DCE6"/>
+                      </a:solidFill>
+                      <a:prstDash val="solid"/>
+                      <a:round/>
+                      <a:headEnd type="none" w="med" len="med"/>
+                      <a:tailEnd type="none" w="med" len="med"/>
+                    </a:lnB>
+                    <a:solidFill>
+                      <a:srgbClr val="FFFFFF"/>
+                    </a:solidFill>
+                  </a:tcPr>
+                </a:tc>
+                <a:extLst>
+                  <a:ext uri="{0D108BD9-81ED-4DB2-BD59-A6C34878D82A}">
+                    <a16:rowId xmlns:a16="http://schemas.microsoft.com/office/drawing/2014/main" val="10006"/>
+                  </a:ext>
+                </a:extLst>
+              </a:tr>
+              <a:tr h="381000">
                 <a:tc>
                   <a:txBody>
                     <a:bodyPr/>
@@ -6720,6 +7519,3486 @@
             <a:fld id="{F7021451-1387-4CA6-816F-3879F97B5CBC}" type="slidenum">
               <a:rPr lang="en-US" b="0"/>
               <a:t>9</a:t>
+            </a:fld>
+            <a:endParaRPr lang="en-US"/>
+          </a:p>
+        </p:txBody>
+      </p:sp>
+    </p:spTree>
+  </p:cSld>
+  <p:clrMapOvr>
+    <a:masterClrMapping/>
+  </p:clrMapOvr>
+</p:sld>
+</file>
+
+<file path=ppt/slides/slide16.xml><?xml version="1.0" encoding="utf-8"?>
+<p:sld xmlns:a="http://schemas.openxmlformats.org/drawingml/2006/main" xmlns:r="http://schemas.openxmlformats.org/officeDocument/2006/relationships" xmlns:p="http://schemas.openxmlformats.org/presentationml/2006/main">
+  <p:cSld name="Slide 10">
+    <p:spTree>
+      <p:nvGrpSpPr>
+        <p:cNvPr id="1" name=""/>
+        <p:cNvGrpSpPr/>
+        <p:nvPr/>
+      </p:nvGrpSpPr>
+      <p:grpSpPr>
+        <a:xfrm>
+          <a:off x="0" y="0"/>
+          <a:ext cx="0" cy="0"/>
+          <a:chOff x="0" y="0"/>
+          <a:chExt cx="0" cy="0"/>
+        </a:xfrm>
+      </p:grpSpPr>
+      <p:sp>
+        <p:nvSpPr>
+          <p:cNvPr id="2" name="Text 0"/>
+          <p:cNvSpPr>
+            <a:spLocks noGrp="1"/>
+          </p:cNvSpPr>
+          <p:nvPr>
+            <p:ph type="title" idx="100" hasCustomPrompt="1"/>
+          </p:nvPr>
+        </p:nvSpPr>
+        <p:spPr>
+          <a:xfrm>
+            <a:off x="548640" y="320040"/>
+            <a:ext cx="11091672" cy="777240"/>
+          </a:xfrm>
+          <a:prstGeom prst="rect">
+            <a:avLst/>
+          </a:prstGeom>
+          <a:noFill/>
+          <a:ln/>
+        </p:spPr>
+        <p:txBody>
+          <a:bodyPr wrap="square" lIns="0" tIns="0" rIns="0" bIns="0" rtlCol="0" anchor="ctr"/>
+          <a:lstStyle/>
+          <a:p>
+            <a:pPr marL="0" indent="0" algn="l">
+              <a:buNone/>
+            </a:pPr>
+            <a:r>
+              <a:rPr lang="en-US" sz="3400" b="1" dirty="0">
+                <a:solidFill>
+                  <a:schemeClr val="tx1"/>
+                </a:solidFill>
+              </a:rPr>
+              <a:t>Old settings: stuck in loops or late, even from S</a:t>
+            </a:r>
+            <a:endParaRPr lang="en-US" sz="3400" dirty="0"/>
+          </a:p>
+        </p:txBody>
+      </p:sp>
+      <p:pic>
+        <p:nvPicPr>
+          <p:cNvPr id="3" name="failure-old" descr="failure_old_routes.png"/>
+          <p:cNvPicPr>
+            <a:picLocks noChangeAspect="1"/>
+          </p:cNvPicPr>
+          <p:nvPr/>
+        </p:nvPicPr>
+        <p:blipFill>
+          <a:blip r:embed="rId3"/>
+          <a:stretch>
+            <a:fillRect/>
+          </a:stretch>
+        </p:blipFill>
+        <p:spPr>
+          <a:xfrm>
+            <a:off x="548640" y="1552881"/>
+            <a:ext cx="11091672" cy="3569357"/>
+          </a:xfrm>
+          <a:prstGeom prst="rect">
+            <a:avLst/>
+          </a:prstGeom>
+        </p:spPr>
+      </p:pic>
+      <p:sp>
+        <p:nvSpPr>
+          <p:cNvPr id="4" name="failure-old-caption"/>
+          <p:cNvSpPr txBox="1"/>
+          <p:nvPr/>
+        </p:nvSpPr>
+        <p:spPr>
+          <a:xfrm>
+            <a:off x="548640" y="5623560"/>
+            <a:ext cx="11091672" cy="502920"/>
+          </a:xfrm>
+          <a:prstGeom prst="rect">
+            <a:avLst/>
+          </a:prstGeom>
+          <a:noFill/>
+          <a:ln/>
+        </p:spPr>
+        <p:txBody>
+          <a:bodyPr wrap="square" lIns="0" tIns="0" rIns="0" bIns="0" rtlCol="0" anchor="t"/>
+          <a:lstStyle/>
+          <a:p>
+            <a:pPr marL="0" indent="0">
+              <a:buNone/>
+            </a:pPr>
+            <a:r>
+              <a:rPr lang="en-US" sz="1700" dirty="0">
+                <a:solidFill>
+                  <a:schemeClr val="tx2"/>
+                </a:solidFill>
+              </a:rPr>
+              <a:t>Worst run per map from S: the robot bumps into a wall or the edge forever (red frame) or delivers C late. Old Q-learning was still optimal from S.</a:t>
+            </a:r>
+            <a:endParaRPr lang="en-US" sz="1700" dirty="0"/>
+          </a:p>
+        </p:txBody>
+      </p:sp>
+      <p:sp>
+        <p:nvSpPr>
+          <p:cNvPr id="25" name="Slide Number Placeholder 0"/>
+          <p:cNvSpPr>
+            <a:spLocks noGrp="1"/>
+          </p:cNvSpPr>
+          <p:nvPr>
+            <p:ph type="sldNum" sz="quarter" idx="4294967295"/>
+          </p:nvPr>
+        </p:nvSpPr>
+        <p:spPr>
+          <a:xfrm>
+            <a:off x="11091672" y="6355080"/>
+            <a:ext cx="548640" cy="274320"/>
+          </a:xfrm>
+          <a:prstGeom prst="rect">
+            <a:avLst/>
+          </a:prstGeom>
+          <a:extLst>
+            <a:ext uri="{C572A759-6A51-4108-AA02-DFA0A04FC94B}">
+              <ma14:wrappingTextBoxFlag xmlns:ma14="http://schemas.microsoft.com/office/mac/drawingml/2011/main" xmlns="" val="0"/>
+            </a:ext>
+          </a:extLst>
+        </p:spPr>
+        <p:txBody>
+          <a:bodyPr/>
+          <a:lstStyle>
+            <a:lvl1pPr>
+              <a:defRPr sz="1100">
+                <a:solidFill>
+                  <a:srgbClr val="737B89"/>
+                </a:solidFill>
+              </a:defRPr>
+            </a:lvl1pPr>
+          </a:lstStyle>
+          <a:p>
+            <a:pPr algn="r"/>
+            <a:fld id="{F7021451-1387-4CA6-816F-3879F97B5CBC}" type="slidenum">
+              <a:rPr lang="en-US" b="0"/>
+              <a:t>9</a:t>
+            </a:fld>
+            <a:endParaRPr lang="en-US"/>
+          </a:p>
+        </p:txBody>
+      </p:sp>
+    </p:spTree>
+  </p:cSld>
+  <p:clrMapOvr>
+    <a:masterClrMapping/>
+  </p:clrMapOvr>
+</p:sld>
+</file>
+
+<file path=ppt/slides/slide17.xml><?xml version="1.0" encoding="utf-8"?>
+<p:sld xmlns:a="http://schemas.openxmlformats.org/drawingml/2006/main" xmlns:r="http://schemas.openxmlformats.org/officeDocument/2006/relationships" xmlns:p="http://schemas.openxmlformats.org/presentationml/2006/main">
+  <p:cSld name="Slide 10">
+    <p:spTree>
+      <p:nvGrpSpPr>
+        <p:cNvPr id="1" name=""/>
+        <p:cNvGrpSpPr/>
+        <p:nvPr/>
+      </p:nvGrpSpPr>
+      <p:grpSpPr>
+        <a:xfrm>
+          <a:off x="0" y="0"/>
+          <a:ext cx="0" cy="0"/>
+          <a:chOff x="0" y="0"/>
+          <a:chExt cx="0" cy="0"/>
+        </a:xfrm>
+      </p:grpSpPr>
+      <p:sp>
+        <p:nvSpPr>
+          <p:cNvPr id="2" name="Text 0"/>
+          <p:cNvSpPr>
+            <a:spLocks noGrp="1"/>
+          </p:cNvSpPr>
+          <p:nvPr>
+            <p:ph type="title" idx="100" hasCustomPrompt="1"/>
+          </p:nvPr>
+        </p:nvSpPr>
+        <p:spPr>
+          <a:xfrm>
+            <a:off x="548640" y="320040"/>
+            <a:ext cx="11091672" cy="777240"/>
+          </a:xfrm>
+          <a:prstGeom prst="rect">
+            <a:avLst/>
+          </a:prstGeom>
+          <a:noFill/>
+          <a:ln/>
+        </p:spPr>
+        <p:txBody>
+          <a:bodyPr wrap="square" lIns="0" tIns="0" rIns="0" bIns="0" rtlCol="0" anchor="ctr"/>
+          <a:lstStyle/>
+          <a:p>
+            <a:pPr marL="0" indent="0" algn="l">
+              <a:buNone/>
+            </a:pPr>
+            <a:r>
+              <a:rPr lang="en-US" sz="3400" b="1" dirty="0">
+                <a:solidFill>
+                  <a:schemeClr val="tx1"/>
+                </a:solidFill>
+              </a:rPr>
+              <a:t>Started anywhere: only SARSA still slips a little</a:t>
+            </a:r>
+            <a:endParaRPr lang="en-US" sz="3400" dirty="0"/>
+          </a:p>
+        </p:txBody>
+      </p:sp>
+      <p:pic>
+        <p:nvPicPr>
+          <p:cNvPr id="3" name="failure-rate" descr="failure_rate.png"/>
+          <p:cNvPicPr>
+            <a:picLocks noChangeAspect="1"/>
+          </p:cNvPicPr>
+          <p:nvPr/>
+        </p:nvPicPr>
+        <p:blipFill>
+          <a:blip r:embed="rId3"/>
+          <a:stretch>
+            <a:fillRect/>
+          </a:stretch>
+        </p:blipFill>
+        <p:spPr>
+          <a:xfrm>
+            <a:off x="548640" y="1448885"/>
+            <a:ext cx="11091672" cy="3777349"/>
+          </a:xfrm>
+          <a:prstGeom prst="rect">
+            <a:avLst/>
+          </a:prstGeom>
+        </p:spPr>
+      </p:pic>
+      <p:sp>
+        <p:nvSpPr>
+          <p:cNvPr id="4" name="failure-rate-caption"/>
+          <p:cNvSpPr txBox="1"/>
+          <p:nvPr/>
+        </p:nvSpPr>
+        <p:spPr>
+          <a:xfrm>
+            <a:off x="548640" y="5623560"/>
+            <a:ext cx="11091672" cy="502920"/>
+          </a:xfrm>
+          <a:prstGeom prst="rect">
+            <a:avLst/>
+          </a:prstGeom>
+          <a:noFill/>
+          <a:ln/>
+        </p:spPr>
+        <p:txBody>
+          <a:bodyPr wrap="square" lIns="0" tIns="0" rIns="0" bIns="0" rtlCol="0" anchor="t"/>
+          <a:lstStyle/>
+          <a:p>
+            <a:pPr marL="0" indent="0">
+              <a:buNone/>
+            </a:pPr>
+            <a:r>
+              <a:rPr lang="en-US" sz="1700" dirty="0">
+                <a:solidFill>
+                  <a:schemeClr val="tx2"/>
+                </a:solidFill>
+              </a:rPr>
+              <a:t>Robot put in each of the 184–15,604 reachable states. New settings: Q-learning and MC ES are never wrong; SARSA takes a longer route in 0.3% (S3) and 1.8% (S4).</a:t>
+            </a:r>
+            <a:endParaRPr lang="en-US" sz="1700" dirty="0"/>
+          </a:p>
+        </p:txBody>
+      </p:sp>
+      <p:sp>
+        <p:nvSpPr>
+          <p:cNvPr id="25" name="Slide Number Placeholder 0"/>
+          <p:cNvSpPr>
+            <a:spLocks noGrp="1"/>
+          </p:cNvSpPr>
+          <p:nvPr>
+            <p:ph type="sldNum" sz="quarter" idx="4294967295"/>
+          </p:nvPr>
+        </p:nvSpPr>
+        <p:spPr>
+          <a:xfrm>
+            <a:off x="11091672" y="6355080"/>
+            <a:ext cx="548640" cy="274320"/>
+          </a:xfrm>
+          <a:prstGeom prst="rect">
+            <a:avLst/>
+          </a:prstGeom>
+          <a:extLst>
+            <a:ext uri="{C572A759-6A51-4108-AA02-DFA0A04FC94B}">
+              <ma14:wrappingTextBoxFlag xmlns:ma14="http://schemas.microsoft.com/office/mac/drawingml/2011/main" xmlns="" val="0"/>
+            </a:ext>
+          </a:extLst>
+        </p:spPr>
+        <p:txBody>
+          <a:bodyPr/>
+          <a:lstStyle>
+            <a:lvl1pPr>
+              <a:defRPr sz="1100">
+                <a:solidFill>
+                  <a:srgbClr val="737B89"/>
+                </a:solidFill>
+              </a:defRPr>
+            </a:lvl1pPr>
+          </a:lstStyle>
+          <a:p>
+            <a:pPr algn="r"/>
+            <a:fld id="{F7021451-1387-4CA6-816F-3879F97B5CBC}" type="slidenum">
+              <a:rPr lang="en-US" b="0"/>
+              <a:t>9</a:t>
+            </a:fld>
+            <a:endParaRPr lang="en-US"/>
+          </a:p>
+        </p:txBody>
+      </p:sp>
+    </p:spTree>
+  </p:cSld>
+  <p:clrMapOvr>
+    <a:masterClrMapping/>
+  </p:clrMapOvr>
+</p:sld>
+</file>
+
+<file path=ppt/slides/slide18.xml><?xml version="1.0" encoding="utf-8"?>
+<p:sld xmlns:a="http://schemas.openxmlformats.org/drawingml/2006/main" xmlns:r="http://schemas.openxmlformats.org/officeDocument/2006/relationships" xmlns:p="http://schemas.openxmlformats.org/presentationml/2006/main">
+  <p:cSld name="Slide 6">
+    <p:spTree>
+      <p:nvGrpSpPr>
+        <p:cNvPr id="1" name=""/>
+        <p:cNvGrpSpPr/>
+        <p:nvPr/>
+      </p:nvGrpSpPr>
+      <p:grpSpPr>
+        <a:xfrm>
+          <a:off x="0" y="0"/>
+          <a:ext cx="0" cy="0"/>
+          <a:chOff x="0" y="0"/>
+          <a:chExt cx="0" cy="0"/>
+        </a:xfrm>
+      </p:grpSpPr>
+      <p:sp>
+        <p:nvSpPr>
+          <p:cNvPr id="2" name="Text 0"/>
+          <p:cNvSpPr>
+            <a:spLocks noGrp="1"/>
+          </p:cNvSpPr>
+          <p:nvPr>
+            <p:ph type="title" idx="100" hasCustomPrompt="1"/>
+          </p:nvPr>
+        </p:nvSpPr>
+        <p:spPr>
+          <a:xfrm>
+            <a:off x="548640" y="320040"/>
+            <a:ext cx="11091672" cy="777240"/>
+          </a:xfrm>
+          <a:prstGeom prst="rect">
+            <a:avLst/>
+          </a:prstGeom>
+          <a:noFill/>
+          <a:ln/>
+        </p:spPr>
+        <p:txBody>
+          <a:bodyPr wrap="square" lIns="0" tIns="0" rIns="0" bIns="0" rtlCol="0" anchor="ctr"/>
+          <a:lstStyle/>
+          <a:p>
+            <a:pPr marL="0" indent="0" algn="l">
+              <a:buNone/>
+            </a:pPr>
+            <a:r>
+              <a:rPr lang="en-US" sz="3400" b="1" dirty="0">
+                <a:solidFill>
+                  <a:schemeClr val="tx1"/>
+                </a:solidFill>
+              </a:rPr>
+              <a:t>SARSA's slip: delivering C early wastes the booster</a:t>
+            </a:r>
+            <a:endParaRPr lang="en-US" sz="3400" dirty="0"/>
+          </a:p>
+        </p:txBody>
+      </p:sp>
+      <p:pic>
+        <p:nvPicPr>
+          <p:cNvPr id="3" name="failure-sarsa" descr="failure_sarsa_S4_slide.png"/>
+          <p:cNvPicPr>
+            <a:picLocks noChangeAspect="1"/>
+          </p:cNvPicPr>
+          <p:nvPr/>
+        </p:nvPicPr>
+        <p:blipFill>
+          <a:blip r:embed="rId3"/>
+          <a:stretch>
+            <a:fillRect/>
+          </a:stretch>
+        </p:blipFill>
+        <p:spPr>
+          <a:xfrm>
+            <a:off x="548640" y="1869909"/>
+            <a:ext cx="7132320" cy="3529661"/>
+          </a:xfrm>
+          <a:prstGeom prst="rect">
+            <a:avLst/>
+          </a:prstGeom>
+        </p:spPr>
+      </p:pic>
+      <p:sp>
+        <p:nvSpPr>
+          <p:cNvPr id="4" name="stat-code-num"/>
+          <p:cNvSpPr txBox="1"/>
+          <p:nvPr/>
+        </p:nvSpPr>
+        <p:spPr>
+          <a:xfrm>
+            <a:off x="8092440" y="1417320"/>
+            <a:ext cx="3547872" cy="685800"/>
+          </a:xfrm>
+          <a:prstGeom prst="rect">
+            <a:avLst/>
+          </a:prstGeom>
+          <a:noFill/>
+          <a:ln/>
+        </p:spPr>
+        <p:txBody>
+          <a:bodyPr wrap="square" lIns="0" tIns="0" rIns="0" bIns="0" rtlCol="0" anchor="t"/>
+          <a:lstStyle/>
+          <a:p>
+            <a:pPr marL="0" indent="0">
+              <a:buNone/>
+            </a:pPr>
+            <a:r>
+              <a:rPr lang="en-US" sz="4000" b="1" dirty="0">
+                <a:solidFill>
+                  <a:schemeClr val="tx1"/>
+                </a:solidFill>
+              </a:rPr>
+              <a:t>17419</a:t>
+            </a:r>
+            <a:endParaRPr lang="en-US" sz="4000" dirty="0"/>
+          </a:p>
+        </p:txBody>
+      </p:sp>
+      <p:sp>
+        <p:nvSpPr>
+          <p:cNvPr id="5" name="stat-code-label"/>
+          <p:cNvSpPr txBox="1"/>
+          <p:nvPr/>
+        </p:nvSpPr>
+        <p:spPr>
+          <a:xfrm>
+            <a:off x="8092440" y="2130552"/>
+            <a:ext cx="3547872" cy="685800"/>
+          </a:xfrm>
+          <a:prstGeom prst="rect">
+            <a:avLst/>
+          </a:prstGeom>
+          <a:noFill/>
+          <a:ln/>
+        </p:spPr>
+        <p:txBody>
+          <a:bodyPr wrap="square" lIns="0" tIns="0" rIns="0" bIns="0" rtlCol="0" anchor="t"/>
+          <a:lstStyle/>
+          <a:p>
+            <a:pPr marL="0" indent="0">
+              <a:buNone/>
+            </a:pPr>
+            <a:r>
+              <a:rPr lang="en-US" sz="1500" dirty="0">
+                <a:solidFill>
+                  <a:schemeClr val="tx2"/>
+                </a:solidFill>
+              </a:rPr>
+              <a:t>state code of the wrong decision (red ring): SARSA takes Drop, optimal is Down</a:t>
+            </a:r>
+            <a:endParaRPr lang="en-US" sz="1500" dirty="0"/>
+          </a:p>
+        </p:txBody>
+      </p:sp>
+      <p:sp>
+        <p:nvSpPr>
+          <p:cNvPr id="6" name="stat-gap-num"/>
+          <p:cNvSpPr txBox="1"/>
+          <p:nvPr/>
+        </p:nvSpPr>
+        <p:spPr>
+          <a:xfrm>
+            <a:off x="8092440" y="2971800"/>
+            <a:ext cx="3547872" cy="685800"/>
+          </a:xfrm>
+          <a:prstGeom prst="rect">
+            <a:avLst/>
+          </a:prstGeom>
+          <a:noFill/>
+          <a:ln/>
+        </p:spPr>
+        <p:txBody>
+          <a:bodyPr wrap="square" lIns="0" tIns="0" rIns="0" bIns="0" rtlCol="0" anchor="t"/>
+          <a:lstStyle/>
+          <a:p>
+            <a:pPr marL="0" indent="0">
+              <a:buNone/>
+            </a:pPr>
+            <a:r>
+              <a:rPr lang="en-US" sz="4000" b="1" dirty="0">
+                <a:solidFill>
+                  <a:schemeClr val="accent1"/>
+                </a:solidFill>
+              </a:rPr>
+              <a:t>0.04</a:t>
+            </a:r>
+            <a:endParaRPr lang="en-US" sz="4000" dirty="0"/>
+          </a:p>
+        </p:txBody>
+      </p:sp>
+      <p:sp>
+        <p:nvSpPr>
+          <p:cNvPr id="7" name="stat-gap-label"/>
+          <p:cNvSpPr txBox="1"/>
+          <p:nvPr/>
+        </p:nvSpPr>
+        <p:spPr>
+          <a:xfrm>
+            <a:off x="8092440" y="3685032"/>
+            <a:ext cx="3547872" cy="685800"/>
+          </a:xfrm>
+          <a:prstGeom prst="rect">
+            <a:avLst/>
+          </a:prstGeom>
+          <a:noFill/>
+          <a:ln/>
+        </p:spPr>
+        <p:txBody>
+          <a:bodyPr wrap="square" lIns="0" tIns="0" rIns="0" bIns="0" rtlCol="0" anchor="t"/>
+          <a:lstStyle/>
+          <a:p>
+            <a:pPr marL="0" indent="0">
+              <a:buNone/>
+            </a:pPr>
+            <a:r>
+              <a:rPr lang="en-US" sz="1500" dirty="0">
+                <a:solidFill>
+                  <a:schemeClr val="tx2"/>
+                </a:solidFill>
+              </a:rPr>
+              <a:t>gap between the two actions in Q*; SARSA's Q error there is 0.12–0.24</a:t>
+            </a:r>
+            <a:endParaRPr lang="en-US" sz="1500" dirty="0"/>
+          </a:p>
+        </p:txBody>
+      </p:sp>
+      <p:sp>
+        <p:nvSpPr>
+          <p:cNvPr id="8" name="stat-steps-num"/>
+          <p:cNvSpPr txBox="1"/>
+          <p:nvPr/>
+        </p:nvSpPr>
+        <p:spPr>
+          <a:xfrm>
+            <a:off x="8092440" y="4526280"/>
+            <a:ext cx="3547872" cy="685800"/>
+          </a:xfrm>
+          <a:prstGeom prst="rect">
+            <a:avLst/>
+          </a:prstGeom>
+          <a:noFill/>
+          <a:ln/>
+        </p:spPr>
+        <p:txBody>
+          <a:bodyPr wrap="square" lIns="0" tIns="0" rIns="0" bIns="0" rtlCol="0" anchor="t"/>
+          <a:lstStyle/>
+          <a:p>
+            <a:pPr marL="0" indent="0">
+              <a:buNone/>
+            </a:pPr>
+            <a:r>
+              <a:rPr lang="en-US" sz="4000" b="1" dirty="0">
+                <a:solidFill>
+                  <a:schemeClr val="accent3"/>
+                </a:solidFill>
+              </a:rPr>
+              <a:t>61 vs 55</a:t>
+            </a:r>
+            <a:endParaRPr lang="en-US" sz="4000" dirty="0"/>
+          </a:p>
+        </p:txBody>
+      </p:sp>
+      <p:sp>
+        <p:nvSpPr>
+          <p:cNvPr id="9" name="stat-steps-label"/>
+          <p:cNvSpPr txBox="1"/>
+          <p:nvPr/>
+        </p:nvSpPr>
+        <p:spPr>
+          <a:xfrm>
+            <a:off x="8092440" y="5239512"/>
+            <a:ext cx="3547872" cy="685800"/>
+          </a:xfrm>
+          <a:prstGeom prst="rect">
+            <a:avLst/>
+          </a:prstGeom>
+          <a:noFill/>
+          <a:ln/>
+        </p:spPr>
+        <p:txBody>
+          <a:bodyPr wrap="square" lIns="0" tIns="0" rIns="0" bIns="0" rtlCol="0" anchor="t"/>
+          <a:lstStyle/>
+          <a:p>
+            <a:pPr marL="0" indent="0">
+              <a:buNone/>
+            </a:pPr>
+            <a:r>
+              <a:rPr lang="en-US" sz="1500" dirty="0">
+                <a:solidFill>
+                  <a:schemeClr val="tx2"/>
+                </a:solidFill>
+              </a:rPr>
+              <a:t>steps from start state 643: SARSA vs optimal</a:t>
+            </a:r>
+            <a:endParaRPr lang="en-US" sz="1500" dirty="0"/>
+          </a:p>
+        </p:txBody>
+      </p:sp>
+      <p:sp>
+        <p:nvSpPr>
+          <p:cNvPr id="25" name="Slide Number Placeholder 0"/>
+          <p:cNvSpPr>
+            <a:spLocks noGrp="1"/>
+          </p:cNvSpPr>
+          <p:nvPr>
+            <p:ph type="sldNum" sz="quarter" idx="4294967295"/>
+          </p:nvPr>
+        </p:nvSpPr>
+        <p:spPr>
+          <a:xfrm>
+            <a:off x="11091672" y="6355080"/>
+            <a:ext cx="548640" cy="274320"/>
+          </a:xfrm>
+          <a:prstGeom prst="rect">
+            <a:avLst/>
+          </a:prstGeom>
+          <a:extLst>
+            <a:ext uri="{C572A759-6A51-4108-AA02-DFA0A04FC94B}">
+              <ma14:wrappingTextBoxFlag xmlns:ma14="http://schemas.microsoft.com/office/mac/drawingml/2011/main" xmlns="" val="0"/>
+            </a:ext>
+          </a:extLst>
+        </p:spPr>
+        <p:txBody>
+          <a:bodyPr/>
+          <a:lstStyle>
+            <a:lvl1pPr>
+              <a:defRPr sz="1100">
+                <a:solidFill>
+                  <a:srgbClr val="737B89"/>
+                </a:solidFill>
+              </a:defRPr>
+            </a:lvl1pPr>
+          </a:lstStyle>
+          <a:p>
+            <a:pPr algn="r"/>
+            <a:fld id="{F7021451-1387-4CA6-816F-3879F97B5CBC}" type="slidenum">
+              <a:rPr lang="en-US" b="0"/>
+              <a:t>5</a:t>
+            </a:fld>
+            <a:endParaRPr lang="en-US"/>
+          </a:p>
+        </p:txBody>
+      </p:sp>
+    </p:spTree>
+  </p:cSld>
+  <p:clrMapOvr>
+    <a:masterClrMapping/>
+  </p:clrMapOvr>
+</p:sld>
+</file>
+
+<file path=ppt/slides/slide19.xml><?xml version="1.0" encoding="utf-8"?>
+<p:sld xmlns:a="http://schemas.openxmlformats.org/drawingml/2006/main" xmlns:r="http://schemas.openxmlformats.org/officeDocument/2006/relationships" xmlns:p="http://schemas.openxmlformats.org/presentationml/2006/main">
+  <p:cSld name="Slide 2">
+    <p:spTree>
+      <p:nvGrpSpPr>
+        <p:cNvPr id="1" name=""/>
+        <p:cNvGrpSpPr/>
+        <p:nvPr/>
+      </p:nvGrpSpPr>
+      <p:grpSpPr>
+        <a:xfrm>
+          <a:off x="0" y="0"/>
+          <a:ext cx="0" cy="0"/>
+          <a:chOff x="0" y="0"/>
+          <a:chExt cx="0" cy="0"/>
+        </a:xfrm>
+      </p:grpSpPr>
+      <p:sp>
+        <p:nvSpPr>
+          <p:cNvPr id="2" name="Text 0"/>
+          <p:cNvSpPr>
+            <a:spLocks noGrp="1"/>
+          </p:cNvSpPr>
+          <p:nvPr>
+            <p:ph type="title" idx="100" hasCustomPrompt="1"/>
+          </p:nvPr>
+        </p:nvSpPr>
+        <p:spPr>
+          <a:xfrm>
+            <a:off x="548640" y="320040"/>
+            <a:ext cx="11091672" cy="777240"/>
+          </a:xfrm>
+          <a:prstGeom prst="rect">
+            <a:avLst/>
+          </a:prstGeom>
+          <a:noFill/>
+          <a:ln/>
+        </p:spPr>
+        <p:txBody>
+          <a:bodyPr wrap="square" lIns="0" tIns="0" rIns="0" bIns="0" rtlCol="0" anchor="ctr"/>
+          <a:lstStyle/>
+          <a:p>
+            <a:pPr marL="0" indent="0" algn="l">
+              <a:buNone/>
+            </a:pPr>
+            <a:r>
+              <a:rPr lang="en-US" sz="3400" b="1" dirty="0">
+                <a:solidFill>
+                  <a:schemeClr val="tx1"/>
+                </a:solidFill>
+              </a:rPr>
+              <a:t>Where SARSA turns wrong: the state codes</a:t>
+            </a:r>
+            <a:endParaRPr lang="en-US" sz="3400" dirty="0"/>
+          </a:p>
+        </p:txBody>
+      </p:sp>
+      <p:sp>
+        <p:nvSpPr>
+          <p:cNvPr id="6" name="reward-card"/>
+          <p:cNvSpPr/>
+          <p:nvPr/>
+        </p:nvSpPr>
+        <p:spPr>
+          <a:xfrm>
+            <a:off x="548640" y="1280160"/>
+            <a:ext cx="11091672" cy="4617720"/>
+          </a:xfrm>
+          <a:prstGeom prst="roundRect">
+            <a:avLst>
+              <a:gd name="adj" fmla="val 2609"/>
+            </a:avLst>
+          </a:prstGeom>
+          <a:solidFill>
+            <a:schemeClr val="bg2"/>
+          </a:solidFill>
+          <a:ln w="12700">
+            <a:solidFill>
+              <a:schemeClr val="bg2"/>
+            </a:solidFill>
+            <a:prstDash val="solid"/>
+          </a:ln>
+        </p:spPr>
+        <p:txBody>
+          <a:bodyPr/>
+          <a:lstStyle/>
+          <a:p>
+            <a:endParaRPr lang="en-US"/>
+          </a:p>
+        </p:txBody>
+      </p:sp>
+      <p:graphicFrame>
+        <p:nvGraphicFramePr>
+          <p:cNvPr id="8" name="codes-table"/>
+          <p:cNvGraphicFramePr>
+            <a:graphicFrameLocks noGrp="1"/>
+          </p:cNvGraphicFramePr>
+          <p:nvPr>
+            <p:extLst>
+              <p:ext uri="{D42A27DB-BD31-4B8C-83A1-F6EECF244321}">
+                <p14:modId xmlns:p14="http://schemas.microsoft.com/office/powerpoint/2010/main" val="1579011935"/>
+              </p:ext>
+            </p:extLst>
+          </p:nvPr>
+        </p:nvGraphicFramePr>
+        <p:xfrm>
+          <a:off x="868680" y="1554480"/>
+          <a:ext cx="10452100" cy="3022600"/>
+        </p:xfrm>
+        <a:graphic>
+          <a:graphicData uri="http://schemas.openxmlformats.org/drawingml/2006/table">
+            <a:tbl>
+              <a:tblPr/>
+              <a:tblGrid>
+                <a:gridCol w="1206500"/>
+                <a:gridCol w="2921000"/>
+                <a:gridCol w="1587500"/>
+                <a:gridCol w="1905000"/>
+                <a:gridCol w="1778000"/>
+                <a:gridCol w="1054100"/>
+              </a:tblGrid>
+              <a:tr h="431800">
+                <a:tc>
+                  <a:txBody>
+                    <a:bodyPr/>
+                    <a:lstStyle/>
+                    <a:p>
+                      <a:pPr marL="0" indent="0" algn="l">
+                        <a:buNone/>
+                      </a:pPr>
+                      <a:r>
+                        <a:rPr lang="en-US" sz="1400" b="1" dirty="0">
+                          <a:solidFill>
+                            <a:schemeClr val="tx1"/>
+                          </a:solidFill>
+                        </a:rPr>
+                        <a:t>State code</a:t>
+                      </a:r>
+                      <a:endParaRPr lang="en-US" sz="1400" dirty="0"/>
+                    </a:p>
+                  </a:txBody>
+                  <a:tcPr marL="109728" marR="109728" marT="0" marB="0" anchor="ctr">
+                    <a:lnL w="9525" cap="flat" cmpd="sng" algn="ctr">
+                      <a:solidFill>
+                        <a:srgbClr val="D5DCE6"/>
+                      </a:solidFill>
+                      <a:prstDash val="solid"/>
+                      <a:round/>
+                      <a:headEnd type="none" w="med" len="med"/>
+                      <a:tailEnd type="none" w="med" len="med"/>
+                    </a:lnL>
+                    <a:lnR w="9525" cap="flat" cmpd="sng" algn="ctr">
+                      <a:solidFill>
+                        <a:srgbClr val="D5DCE6"/>
+                      </a:solidFill>
+                      <a:prstDash val="solid"/>
+                      <a:round/>
+                      <a:headEnd type="none" w="med" len="med"/>
+                      <a:tailEnd type="none" w="med" len="med"/>
+                    </a:lnR>
+                    <a:lnT w="9525" cap="flat" cmpd="sng" algn="ctr">
+                      <a:solidFill>
+                        <a:srgbClr val="D5DCE6"/>
+                      </a:solidFill>
+                      <a:prstDash val="solid"/>
+                      <a:round/>
+                      <a:headEnd type="none" w="med" len="med"/>
+                      <a:tailEnd type="none" w="med" len="med"/>
+                    </a:lnT>
+                    <a:lnB w="9525" cap="flat" cmpd="sng" algn="ctr">
+                      <a:solidFill>
+                        <a:srgbClr val="D5DCE6"/>
+                      </a:solidFill>
+                      <a:prstDash val="solid"/>
+                      <a:round/>
+                      <a:headEnd type="none" w="med" len="med"/>
+                      <a:tailEnd type="none" w="med" len="med"/>
+                    </a:lnB>
+                    <a:solidFill>
+                      <a:srgbClr val="E2E8F1"/>
+                    </a:solidFill>
+                  </a:tcPr>
+                </a:tc>
+                <a:tc>
+                  <a:txBody>
+                    <a:bodyPr/>
+                    <a:lstStyle/>
+                    <a:p>
+                      <a:pPr marL="0" indent="0" algn="l">
+                        <a:buNone/>
+                      </a:pPr>
+                      <a:r>
+                        <a:rPr lang="en-US" sz="1400" b="1" dirty="0">
+                          <a:solidFill>
+                            <a:schemeClr val="tx1"/>
+                          </a:solidFill>
+                        </a:rPr>
+                        <a:t>State (row, col, σA–σD, τ, b)</a:t>
+                      </a:r>
+                      <a:endParaRPr lang="en-US" sz="1400" dirty="0"/>
+                    </a:p>
+                  </a:txBody>
+                  <a:tcPr marL="109728" marR="109728" marT="0" marB="0" anchor="ctr">
+                    <a:lnL w="9525" cap="flat" cmpd="sng" algn="ctr">
+                      <a:solidFill>
+                        <a:srgbClr val="D5DCE6"/>
+                      </a:solidFill>
+                      <a:prstDash val="solid"/>
+                      <a:round/>
+                      <a:headEnd type="none" w="med" len="med"/>
+                      <a:tailEnd type="none" w="med" len="med"/>
+                    </a:lnL>
+                    <a:lnR w="9525" cap="flat" cmpd="sng" algn="ctr">
+                      <a:solidFill>
+                        <a:srgbClr val="D5DCE6"/>
+                      </a:solidFill>
+                      <a:prstDash val="solid"/>
+                      <a:round/>
+                      <a:headEnd type="none" w="med" len="med"/>
+                      <a:tailEnd type="none" w="med" len="med"/>
+                    </a:lnR>
+                    <a:lnT w="9525" cap="flat" cmpd="sng" algn="ctr">
+                      <a:solidFill>
+                        <a:srgbClr val="D5DCE6"/>
+                      </a:solidFill>
+                      <a:prstDash val="solid"/>
+                      <a:round/>
+                      <a:headEnd type="none" w="med" len="med"/>
+                      <a:tailEnd type="none" w="med" len="med"/>
+                    </a:lnT>
+                    <a:lnB w="9525" cap="flat" cmpd="sng" algn="ctr">
+                      <a:solidFill>
+                        <a:srgbClr val="D5DCE6"/>
+                      </a:solidFill>
+                      <a:prstDash val="solid"/>
+                      <a:round/>
+                      <a:headEnd type="none" w="med" len="med"/>
+                      <a:tailEnd type="none" w="med" len="med"/>
+                    </a:lnB>
+                    <a:solidFill>
+                      <a:srgbClr val="E2E8F1"/>
+                    </a:solidFill>
+                  </a:tcPr>
+                </a:tc>
+                <a:tc>
+                  <a:txBody>
+                    <a:bodyPr/>
+                    <a:lstStyle/>
+                    <a:p>
+                      <a:pPr marL="0" indent="0" algn="l">
+                        <a:buNone/>
+                      </a:pPr>
+                      <a:r>
+                        <a:rPr lang="en-US" sz="1400" b="1" dirty="0">
+                          <a:solidFill>
+                            <a:schemeClr val="tx1"/>
+                          </a:solidFill>
+                        </a:rPr>
+                        <a:t>Wrong states</a:t>
+                      </a:r>
+                      <a:endParaRPr lang="en-US" sz="1400" dirty="0"/>
+                    </a:p>
+                  </a:txBody>
+                  <a:tcPr marL="109728" marR="109728" marT="0" marB="0" anchor="ctr">
+                    <a:lnL w="9525" cap="flat" cmpd="sng" algn="ctr">
+                      <a:solidFill>
+                        <a:srgbClr val="D5DCE6"/>
+                      </a:solidFill>
+                      <a:prstDash val="solid"/>
+                      <a:round/>
+                      <a:headEnd type="none" w="med" len="med"/>
+                      <a:tailEnd type="none" w="med" len="med"/>
+                    </a:lnL>
+                    <a:lnR w="9525" cap="flat" cmpd="sng" algn="ctr">
+                      <a:solidFill>
+                        <a:srgbClr val="D5DCE6"/>
+                      </a:solidFill>
+                      <a:prstDash val="solid"/>
+                      <a:round/>
+                      <a:headEnd type="none" w="med" len="med"/>
+                      <a:tailEnd type="none" w="med" len="med"/>
+                    </a:lnR>
+                    <a:lnT w="9525" cap="flat" cmpd="sng" algn="ctr">
+                      <a:solidFill>
+                        <a:srgbClr val="D5DCE6"/>
+                      </a:solidFill>
+                      <a:prstDash val="solid"/>
+                      <a:round/>
+                      <a:headEnd type="none" w="med" len="med"/>
+                      <a:tailEnd type="none" w="med" len="med"/>
+                    </a:lnT>
+                    <a:lnB w="9525" cap="flat" cmpd="sng" algn="ctr">
+                      <a:solidFill>
+                        <a:srgbClr val="D5DCE6"/>
+                      </a:solidFill>
+                      <a:prstDash val="solid"/>
+                      <a:round/>
+                      <a:headEnd type="none" w="med" len="med"/>
+                      <a:tailEnd type="none" w="med" len="med"/>
+                    </a:lnB>
+                    <a:solidFill>
+                      <a:srgbClr val="E2E8F1"/>
+                    </a:solidFill>
+                  </a:tcPr>
+                </a:tc>
+                <a:tc>
+                  <a:txBody>
+                    <a:bodyPr/>
+                    <a:lstStyle/>
+                    <a:p>
+                      <a:pPr marL="0" indent="0" algn="l">
+                        <a:buNone/>
+                      </a:pPr>
+                      <a:r>
+                        <a:rPr lang="en-US" sz="1400" b="1" dirty="0">
+                          <a:solidFill>
+                            <a:schemeClr val="tx1"/>
+                          </a:solidFill>
+                        </a:rPr>
+                        <a:t>SARSA takes (Q*)</a:t>
+                      </a:r>
+                      <a:endParaRPr lang="en-US" sz="1400" dirty="0"/>
+                    </a:p>
+                  </a:txBody>
+                  <a:tcPr marL="109728" marR="109728" marT="0" marB="0" anchor="ctr">
+                    <a:lnL w="9525" cap="flat" cmpd="sng" algn="ctr">
+                      <a:solidFill>
+                        <a:srgbClr val="D5DCE6"/>
+                      </a:solidFill>
+                      <a:prstDash val="solid"/>
+                      <a:round/>
+                      <a:headEnd type="none" w="med" len="med"/>
+                      <a:tailEnd type="none" w="med" len="med"/>
+                    </a:lnL>
+                    <a:lnR w="9525" cap="flat" cmpd="sng" algn="ctr">
+                      <a:solidFill>
+                        <a:srgbClr val="D5DCE6"/>
+                      </a:solidFill>
+                      <a:prstDash val="solid"/>
+                      <a:round/>
+                      <a:headEnd type="none" w="med" len="med"/>
+                      <a:tailEnd type="none" w="med" len="med"/>
+                    </a:lnR>
+                    <a:lnT w="9525" cap="flat" cmpd="sng" algn="ctr">
+                      <a:solidFill>
+                        <a:srgbClr val="D5DCE6"/>
+                      </a:solidFill>
+                      <a:prstDash val="solid"/>
+                      <a:round/>
+                      <a:headEnd type="none" w="med" len="med"/>
+                      <a:tailEnd type="none" w="med" len="med"/>
+                    </a:lnT>
+                    <a:lnB w="9525" cap="flat" cmpd="sng" algn="ctr">
+                      <a:solidFill>
+                        <a:srgbClr val="D5DCE6"/>
+                      </a:solidFill>
+                      <a:prstDash val="solid"/>
+                      <a:round/>
+                      <a:headEnd type="none" w="med" len="med"/>
+                      <a:tailEnd type="none" w="med" len="med"/>
+                    </a:lnB>
+                    <a:solidFill>
+                      <a:srgbClr val="E2E8F1"/>
+                    </a:solidFill>
+                  </a:tcPr>
+                </a:tc>
+                <a:tc>
+                  <a:txBody>
+                    <a:bodyPr/>
+                    <a:lstStyle/>
+                    <a:p>
+                      <a:pPr marL="0" indent="0" algn="l">
+                        <a:buNone/>
+                      </a:pPr>
+                      <a:r>
+                        <a:rPr lang="en-US" sz="1400" b="1" dirty="0">
+                          <a:solidFill>
+                            <a:schemeClr val="tx1"/>
+                          </a:solidFill>
+                        </a:rPr>
+                        <a:t>Optimal (Q*)</a:t>
+                      </a:r>
+                      <a:endParaRPr lang="en-US" sz="1400" dirty="0"/>
+                    </a:p>
+                  </a:txBody>
+                  <a:tcPr marL="109728" marR="109728" marT="0" marB="0" anchor="ctr">
+                    <a:lnL w="9525" cap="flat" cmpd="sng" algn="ctr">
+                      <a:solidFill>
+                        <a:srgbClr val="D5DCE6"/>
+                      </a:solidFill>
+                      <a:prstDash val="solid"/>
+                      <a:round/>
+                      <a:headEnd type="none" w="med" len="med"/>
+                      <a:tailEnd type="none" w="med" len="med"/>
+                    </a:lnL>
+                    <a:lnR w="9525" cap="flat" cmpd="sng" algn="ctr">
+                      <a:solidFill>
+                        <a:srgbClr val="D5DCE6"/>
+                      </a:solidFill>
+                      <a:prstDash val="solid"/>
+                      <a:round/>
+                      <a:headEnd type="none" w="med" len="med"/>
+                      <a:tailEnd type="none" w="med" len="med"/>
+                    </a:lnR>
+                    <a:lnT w="9525" cap="flat" cmpd="sng" algn="ctr">
+                      <a:solidFill>
+                        <a:srgbClr val="D5DCE6"/>
+                      </a:solidFill>
+                      <a:prstDash val="solid"/>
+                      <a:round/>
+                      <a:headEnd type="none" w="med" len="med"/>
+                      <a:tailEnd type="none" w="med" len="med"/>
+                    </a:lnT>
+                    <a:lnB w="9525" cap="flat" cmpd="sng" algn="ctr">
+                      <a:solidFill>
+                        <a:srgbClr val="D5DCE6"/>
+                      </a:solidFill>
+                      <a:prstDash val="solid"/>
+                      <a:round/>
+                      <a:headEnd type="none" w="med" len="med"/>
+                      <a:tailEnd type="none" w="med" len="med"/>
+                    </a:lnB>
+                    <a:solidFill>
+                      <a:srgbClr val="E2E8F1"/>
+                    </a:solidFill>
+                  </a:tcPr>
+                </a:tc>
+                <a:tc>
+                  <a:txBody>
+                    <a:bodyPr/>
+                    <a:lstStyle/>
+                    <a:p>
+                      <a:pPr marL="0" indent="0" algn="l">
+                        <a:buNone/>
+                      </a:pPr>
+                      <a:r>
+                        <a:rPr lang="en-US" sz="1400" b="1" dirty="0">
+                          <a:solidFill>
+                            <a:schemeClr val="tx1"/>
+                          </a:solidFill>
+                        </a:rPr>
+                        <a:t>Q* gap</a:t>
+                      </a:r>
+                      <a:endParaRPr lang="en-US" sz="1400" dirty="0"/>
+                    </a:p>
+                  </a:txBody>
+                  <a:tcPr marL="109728" marR="109728" marT="0" marB="0" anchor="ctr">
+                    <a:lnL w="9525" cap="flat" cmpd="sng" algn="ctr">
+                      <a:solidFill>
+                        <a:srgbClr val="D5DCE6"/>
+                      </a:solidFill>
+                      <a:prstDash val="solid"/>
+                      <a:round/>
+                      <a:headEnd type="none" w="med" len="med"/>
+                      <a:tailEnd type="none" w="med" len="med"/>
+                    </a:lnL>
+                    <a:lnR w="9525" cap="flat" cmpd="sng" algn="ctr">
+                      <a:solidFill>
+                        <a:srgbClr val="D5DCE6"/>
+                      </a:solidFill>
+                      <a:prstDash val="solid"/>
+                      <a:round/>
+                      <a:headEnd type="none" w="med" len="med"/>
+                      <a:tailEnd type="none" w="med" len="med"/>
+                    </a:lnR>
+                    <a:lnT w="9525" cap="flat" cmpd="sng" algn="ctr">
+                      <a:solidFill>
+                        <a:srgbClr val="D5DCE6"/>
+                      </a:solidFill>
+                      <a:prstDash val="solid"/>
+                      <a:round/>
+                      <a:headEnd type="none" w="med" len="med"/>
+                      <a:tailEnd type="none" w="med" len="med"/>
+                    </a:lnT>
+                    <a:lnB w="9525" cap="flat" cmpd="sng" algn="ctr">
+                      <a:solidFill>
+                        <a:srgbClr val="D5DCE6"/>
+                      </a:solidFill>
+                      <a:prstDash val="solid"/>
+                      <a:round/>
+                      <a:headEnd type="none" w="med" len="med"/>
+                      <a:tailEnd type="none" w="med" len="med"/>
+                    </a:lnB>
+                    <a:solidFill>
+                      <a:srgbClr val="E2E8F1"/>
+                    </a:solidFill>
+                  </a:tcPr>
+                </a:tc>
+              </a:tr>
+              <a:tr h="431800">
+                <a:tc>
+                  <a:txBody>
+                    <a:bodyPr/>
+                    <a:lstStyle/>
+                    <a:p>
+                      <a:pPr marL="0" indent="0">
+                        <a:buNone/>
+                      </a:pPr>
+                      <a:r>
+                        <a:rPr lang="en-US" sz="1400" dirty="0">
+                          <a:solidFill>
+                            <a:srgbClr val="3D4451"/>
+                          </a:solidFill>
+                        </a:rPr>
+                        <a:t>190921</a:t>
+                      </a:r>
+                      <a:endParaRPr lang="en-US" sz="1400" dirty="0"/>
+                    </a:p>
+                  </a:txBody>
+                  <a:tcPr marL="109728" marR="109728" marT="0" marB="0" anchor="ctr">
+                    <a:lnL w="9525" cap="flat" cmpd="sng" algn="ctr">
+                      <a:solidFill>
+                        <a:srgbClr val="D5DCE6"/>
+                      </a:solidFill>
+                      <a:prstDash val="solid"/>
+                      <a:round/>
+                      <a:headEnd type="none" w="med" len="med"/>
+                      <a:tailEnd type="none" w="med" len="med"/>
+                    </a:lnL>
+                    <a:lnR w="9525" cap="flat" cmpd="sng" algn="ctr">
+                      <a:solidFill>
+                        <a:srgbClr val="D5DCE6"/>
+                      </a:solidFill>
+                      <a:prstDash val="solid"/>
+                      <a:round/>
+                      <a:headEnd type="none" w="med" len="med"/>
+                      <a:tailEnd type="none" w="med" len="med"/>
+                    </a:lnR>
+                    <a:lnT w="9525" cap="flat" cmpd="sng" algn="ctr">
+                      <a:solidFill>
+                        <a:srgbClr val="D5DCE6"/>
+                      </a:solidFill>
+                      <a:prstDash val="solid"/>
+                      <a:round/>
+                      <a:headEnd type="none" w="med" len="med"/>
+                      <a:tailEnd type="none" w="med" len="med"/>
+                    </a:lnT>
+                    <a:lnB w="9525" cap="flat" cmpd="sng" algn="ctr">
+                      <a:solidFill>
+                        <a:srgbClr val="D5DCE6"/>
+                      </a:solidFill>
+                      <a:prstDash val="solid"/>
+                      <a:round/>
+                      <a:headEnd type="none" w="med" len="med"/>
+                      <a:tailEnd type="none" w="med" len="med"/>
+                    </a:lnB>
+                    <a:solidFill>
+                      <a:srgbClr val="FFFFFF"/>
+                    </a:solidFill>
+                  </a:tcPr>
+                </a:tc>
+                <a:tc>
+                  <a:txBody>
+                    <a:bodyPr/>
+                    <a:lstStyle/>
+                    <a:p>
+                      <a:pPr marL="0" indent="0">
+                        <a:buNone/>
+                      </a:pPr>
+                      <a:r>
+                        <a:rPr lang="en-US" sz="1400" dirty="0">
+                          <a:solidFill>
+                            <a:srgbClr val="3D4451"/>
+                          </a:solidFill>
+                        </a:rPr>
+                        <a:t>(4, 2, 0, 1, 1, 0, 22, 1)</a:t>
+                      </a:r>
+                      <a:endParaRPr lang="en-US" sz="1400" dirty="0"/>
+                    </a:p>
+                  </a:txBody>
+                  <a:tcPr marL="109728" marR="109728" marT="0" marB="0" anchor="ctr">
+                    <a:lnL w="9525" cap="flat" cmpd="sng" algn="ctr">
+                      <a:solidFill>
+                        <a:srgbClr val="D5DCE6"/>
+                      </a:solidFill>
+                      <a:prstDash val="solid"/>
+                      <a:round/>
+                      <a:headEnd type="none" w="med" len="med"/>
+                      <a:tailEnd type="none" w="med" len="med"/>
+                    </a:lnL>
+                    <a:lnR w="9525" cap="flat" cmpd="sng" algn="ctr">
+                      <a:solidFill>
+                        <a:srgbClr val="D5DCE6"/>
+                      </a:solidFill>
+                      <a:prstDash val="solid"/>
+                      <a:round/>
+                      <a:headEnd type="none" w="med" len="med"/>
+                      <a:tailEnd type="none" w="med" len="med"/>
+                    </a:lnR>
+                    <a:lnT w="9525" cap="flat" cmpd="sng" algn="ctr">
+                      <a:solidFill>
+                        <a:srgbClr val="D5DCE6"/>
+                      </a:solidFill>
+                      <a:prstDash val="solid"/>
+                      <a:round/>
+                      <a:headEnd type="none" w="med" len="med"/>
+                      <a:tailEnd type="none" w="med" len="med"/>
+                    </a:lnT>
+                    <a:lnB w="9525" cap="flat" cmpd="sng" algn="ctr">
+                      <a:solidFill>
+                        <a:srgbClr val="D5DCE6"/>
+                      </a:solidFill>
+                      <a:prstDash val="solid"/>
+                      <a:round/>
+                      <a:headEnd type="none" w="med" len="med"/>
+                      <a:tailEnd type="none" w="med" len="med"/>
+                    </a:lnB>
+                    <a:solidFill>
+                      <a:srgbClr val="FFFFFF"/>
+                    </a:solidFill>
+                  </a:tcPr>
+                </a:tc>
+                <a:tc>
+                  <a:txBody>
+                    <a:bodyPr/>
+                    <a:lstStyle/>
+                    <a:p>
+                      <a:pPr marL="0" indent="0">
+                        <a:buNone/>
+                      </a:pPr>
+                      <a:r>
+                        <a:rPr lang="en-US" sz="1400" dirty="0">
+                          <a:solidFill>
+                            <a:srgbClr val="3D4451"/>
+                          </a:solidFill>
+                        </a:rPr>
+                        <a:t>109</a:t>
+                      </a:r>
+                      <a:endParaRPr lang="en-US" sz="1400" dirty="0"/>
+                    </a:p>
+                  </a:txBody>
+                  <a:tcPr marL="109728" marR="109728" marT="0" marB="0" anchor="ctr">
+                    <a:lnL w="9525" cap="flat" cmpd="sng" algn="ctr">
+                      <a:solidFill>
+                        <a:srgbClr val="D5DCE6"/>
+                      </a:solidFill>
+                      <a:prstDash val="solid"/>
+                      <a:round/>
+                      <a:headEnd type="none" w="med" len="med"/>
+                      <a:tailEnd type="none" w="med" len="med"/>
+                    </a:lnL>
+                    <a:lnR w="9525" cap="flat" cmpd="sng" algn="ctr">
+                      <a:solidFill>
+                        <a:srgbClr val="D5DCE6"/>
+                      </a:solidFill>
+                      <a:prstDash val="solid"/>
+                      <a:round/>
+                      <a:headEnd type="none" w="med" len="med"/>
+                      <a:tailEnd type="none" w="med" len="med"/>
+                    </a:lnR>
+                    <a:lnT w="9525" cap="flat" cmpd="sng" algn="ctr">
+                      <a:solidFill>
+                        <a:srgbClr val="D5DCE6"/>
+                      </a:solidFill>
+                      <a:prstDash val="solid"/>
+                      <a:round/>
+                      <a:headEnd type="none" w="med" len="med"/>
+                      <a:tailEnd type="none" w="med" len="med"/>
+                    </a:lnT>
+                    <a:lnB w="9525" cap="flat" cmpd="sng" algn="ctr">
+                      <a:solidFill>
+                        <a:srgbClr val="D5DCE6"/>
+                      </a:solidFill>
+                      <a:prstDash val="solid"/>
+                      <a:round/>
+                      <a:headEnd type="none" w="med" len="med"/>
+                      <a:tailEnd type="none" w="med" len="med"/>
+                    </a:lnB>
+                    <a:solidFill>
+                      <a:srgbClr val="FFFFFF"/>
+                    </a:solidFill>
+                  </a:tcPr>
+                </a:tc>
+                <a:tc>
+                  <a:txBody>
+                    <a:bodyPr/>
+                    <a:lstStyle/>
+                    <a:p>
+                      <a:pPr marL="0" indent="0">
+                        <a:buNone/>
+                      </a:pPr>
+                      <a:r>
+                        <a:rPr lang="en-US" sz="1400" dirty="0">
+                          <a:solidFill>
+                            <a:srgbClr val="3D4451"/>
+                          </a:solidFill>
+                        </a:rPr>
+                        <a:t>Down (26.73)</a:t>
+                      </a:r>
+                      <a:endParaRPr lang="en-US" sz="1400" dirty="0"/>
+                    </a:p>
+                  </a:txBody>
+                  <a:tcPr marL="109728" marR="109728" marT="0" marB="0" anchor="ctr">
+                    <a:lnL w="9525" cap="flat" cmpd="sng" algn="ctr">
+                      <a:solidFill>
+                        <a:srgbClr val="D5DCE6"/>
+                      </a:solidFill>
+                      <a:prstDash val="solid"/>
+                      <a:round/>
+                      <a:headEnd type="none" w="med" len="med"/>
+                      <a:tailEnd type="none" w="med" len="med"/>
+                    </a:lnL>
+                    <a:lnR w="9525" cap="flat" cmpd="sng" algn="ctr">
+                      <a:solidFill>
+                        <a:srgbClr val="D5DCE6"/>
+                      </a:solidFill>
+                      <a:prstDash val="solid"/>
+                      <a:round/>
+                      <a:headEnd type="none" w="med" len="med"/>
+                      <a:tailEnd type="none" w="med" len="med"/>
+                    </a:lnR>
+                    <a:lnT w="9525" cap="flat" cmpd="sng" algn="ctr">
+                      <a:solidFill>
+                        <a:srgbClr val="D5DCE6"/>
+                      </a:solidFill>
+                      <a:prstDash val="solid"/>
+                      <a:round/>
+                      <a:headEnd type="none" w="med" len="med"/>
+                      <a:tailEnd type="none" w="med" len="med"/>
+                    </a:lnT>
+                    <a:lnB w="9525" cap="flat" cmpd="sng" algn="ctr">
+                      <a:solidFill>
+                        <a:srgbClr val="D5DCE6"/>
+                      </a:solidFill>
+                      <a:prstDash val="solid"/>
+                      <a:round/>
+                      <a:headEnd type="none" w="med" len="med"/>
+                      <a:tailEnd type="none" w="med" len="med"/>
+                    </a:lnB>
+                    <a:solidFill>
+                      <a:srgbClr val="FFFFFF"/>
+                    </a:solidFill>
+                  </a:tcPr>
+                </a:tc>
+                <a:tc>
+                  <a:txBody>
+                    <a:bodyPr/>
+                    <a:lstStyle/>
+                    <a:p>
+                      <a:pPr marL="0" indent="0">
+                        <a:buNone/>
+                      </a:pPr>
+                      <a:r>
+                        <a:rPr lang="en-US" sz="1400" dirty="0">
+                          <a:solidFill>
+                            <a:srgbClr val="3D4451"/>
+                          </a:solidFill>
+                        </a:rPr>
+                        <a:t>Up (26.76)</a:t>
+                      </a:r>
+                      <a:endParaRPr lang="en-US" sz="1400" dirty="0"/>
+                    </a:p>
+                  </a:txBody>
+                  <a:tcPr marL="109728" marR="109728" marT="0" marB="0" anchor="ctr">
+                    <a:lnL w="9525" cap="flat" cmpd="sng" algn="ctr">
+                      <a:solidFill>
+                        <a:srgbClr val="D5DCE6"/>
+                      </a:solidFill>
+                      <a:prstDash val="solid"/>
+                      <a:round/>
+                      <a:headEnd type="none" w="med" len="med"/>
+                      <a:tailEnd type="none" w="med" len="med"/>
+                    </a:lnL>
+                    <a:lnR w="9525" cap="flat" cmpd="sng" algn="ctr">
+                      <a:solidFill>
+                        <a:srgbClr val="D5DCE6"/>
+                      </a:solidFill>
+                      <a:prstDash val="solid"/>
+                      <a:round/>
+                      <a:headEnd type="none" w="med" len="med"/>
+                      <a:tailEnd type="none" w="med" len="med"/>
+                    </a:lnR>
+                    <a:lnT w="9525" cap="flat" cmpd="sng" algn="ctr">
+                      <a:solidFill>
+                        <a:srgbClr val="D5DCE6"/>
+                      </a:solidFill>
+                      <a:prstDash val="solid"/>
+                      <a:round/>
+                      <a:headEnd type="none" w="med" len="med"/>
+                      <a:tailEnd type="none" w="med" len="med"/>
+                    </a:lnT>
+                    <a:lnB w="9525" cap="flat" cmpd="sng" algn="ctr">
+                      <a:solidFill>
+                        <a:srgbClr val="D5DCE6"/>
+                      </a:solidFill>
+                      <a:prstDash val="solid"/>
+                      <a:round/>
+                      <a:headEnd type="none" w="med" len="med"/>
+                      <a:tailEnd type="none" w="med" len="med"/>
+                    </a:lnB>
+                    <a:solidFill>
+                      <a:srgbClr val="FFFFFF"/>
+                    </a:solidFill>
+                  </a:tcPr>
+                </a:tc>
+                <a:tc>
+                  <a:txBody>
+                    <a:bodyPr/>
+                    <a:lstStyle/>
+                    <a:p>
+                      <a:pPr marL="0" indent="0">
+                        <a:buNone/>
+                      </a:pPr>
+                      <a:r>
+                        <a:rPr lang="en-US" sz="1400" dirty="0">
+                          <a:solidFill>
+                            <a:srgbClr val="3D4451"/>
+                          </a:solidFill>
+                        </a:rPr>
+                        <a:t>0.03</a:t>
+                      </a:r>
+                      <a:endParaRPr lang="en-US" sz="1400" dirty="0"/>
+                    </a:p>
+                  </a:txBody>
+                  <a:tcPr marL="109728" marR="109728" marT="0" marB="0" anchor="ctr">
+                    <a:lnL w="9525" cap="flat" cmpd="sng" algn="ctr">
+                      <a:solidFill>
+                        <a:srgbClr val="D5DCE6"/>
+                      </a:solidFill>
+                      <a:prstDash val="solid"/>
+                      <a:round/>
+                      <a:headEnd type="none" w="med" len="med"/>
+                      <a:tailEnd type="none" w="med" len="med"/>
+                    </a:lnL>
+                    <a:lnR w="9525" cap="flat" cmpd="sng" algn="ctr">
+                      <a:solidFill>
+                        <a:srgbClr val="D5DCE6"/>
+                      </a:solidFill>
+                      <a:prstDash val="solid"/>
+                      <a:round/>
+                      <a:headEnd type="none" w="med" len="med"/>
+                      <a:tailEnd type="none" w="med" len="med"/>
+                    </a:lnR>
+                    <a:lnT w="9525" cap="flat" cmpd="sng" algn="ctr">
+                      <a:solidFill>
+                        <a:srgbClr val="D5DCE6"/>
+                      </a:solidFill>
+                      <a:prstDash val="solid"/>
+                      <a:round/>
+                      <a:headEnd type="none" w="med" len="med"/>
+                      <a:tailEnd type="none" w="med" len="med"/>
+                    </a:lnT>
+                    <a:lnB w="9525" cap="flat" cmpd="sng" algn="ctr">
+                      <a:solidFill>
+                        <a:srgbClr val="D5DCE6"/>
+                      </a:solidFill>
+                      <a:prstDash val="solid"/>
+                      <a:round/>
+                      <a:headEnd type="none" w="med" len="med"/>
+                      <a:tailEnd type="none" w="med" len="med"/>
+                    </a:lnB>
+                    <a:solidFill>
+                      <a:srgbClr val="FFFFFF"/>
+                    </a:solidFill>
+                  </a:tcPr>
+                </a:tc>
+              </a:tr>
+              <a:tr h="431800">
+                <a:tc>
+                  <a:txBody>
+                    <a:bodyPr/>
+                    <a:lstStyle/>
+                    <a:p>
+                      <a:pPr marL="0" indent="0">
+                        <a:buNone/>
+                      </a:pPr>
+                      <a:r>
+                        <a:rPr lang="en-US" sz="1400" dirty="0">
+                          <a:solidFill>
+                            <a:srgbClr val="3D4451"/>
+                          </a:solidFill>
+                        </a:rPr>
+                        <a:t>190915</a:t>
+                      </a:r>
+                      <a:endParaRPr lang="en-US" sz="1400" dirty="0"/>
+                    </a:p>
+                  </a:txBody>
+                  <a:tcPr marL="109728" marR="109728" marT="0" marB="0" anchor="ctr">
+                    <a:lnL w="9525" cap="flat" cmpd="sng" algn="ctr">
+                      <a:solidFill>
+                        <a:srgbClr val="D5DCE6"/>
+                      </a:solidFill>
+                      <a:prstDash val="solid"/>
+                      <a:round/>
+                      <a:headEnd type="none" w="med" len="med"/>
+                      <a:tailEnd type="none" w="med" len="med"/>
+                    </a:lnL>
+                    <a:lnR w="9525" cap="flat" cmpd="sng" algn="ctr">
+                      <a:solidFill>
+                        <a:srgbClr val="D5DCE6"/>
+                      </a:solidFill>
+                      <a:prstDash val="solid"/>
+                      <a:round/>
+                      <a:headEnd type="none" w="med" len="med"/>
+                      <a:tailEnd type="none" w="med" len="med"/>
+                    </a:lnR>
+                    <a:lnT w="9525" cap="flat" cmpd="sng" algn="ctr">
+                      <a:solidFill>
+                        <a:srgbClr val="D5DCE6"/>
+                      </a:solidFill>
+                      <a:prstDash val="solid"/>
+                      <a:round/>
+                      <a:headEnd type="none" w="med" len="med"/>
+                      <a:tailEnd type="none" w="med" len="med"/>
+                    </a:lnT>
+                    <a:lnB w="9525" cap="flat" cmpd="sng" algn="ctr">
+                      <a:solidFill>
+                        <a:srgbClr val="D5DCE6"/>
+                      </a:solidFill>
+                      <a:prstDash val="solid"/>
+                      <a:round/>
+                      <a:headEnd type="none" w="med" len="med"/>
+                      <a:tailEnd type="none" w="med" len="med"/>
+                    </a:lnB>
+                    <a:solidFill>
+                      <a:srgbClr val="FFFFFF"/>
+                    </a:solidFill>
+                  </a:tcPr>
+                </a:tc>
+                <a:tc>
+                  <a:txBody>
+                    <a:bodyPr/>
+                    <a:lstStyle/>
+                    <a:p>
+                      <a:pPr marL="0" indent="0">
+                        <a:buNone/>
+                      </a:pPr>
+                      <a:r>
+                        <a:rPr lang="en-US" sz="1400" dirty="0">
+                          <a:solidFill>
+                            <a:srgbClr val="3D4451"/>
+                          </a:solidFill>
+                        </a:rPr>
+                        <a:t>(4, 2, 0, 1, 1, 0, 20, 1)</a:t>
+                      </a:r>
+                      <a:endParaRPr lang="en-US" sz="1400" dirty="0"/>
+                    </a:p>
+                  </a:txBody>
+                  <a:tcPr marL="109728" marR="109728" marT="0" marB="0" anchor="ctr">
+                    <a:lnL w="9525" cap="flat" cmpd="sng" algn="ctr">
+                      <a:solidFill>
+                        <a:srgbClr val="D5DCE6"/>
+                      </a:solidFill>
+                      <a:prstDash val="solid"/>
+                      <a:round/>
+                      <a:headEnd type="none" w="med" len="med"/>
+                      <a:tailEnd type="none" w="med" len="med"/>
+                    </a:lnL>
+                    <a:lnR w="9525" cap="flat" cmpd="sng" algn="ctr">
+                      <a:solidFill>
+                        <a:srgbClr val="D5DCE6"/>
+                      </a:solidFill>
+                      <a:prstDash val="solid"/>
+                      <a:round/>
+                      <a:headEnd type="none" w="med" len="med"/>
+                      <a:tailEnd type="none" w="med" len="med"/>
+                    </a:lnR>
+                    <a:lnT w="9525" cap="flat" cmpd="sng" algn="ctr">
+                      <a:solidFill>
+                        <a:srgbClr val="D5DCE6"/>
+                      </a:solidFill>
+                      <a:prstDash val="solid"/>
+                      <a:round/>
+                      <a:headEnd type="none" w="med" len="med"/>
+                      <a:tailEnd type="none" w="med" len="med"/>
+                    </a:lnT>
+                    <a:lnB w="9525" cap="flat" cmpd="sng" algn="ctr">
+                      <a:solidFill>
+                        <a:srgbClr val="D5DCE6"/>
+                      </a:solidFill>
+                      <a:prstDash val="solid"/>
+                      <a:round/>
+                      <a:headEnd type="none" w="med" len="med"/>
+                      <a:tailEnd type="none" w="med" len="med"/>
+                    </a:lnB>
+                    <a:solidFill>
+                      <a:srgbClr val="FFFFFF"/>
+                    </a:solidFill>
+                  </a:tcPr>
+                </a:tc>
+                <a:tc>
+                  <a:txBody>
+                    <a:bodyPr/>
+                    <a:lstStyle/>
+                    <a:p>
+                      <a:pPr marL="0" indent="0">
+                        <a:buNone/>
+                      </a:pPr>
+                      <a:r>
+                        <a:rPr lang="en-US" sz="1400" dirty="0">
+                          <a:solidFill>
+                            <a:srgbClr val="3D4451"/>
+                          </a:solidFill>
+                        </a:rPr>
+                        <a:t>20</a:t>
+                      </a:r>
+                      <a:endParaRPr lang="en-US" sz="1400" dirty="0"/>
+                    </a:p>
+                  </a:txBody>
+                  <a:tcPr marL="109728" marR="109728" marT="0" marB="0" anchor="ctr">
+                    <a:lnL w="9525" cap="flat" cmpd="sng" algn="ctr">
+                      <a:solidFill>
+                        <a:srgbClr val="D5DCE6"/>
+                      </a:solidFill>
+                      <a:prstDash val="solid"/>
+                      <a:round/>
+                      <a:headEnd type="none" w="med" len="med"/>
+                      <a:tailEnd type="none" w="med" len="med"/>
+                    </a:lnL>
+                    <a:lnR w="9525" cap="flat" cmpd="sng" algn="ctr">
+                      <a:solidFill>
+                        <a:srgbClr val="D5DCE6"/>
+                      </a:solidFill>
+                      <a:prstDash val="solid"/>
+                      <a:round/>
+                      <a:headEnd type="none" w="med" len="med"/>
+                      <a:tailEnd type="none" w="med" len="med"/>
+                    </a:lnR>
+                    <a:lnT w="9525" cap="flat" cmpd="sng" algn="ctr">
+                      <a:solidFill>
+                        <a:srgbClr val="D5DCE6"/>
+                      </a:solidFill>
+                      <a:prstDash val="solid"/>
+                      <a:round/>
+                      <a:headEnd type="none" w="med" len="med"/>
+                      <a:tailEnd type="none" w="med" len="med"/>
+                    </a:lnT>
+                    <a:lnB w="9525" cap="flat" cmpd="sng" algn="ctr">
+                      <a:solidFill>
+                        <a:srgbClr val="D5DCE6"/>
+                      </a:solidFill>
+                      <a:prstDash val="solid"/>
+                      <a:round/>
+                      <a:headEnd type="none" w="med" len="med"/>
+                      <a:tailEnd type="none" w="med" len="med"/>
+                    </a:lnB>
+                    <a:solidFill>
+                      <a:srgbClr val="FFFFFF"/>
+                    </a:solidFill>
+                  </a:tcPr>
+                </a:tc>
+                <a:tc>
+                  <a:txBody>
+                    <a:bodyPr/>
+                    <a:lstStyle/>
+                    <a:p>
+                      <a:pPr marL="0" indent="0">
+                        <a:buNone/>
+                      </a:pPr>
+                      <a:r>
+                        <a:rPr lang="en-US" sz="1400" dirty="0">
+                          <a:solidFill>
+                            <a:srgbClr val="3D4451"/>
+                          </a:solidFill>
+                        </a:rPr>
+                        <a:t>Down (−2.97)</a:t>
+                      </a:r>
+                      <a:endParaRPr lang="en-US" sz="1400" dirty="0"/>
+                    </a:p>
+                  </a:txBody>
+                  <a:tcPr marL="109728" marR="109728" marT="0" marB="0" anchor="ctr">
+                    <a:lnL w="9525" cap="flat" cmpd="sng" algn="ctr">
+                      <a:solidFill>
+                        <a:srgbClr val="D5DCE6"/>
+                      </a:solidFill>
+                      <a:prstDash val="solid"/>
+                      <a:round/>
+                      <a:headEnd type="none" w="med" len="med"/>
+                      <a:tailEnd type="none" w="med" len="med"/>
+                    </a:lnL>
+                    <a:lnR w="9525" cap="flat" cmpd="sng" algn="ctr">
+                      <a:solidFill>
+                        <a:srgbClr val="D5DCE6"/>
+                      </a:solidFill>
+                      <a:prstDash val="solid"/>
+                      <a:round/>
+                      <a:headEnd type="none" w="med" len="med"/>
+                      <a:tailEnd type="none" w="med" len="med"/>
+                    </a:lnR>
+                    <a:lnT w="9525" cap="flat" cmpd="sng" algn="ctr">
+                      <a:solidFill>
+                        <a:srgbClr val="D5DCE6"/>
+                      </a:solidFill>
+                      <a:prstDash val="solid"/>
+                      <a:round/>
+                      <a:headEnd type="none" w="med" len="med"/>
+                      <a:tailEnd type="none" w="med" len="med"/>
+                    </a:lnT>
+                    <a:lnB w="9525" cap="flat" cmpd="sng" algn="ctr">
+                      <a:solidFill>
+                        <a:srgbClr val="D5DCE6"/>
+                      </a:solidFill>
+                      <a:prstDash val="solid"/>
+                      <a:round/>
+                      <a:headEnd type="none" w="med" len="med"/>
+                      <a:tailEnd type="none" w="med" len="med"/>
+                    </a:lnB>
+                    <a:solidFill>
+                      <a:srgbClr val="FFFFFF"/>
+                    </a:solidFill>
+                  </a:tcPr>
+                </a:tc>
+                <a:tc>
+                  <a:txBody>
+                    <a:bodyPr/>
+                    <a:lstStyle/>
+                    <a:p>
+                      <a:pPr marL="0" indent="0">
+                        <a:buNone/>
+                      </a:pPr>
+                      <a:r>
+                        <a:rPr lang="en-US" sz="1400" dirty="0">
+                          <a:solidFill>
+                            <a:srgbClr val="3D4451"/>
+                          </a:solidFill>
+                        </a:rPr>
+                        <a:t>Up (−2.94)</a:t>
+                      </a:r>
+                      <a:endParaRPr lang="en-US" sz="1400" dirty="0"/>
+                    </a:p>
+                  </a:txBody>
+                  <a:tcPr marL="109728" marR="109728" marT="0" marB="0" anchor="ctr">
+                    <a:lnL w="9525" cap="flat" cmpd="sng" algn="ctr">
+                      <a:solidFill>
+                        <a:srgbClr val="D5DCE6"/>
+                      </a:solidFill>
+                      <a:prstDash val="solid"/>
+                      <a:round/>
+                      <a:headEnd type="none" w="med" len="med"/>
+                      <a:tailEnd type="none" w="med" len="med"/>
+                    </a:lnL>
+                    <a:lnR w="9525" cap="flat" cmpd="sng" algn="ctr">
+                      <a:solidFill>
+                        <a:srgbClr val="D5DCE6"/>
+                      </a:solidFill>
+                      <a:prstDash val="solid"/>
+                      <a:round/>
+                      <a:headEnd type="none" w="med" len="med"/>
+                      <a:tailEnd type="none" w="med" len="med"/>
+                    </a:lnR>
+                    <a:lnT w="9525" cap="flat" cmpd="sng" algn="ctr">
+                      <a:solidFill>
+                        <a:srgbClr val="D5DCE6"/>
+                      </a:solidFill>
+                      <a:prstDash val="solid"/>
+                      <a:round/>
+                      <a:headEnd type="none" w="med" len="med"/>
+                      <a:tailEnd type="none" w="med" len="med"/>
+                    </a:lnT>
+                    <a:lnB w="9525" cap="flat" cmpd="sng" algn="ctr">
+                      <a:solidFill>
+                        <a:srgbClr val="D5DCE6"/>
+                      </a:solidFill>
+                      <a:prstDash val="solid"/>
+                      <a:round/>
+                      <a:headEnd type="none" w="med" len="med"/>
+                      <a:tailEnd type="none" w="med" len="med"/>
+                    </a:lnB>
+                    <a:solidFill>
+                      <a:srgbClr val="FFFFFF"/>
+                    </a:solidFill>
+                  </a:tcPr>
+                </a:tc>
+                <a:tc>
+                  <a:txBody>
+                    <a:bodyPr/>
+                    <a:lstStyle/>
+                    <a:p>
+                      <a:pPr marL="0" indent="0">
+                        <a:buNone/>
+                      </a:pPr>
+                      <a:r>
+                        <a:rPr lang="en-US" sz="1400" dirty="0">
+                          <a:solidFill>
+                            <a:srgbClr val="3D4451"/>
+                          </a:solidFill>
+                        </a:rPr>
+                        <a:t>0.03</a:t>
+                      </a:r>
+                      <a:endParaRPr lang="en-US" sz="1400" dirty="0"/>
+                    </a:p>
+                  </a:txBody>
+                  <a:tcPr marL="109728" marR="109728" marT="0" marB="0" anchor="ctr">
+                    <a:lnL w="9525" cap="flat" cmpd="sng" algn="ctr">
+                      <a:solidFill>
+                        <a:srgbClr val="D5DCE6"/>
+                      </a:solidFill>
+                      <a:prstDash val="solid"/>
+                      <a:round/>
+                      <a:headEnd type="none" w="med" len="med"/>
+                      <a:tailEnd type="none" w="med" len="med"/>
+                    </a:lnL>
+                    <a:lnR w="9525" cap="flat" cmpd="sng" algn="ctr">
+                      <a:solidFill>
+                        <a:srgbClr val="D5DCE6"/>
+                      </a:solidFill>
+                      <a:prstDash val="solid"/>
+                      <a:round/>
+                      <a:headEnd type="none" w="med" len="med"/>
+                      <a:tailEnd type="none" w="med" len="med"/>
+                    </a:lnR>
+                    <a:lnT w="9525" cap="flat" cmpd="sng" algn="ctr">
+                      <a:solidFill>
+                        <a:srgbClr val="D5DCE6"/>
+                      </a:solidFill>
+                      <a:prstDash val="solid"/>
+                      <a:round/>
+                      <a:headEnd type="none" w="med" len="med"/>
+                      <a:tailEnd type="none" w="med" len="med"/>
+                    </a:lnT>
+                    <a:lnB w="9525" cap="flat" cmpd="sng" algn="ctr">
+                      <a:solidFill>
+                        <a:srgbClr val="D5DCE6"/>
+                      </a:solidFill>
+                      <a:prstDash val="solid"/>
+                      <a:round/>
+                      <a:headEnd type="none" w="med" len="med"/>
+                      <a:tailEnd type="none" w="med" len="med"/>
+                    </a:lnB>
+                    <a:solidFill>
+                      <a:srgbClr val="FFFFFF"/>
+                    </a:solidFill>
+                  </a:tcPr>
+                </a:tc>
+              </a:tr>
+              <a:tr h="431800">
+                <a:tc>
+                  <a:txBody>
+                    <a:bodyPr/>
+                    <a:lstStyle/>
+                    <a:p>
+                      <a:pPr marL="0" indent="0">
+                        <a:buNone/>
+                      </a:pPr>
+                      <a:r>
+                        <a:rPr lang="en-US" sz="1400" dirty="0">
+                          <a:solidFill>
+                            <a:srgbClr val="3D4451"/>
+                          </a:solidFill>
+                        </a:rPr>
+                        <a:t>190918</a:t>
+                      </a:r>
+                      <a:endParaRPr lang="en-US" sz="1400" dirty="0"/>
+                    </a:p>
+                  </a:txBody>
+                  <a:tcPr marL="109728" marR="109728" marT="0" marB="0" anchor="ctr">
+                    <a:lnL w="9525" cap="flat" cmpd="sng" algn="ctr">
+                      <a:solidFill>
+                        <a:srgbClr val="D5DCE6"/>
+                      </a:solidFill>
+                      <a:prstDash val="solid"/>
+                      <a:round/>
+                      <a:headEnd type="none" w="med" len="med"/>
+                      <a:tailEnd type="none" w="med" len="med"/>
+                    </a:lnL>
+                    <a:lnR w="9525" cap="flat" cmpd="sng" algn="ctr">
+                      <a:solidFill>
+                        <a:srgbClr val="D5DCE6"/>
+                      </a:solidFill>
+                      <a:prstDash val="solid"/>
+                      <a:round/>
+                      <a:headEnd type="none" w="med" len="med"/>
+                      <a:tailEnd type="none" w="med" len="med"/>
+                    </a:lnR>
+                    <a:lnT w="9525" cap="flat" cmpd="sng" algn="ctr">
+                      <a:solidFill>
+                        <a:srgbClr val="D5DCE6"/>
+                      </a:solidFill>
+                      <a:prstDash val="solid"/>
+                      <a:round/>
+                      <a:headEnd type="none" w="med" len="med"/>
+                      <a:tailEnd type="none" w="med" len="med"/>
+                    </a:lnT>
+                    <a:lnB w="9525" cap="flat" cmpd="sng" algn="ctr">
+                      <a:solidFill>
+                        <a:srgbClr val="D5DCE6"/>
+                      </a:solidFill>
+                      <a:prstDash val="solid"/>
+                      <a:round/>
+                      <a:headEnd type="none" w="med" len="med"/>
+                      <a:tailEnd type="none" w="med" len="med"/>
+                    </a:lnB>
+                    <a:solidFill>
+                      <a:srgbClr val="FFFFFF"/>
+                    </a:solidFill>
+                  </a:tcPr>
+                </a:tc>
+                <a:tc>
+                  <a:txBody>
+                    <a:bodyPr/>
+                    <a:lstStyle/>
+                    <a:p>
+                      <a:pPr marL="0" indent="0">
+                        <a:buNone/>
+                      </a:pPr>
+                      <a:r>
+                        <a:rPr lang="en-US" sz="1400" dirty="0">
+                          <a:solidFill>
+                            <a:srgbClr val="3D4451"/>
+                          </a:solidFill>
+                        </a:rPr>
+                        <a:t>(4, 2, 0, 1, 1, 0, 21, 1)</a:t>
+                      </a:r>
+                      <a:endParaRPr lang="en-US" sz="1400" dirty="0"/>
+                    </a:p>
+                  </a:txBody>
+                  <a:tcPr marL="109728" marR="109728" marT="0" marB="0" anchor="ctr">
+                    <a:lnL w="9525" cap="flat" cmpd="sng" algn="ctr">
+                      <a:solidFill>
+                        <a:srgbClr val="D5DCE6"/>
+                      </a:solidFill>
+                      <a:prstDash val="solid"/>
+                      <a:round/>
+                      <a:headEnd type="none" w="med" len="med"/>
+                      <a:tailEnd type="none" w="med" len="med"/>
+                    </a:lnL>
+                    <a:lnR w="9525" cap="flat" cmpd="sng" algn="ctr">
+                      <a:solidFill>
+                        <a:srgbClr val="D5DCE6"/>
+                      </a:solidFill>
+                      <a:prstDash val="solid"/>
+                      <a:round/>
+                      <a:headEnd type="none" w="med" len="med"/>
+                      <a:tailEnd type="none" w="med" len="med"/>
+                    </a:lnR>
+                    <a:lnT w="9525" cap="flat" cmpd="sng" algn="ctr">
+                      <a:solidFill>
+                        <a:srgbClr val="D5DCE6"/>
+                      </a:solidFill>
+                      <a:prstDash val="solid"/>
+                      <a:round/>
+                      <a:headEnd type="none" w="med" len="med"/>
+                      <a:tailEnd type="none" w="med" len="med"/>
+                    </a:lnT>
+                    <a:lnB w="9525" cap="flat" cmpd="sng" algn="ctr">
+                      <a:solidFill>
+                        <a:srgbClr val="D5DCE6"/>
+                      </a:solidFill>
+                      <a:prstDash val="solid"/>
+                      <a:round/>
+                      <a:headEnd type="none" w="med" len="med"/>
+                      <a:tailEnd type="none" w="med" len="med"/>
+                    </a:lnB>
+                    <a:solidFill>
+                      <a:srgbClr val="FFFFFF"/>
+                    </a:solidFill>
+                  </a:tcPr>
+                </a:tc>
+                <a:tc>
+                  <a:txBody>
+                    <a:bodyPr/>
+                    <a:lstStyle/>
+                    <a:p>
+                      <a:pPr marL="0" indent="0">
+                        <a:buNone/>
+                      </a:pPr>
+                      <a:r>
+                        <a:rPr lang="en-US" sz="1400" dirty="0">
+                          <a:solidFill>
+                            <a:srgbClr val="3D4451"/>
+                          </a:solidFill>
+                        </a:rPr>
+                        <a:t>20</a:t>
+                      </a:r>
+                      <a:endParaRPr lang="en-US" sz="1400" dirty="0"/>
+                    </a:p>
+                  </a:txBody>
+                  <a:tcPr marL="109728" marR="109728" marT="0" marB="0" anchor="ctr">
+                    <a:lnL w="9525" cap="flat" cmpd="sng" algn="ctr">
+                      <a:solidFill>
+                        <a:srgbClr val="D5DCE6"/>
+                      </a:solidFill>
+                      <a:prstDash val="solid"/>
+                      <a:round/>
+                      <a:headEnd type="none" w="med" len="med"/>
+                      <a:tailEnd type="none" w="med" len="med"/>
+                    </a:lnL>
+                    <a:lnR w="9525" cap="flat" cmpd="sng" algn="ctr">
+                      <a:solidFill>
+                        <a:srgbClr val="D5DCE6"/>
+                      </a:solidFill>
+                      <a:prstDash val="solid"/>
+                      <a:round/>
+                      <a:headEnd type="none" w="med" len="med"/>
+                      <a:tailEnd type="none" w="med" len="med"/>
+                    </a:lnR>
+                    <a:lnT w="9525" cap="flat" cmpd="sng" algn="ctr">
+                      <a:solidFill>
+                        <a:srgbClr val="D5DCE6"/>
+                      </a:solidFill>
+                      <a:prstDash val="solid"/>
+                      <a:round/>
+                      <a:headEnd type="none" w="med" len="med"/>
+                      <a:tailEnd type="none" w="med" len="med"/>
+                    </a:lnT>
+                    <a:lnB w="9525" cap="flat" cmpd="sng" algn="ctr">
+                      <a:solidFill>
+                        <a:srgbClr val="D5DCE6"/>
+                      </a:solidFill>
+                      <a:prstDash val="solid"/>
+                      <a:round/>
+                      <a:headEnd type="none" w="med" len="med"/>
+                      <a:tailEnd type="none" w="med" len="med"/>
+                    </a:lnB>
+                    <a:solidFill>
+                      <a:srgbClr val="FFFFFF"/>
+                    </a:solidFill>
+                  </a:tcPr>
+                </a:tc>
+                <a:tc>
+                  <a:txBody>
+                    <a:bodyPr/>
+                    <a:lstStyle/>
+                    <a:p>
+                      <a:pPr marL="0" indent="0">
+                        <a:buNone/>
+                      </a:pPr>
+                      <a:r>
+                        <a:rPr lang="en-US" sz="1400" dirty="0">
+                          <a:solidFill>
+                            <a:srgbClr val="3D4451"/>
+                          </a:solidFill>
+                        </a:rPr>
+                        <a:t>Down (−3.27)</a:t>
+                      </a:r>
+                      <a:endParaRPr lang="en-US" sz="1400" dirty="0"/>
+                    </a:p>
+                  </a:txBody>
+                  <a:tcPr marL="109728" marR="109728" marT="0" marB="0" anchor="ctr">
+                    <a:lnL w="9525" cap="flat" cmpd="sng" algn="ctr">
+                      <a:solidFill>
+                        <a:srgbClr val="D5DCE6"/>
+                      </a:solidFill>
+                      <a:prstDash val="solid"/>
+                      <a:round/>
+                      <a:headEnd type="none" w="med" len="med"/>
+                      <a:tailEnd type="none" w="med" len="med"/>
+                    </a:lnL>
+                    <a:lnR w="9525" cap="flat" cmpd="sng" algn="ctr">
+                      <a:solidFill>
+                        <a:srgbClr val="D5DCE6"/>
+                      </a:solidFill>
+                      <a:prstDash val="solid"/>
+                      <a:round/>
+                      <a:headEnd type="none" w="med" len="med"/>
+                      <a:tailEnd type="none" w="med" len="med"/>
+                    </a:lnR>
+                    <a:lnT w="9525" cap="flat" cmpd="sng" algn="ctr">
+                      <a:solidFill>
+                        <a:srgbClr val="D5DCE6"/>
+                      </a:solidFill>
+                      <a:prstDash val="solid"/>
+                      <a:round/>
+                      <a:headEnd type="none" w="med" len="med"/>
+                      <a:tailEnd type="none" w="med" len="med"/>
+                    </a:lnT>
+                    <a:lnB w="9525" cap="flat" cmpd="sng" algn="ctr">
+                      <a:solidFill>
+                        <a:srgbClr val="D5DCE6"/>
+                      </a:solidFill>
+                      <a:prstDash val="solid"/>
+                      <a:round/>
+                      <a:headEnd type="none" w="med" len="med"/>
+                      <a:tailEnd type="none" w="med" len="med"/>
+                    </a:lnB>
+                    <a:solidFill>
+                      <a:srgbClr val="FFFFFF"/>
+                    </a:solidFill>
+                  </a:tcPr>
+                </a:tc>
+                <a:tc>
+                  <a:txBody>
+                    <a:bodyPr/>
+                    <a:lstStyle/>
+                    <a:p>
+                      <a:pPr marL="0" indent="0">
+                        <a:buNone/>
+                      </a:pPr>
+                      <a:r>
+                        <a:rPr lang="en-US" sz="1400" dirty="0">
+                          <a:solidFill>
+                            <a:srgbClr val="3D4451"/>
+                          </a:solidFill>
+                        </a:rPr>
+                        <a:t>Up (−3.24)</a:t>
+                      </a:r>
+                      <a:endParaRPr lang="en-US" sz="1400" dirty="0"/>
+                    </a:p>
+                  </a:txBody>
+                  <a:tcPr marL="109728" marR="109728" marT="0" marB="0" anchor="ctr">
+                    <a:lnL w="9525" cap="flat" cmpd="sng" algn="ctr">
+                      <a:solidFill>
+                        <a:srgbClr val="D5DCE6"/>
+                      </a:solidFill>
+                      <a:prstDash val="solid"/>
+                      <a:round/>
+                      <a:headEnd type="none" w="med" len="med"/>
+                      <a:tailEnd type="none" w="med" len="med"/>
+                    </a:lnL>
+                    <a:lnR w="9525" cap="flat" cmpd="sng" algn="ctr">
+                      <a:solidFill>
+                        <a:srgbClr val="D5DCE6"/>
+                      </a:solidFill>
+                      <a:prstDash val="solid"/>
+                      <a:round/>
+                      <a:headEnd type="none" w="med" len="med"/>
+                      <a:tailEnd type="none" w="med" len="med"/>
+                    </a:lnR>
+                    <a:lnT w="9525" cap="flat" cmpd="sng" algn="ctr">
+                      <a:solidFill>
+                        <a:srgbClr val="D5DCE6"/>
+                      </a:solidFill>
+                      <a:prstDash val="solid"/>
+                      <a:round/>
+                      <a:headEnd type="none" w="med" len="med"/>
+                      <a:tailEnd type="none" w="med" len="med"/>
+                    </a:lnT>
+                    <a:lnB w="9525" cap="flat" cmpd="sng" algn="ctr">
+                      <a:solidFill>
+                        <a:srgbClr val="D5DCE6"/>
+                      </a:solidFill>
+                      <a:prstDash val="solid"/>
+                      <a:round/>
+                      <a:headEnd type="none" w="med" len="med"/>
+                      <a:tailEnd type="none" w="med" len="med"/>
+                    </a:lnB>
+                    <a:solidFill>
+                      <a:srgbClr val="FFFFFF"/>
+                    </a:solidFill>
+                  </a:tcPr>
+                </a:tc>
+                <a:tc>
+                  <a:txBody>
+                    <a:bodyPr/>
+                    <a:lstStyle/>
+                    <a:p>
+                      <a:pPr marL="0" indent="0">
+                        <a:buNone/>
+                      </a:pPr>
+                      <a:r>
+                        <a:rPr lang="en-US" sz="1400" dirty="0">
+                          <a:solidFill>
+                            <a:srgbClr val="3D4451"/>
+                          </a:solidFill>
+                        </a:rPr>
+                        <a:t>0.03</a:t>
+                      </a:r>
+                      <a:endParaRPr lang="en-US" sz="1400" dirty="0"/>
+                    </a:p>
+                  </a:txBody>
+                  <a:tcPr marL="109728" marR="109728" marT="0" marB="0" anchor="ctr">
+                    <a:lnL w="9525" cap="flat" cmpd="sng" algn="ctr">
+                      <a:solidFill>
+                        <a:srgbClr val="D5DCE6"/>
+                      </a:solidFill>
+                      <a:prstDash val="solid"/>
+                      <a:round/>
+                      <a:headEnd type="none" w="med" len="med"/>
+                      <a:tailEnd type="none" w="med" len="med"/>
+                    </a:lnL>
+                    <a:lnR w="9525" cap="flat" cmpd="sng" algn="ctr">
+                      <a:solidFill>
+                        <a:srgbClr val="D5DCE6"/>
+                      </a:solidFill>
+                      <a:prstDash val="solid"/>
+                      <a:round/>
+                      <a:headEnd type="none" w="med" len="med"/>
+                      <a:tailEnd type="none" w="med" len="med"/>
+                    </a:lnR>
+                    <a:lnT w="9525" cap="flat" cmpd="sng" algn="ctr">
+                      <a:solidFill>
+                        <a:srgbClr val="D5DCE6"/>
+                      </a:solidFill>
+                      <a:prstDash val="solid"/>
+                      <a:round/>
+                      <a:headEnd type="none" w="med" len="med"/>
+                      <a:tailEnd type="none" w="med" len="med"/>
+                    </a:lnT>
+                    <a:lnB w="9525" cap="flat" cmpd="sng" algn="ctr">
+                      <a:solidFill>
+                        <a:srgbClr val="D5DCE6"/>
+                      </a:solidFill>
+                      <a:prstDash val="solid"/>
+                      <a:round/>
+                      <a:headEnd type="none" w="med" len="med"/>
+                      <a:tailEnd type="none" w="med" len="med"/>
+                    </a:lnB>
+                    <a:solidFill>
+                      <a:srgbClr val="FFFFFF"/>
+                    </a:solidFill>
+                  </a:tcPr>
+                </a:tc>
+              </a:tr>
+              <a:tr h="431800">
+                <a:tc>
+                  <a:txBody>
+                    <a:bodyPr/>
+                    <a:lstStyle/>
+                    <a:p>
+                      <a:pPr marL="0" indent="0">
+                        <a:buNone/>
+                      </a:pPr>
+                      <a:r>
+                        <a:rPr lang="en-US" sz="1400" dirty="0">
+                          <a:solidFill>
+                            <a:srgbClr val="3D4451"/>
+                          </a:solidFill>
+                        </a:rPr>
+                        <a:t>190909</a:t>
+                      </a:r>
+                      <a:endParaRPr lang="en-US" sz="1400" dirty="0"/>
+                    </a:p>
+                  </a:txBody>
+                  <a:tcPr marL="109728" marR="109728" marT="0" marB="0" anchor="ctr">
+                    <a:lnL w="9525" cap="flat" cmpd="sng" algn="ctr">
+                      <a:solidFill>
+                        <a:srgbClr val="D5DCE6"/>
+                      </a:solidFill>
+                      <a:prstDash val="solid"/>
+                      <a:round/>
+                      <a:headEnd type="none" w="med" len="med"/>
+                      <a:tailEnd type="none" w="med" len="med"/>
+                    </a:lnL>
+                    <a:lnR w="9525" cap="flat" cmpd="sng" algn="ctr">
+                      <a:solidFill>
+                        <a:srgbClr val="D5DCE6"/>
+                      </a:solidFill>
+                      <a:prstDash val="solid"/>
+                      <a:round/>
+                      <a:headEnd type="none" w="med" len="med"/>
+                      <a:tailEnd type="none" w="med" len="med"/>
+                    </a:lnR>
+                    <a:lnT w="9525" cap="flat" cmpd="sng" algn="ctr">
+                      <a:solidFill>
+                        <a:srgbClr val="D5DCE6"/>
+                      </a:solidFill>
+                      <a:prstDash val="solid"/>
+                      <a:round/>
+                      <a:headEnd type="none" w="med" len="med"/>
+                      <a:tailEnd type="none" w="med" len="med"/>
+                    </a:lnT>
+                    <a:lnB w="9525" cap="flat" cmpd="sng" algn="ctr">
+                      <a:solidFill>
+                        <a:srgbClr val="D5DCE6"/>
+                      </a:solidFill>
+                      <a:prstDash val="solid"/>
+                      <a:round/>
+                      <a:headEnd type="none" w="med" len="med"/>
+                      <a:tailEnd type="none" w="med" len="med"/>
+                    </a:lnB>
+                    <a:solidFill>
+                      <a:srgbClr val="FFFFFF"/>
+                    </a:solidFill>
+                  </a:tcPr>
+                </a:tc>
+                <a:tc>
+                  <a:txBody>
+                    <a:bodyPr/>
+                    <a:lstStyle/>
+                    <a:p>
+                      <a:pPr marL="0" indent="0">
+                        <a:buNone/>
+                      </a:pPr>
+                      <a:r>
+                        <a:rPr lang="en-US" sz="1400" dirty="0">
+                          <a:solidFill>
+                            <a:srgbClr val="3D4451"/>
+                          </a:solidFill>
+                        </a:rPr>
+                        <a:t>(4, 2, 0, 1, 1, 0, 18, 1)</a:t>
+                      </a:r>
+                      <a:endParaRPr lang="en-US" sz="1400" dirty="0"/>
+                    </a:p>
+                  </a:txBody>
+                  <a:tcPr marL="109728" marR="109728" marT="0" marB="0" anchor="ctr">
+                    <a:lnL w="9525" cap="flat" cmpd="sng" algn="ctr">
+                      <a:solidFill>
+                        <a:srgbClr val="D5DCE6"/>
+                      </a:solidFill>
+                      <a:prstDash val="solid"/>
+                      <a:round/>
+                      <a:headEnd type="none" w="med" len="med"/>
+                      <a:tailEnd type="none" w="med" len="med"/>
+                    </a:lnL>
+                    <a:lnR w="9525" cap="flat" cmpd="sng" algn="ctr">
+                      <a:solidFill>
+                        <a:srgbClr val="D5DCE6"/>
+                      </a:solidFill>
+                      <a:prstDash val="solid"/>
+                      <a:round/>
+                      <a:headEnd type="none" w="med" len="med"/>
+                      <a:tailEnd type="none" w="med" len="med"/>
+                    </a:lnR>
+                    <a:lnT w="9525" cap="flat" cmpd="sng" algn="ctr">
+                      <a:solidFill>
+                        <a:srgbClr val="D5DCE6"/>
+                      </a:solidFill>
+                      <a:prstDash val="solid"/>
+                      <a:round/>
+                      <a:headEnd type="none" w="med" len="med"/>
+                      <a:tailEnd type="none" w="med" len="med"/>
+                    </a:lnT>
+                    <a:lnB w="9525" cap="flat" cmpd="sng" algn="ctr">
+                      <a:solidFill>
+                        <a:srgbClr val="D5DCE6"/>
+                      </a:solidFill>
+                      <a:prstDash val="solid"/>
+                      <a:round/>
+                      <a:headEnd type="none" w="med" len="med"/>
+                      <a:tailEnd type="none" w="med" len="med"/>
+                    </a:lnB>
+                    <a:solidFill>
+                      <a:srgbClr val="FFFFFF"/>
+                    </a:solidFill>
+                  </a:tcPr>
+                </a:tc>
+                <a:tc>
+                  <a:txBody>
+                    <a:bodyPr/>
+                    <a:lstStyle/>
+                    <a:p>
+                      <a:pPr marL="0" indent="0">
+                        <a:buNone/>
+                      </a:pPr>
+                      <a:r>
+                        <a:rPr lang="en-US" sz="1400" dirty="0">
+                          <a:solidFill>
+                            <a:srgbClr val="3D4451"/>
+                          </a:solidFill>
+                        </a:rPr>
+                        <a:t>17</a:t>
+                      </a:r>
+                      <a:endParaRPr lang="en-US" sz="1400" dirty="0"/>
+                    </a:p>
+                  </a:txBody>
+                  <a:tcPr marL="109728" marR="109728" marT="0" marB="0" anchor="ctr">
+                    <a:lnL w="9525" cap="flat" cmpd="sng" algn="ctr">
+                      <a:solidFill>
+                        <a:srgbClr val="D5DCE6"/>
+                      </a:solidFill>
+                      <a:prstDash val="solid"/>
+                      <a:round/>
+                      <a:headEnd type="none" w="med" len="med"/>
+                      <a:tailEnd type="none" w="med" len="med"/>
+                    </a:lnL>
+                    <a:lnR w="9525" cap="flat" cmpd="sng" algn="ctr">
+                      <a:solidFill>
+                        <a:srgbClr val="D5DCE6"/>
+                      </a:solidFill>
+                      <a:prstDash val="solid"/>
+                      <a:round/>
+                      <a:headEnd type="none" w="med" len="med"/>
+                      <a:tailEnd type="none" w="med" len="med"/>
+                    </a:lnR>
+                    <a:lnT w="9525" cap="flat" cmpd="sng" algn="ctr">
+                      <a:solidFill>
+                        <a:srgbClr val="D5DCE6"/>
+                      </a:solidFill>
+                      <a:prstDash val="solid"/>
+                      <a:round/>
+                      <a:headEnd type="none" w="med" len="med"/>
+                      <a:tailEnd type="none" w="med" len="med"/>
+                    </a:lnT>
+                    <a:lnB w="9525" cap="flat" cmpd="sng" algn="ctr">
+                      <a:solidFill>
+                        <a:srgbClr val="D5DCE6"/>
+                      </a:solidFill>
+                      <a:prstDash val="solid"/>
+                      <a:round/>
+                      <a:headEnd type="none" w="med" len="med"/>
+                      <a:tailEnd type="none" w="med" len="med"/>
+                    </a:lnB>
+                    <a:solidFill>
+                      <a:srgbClr val="FFFFFF"/>
+                    </a:solidFill>
+                  </a:tcPr>
+                </a:tc>
+                <a:tc>
+                  <a:txBody>
+                    <a:bodyPr/>
+                    <a:lstStyle/>
+                    <a:p>
+                      <a:pPr marL="0" indent="0">
+                        <a:buNone/>
+                      </a:pPr>
+                      <a:r>
+                        <a:rPr lang="en-US" sz="1400" dirty="0">
+                          <a:solidFill>
+                            <a:srgbClr val="3D4451"/>
+                          </a:solidFill>
+                        </a:rPr>
+                        <a:t>Down (−2.38)</a:t>
+                      </a:r>
+                      <a:endParaRPr lang="en-US" sz="1400" dirty="0"/>
+                    </a:p>
+                  </a:txBody>
+                  <a:tcPr marL="109728" marR="109728" marT="0" marB="0" anchor="ctr">
+                    <a:lnL w="9525" cap="flat" cmpd="sng" algn="ctr">
+                      <a:solidFill>
+                        <a:srgbClr val="D5DCE6"/>
+                      </a:solidFill>
+                      <a:prstDash val="solid"/>
+                      <a:round/>
+                      <a:headEnd type="none" w="med" len="med"/>
+                      <a:tailEnd type="none" w="med" len="med"/>
+                    </a:lnL>
+                    <a:lnR w="9525" cap="flat" cmpd="sng" algn="ctr">
+                      <a:solidFill>
+                        <a:srgbClr val="D5DCE6"/>
+                      </a:solidFill>
+                      <a:prstDash val="solid"/>
+                      <a:round/>
+                      <a:headEnd type="none" w="med" len="med"/>
+                      <a:tailEnd type="none" w="med" len="med"/>
+                    </a:lnR>
+                    <a:lnT w="9525" cap="flat" cmpd="sng" algn="ctr">
+                      <a:solidFill>
+                        <a:srgbClr val="D5DCE6"/>
+                      </a:solidFill>
+                      <a:prstDash val="solid"/>
+                      <a:round/>
+                      <a:headEnd type="none" w="med" len="med"/>
+                      <a:tailEnd type="none" w="med" len="med"/>
+                    </a:lnT>
+                    <a:lnB w="9525" cap="flat" cmpd="sng" algn="ctr">
+                      <a:solidFill>
+                        <a:srgbClr val="D5DCE6"/>
+                      </a:solidFill>
+                      <a:prstDash val="solid"/>
+                      <a:round/>
+                      <a:headEnd type="none" w="med" len="med"/>
+                      <a:tailEnd type="none" w="med" len="med"/>
+                    </a:lnB>
+                    <a:solidFill>
+                      <a:srgbClr val="FFFFFF"/>
+                    </a:solidFill>
+                  </a:tcPr>
+                </a:tc>
+                <a:tc>
+                  <a:txBody>
+                    <a:bodyPr/>
+                    <a:lstStyle/>
+                    <a:p>
+                      <a:pPr marL="0" indent="0">
+                        <a:buNone/>
+                      </a:pPr>
+                      <a:r>
+                        <a:rPr lang="en-US" sz="1400" dirty="0">
+                          <a:solidFill>
+                            <a:srgbClr val="3D4451"/>
+                          </a:solidFill>
+                        </a:rPr>
+                        <a:t>Up (−2.35)</a:t>
+                      </a:r>
+                      <a:endParaRPr lang="en-US" sz="1400" dirty="0"/>
+                    </a:p>
+                  </a:txBody>
+                  <a:tcPr marL="109728" marR="109728" marT="0" marB="0" anchor="ctr">
+                    <a:lnL w="9525" cap="flat" cmpd="sng" algn="ctr">
+                      <a:solidFill>
+                        <a:srgbClr val="D5DCE6"/>
+                      </a:solidFill>
+                      <a:prstDash val="solid"/>
+                      <a:round/>
+                      <a:headEnd type="none" w="med" len="med"/>
+                      <a:tailEnd type="none" w="med" len="med"/>
+                    </a:lnL>
+                    <a:lnR w="9525" cap="flat" cmpd="sng" algn="ctr">
+                      <a:solidFill>
+                        <a:srgbClr val="D5DCE6"/>
+                      </a:solidFill>
+                      <a:prstDash val="solid"/>
+                      <a:round/>
+                      <a:headEnd type="none" w="med" len="med"/>
+                      <a:tailEnd type="none" w="med" len="med"/>
+                    </a:lnR>
+                    <a:lnT w="9525" cap="flat" cmpd="sng" algn="ctr">
+                      <a:solidFill>
+                        <a:srgbClr val="D5DCE6"/>
+                      </a:solidFill>
+                      <a:prstDash val="solid"/>
+                      <a:round/>
+                      <a:headEnd type="none" w="med" len="med"/>
+                      <a:tailEnd type="none" w="med" len="med"/>
+                    </a:lnT>
+                    <a:lnB w="9525" cap="flat" cmpd="sng" algn="ctr">
+                      <a:solidFill>
+                        <a:srgbClr val="D5DCE6"/>
+                      </a:solidFill>
+                      <a:prstDash val="solid"/>
+                      <a:round/>
+                      <a:headEnd type="none" w="med" len="med"/>
+                      <a:tailEnd type="none" w="med" len="med"/>
+                    </a:lnB>
+                    <a:solidFill>
+                      <a:srgbClr val="FFFFFF"/>
+                    </a:solidFill>
+                  </a:tcPr>
+                </a:tc>
+                <a:tc>
+                  <a:txBody>
+                    <a:bodyPr/>
+                    <a:lstStyle/>
+                    <a:p>
+                      <a:pPr marL="0" indent="0">
+                        <a:buNone/>
+                      </a:pPr>
+                      <a:r>
+                        <a:rPr lang="en-US" sz="1400" dirty="0">
+                          <a:solidFill>
+                            <a:srgbClr val="3D4451"/>
+                          </a:solidFill>
+                        </a:rPr>
+                        <a:t>0.03</a:t>
+                      </a:r>
+                      <a:endParaRPr lang="en-US" sz="1400" dirty="0"/>
+                    </a:p>
+                  </a:txBody>
+                  <a:tcPr marL="109728" marR="109728" marT="0" marB="0" anchor="ctr">
+                    <a:lnL w="9525" cap="flat" cmpd="sng" algn="ctr">
+                      <a:solidFill>
+                        <a:srgbClr val="D5DCE6"/>
+                      </a:solidFill>
+                      <a:prstDash val="solid"/>
+                      <a:round/>
+                      <a:headEnd type="none" w="med" len="med"/>
+                      <a:tailEnd type="none" w="med" len="med"/>
+                    </a:lnL>
+                    <a:lnR w="9525" cap="flat" cmpd="sng" algn="ctr">
+                      <a:solidFill>
+                        <a:srgbClr val="D5DCE6"/>
+                      </a:solidFill>
+                      <a:prstDash val="solid"/>
+                      <a:round/>
+                      <a:headEnd type="none" w="med" len="med"/>
+                      <a:tailEnd type="none" w="med" len="med"/>
+                    </a:lnR>
+                    <a:lnT w="9525" cap="flat" cmpd="sng" algn="ctr">
+                      <a:solidFill>
+                        <a:srgbClr val="D5DCE6"/>
+                      </a:solidFill>
+                      <a:prstDash val="solid"/>
+                      <a:round/>
+                      <a:headEnd type="none" w="med" len="med"/>
+                      <a:tailEnd type="none" w="med" len="med"/>
+                    </a:lnT>
+                    <a:lnB w="9525" cap="flat" cmpd="sng" algn="ctr">
+                      <a:solidFill>
+                        <a:srgbClr val="D5DCE6"/>
+                      </a:solidFill>
+                      <a:prstDash val="solid"/>
+                      <a:round/>
+                      <a:headEnd type="none" w="med" len="med"/>
+                      <a:tailEnd type="none" w="med" len="med"/>
+                    </a:lnB>
+                    <a:solidFill>
+                      <a:srgbClr val="FFFFFF"/>
+                    </a:solidFill>
+                  </a:tcPr>
+                </a:tc>
+              </a:tr>
+              <a:tr h="431800">
+                <a:tc>
+                  <a:txBody>
+                    <a:bodyPr/>
+                    <a:lstStyle/>
+                    <a:p>
+                      <a:pPr marL="0" indent="0">
+                        <a:buNone/>
+                      </a:pPr>
+                      <a:r>
+                        <a:rPr lang="en-US" sz="1400" dirty="0">
+                          <a:solidFill>
+                            <a:srgbClr val="3D4451"/>
+                          </a:solidFill>
+                        </a:rPr>
+                        <a:t>190912</a:t>
+                      </a:r>
+                      <a:endParaRPr lang="en-US" sz="1400" dirty="0"/>
+                    </a:p>
+                  </a:txBody>
+                  <a:tcPr marL="109728" marR="109728" marT="0" marB="0" anchor="ctr">
+                    <a:lnL w="9525" cap="flat" cmpd="sng" algn="ctr">
+                      <a:solidFill>
+                        <a:srgbClr val="D5DCE6"/>
+                      </a:solidFill>
+                      <a:prstDash val="solid"/>
+                      <a:round/>
+                      <a:headEnd type="none" w="med" len="med"/>
+                      <a:tailEnd type="none" w="med" len="med"/>
+                    </a:lnL>
+                    <a:lnR w="9525" cap="flat" cmpd="sng" algn="ctr">
+                      <a:solidFill>
+                        <a:srgbClr val="D5DCE6"/>
+                      </a:solidFill>
+                      <a:prstDash val="solid"/>
+                      <a:round/>
+                      <a:headEnd type="none" w="med" len="med"/>
+                      <a:tailEnd type="none" w="med" len="med"/>
+                    </a:lnR>
+                    <a:lnT w="9525" cap="flat" cmpd="sng" algn="ctr">
+                      <a:solidFill>
+                        <a:srgbClr val="D5DCE6"/>
+                      </a:solidFill>
+                      <a:prstDash val="solid"/>
+                      <a:round/>
+                      <a:headEnd type="none" w="med" len="med"/>
+                      <a:tailEnd type="none" w="med" len="med"/>
+                    </a:lnT>
+                    <a:lnB w="9525" cap="flat" cmpd="sng" algn="ctr">
+                      <a:solidFill>
+                        <a:srgbClr val="D5DCE6"/>
+                      </a:solidFill>
+                      <a:prstDash val="solid"/>
+                      <a:round/>
+                      <a:headEnd type="none" w="med" len="med"/>
+                      <a:tailEnd type="none" w="med" len="med"/>
+                    </a:lnB>
+                    <a:solidFill>
+                      <a:srgbClr val="FFFFFF"/>
+                    </a:solidFill>
+                  </a:tcPr>
+                </a:tc>
+                <a:tc>
+                  <a:txBody>
+                    <a:bodyPr/>
+                    <a:lstStyle/>
+                    <a:p>
+                      <a:pPr marL="0" indent="0">
+                        <a:buNone/>
+                      </a:pPr>
+                      <a:r>
+                        <a:rPr lang="en-US" sz="1400" dirty="0">
+                          <a:solidFill>
+                            <a:srgbClr val="3D4451"/>
+                          </a:solidFill>
+                        </a:rPr>
+                        <a:t>(4, 2, 0, 1, 1, 0, 19, 1)</a:t>
+                      </a:r>
+                      <a:endParaRPr lang="en-US" sz="1400" dirty="0"/>
+                    </a:p>
+                  </a:txBody>
+                  <a:tcPr marL="109728" marR="109728" marT="0" marB="0" anchor="ctr">
+                    <a:lnL w="9525" cap="flat" cmpd="sng" algn="ctr">
+                      <a:solidFill>
+                        <a:srgbClr val="D5DCE6"/>
+                      </a:solidFill>
+                      <a:prstDash val="solid"/>
+                      <a:round/>
+                      <a:headEnd type="none" w="med" len="med"/>
+                      <a:tailEnd type="none" w="med" len="med"/>
+                    </a:lnL>
+                    <a:lnR w="9525" cap="flat" cmpd="sng" algn="ctr">
+                      <a:solidFill>
+                        <a:srgbClr val="D5DCE6"/>
+                      </a:solidFill>
+                      <a:prstDash val="solid"/>
+                      <a:round/>
+                      <a:headEnd type="none" w="med" len="med"/>
+                      <a:tailEnd type="none" w="med" len="med"/>
+                    </a:lnR>
+                    <a:lnT w="9525" cap="flat" cmpd="sng" algn="ctr">
+                      <a:solidFill>
+                        <a:srgbClr val="D5DCE6"/>
+                      </a:solidFill>
+                      <a:prstDash val="solid"/>
+                      <a:round/>
+                      <a:headEnd type="none" w="med" len="med"/>
+                      <a:tailEnd type="none" w="med" len="med"/>
+                    </a:lnT>
+                    <a:lnB w="9525" cap="flat" cmpd="sng" algn="ctr">
+                      <a:solidFill>
+                        <a:srgbClr val="D5DCE6"/>
+                      </a:solidFill>
+                      <a:prstDash val="solid"/>
+                      <a:round/>
+                      <a:headEnd type="none" w="med" len="med"/>
+                      <a:tailEnd type="none" w="med" len="med"/>
+                    </a:lnB>
+                    <a:solidFill>
+                      <a:srgbClr val="FFFFFF"/>
+                    </a:solidFill>
+                  </a:tcPr>
+                </a:tc>
+                <a:tc>
+                  <a:txBody>
+                    <a:bodyPr/>
+                    <a:lstStyle/>
+                    <a:p>
+                      <a:pPr marL="0" indent="0">
+                        <a:buNone/>
+                      </a:pPr>
+                      <a:r>
+                        <a:rPr lang="en-US" sz="1400" dirty="0">
+                          <a:solidFill>
+                            <a:srgbClr val="3D4451"/>
+                          </a:solidFill>
+                        </a:rPr>
+                        <a:t>17</a:t>
+                      </a:r>
+                      <a:endParaRPr lang="en-US" sz="1400" dirty="0"/>
+                    </a:p>
+                  </a:txBody>
+                  <a:tcPr marL="109728" marR="109728" marT="0" marB="0" anchor="ctr">
+                    <a:lnL w="9525" cap="flat" cmpd="sng" algn="ctr">
+                      <a:solidFill>
+                        <a:srgbClr val="D5DCE6"/>
+                      </a:solidFill>
+                      <a:prstDash val="solid"/>
+                      <a:round/>
+                      <a:headEnd type="none" w="med" len="med"/>
+                      <a:tailEnd type="none" w="med" len="med"/>
+                    </a:lnL>
+                    <a:lnR w="9525" cap="flat" cmpd="sng" algn="ctr">
+                      <a:solidFill>
+                        <a:srgbClr val="D5DCE6"/>
+                      </a:solidFill>
+                      <a:prstDash val="solid"/>
+                      <a:round/>
+                      <a:headEnd type="none" w="med" len="med"/>
+                      <a:tailEnd type="none" w="med" len="med"/>
+                    </a:lnR>
+                    <a:lnT w="9525" cap="flat" cmpd="sng" algn="ctr">
+                      <a:solidFill>
+                        <a:srgbClr val="D5DCE6"/>
+                      </a:solidFill>
+                      <a:prstDash val="solid"/>
+                      <a:round/>
+                      <a:headEnd type="none" w="med" len="med"/>
+                      <a:tailEnd type="none" w="med" len="med"/>
+                    </a:lnT>
+                    <a:lnB w="9525" cap="flat" cmpd="sng" algn="ctr">
+                      <a:solidFill>
+                        <a:srgbClr val="D5DCE6"/>
+                      </a:solidFill>
+                      <a:prstDash val="solid"/>
+                      <a:round/>
+                      <a:headEnd type="none" w="med" len="med"/>
+                      <a:tailEnd type="none" w="med" len="med"/>
+                    </a:lnB>
+                    <a:solidFill>
+                      <a:srgbClr val="FFFFFF"/>
+                    </a:solidFill>
+                  </a:tcPr>
+                </a:tc>
+                <a:tc>
+                  <a:txBody>
+                    <a:bodyPr/>
+                    <a:lstStyle/>
+                    <a:p>
+                      <a:pPr marL="0" indent="0">
+                        <a:buNone/>
+                      </a:pPr>
+                      <a:r>
+                        <a:rPr lang="en-US" sz="1400" dirty="0">
+                          <a:solidFill>
+                            <a:srgbClr val="3D4451"/>
+                          </a:solidFill>
+                        </a:rPr>
+                        <a:t>Down (−2.68)</a:t>
+                      </a:r>
+                      <a:endParaRPr lang="en-US" sz="1400" dirty="0"/>
+                    </a:p>
+                  </a:txBody>
+                  <a:tcPr marL="109728" marR="109728" marT="0" marB="0" anchor="ctr">
+                    <a:lnL w="9525" cap="flat" cmpd="sng" algn="ctr">
+                      <a:solidFill>
+                        <a:srgbClr val="D5DCE6"/>
+                      </a:solidFill>
+                      <a:prstDash val="solid"/>
+                      <a:round/>
+                      <a:headEnd type="none" w="med" len="med"/>
+                      <a:tailEnd type="none" w="med" len="med"/>
+                    </a:lnL>
+                    <a:lnR w="9525" cap="flat" cmpd="sng" algn="ctr">
+                      <a:solidFill>
+                        <a:srgbClr val="D5DCE6"/>
+                      </a:solidFill>
+                      <a:prstDash val="solid"/>
+                      <a:round/>
+                      <a:headEnd type="none" w="med" len="med"/>
+                      <a:tailEnd type="none" w="med" len="med"/>
+                    </a:lnR>
+                    <a:lnT w="9525" cap="flat" cmpd="sng" algn="ctr">
+                      <a:solidFill>
+                        <a:srgbClr val="D5DCE6"/>
+                      </a:solidFill>
+                      <a:prstDash val="solid"/>
+                      <a:round/>
+                      <a:headEnd type="none" w="med" len="med"/>
+                      <a:tailEnd type="none" w="med" len="med"/>
+                    </a:lnT>
+                    <a:lnB w="9525" cap="flat" cmpd="sng" algn="ctr">
+                      <a:solidFill>
+                        <a:srgbClr val="D5DCE6"/>
+                      </a:solidFill>
+                      <a:prstDash val="solid"/>
+                      <a:round/>
+                      <a:headEnd type="none" w="med" len="med"/>
+                      <a:tailEnd type="none" w="med" len="med"/>
+                    </a:lnB>
+                    <a:solidFill>
+                      <a:srgbClr val="FFFFFF"/>
+                    </a:solidFill>
+                  </a:tcPr>
+                </a:tc>
+                <a:tc>
+                  <a:txBody>
+                    <a:bodyPr/>
+                    <a:lstStyle/>
+                    <a:p>
+                      <a:pPr marL="0" indent="0">
+                        <a:buNone/>
+                      </a:pPr>
+                      <a:r>
+                        <a:rPr lang="en-US" sz="1400" dirty="0">
+                          <a:solidFill>
+                            <a:srgbClr val="3D4451"/>
+                          </a:solidFill>
+                        </a:rPr>
+                        <a:t>Up (−2.64)</a:t>
+                      </a:r>
+                      <a:endParaRPr lang="en-US" sz="1400" dirty="0"/>
+                    </a:p>
+                  </a:txBody>
+                  <a:tcPr marL="109728" marR="109728" marT="0" marB="0" anchor="ctr">
+                    <a:lnL w="9525" cap="flat" cmpd="sng" algn="ctr">
+                      <a:solidFill>
+                        <a:srgbClr val="D5DCE6"/>
+                      </a:solidFill>
+                      <a:prstDash val="solid"/>
+                      <a:round/>
+                      <a:headEnd type="none" w="med" len="med"/>
+                      <a:tailEnd type="none" w="med" len="med"/>
+                    </a:lnL>
+                    <a:lnR w="9525" cap="flat" cmpd="sng" algn="ctr">
+                      <a:solidFill>
+                        <a:srgbClr val="D5DCE6"/>
+                      </a:solidFill>
+                      <a:prstDash val="solid"/>
+                      <a:round/>
+                      <a:headEnd type="none" w="med" len="med"/>
+                      <a:tailEnd type="none" w="med" len="med"/>
+                    </a:lnR>
+                    <a:lnT w="9525" cap="flat" cmpd="sng" algn="ctr">
+                      <a:solidFill>
+                        <a:srgbClr val="D5DCE6"/>
+                      </a:solidFill>
+                      <a:prstDash val="solid"/>
+                      <a:round/>
+                      <a:headEnd type="none" w="med" len="med"/>
+                      <a:tailEnd type="none" w="med" len="med"/>
+                    </a:lnT>
+                    <a:lnB w="9525" cap="flat" cmpd="sng" algn="ctr">
+                      <a:solidFill>
+                        <a:srgbClr val="D5DCE6"/>
+                      </a:solidFill>
+                      <a:prstDash val="solid"/>
+                      <a:round/>
+                      <a:headEnd type="none" w="med" len="med"/>
+                      <a:tailEnd type="none" w="med" len="med"/>
+                    </a:lnB>
+                    <a:solidFill>
+                      <a:srgbClr val="FFFFFF"/>
+                    </a:solidFill>
+                  </a:tcPr>
+                </a:tc>
+                <a:tc>
+                  <a:txBody>
+                    <a:bodyPr/>
+                    <a:lstStyle/>
+                    <a:p>
+                      <a:pPr marL="0" indent="0">
+                        <a:buNone/>
+                      </a:pPr>
+                      <a:r>
+                        <a:rPr lang="en-US" sz="1400" dirty="0">
+                          <a:solidFill>
+                            <a:srgbClr val="3D4451"/>
+                          </a:solidFill>
+                        </a:rPr>
+                        <a:t>0.04</a:t>
+                      </a:r>
+                      <a:endParaRPr lang="en-US" sz="1400" dirty="0"/>
+                    </a:p>
+                  </a:txBody>
+                  <a:tcPr marL="109728" marR="109728" marT="0" marB="0" anchor="ctr">
+                    <a:lnL w="9525" cap="flat" cmpd="sng" algn="ctr">
+                      <a:solidFill>
+                        <a:srgbClr val="D5DCE6"/>
+                      </a:solidFill>
+                      <a:prstDash val="solid"/>
+                      <a:round/>
+                      <a:headEnd type="none" w="med" len="med"/>
+                      <a:tailEnd type="none" w="med" len="med"/>
+                    </a:lnL>
+                    <a:lnR w="9525" cap="flat" cmpd="sng" algn="ctr">
+                      <a:solidFill>
+                        <a:srgbClr val="D5DCE6"/>
+                      </a:solidFill>
+                      <a:prstDash val="solid"/>
+                      <a:round/>
+                      <a:headEnd type="none" w="med" len="med"/>
+                      <a:tailEnd type="none" w="med" len="med"/>
+                    </a:lnR>
+                    <a:lnT w="9525" cap="flat" cmpd="sng" algn="ctr">
+                      <a:solidFill>
+                        <a:srgbClr val="D5DCE6"/>
+                      </a:solidFill>
+                      <a:prstDash val="solid"/>
+                      <a:round/>
+                      <a:headEnd type="none" w="med" len="med"/>
+                      <a:tailEnd type="none" w="med" len="med"/>
+                    </a:lnT>
+                    <a:lnB w="9525" cap="flat" cmpd="sng" algn="ctr">
+                      <a:solidFill>
+                        <a:srgbClr val="D5DCE6"/>
+                      </a:solidFill>
+                      <a:prstDash val="solid"/>
+                      <a:round/>
+                      <a:headEnd type="none" w="med" len="med"/>
+                      <a:tailEnd type="none" w="med" len="med"/>
+                    </a:lnB>
+                    <a:solidFill>
+                      <a:srgbClr val="FFFFFF"/>
+                    </a:solidFill>
+                  </a:tcPr>
+                </a:tc>
+              </a:tr>
+              <a:tr h="431800">
+                <a:tc>
+                  <a:txBody>
+                    <a:bodyPr/>
+                    <a:lstStyle/>
+                    <a:p>
+                      <a:pPr marL="0" indent="0">
+                        <a:buNone/>
+                      </a:pPr>
+                      <a:r>
+                        <a:rPr lang="en-US" sz="1400" dirty="0">
+                          <a:solidFill>
+                            <a:srgbClr val="3D4451"/>
+                          </a:solidFill>
+                        </a:rPr>
+                        <a:t>17455</a:t>
+                      </a:r>
+                      <a:endParaRPr lang="en-US" sz="1400" dirty="0"/>
+                    </a:p>
+                  </a:txBody>
+                  <a:tcPr marL="109728" marR="109728" marT="0" marB="0" anchor="ctr">
+                    <a:lnL w="9525" cap="flat" cmpd="sng" algn="ctr">
+                      <a:solidFill>
+                        <a:srgbClr val="D5DCE6"/>
+                      </a:solidFill>
+                      <a:prstDash val="solid"/>
+                      <a:round/>
+                      <a:headEnd type="none" w="med" len="med"/>
+                      <a:tailEnd type="none" w="med" len="med"/>
+                    </a:lnL>
+                    <a:lnR w="9525" cap="flat" cmpd="sng" algn="ctr">
+                      <a:solidFill>
+                        <a:srgbClr val="D5DCE6"/>
+                      </a:solidFill>
+                      <a:prstDash val="solid"/>
+                      <a:round/>
+                      <a:headEnd type="none" w="med" len="med"/>
+                      <a:tailEnd type="none" w="med" len="med"/>
+                    </a:lnR>
+                    <a:lnT w="9525" cap="flat" cmpd="sng" algn="ctr">
+                      <a:solidFill>
+                        <a:srgbClr val="D5DCE6"/>
+                      </a:solidFill>
+                      <a:prstDash val="solid"/>
+                      <a:round/>
+                      <a:headEnd type="none" w="med" len="med"/>
+                      <a:tailEnd type="none" w="med" len="med"/>
+                    </a:lnT>
+                    <a:lnB w="9525" cap="flat" cmpd="sng" algn="ctr">
+                      <a:solidFill>
+                        <a:srgbClr val="D5DCE6"/>
+                      </a:solidFill>
+                      <a:prstDash val="solid"/>
+                      <a:round/>
+                      <a:headEnd type="none" w="med" len="med"/>
+                      <a:tailEnd type="none" w="med" len="med"/>
+                    </a:lnB>
+                    <a:solidFill>
+                      <a:srgbClr val="FFFFFF"/>
+                    </a:solidFill>
+                  </a:tcPr>
+                </a:tc>
+                <a:tc>
+                  <a:txBody>
+                    <a:bodyPr/>
+                    <a:lstStyle/>
+                    <a:p>
+                      <a:pPr marL="0" indent="0">
+                        <a:buNone/>
+                      </a:pPr>
+                      <a:r>
+                        <a:rPr lang="en-US" sz="1400" dirty="0">
+                          <a:solidFill>
+                            <a:srgbClr val="3D4451"/>
+                          </a:solidFill>
+                        </a:rPr>
+                        <a:t>(0, 3, 0, 0, 1, 0, 22, 1)</a:t>
+                      </a:r>
+                      <a:endParaRPr lang="en-US" sz="1400" dirty="0"/>
+                    </a:p>
+                  </a:txBody>
+                  <a:tcPr marL="109728" marR="109728" marT="0" marB="0" anchor="ctr">
+                    <a:lnL w="9525" cap="flat" cmpd="sng" algn="ctr">
+                      <a:solidFill>
+                        <a:srgbClr val="D5DCE6"/>
+                      </a:solidFill>
+                      <a:prstDash val="solid"/>
+                      <a:round/>
+                      <a:headEnd type="none" w="med" len="med"/>
+                      <a:tailEnd type="none" w="med" len="med"/>
+                    </a:lnL>
+                    <a:lnR w="9525" cap="flat" cmpd="sng" algn="ctr">
+                      <a:solidFill>
+                        <a:srgbClr val="D5DCE6"/>
+                      </a:solidFill>
+                      <a:prstDash val="solid"/>
+                      <a:round/>
+                      <a:headEnd type="none" w="med" len="med"/>
+                      <a:tailEnd type="none" w="med" len="med"/>
+                    </a:lnR>
+                    <a:lnT w="9525" cap="flat" cmpd="sng" algn="ctr">
+                      <a:solidFill>
+                        <a:srgbClr val="D5DCE6"/>
+                      </a:solidFill>
+                      <a:prstDash val="solid"/>
+                      <a:round/>
+                      <a:headEnd type="none" w="med" len="med"/>
+                      <a:tailEnd type="none" w="med" len="med"/>
+                    </a:lnT>
+                    <a:lnB w="9525" cap="flat" cmpd="sng" algn="ctr">
+                      <a:solidFill>
+                        <a:srgbClr val="D5DCE6"/>
+                      </a:solidFill>
+                      <a:prstDash val="solid"/>
+                      <a:round/>
+                      <a:headEnd type="none" w="med" len="med"/>
+                      <a:tailEnd type="none" w="med" len="med"/>
+                    </a:lnB>
+                    <a:solidFill>
+                      <a:srgbClr val="FFFFFF"/>
+                    </a:solidFill>
+                  </a:tcPr>
+                </a:tc>
+                <a:tc>
+                  <a:txBody>
+                    <a:bodyPr/>
+                    <a:lstStyle/>
+                    <a:p>
+                      <a:pPr marL="0" indent="0">
+                        <a:buNone/>
+                      </a:pPr>
+                      <a:r>
+                        <a:rPr lang="en-US" sz="1400" dirty="0">
+                          <a:solidFill>
+                            <a:srgbClr val="3D4451"/>
+                          </a:solidFill>
+                        </a:rPr>
+                        <a:t>15</a:t>
+                      </a:r>
+                      <a:endParaRPr lang="en-US" sz="1400" dirty="0"/>
+                    </a:p>
+                  </a:txBody>
+                  <a:tcPr marL="109728" marR="109728" marT="0" marB="0" anchor="ctr">
+                    <a:lnL w="9525" cap="flat" cmpd="sng" algn="ctr">
+                      <a:solidFill>
+                        <a:srgbClr val="D5DCE6"/>
+                      </a:solidFill>
+                      <a:prstDash val="solid"/>
+                      <a:round/>
+                      <a:headEnd type="none" w="med" len="med"/>
+                      <a:tailEnd type="none" w="med" len="med"/>
+                    </a:lnL>
+                    <a:lnR w="9525" cap="flat" cmpd="sng" algn="ctr">
+                      <a:solidFill>
+                        <a:srgbClr val="D5DCE6"/>
+                      </a:solidFill>
+                      <a:prstDash val="solid"/>
+                      <a:round/>
+                      <a:headEnd type="none" w="med" len="med"/>
+                      <a:tailEnd type="none" w="med" len="med"/>
+                    </a:lnR>
+                    <a:lnT w="9525" cap="flat" cmpd="sng" algn="ctr">
+                      <a:solidFill>
+                        <a:srgbClr val="D5DCE6"/>
+                      </a:solidFill>
+                      <a:prstDash val="solid"/>
+                      <a:round/>
+                      <a:headEnd type="none" w="med" len="med"/>
+                      <a:tailEnd type="none" w="med" len="med"/>
+                    </a:lnT>
+                    <a:lnB w="9525" cap="flat" cmpd="sng" algn="ctr">
+                      <a:solidFill>
+                        <a:srgbClr val="D5DCE6"/>
+                      </a:solidFill>
+                      <a:prstDash val="solid"/>
+                      <a:round/>
+                      <a:headEnd type="none" w="med" len="med"/>
+                      <a:tailEnd type="none" w="med" len="med"/>
+                    </a:lnB>
+                    <a:solidFill>
+                      <a:srgbClr val="FFFFFF"/>
+                    </a:solidFill>
+                  </a:tcPr>
+                </a:tc>
+                <a:tc>
+                  <a:txBody>
+                    <a:bodyPr/>
+                    <a:lstStyle/>
+                    <a:p>
+                      <a:pPr marL="0" indent="0">
+                        <a:buNone/>
+                      </a:pPr>
+                      <a:r>
+                        <a:rPr lang="en-US" sz="1400" dirty="0">
+                          <a:solidFill>
+                            <a:srgbClr val="3D4451"/>
+                          </a:solidFill>
+                        </a:rPr>
+                        <a:t>Drop (16.93)</a:t>
+                      </a:r>
+                      <a:endParaRPr lang="en-US" sz="1400" dirty="0"/>
+                    </a:p>
+                  </a:txBody>
+                  <a:tcPr marL="109728" marR="109728" marT="0" marB="0" anchor="ctr">
+                    <a:lnL w="9525" cap="flat" cmpd="sng" algn="ctr">
+                      <a:solidFill>
+                        <a:srgbClr val="D5DCE6"/>
+                      </a:solidFill>
+                      <a:prstDash val="solid"/>
+                      <a:round/>
+                      <a:headEnd type="none" w="med" len="med"/>
+                      <a:tailEnd type="none" w="med" len="med"/>
+                    </a:lnL>
+                    <a:lnR w="9525" cap="flat" cmpd="sng" algn="ctr">
+                      <a:solidFill>
+                        <a:srgbClr val="D5DCE6"/>
+                      </a:solidFill>
+                      <a:prstDash val="solid"/>
+                      <a:round/>
+                      <a:headEnd type="none" w="med" len="med"/>
+                      <a:tailEnd type="none" w="med" len="med"/>
+                    </a:lnR>
+                    <a:lnT w="9525" cap="flat" cmpd="sng" algn="ctr">
+                      <a:solidFill>
+                        <a:srgbClr val="D5DCE6"/>
+                      </a:solidFill>
+                      <a:prstDash val="solid"/>
+                      <a:round/>
+                      <a:headEnd type="none" w="med" len="med"/>
+                      <a:tailEnd type="none" w="med" len="med"/>
+                    </a:lnT>
+                    <a:lnB w="9525" cap="flat" cmpd="sng" algn="ctr">
+                      <a:solidFill>
+                        <a:srgbClr val="D5DCE6"/>
+                      </a:solidFill>
+                      <a:prstDash val="solid"/>
+                      <a:round/>
+                      <a:headEnd type="none" w="med" len="med"/>
+                      <a:tailEnd type="none" w="med" len="med"/>
+                    </a:lnB>
+                    <a:solidFill>
+                      <a:srgbClr val="FFFFFF"/>
+                    </a:solidFill>
+                  </a:tcPr>
+                </a:tc>
+                <a:tc>
+                  <a:txBody>
+                    <a:bodyPr/>
+                    <a:lstStyle/>
+                    <a:p>
+                      <a:pPr marL="0" indent="0">
+                        <a:buNone/>
+                      </a:pPr>
+                      <a:r>
+                        <a:rPr lang="en-US" sz="1400" dirty="0">
+                          <a:solidFill>
+                            <a:srgbClr val="3D4451"/>
+                          </a:solidFill>
+                        </a:rPr>
+                        <a:t>Down (16.97)</a:t>
+                      </a:r>
+                      <a:endParaRPr lang="en-US" sz="1400" dirty="0"/>
+                    </a:p>
+                  </a:txBody>
+                  <a:tcPr marL="109728" marR="109728" marT="0" marB="0" anchor="ctr">
+                    <a:lnL w="9525" cap="flat" cmpd="sng" algn="ctr">
+                      <a:solidFill>
+                        <a:srgbClr val="D5DCE6"/>
+                      </a:solidFill>
+                      <a:prstDash val="solid"/>
+                      <a:round/>
+                      <a:headEnd type="none" w="med" len="med"/>
+                      <a:tailEnd type="none" w="med" len="med"/>
+                    </a:lnL>
+                    <a:lnR w="9525" cap="flat" cmpd="sng" algn="ctr">
+                      <a:solidFill>
+                        <a:srgbClr val="D5DCE6"/>
+                      </a:solidFill>
+                      <a:prstDash val="solid"/>
+                      <a:round/>
+                      <a:headEnd type="none" w="med" len="med"/>
+                      <a:tailEnd type="none" w="med" len="med"/>
+                    </a:lnR>
+                    <a:lnT w="9525" cap="flat" cmpd="sng" algn="ctr">
+                      <a:solidFill>
+                        <a:srgbClr val="D5DCE6"/>
+                      </a:solidFill>
+                      <a:prstDash val="solid"/>
+                      <a:round/>
+                      <a:headEnd type="none" w="med" len="med"/>
+                      <a:tailEnd type="none" w="med" len="med"/>
+                    </a:lnT>
+                    <a:lnB w="9525" cap="flat" cmpd="sng" algn="ctr">
+                      <a:solidFill>
+                        <a:srgbClr val="D5DCE6"/>
+                      </a:solidFill>
+                      <a:prstDash val="solid"/>
+                      <a:round/>
+                      <a:headEnd type="none" w="med" len="med"/>
+                      <a:tailEnd type="none" w="med" len="med"/>
+                    </a:lnB>
+                    <a:solidFill>
+                      <a:srgbClr val="FFFFFF"/>
+                    </a:solidFill>
+                  </a:tcPr>
+                </a:tc>
+                <a:tc>
+                  <a:txBody>
+                    <a:bodyPr/>
+                    <a:lstStyle/>
+                    <a:p>
+                      <a:pPr marL="0" indent="0">
+                        <a:buNone/>
+                      </a:pPr>
+                      <a:r>
+                        <a:rPr lang="en-US" sz="1400" dirty="0">
+                          <a:solidFill>
+                            <a:srgbClr val="3D4451"/>
+                          </a:solidFill>
+                        </a:rPr>
+                        <a:t>0.04</a:t>
+                      </a:r>
+                      <a:endParaRPr lang="en-US" sz="1400" dirty="0"/>
+                    </a:p>
+                  </a:txBody>
+                  <a:tcPr marL="109728" marR="109728" marT="0" marB="0" anchor="ctr">
+                    <a:lnL w="9525" cap="flat" cmpd="sng" algn="ctr">
+                      <a:solidFill>
+                        <a:srgbClr val="D5DCE6"/>
+                      </a:solidFill>
+                      <a:prstDash val="solid"/>
+                      <a:round/>
+                      <a:headEnd type="none" w="med" len="med"/>
+                      <a:tailEnd type="none" w="med" len="med"/>
+                    </a:lnL>
+                    <a:lnR w="9525" cap="flat" cmpd="sng" algn="ctr">
+                      <a:solidFill>
+                        <a:srgbClr val="D5DCE6"/>
+                      </a:solidFill>
+                      <a:prstDash val="solid"/>
+                      <a:round/>
+                      <a:headEnd type="none" w="med" len="med"/>
+                      <a:tailEnd type="none" w="med" len="med"/>
+                    </a:lnR>
+                    <a:lnT w="9525" cap="flat" cmpd="sng" algn="ctr">
+                      <a:solidFill>
+                        <a:srgbClr val="D5DCE6"/>
+                      </a:solidFill>
+                      <a:prstDash val="solid"/>
+                      <a:round/>
+                      <a:headEnd type="none" w="med" len="med"/>
+                      <a:tailEnd type="none" w="med" len="med"/>
+                    </a:lnT>
+                    <a:lnB w="9525" cap="flat" cmpd="sng" algn="ctr">
+                      <a:solidFill>
+                        <a:srgbClr val="D5DCE6"/>
+                      </a:solidFill>
+                      <a:prstDash val="solid"/>
+                      <a:round/>
+                      <a:headEnd type="none" w="med" len="med"/>
+                      <a:tailEnd type="none" w="med" len="med"/>
+                    </a:lnB>
+                    <a:solidFill>
+                      <a:srgbClr val="FFFFFF"/>
+                    </a:solidFill>
+                  </a:tcPr>
+                </a:tc>
+              </a:tr>
+            </a:tbl>
+          </a:graphicData>
+        </a:graphic>
+      </p:graphicFrame>
+      <p:sp>
+        <p:nvSpPr>
+          <p:cNvPr id="9" name="codes-note"/>
+          <p:cNvSpPr txBox="1"/>
+          <p:nvPr/>
+        </p:nvSpPr>
+        <p:spPr>
+          <a:xfrm>
+            <a:off x="868680" y="5303520"/>
+            <a:ext cx="10451592" cy="411480"/>
+          </a:xfrm>
+          <a:prstGeom prst="rect">
+            <a:avLst/>
+          </a:prstGeom>
+          <a:noFill/>
+          <a:ln/>
+        </p:spPr>
+        <p:txBody>
+          <a:bodyPr wrap="square" lIns="0" tIns="0" rIns="0" bIns="0" rtlCol="0" anchor="t"/>
+          <a:lstStyle/>
+          <a:p>
+            <a:pPr marL="0" indent="0">
+              <a:buNone/>
+            </a:pPr>
+            <a:r>
+              <a:rPr lang="en-US" sz="1400" dirty="0">
+                <a:solidFill>
+                  <a:schemeClr val="accent6"/>
+                </a:solidFill>
+              </a:rPr>
+              <a:t>S4, SARSA seed 0: 301 wrong states come from 39 wrong decisions. Old-settings loops from S: S1 state 0 (2 runs) · S1 state 202 (1 run) · S2 state 817 (1 run) · S4 state 17455 (4 runs). All rows: results/failure_states.csv</a:t>
+            </a:r>
+            <a:endParaRPr lang="en-US" sz="1400" dirty="0"/>
+          </a:p>
+        </p:txBody>
+      </p:sp>
+      <p:sp>
+        <p:nvSpPr>
+          <p:cNvPr id="25" name="Slide Number Placeholder 0"/>
+          <p:cNvSpPr>
+            <a:spLocks noGrp="1"/>
+          </p:cNvSpPr>
+          <p:nvPr>
+            <p:ph type="sldNum" sz="quarter" idx="4294967295"/>
+          </p:nvPr>
+        </p:nvSpPr>
+        <p:spPr>
+          <a:xfrm>
+            <a:off x="11091672" y="6355080"/>
+            <a:ext cx="548640" cy="274320"/>
+          </a:xfrm>
+          <a:prstGeom prst="rect">
+            <a:avLst/>
+          </a:prstGeom>
+          <a:extLst>
+            <a:ext uri="{C572A759-6A51-4108-AA02-DFA0A04FC94B}">
+              <ma14:wrappingTextBoxFlag xmlns:ma14="http://schemas.microsoft.com/office/mac/drawingml/2011/main" xmlns="" val="0"/>
+            </a:ext>
+          </a:extLst>
+        </p:spPr>
+        <p:txBody>
+          <a:bodyPr/>
+          <a:lstStyle>
+            <a:lvl1pPr>
+              <a:defRPr sz="1100">
+                <a:solidFill>
+                  <a:srgbClr val="737B89"/>
+                </a:solidFill>
+              </a:defRPr>
+            </a:lvl1pPr>
+          </a:lstStyle>
+          <a:p>
+            <a:pPr algn="r"/>
+            <a:fld id="{F7021451-1387-4CA6-816F-3879F97B5CBC}" type="slidenum">
+              <a:rPr lang="en-US" b="0"/>
+              <a:t>2</a:t>
             </a:fld>
             <a:endParaRPr lang="en-US"/>
           </a:p>
@@ -7787,6 +12066,946 @@
             <a:fld id="{F7021451-1387-4CA6-816F-3879F97B5CBC}" type="slidenum">
               <a:rPr lang="en-US" b="0"/>
               <a:t>2</a:t>
+            </a:fld>
+            <a:endParaRPr lang="en-US"/>
+          </a:p>
+        </p:txBody>
+      </p:sp>
+    </p:spTree>
+  </p:cSld>
+  <p:clrMapOvr>
+    <a:masterClrMapping/>
+  </p:clrMapOvr>
+</p:sld>
+</file>
+
+<file path=ppt/slides/slide20.xml><?xml version="1.0" encoding="utf-8"?>
+<p:sld xmlns:a="http://schemas.openxmlformats.org/drawingml/2006/main" xmlns:r="http://schemas.openxmlformats.org/officeDocument/2006/relationships" xmlns:p="http://schemas.openxmlformats.org/presentationml/2006/main">
+  <p:cSld name="Slide 12">
+    <p:spTree>
+      <p:nvGrpSpPr>
+        <p:cNvPr id="1" name=""/>
+        <p:cNvGrpSpPr/>
+        <p:nvPr/>
+      </p:nvGrpSpPr>
+      <p:grpSpPr>
+        <a:xfrm>
+          <a:off x="0" y="0"/>
+          <a:ext cx="0" cy="0"/>
+          <a:chOff x="0" y="0"/>
+          <a:chExt cx="0" cy="0"/>
+        </a:xfrm>
+      </p:grpSpPr>
+      <p:sp>
+        <p:nvSpPr>
+          <p:cNvPr id="2" name="Text 0"/>
+          <p:cNvSpPr>
+            <a:spLocks noGrp="1"/>
+          </p:cNvSpPr>
+          <p:nvPr>
+            <p:ph type="title" idx="100" hasCustomPrompt="1"/>
+          </p:nvPr>
+        </p:nvSpPr>
+        <p:spPr>
+          <a:xfrm>
+            <a:off x="548640" y="320040"/>
+            <a:ext cx="11091672" cy="777240"/>
+          </a:xfrm>
+          <a:prstGeom prst="rect">
+            <a:avLst/>
+          </a:prstGeom>
+          <a:noFill/>
+          <a:ln/>
+        </p:spPr>
+        <p:txBody>
+          <a:bodyPr wrap="square" lIns="0" tIns="0" rIns="0" bIns="0" rtlCol="0" anchor="ctr"/>
+          <a:lstStyle/>
+          <a:p>
+            <a:pPr marL="0" indent="0" algn="l">
+              <a:buNone/>
+            </a:pPr>
+            <a:r>
+              <a:rPr lang="en-US" sz="3400" b="1" dirty="0">
+                <a:solidFill>
+                  <a:schemeClr val="tx1"/>
+                </a:solidFill>
+              </a:rPr>
+              <a:t>State code: one integer per state</a:t>
+            </a:r>
+            <a:endParaRPr lang="en-US" sz="3400" dirty="0"/>
+          </a:p>
+        </p:txBody>
+      </p:sp>
+      <p:sp>
+        <p:nvSpPr>
+          <p:cNvPr id="4" name="encode-box"/>
+          <p:cNvSpPr/>
+          <p:nvPr/>
+        </p:nvSpPr>
+        <p:spPr>
+          <a:xfrm>
+            <a:off x="548640" y="1234440"/>
+            <a:ext cx="6537960" cy="4800600"/>
+          </a:xfrm>
+          <a:prstGeom prst="roundRect">
+            <a:avLst>
+              <a:gd name="adj" fmla="val 5714"/>
+            </a:avLst>
+          </a:prstGeom>
+          <a:solidFill>
+            <a:schemeClr val="tx1"/>
+          </a:solidFill>
+          <a:ln w="12700">
+            <a:solidFill>
+              <a:schemeClr val="tx1"/>
+            </a:solidFill>
+            <a:prstDash val="solid"/>
+          </a:ln>
+        </p:spPr>
+        <p:txBody>
+          <a:bodyPr/>
+          <a:lstStyle/>
+          <a:p>
+            <a:endParaRPr lang="en-US"/>
+          </a:p>
+        </p:txBody>
+      </p:sp>
+      <p:sp>
+        <p:nvSpPr>
+          <p:cNvPr id="5" name="encode-code"/>
+          <p:cNvSpPr txBox="1"/>
+          <p:nvPr/>
+        </p:nvSpPr>
+        <p:spPr>
+          <a:xfrm>
+            <a:off x="731520" y="1325880"/>
+            <a:ext cx="6263640" cy="4617720"/>
+          </a:xfrm>
+          <a:prstGeom prst="rect">
+            <a:avLst/>
+          </a:prstGeom>
+          <a:noFill/>
+          <a:ln/>
+        </p:spPr>
+        <p:txBody>
+          <a:bodyPr wrap="square" lIns="0" tIns="0" rIns="0" bIns="0" rtlCol="0" anchor="ctr"/>
+          <a:lstStyle/>
+          <a:p>
+            <a:pPr marL="0" indent="0">
+              <a:lnSpc>
+                <a:spcPct val="115000"/>
+              </a:lnSpc>
+              <a:buNone/>
+            </a:pPr>
+            <a:r>
+              <a:rPr lang="en-US" sz="1300" dirty="0">
+                <a:solidFill>
+                  <a:schemeClr val="bg1"/>
+                </a:solidFill>
+                <a:latin typeface="Courier New" pitchFamily="34" charset="0"/>
+                <a:ea typeface="Courier New" pitchFamily="34" charset="-122"/>
+                <a:cs typeface="Courier New" pitchFamily="34" charset="-120"/>
+              </a:rPr>
+              <a:t>def encode(self, state):        # delivery_env.py</a:t>
+            </a:r>
+            <a:endParaRPr lang="en-US" sz="1300" dirty="0"/>
+          </a:p>
+          <a:p>
+            <a:pPr marL="0" indent="0">
+              <a:lnSpc>
+                <a:spcPct val="115000"/>
+              </a:lnSpc>
+              <a:buNone/>
+            </a:pPr>
+            <a:r>
+              <a:rPr lang="en-US" sz="1300" dirty="0">
+                <a:solidFill>
+                  <a:schemeClr val="bg1"/>
+                </a:solidFill>
+                <a:latin typeface="Courier New" pitchFamily="34" charset="0"/>
+                <a:ea typeface="Courier New" pitchFamily="34" charset="-122"/>
+                <a:cs typeface="Courier New" pitchFamily="34" charset="-120"/>
+              </a:rPr>
+              <a:t>    r, c, status, tau, boost = state</a:t>
+            </a:r>
+            <a:endParaRPr lang="en-US" sz="1300" dirty="0"/>
+          </a:p>
+          <a:p>
+            <a:pPr marL="0" indent="0">
+              <a:lnSpc>
+                <a:spcPct val="115000"/>
+              </a:lnSpc>
+              <a:buNone/>
+            </a:pPr>
+            <a:r>
+              <a:rPr lang="en-US" sz="1300" dirty="0">
+                <a:solidFill>
+                  <a:schemeClr val="bg1"/>
+                </a:solidFill>
+                <a:latin typeface="Courier New" pitchFamily="34" charset="0"/>
+                <a:ea typeface="Courier New" pitchFamily="34" charset="-122"/>
+                <a:cs typeface="Courier New" pitchFamily="34" charset="-120"/>
+              </a:rPr>
+              <a:t>    code = 0</a:t>
+            </a:r>
+            <a:endParaRPr lang="en-US" sz="1300" dirty="0"/>
+          </a:p>
+          <a:p>
+            <a:pPr marL="0" indent="0">
+              <a:lnSpc>
+                <a:spcPct val="115000"/>
+              </a:lnSpc>
+              <a:buNone/>
+            </a:pPr>
+            <a:r>
+              <a:rPr lang="en-US" sz="1300" dirty="0">
+                <a:solidFill>
+                  <a:schemeClr val="bg1"/>
+                </a:solidFill>
+                <a:latin typeface="Courier New" pitchFamily="34" charset="0"/>
+                <a:ea typeface="Courier New" pitchFamily="34" charset="-122"/>
+                <a:cs typeface="Courier New" pitchFamily="34" charset="-120"/>
+              </a:rPr>
+              <a:t>    for i, s in enumerate(status):</a:t>
+            </a:r>
+            <a:endParaRPr lang="en-US" sz="1300" dirty="0"/>
+          </a:p>
+          <a:p>
+            <a:pPr marL="0" indent="0">
+              <a:lnSpc>
+                <a:spcPct val="115000"/>
+              </a:lnSpc>
+              <a:buNone/>
+            </a:pPr>
+            <a:r>
+              <a:rPr lang="en-US" sz="1300" dirty="0">
+                <a:solidFill>
+                  <a:schemeClr val="bg1"/>
+                </a:solidFill>
+                <a:latin typeface="Courier New" pitchFamily="34" charset="0"/>
+                <a:ea typeface="Courier New" pitchFamily="34" charset="-122"/>
+                <a:cs typeface="Courier New" pitchFamily="34" charset="-120"/>
+              </a:rPr>
+              <a:t>        code += s * 3 ** i      # parcels: base 3</a:t>
+            </a:r>
+            <a:endParaRPr lang="en-US" sz="1300" dirty="0"/>
+          </a:p>
+          <a:p>
+            <a:pPr marL="0" indent="0">
+              <a:lnSpc>
+                <a:spcPct val="115000"/>
+              </a:lnSpc>
+              <a:buNone/>
+            </a:pPr>
+            <a:r>
+              <a:rPr lang="en-US" sz="1300" dirty="0">
+                <a:solidFill>
+                  <a:schemeClr val="bg1"/>
+                </a:solidFill>
+                <a:latin typeface="Courier New" pitchFamily="34" charset="0"/>
+                <a:ea typeface="Courier New" pitchFamily="34" charset="-122"/>
+                <a:cs typeface="Courier New" pitchFamily="34" charset="-120"/>
+              </a:rPr>
+              <a:t>    idx = r * self.W + c        # cell</a:t>
+            </a:r>
+            <a:endParaRPr lang="en-US" sz="1300" dirty="0"/>
+          </a:p>
+          <a:p>
+            <a:pPr marL="0" indent="0">
+              <a:lnSpc>
+                <a:spcPct val="115000"/>
+              </a:lnSpc>
+              <a:buNone/>
+            </a:pPr>
+            <a:r>
+              <a:rPr lang="en-US" sz="1300" dirty="0">
+                <a:solidFill>
+                  <a:schemeClr val="bg1"/>
+                </a:solidFill>
+                <a:latin typeface="Courier New" pitchFamily="34" charset="0"/>
+                <a:ea typeface="Courier New" pitchFamily="34" charset="-122"/>
+                <a:cs typeface="Courier New" pitchFamily="34" charset="-120"/>
+              </a:rPr>
+              <a:t>    idx = idx * self.n_codes + code</a:t>
+            </a:r>
+            <a:endParaRPr lang="en-US" sz="1300" dirty="0"/>
+          </a:p>
+          <a:p>
+            <a:pPr marL="0" indent="0">
+              <a:lnSpc>
+                <a:spcPct val="115000"/>
+              </a:lnSpc>
+              <a:buNone/>
+            </a:pPr>
+            <a:r>
+              <a:rPr lang="en-US" sz="1300" dirty="0">
+                <a:solidFill>
+                  <a:schemeClr val="bg1"/>
+                </a:solidFill>
+                <a:latin typeface="Courier New" pitchFamily="34" charset="0"/>
+                <a:ea typeface="Courier New" pitchFamily="34" charset="-122"/>
+                <a:cs typeface="Courier New" pitchFamily="34" charset="-120"/>
+              </a:rPr>
+              <a:t>    idx = idx * self.n_tau + tau</a:t>
+            </a:r>
+            <a:endParaRPr lang="en-US" sz="1300" dirty="0"/>
+          </a:p>
+          <a:p>
+            <a:pPr marL="0" indent="0">
+              <a:lnSpc>
+                <a:spcPct val="115000"/>
+              </a:lnSpc>
+              <a:buNone/>
+            </a:pPr>
+            <a:r>
+              <a:rPr lang="en-US" sz="1300" dirty="0">
+                <a:solidFill>
+                  <a:schemeClr val="bg1"/>
+                </a:solidFill>
+                <a:latin typeface="Courier New" pitchFamily="34" charset="0"/>
+                <a:ea typeface="Courier New" pitchFamily="34" charset="-122"/>
+                <a:cs typeface="Courier New" pitchFamily="34" charset="-120"/>
+              </a:rPr>
+              <a:t>    idx = idx * self.n_boost + boost</a:t>
+            </a:r>
+            <a:endParaRPr lang="en-US" sz="1300" dirty="0"/>
+          </a:p>
+          <a:p>
+            <a:pPr marL="0" indent="0">
+              <a:lnSpc>
+                <a:spcPct val="115000"/>
+              </a:lnSpc>
+              <a:buNone/>
+            </a:pPr>
+            <a:r>
+              <a:rPr lang="en-US" sz="1300" dirty="0">
+                <a:solidFill>
+                  <a:schemeClr val="bg1"/>
+                </a:solidFill>
+                <a:latin typeface="Courier New" pitchFamily="34" charset="0"/>
+                <a:ea typeface="Courier New" pitchFamily="34" charset="-122"/>
+                <a:cs typeface="Courier New" pitchFamily="34" charset="-120"/>
+              </a:rPr>
+              <a:t>    return idx                  # = row of Q</a:t>
+            </a:r>
+            <a:endParaRPr lang="en-US" sz="1300" dirty="0"/>
+          </a:p>
+          <a:p>
+            <a:pPr marL="0" indent="0">
+              <a:lnSpc>
+                <a:spcPct val="115000"/>
+              </a:lnSpc>
+              <a:buNone/>
+            </a:pPr>
+            <a:r>
+              <a:rPr lang="en-US" sz="1300" dirty="0">
+                <a:solidFill>
+                  <a:schemeClr val="bg1"/>
+                </a:solidFill>
+                <a:latin typeface="Courier New" pitchFamily="34" charset="0"/>
+                <a:ea typeface="Courier New" pitchFamily="34" charset="-122"/>
+                <a:cs typeface="Courier New" pitchFamily="34" charset="-120"/>
+              </a:rPr>
+              <a:t/>
+            </a:r>
+            <a:endParaRPr lang="en-US" sz="1300" dirty="0"/>
+          </a:p>
+          <a:p>
+            <a:pPr marL="0" indent="0">
+              <a:lnSpc>
+                <a:spcPct val="115000"/>
+              </a:lnSpc>
+              <a:buNone/>
+            </a:pPr>
+            <a:r>
+              <a:rPr lang="en-US" sz="1300" dirty="0">
+                <a:solidFill>
+                  <a:schemeClr val="bg1"/>
+                </a:solidFill>
+                <a:latin typeface="Courier New" pitchFamily="34" charset="0"/>
+                <a:ea typeface="Courier New" pitchFamily="34" charset="-122"/>
+                <a:cs typeface="Courier New" pitchFamily="34" charset="-120"/>
+              </a:rPr>
+              <a:t>def decode(self, idx):          # the reverse</a:t>
+            </a:r>
+            <a:endParaRPr lang="en-US" sz="1300" dirty="0"/>
+          </a:p>
+          <a:p>
+            <a:pPr marL="0" indent="0">
+              <a:lnSpc>
+                <a:spcPct val="115000"/>
+              </a:lnSpc>
+              <a:buNone/>
+            </a:pPr>
+            <a:r>
+              <a:rPr lang="en-US" sz="1300" dirty="0">
+                <a:solidFill>
+                  <a:schemeClr val="bg1"/>
+                </a:solidFill>
+                <a:latin typeface="Courier New" pitchFamily="34" charset="0"/>
+                <a:ea typeface="Courier New" pitchFamily="34" charset="-122"/>
+                <a:cs typeface="Courier New" pitchFamily="34" charset="-120"/>
+              </a:rPr>
+              <a:t>    idx, boost = divmod(idx, self.n_boost)</a:t>
+            </a:r>
+            <a:endParaRPr lang="en-US" sz="1300" dirty="0"/>
+          </a:p>
+          <a:p>
+            <a:pPr marL="0" indent="0">
+              <a:lnSpc>
+                <a:spcPct val="115000"/>
+              </a:lnSpc>
+              <a:buNone/>
+            </a:pPr>
+            <a:r>
+              <a:rPr lang="en-US" sz="1300" dirty="0">
+                <a:solidFill>
+                  <a:schemeClr val="bg1"/>
+                </a:solidFill>
+                <a:latin typeface="Courier New" pitchFamily="34" charset="0"/>
+                <a:ea typeface="Courier New" pitchFamily="34" charset="-122"/>
+                <a:cs typeface="Courier New" pitchFamily="34" charset="-120"/>
+              </a:rPr>
+              <a:t>    idx, tau = divmod(idx, self.n_tau)</a:t>
+            </a:r>
+            <a:endParaRPr lang="en-US" sz="1300" dirty="0"/>
+          </a:p>
+          <a:p>
+            <a:pPr marL="0" indent="0">
+              <a:lnSpc>
+                <a:spcPct val="115000"/>
+              </a:lnSpc>
+              <a:buNone/>
+            </a:pPr>
+            <a:r>
+              <a:rPr lang="en-US" sz="1300" dirty="0">
+                <a:solidFill>
+                  <a:schemeClr val="bg1"/>
+                </a:solidFill>
+                <a:latin typeface="Courier New" pitchFamily="34" charset="0"/>
+                <a:ea typeface="Courier New" pitchFamily="34" charset="-122"/>
+                <a:cs typeface="Courier New" pitchFamily="34" charset="-120"/>
+              </a:rPr>
+              <a:t>    pos, code = divmod(idx, self.n_codes)</a:t>
+            </a:r>
+            <a:endParaRPr lang="en-US" sz="1300" dirty="0"/>
+          </a:p>
+          <a:p>
+            <a:pPr marL="0" indent="0">
+              <a:lnSpc>
+                <a:spcPct val="115000"/>
+              </a:lnSpc>
+              <a:buNone/>
+            </a:pPr>
+            <a:r>
+              <a:rPr lang="en-US" sz="1300" dirty="0">
+                <a:solidFill>
+                  <a:schemeClr val="bg1"/>
+                </a:solidFill>
+                <a:latin typeface="Courier New" pitchFamily="34" charset="0"/>
+                <a:ea typeface="Courier New" pitchFamily="34" charset="-122"/>
+                <a:cs typeface="Courier New" pitchFamily="34" charset="-120"/>
+              </a:rPr>
+              <a:t>    r, c = divmod(pos, self.W)</a:t>
+            </a:r>
+            <a:endParaRPr lang="en-US" sz="1300" dirty="0"/>
+          </a:p>
+          <a:p>
+            <a:pPr marL="0" indent="0">
+              <a:lnSpc>
+                <a:spcPct val="115000"/>
+              </a:lnSpc>
+              <a:buNone/>
+            </a:pPr>
+            <a:r>
+              <a:rPr lang="en-US" sz="1300" dirty="0">
+                <a:solidFill>
+                  <a:schemeClr val="bg1"/>
+                </a:solidFill>
+                <a:latin typeface="Courier New" pitchFamily="34" charset="0"/>
+                <a:ea typeface="Courier New" pitchFamily="34" charset="-122"/>
+                <a:cs typeface="Courier New" pitchFamily="34" charset="-120"/>
+              </a:rPr>
+              <a:t>    ...                         # code -&gt; σ digits</a:t>
+            </a:r>
+            <a:endParaRPr lang="en-US" sz="1300" dirty="0"/>
+          </a:p>
+        </p:txBody>
+      </p:sp>
+      <p:sp>
+        <p:nvSpPr>
+          <p:cNvPr id="6" name="encode-points"/>
+          <p:cNvSpPr txBox="1"/>
+          <p:nvPr/>
+        </p:nvSpPr>
+        <p:spPr>
+          <a:xfrm>
+            <a:off x="7360920" y="1234440"/>
+            <a:ext cx="4297680" cy="4800600"/>
+          </a:xfrm>
+          <a:prstGeom prst="rect">
+            <a:avLst/>
+          </a:prstGeom>
+          <a:noFill/>
+          <a:ln/>
+        </p:spPr>
+        <p:txBody>
+          <a:bodyPr wrap="square" lIns="0" tIns="0" rIns="0" bIns="0" rtlCol="0" anchor="t"/>
+          <a:lstStyle/>
+          <a:p>
+            <a:pPr marL="342900" indent="-342900">
+              <a:spcAft>
+                <a:spcPts val="1000"/>
+              </a:spcAft>
+              <a:buSzPct val="100000"/>
+              <a:buChar char="•"/>
+            </a:pPr>
+            <a:r>
+              <a:rPr lang="en-US" sz="1500" dirty="0">
+                <a:solidFill>
+                  <a:schemeClr val="tx2"/>
+                </a:solidFill>
+              </a:rPr>
+              <a:t>State s = (row, col, σA…σD, τ, b) → encode() packs it into one integer, the state code</a:t>
+            </a:r>
+            <a:endParaRPr lang="en-US" sz="1500" dirty="0"/>
+          </a:p>
+          <a:p>
+            <a:pPr marL="342900" indent="-342900">
+              <a:spcAft>
+                <a:spcPts val="1000"/>
+              </a:spcAft>
+              <a:buSzPct val="100000"/>
+              <a:buChar char="•"/>
+            </a:pPr>
+            <a:r>
+              <a:rPr lang="en-US" sz="1500" dirty="0">
+                <a:solidFill>
+                  <a:schemeClr val="tx2"/>
+                </a:solidFill>
+              </a:rPr>
+              <a:t>S4: idx = (((8·row + col)·81 + Σ σᵢ·3ⁱ⁻¹)·23 + τ)·3 + b</a:t>
+            </a:r>
+            <a:endParaRPr lang="en-US" sz="1500" dirty="0"/>
+          </a:p>
+          <a:p>
+            <a:pPr marL="342900" indent="-342900">
+              <a:spcAft>
+                <a:spcPts val="1000"/>
+              </a:spcAft>
+              <a:buSzPct val="100000"/>
+              <a:buChar char="•"/>
+            </a:pPr>
+            <a:r>
+              <a:rPr lang="en-US" sz="1500" dirty="0">
+                <a:solidFill>
+                  <a:schemeClr val="tx2"/>
+                </a:solidFill>
+              </a:rPr>
+              <a:t>17419 → (0, 3, 0, 0, 1, 0, 10, 1): C's drop cell, carrying C, τ = 10, booster on</a:t>
+            </a:r>
+            <a:endParaRPr lang="en-US" sz="1500" dirty="0"/>
+          </a:p>
+          <a:p>
+            <a:pPr marL="342900" indent="-342900">
+              <a:spcAft>
+                <a:spcPts val="1000"/>
+              </a:spcAft>
+              <a:buSzPct val="100000"/>
+              <a:buChar char="•"/>
+            </a:pPr>
+            <a:r>
+              <a:rPr lang="en-US" sz="1500" dirty="0">
+                <a:solidFill>
+                  <a:schemeClr val="tx2"/>
+                </a:solidFill>
+              </a:rPr>
+              <a:t>Row 17419 of Q: Drop −10.05 &gt; Down −10.13, but Q* prefers Down (−9.89 vs −9.93)</a:t>
+            </a:r>
+            <a:endParaRPr lang="en-US" sz="1500" dirty="0"/>
+          </a:p>
+          <a:p>
+            <a:pPr marL="342900" indent="-342900">
+              <a:spcAft>
+                <a:spcPts val="1000"/>
+              </a:spcAft>
+              <a:buSzPct val="100000"/>
+              <a:buChar char="•"/>
+            </a:pPr>
+            <a:r>
+              <a:rPr lang="en-US" sz="1500" dirty="0">
+                <a:solidFill>
+                  <a:schemeClr val="tx2"/>
+                </a:solidFill>
+              </a:rPr>
+              <a:t>failure_cases.py writes every wrong state and its wrong decision, by state code, to results/failure_states.csv</a:t>
+            </a:r>
+            <a:endParaRPr lang="en-US" sz="1500" dirty="0"/>
+          </a:p>
+        </p:txBody>
+      </p:sp>
+      <p:sp>
+        <p:nvSpPr>
+          <p:cNvPr id="25" name="Slide Number Placeholder 0"/>
+          <p:cNvSpPr>
+            <a:spLocks noGrp="1"/>
+          </p:cNvSpPr>
+          <p:nvPr>
+            <p:ph type="sldNum" sz="quarter" idx="4294967295"/>
+          </p:nvPr>
+        </p:nvSpPr>
+        <p:spPr>
+          <a:xfrm>
+            <a:off x="11091672" y="6355080"/>
+            <a:ext cx="548640" cy="274320"/>
+          </a:xfrm>
+          <a:prstGeom prst="rect">
+            <a:avLst/>
+          </a:prstGeom>
+          <a:extLst>
+            <a:ext uri="{C572A759-6A51-4108-AA02-DFA0A04FC94B}">
+              <ma14:wrappingTextBoxFlag xmlns:ma14="http://schemas.microsoft.com/office/mac/drawingml/2011/main" xmlns="" val="0"/>
+            </a:ext>
+          </a:extLst>
+        </p:spPr>
+        <p:txBody>
+          <a:bodyPr/>
+          <a:lstStyle>
+            <a:lvl1pPr>
+              <a:defRPr sz="1100">
+                <a:solidFill>
+                  <a:srgbClr val="737B89"/>
+                </a:solidFill>
+              </a:defRPr>
+            </a:lvl1pPr>
+          </a:lstStyle>
+          <a:p>
+            <a:pPr algn="r"/>
+            <a:fld id="{F7021451-1387-4CA6-816F-3879F97B5CBC}" type="slidenum">
+              <a:rPr lang="en-US" b="0"/>
+              <a:t>11</a:t>
+            </a:fld>
+            <a:endParaRPr lang="en-US"/>
+          </a:p>
+        </p:txBody>
+      </p:sp>
+    </p:spTree>
+  </p:cSld>
+  <p:clrMapOvr>
+    <a:masterClrMapping/>
+  </p:clrMapOvr>
+</p:sld>
+</file>
+
+<file path=ppt/slides/slide21.xml><?xml version="1.0" encoding="utf-8"?>
+<p:sld xmlns:a="http://schemas.openxmlformats.org/drawingml/2006/main" xmlns:r="http://schemas.openxmlformats.org/officeDocument/2006/relationships" xmlns:p="http://schemas.openxmlformats.org/presentationml/2006/main">
+  <p:cSld name="Slide 12">
+    <p:spTree>
+      <p:nvGrpSpPr>
+        <p:cNvPr id="1" name=""/>
+        <p:cNvGrpSpPr/>
+        <p:nvPr/>
+      </p:nvGrpSpPr>
+      <p:grpSpPr>
+        <a:xfrm>
+          <a:off x="0" y="0"/>
+          <a:ext cx="0" cy="0"/>
+          <a:chOff x="0" y="0"/>
+          <a:chExt cx="0" cy="0"/>
+        </a:xfrm>
+      </p:grpSpPr>
+      <p:sp>
+        <p:nvSpPr>
+          <p:cNvPr id="2" name="Text 0"/>
+          <p:cNvSpPr>
+            <a:spLocks noGrp="1"/>
+          </p:cNvSpPr>
+          <p:nvPr>
+            <p:ph type="title" idx="100" hasCustomPrompt="1"/>
+          </p:nvPr>
+        </p:nvSpPr>
+        <p:spPr>
+          <a:xfrm>
+            <a:off x="548640" y="320040"/>
+            <a:ext cx="11091672" cy="777240"/>
+          </a:xfrm>
+          <a:prstGeom prst="rect">
+            <a:avLst/>
+          </a:prstGeom>
+          <a:noFill/>
+          <a:ln/>
+        </p:spPr>
+        <p:txBody>
+          <a:bodyPr wrap="square" lIns="0" tIns="0" rIns="0" bIns="0" rtlCol="0" anchor="ctr"/>
+          <a:lstStyle/>
+          <a:p>
+            <a:pPr marL="0" indent="0" algn="l">
+              <a:buNone/>
+            </a:pPr>
+            <a:r>
+              <a:rPr lang="en-US" sz="3400" b="1" dirty="0">
+                <a:solidFill>
+                  <a:schemeClr val="tx1"/>
+                </a:solidFill>
+              </a:rPr>
+              <a:t>App: train live and control the robot</a:t>
+            </a:r>
+            <a:endParaRPr lang="en-US" sz="3400" dirty="0"/>
+          </a:p>
+        </p:txBody>
+      </p:sp>
+      <p:pic>
+        <p:nvPicPr>
+          <p:cNvPr id="3" name="app-screenshot" descr="app_screenshot.png"/>
+          <p:cNvPicPr>
+            <a:picLocks noChangeAspect="1"/>
+          </p:cNvPicPr>
+          <p:nvPr/>
+        </p:nvPicPr>
+        <p:blipFill>
+          <a:blip r:embed="rId3"/>
+          <a:stretch>
+            <a:fillRect/>
+          </a:stretch>
+        </p:blipFill>
+        <p:spPr>
+          <a:xfrm>
+            <a:off x="548640" y="1205943"/>
+            <a:ext cx="7360920" cy="4537553"/>
+          </a:xfrm>
+          <a:prstGeom prst="rect">
+            <a:avLst/>
+          </a:prstGeom>
+        </p:spPr>
+      </p:pic>
+      <p:sp>
+        <p:nvSpPr>
+          <p:cNvPr id="4" name="app-code-box"/>
+          <p:cNvSpPr/>
+          <p:nvPr/>
+        </p:nvSpPr>
+        <p:spPr>
+          <a:xfrm>
+            <a:off x="8183879" y="1234440"/>
+            <a:ext cx="3474720" cy="566928"/>
+          </a:xfrm>
+          <a:prstGeom prst="roundRect">
+            <a:avLst>
+              <a:gd name="adj" fmla="val 5714"/>
+            </a:avLst>
+          </a:prstGeom>
+          <a:solidFill>
+            <a:schemeClr val="tx1"/>
+          </a:solidFill>
+          <a:ln w="12700">
+            <a:solidFill>
+              <a:schemeClr val="tx1"/>
+            </a:solidFill>
+            <a:prstDash val="solid"/>
+          </a:ln>
+        </p:spPr>
+        <p:txBody>
+          <a:bodyPr/>
+          <a:lstStyle/>
+          <a:p>
+            <a:endParaRPr lang="en-US"/>
+          </a:p>
+        </p:txBody>
+      </p:sp>
+      <p:sp>
+        <p:nvSpPr>
+          <p:cNvPr id="5" name="app-code"/>
+          <p:cNvSpPr txBox="1"/>
+          <p:nvPr/>
+        </p:nvSpPr>
+        <p:spPr>
+          <a:xfrm>
+            <a:off x="8366760" y="1234440"/>
+            <a:ext cx="3200400" cy="566928"/>
+          </a:xfrm>
+          <a:prstGeom prst="rect">
+            <a:avLst/>
+          </a:prstGeom>
+          <a:noFill/>
+          <a:ln/>
+        </p:spPr>
+        <p:txBody>
+          <a:bodyPr wrap="square" lIns="0" tIns="0" rIns="0" bIns="0" rtlCol="0" anchor="ctr"/>
+          <a:lstStyle/>
+          <a:p>
+            <a:pPr marL="0" indent="0">
+              <a:lnSpc>
+                <a:spcPct val="115000"/>
+              </a:lnSpc>
+              <a:buNone/>
+            </a:pPr>
+            <a:r>
+              <a:rPr lang="en-US" sz="1500" dirty="0">
+                <a:solidFill>
+                  <a:schemeClr val="bg1"/>
+                </a:solidFill>
+                <a:latin typeface="Courier New" pitchFamily="34" charset="0"/>
+                <a:ea typeface="Courier New" pitchFamily="34" charset="-122"/>
+                <a:cs typeface="Courier New" pitchFamily="34" charset="-120"/>
+              </a:rPr>
+              <a:t>python app.py --lang en</a:t>
+            </a:r>
+            <a:endParaRPr lang="en-US" sz="1500" dirty="0"/>
+          </a:p>
+        </p:txBody>
+      </p:sp>
+      <p:sp>
+        <p:nvSpPr>
+          <p:cNvPr id="6" name="app-features"/>
+          <p:cNvSpPr txBox="1"/>
+          <p:nvPr/>
+        </p:nvSpPr>
+        <p:spPr>
+          <a:xfrm>
+            <a:off x="8183879" y="1965960"/>
+            <a:ext cx="3520440" cy="4069080"/>
+          </a:xfrm>
+          <a:prstGeom prst="rect">
+            <a:avLst/>
+          </a:prstGeom>
+          <a:noFill/>
+          <a:ln/>
+        </p:spPr>
+        <p:txBody>
+          <a:bodyPr wrap="square" lIns="0" tIns="0" rIns="0" bIns="0" rtlCol="0" anchor="t"/>
+          <a:lstStyle/>
+          <a:p>
+            <a:pPr marL="342900" indent="-342900">
+              <a:spcAft>
+                <a:spcPts val="1000"/>
+              </a:spcAft>
+              <a:buSzPct val="100000"/>
+              <a:buChar char="•"/>
+            </a:pPr>
+            <a:r>
+              <a:rPr lang="en-US" sz="1400" dirty="0">
+                <a:solidFill>
+                  <a:schemeClr val="tx2"/>
+                </a:solidFill>
+              </a:rPr>
+              <a:t>Train any map, algorithm and setting; pause, stop, or slow down to one episode per update</a:t>
+            </a:r>
+            <a:endParaRPr lang="en-US" sz="1400" dirty="0"/>
+          </a:p>
+          <a:p>
+            <a:pPr marL="342900" indent="-342900">
+              <a:spcAft>
+                <a:spcPts val="1000"/>
+              </a:spcAft>
+              <a:buSzPct val="100000"/>
+              <a:buChar char="•"/>
+            </a:pPr>
+            <a:r>
+              <a:rPr lang="en-US" sz="1400" dirty="0">
+                <a:solidFill>
+                  <a:schemeClr val="tx2"/>
+                </a:solidFill>
+              </a:rPr>
+              <a:t>Map and curves update live from the shared Q table; same seed = same Q as experiments.py</a:t>
+            </a:r>
+            <a:endParaRPr lang="en-US" sz="1400" dirty="0"/>
+          </a:p>
+          <a:p>
+            <a:pPr marL="342900" indent="-342900">
+              <a:spcAft>
+                <a:spcPts val="1000"/>
+              </a:spcAft>
+              <a:buSzPct val="100000"/>
+              <a:buChar char="•"/>
+            </a:pPr>
+            <a:r>
+              <a:rPr lang="en-US" sz="1400" dirty="0">
+                <a:solidFill>
+                  <a:schemeClr val="tx2"/>
+                </a:solidFill>
+              </a:rPr>
+              <a:t>Drive the robot (W/A/S/D, J, K) or let the agent step / run</a:t>
+            </a:r>
+            <a:endParaRPr lang="en-US" sz="1400" dirty="0"/>
+          </a:p>
+          <a:p>
+            <a:pPr marL="342900" indent="-342900">
+              <a:spcAft>
+                <a:spcPts val="1000"/>
+              </a:spcAft>
+              <a:buSzPct val="100000"/>
+              <a:buChar char="•"/>
+            </a:pPr>
+            <a:r>
+              <a:rPr lang="en-US" sz="1400" dirty="0">
+                <a:solidFill>
+                  <a:schemeClr val="tx2"/>
+                </a:solidFill>
+              </a:rPr>
+              <a:t>Click a cell or type a state code to start anywhere</a:t>
+            </a:r>
+            <a:endParaRPr lang="en-US" sz="1400" dirty="0"/>
+          </a:p>
+          <a:p>
+            <a:pPr marL="342900" indent="-342900">
+              <a:spcAft>
+                <a:spcPts val="1000"/>
+              </a:spcAft>
+              <a:buSzPct val="100000"/>
+              <a:buChar char="•"/>
+            </a:pPr>
+            <a:r>
+              <a:rPr lang="en-US" sz="1400" dirty="0">
+                <a:solidFill>
+                  <a:schemeClr val="tx2"/>
+                </a:solidFill>
+              </a:rPr>
+              <a:t>Overlays: policy, value V, wrong vs Q*; the Q / Q* table flags wrong decisions</a:t>
+            </a:r>
+            <a:endParaRPr lang="en-US" sz="1400" dirty="0"/>
+          </a:p>
+        </p:txBody>
+      </p:sp>
+      <p:sp>
+        <p:nvSpPr>
+          <p:cNvPr id="25" name="Slide Number Placeholder 0"/>
+          <p:cNvSpPr>
+            <a:spLocks noGrp="1"/>
+          </p:cNvSpPr>
+          <p:nvPr>
+            <p:ph type="sldNum" sz="quarter" idx="4294967295"/>
+          </p:nvPr>
+        </p:nvSpPr>
+        <p:spPr>
+          <a:xfrm>
+            <a:off x="11091672" y="6355080"/>
+            <a:ext cx="548640" cy="274320"/>
+          </a:xfrm>
+          <a:prstGeom prst="rect">
+            <a:avLst/>
+          </a:prstGeom>
+          <a:extLst>
+            <a:ext uri="{C572A759-6A51-4108-AA02-DFA0A04FC94B}">
+              <ma14:wrappingTextBoxFlag xmlns:ma14="http://schemas.microsoft.com/office/mac/drawingml/2011/main" xmlns="" val="0"/>
+            </a:ext>
+          </a:extLst>
+        </p:spPr>
+        <p:txBody>
+          <a:bodyPr/>
+          <a:lstStyle>
+            <a:lvl1pPr>
+              <a:defRPr sz="1100">
+                <a:solidFill>
+                  <a:srgbClr val="737B89"/>
+                </a:solidFill>
+              </a:defRPr>
+            </a:lvl1pPr>
+          </a:lstStyle>
+          <a:p>
+            <a:pPr algn="r"/>
+            <a:fld id="{F7021451-1387-4CA6-816F-3879F97B5CBC}" type="slidenum">
+              <a:rPr lang="en-US" b="0"/>
+              <a:t>11</a:t>
             </a:fld>
             <a:endParaRPr lang="en-US"/>
           </a:p>
